--- a/씬 별 UI.pptx
+++ b/씬 별 UI.pptx
@@ -7149,244 +7149,6 @@
           </p:txBody>
         </p:sp>
       </p:grpSp>
-      <p:sp>
-        <p:nvSpPr>
-          <p:cNvPr id="25" name="타원 24">
-            <a:extLst>
-              <a:ext uri="{FF2B5EF4-FFF2-40B4-BE49-F238E27FC236}">
-                <a16:creationId xmlns:a16="http://schemas.microsoft.com/office/drawing/2014/main" id="{EA036A60-426F-F2A8-449C-4E38B7CF5F61}"/>
-              </a:ext>
-            </a:extLst>
-          </p:cNvPr>
-          <p:cNvSpPr>
-            <a:spLocks noChangeAspect="1"/>
-          </p:cNvSpPr>
-          <p:nvPr/>
-        </p:nvSpPr>
-        <p:spPr>
-          <a:xfrm>
-            <a:off x="2206734" y="4744025"/>
-            <a:ext cx="360000" cy="360000"/>
-          </a:xfrm>
-          <a:prstGeom prst="ellipse">
-            <a:avLst/>
-          </a:prstGeom>
-          <a:solidFill>
-            <a:schemeClr val="accent1">
-              <a:lumMod val="40000"/>
-              <a:lumOff val="60000"/>
-              <a:alpha val="50000"/>
-            </a:schemeClr>
-          </a:solidFill>
-          <a:ln>
-            <a:solidFill>
-              <a:schemeClr val="tx1"/>
-            </a:solidFill>
-          </a:ln>
-        </p:spPr>
-        <p:style>
-          <a:lnRef idx="2">
-            <a:schemeClr val="accent1">
-              <a:shade val="15000"/>
-            </a:schemeClr>
-          </a:lnRef>
-          <a:fillRef idx="1">
-            <a:schemeClr val="accent1"/>
-          </a:fillRef>
-          <a:effectRef idx="0">
-            <a:schemeClr val="accent1"/>
-          </a:effectRef>
-          <a:fontRef idx="minor">
-            <a:schemeClr val="lt1"/>
-          </a:fontRef>
-        </p:style>
-        <p:txBody>
-          <a:bodyPr rtlCol="0" anchor="ctr"/>
-          <a:lstStyle/>
-          <a:p>
-            <a:pPr algn="ctr"/>
-            <a:endParaRPr lang="ko-KR" altLang="en-US"/>
-          </a:p>
-        </p:txBody>
-      </p:sp>
-      <p:sp>
-        <p:nvSpPr>
-          <p:cNvPr id="27" name="타원 26">
-            <a:extLst>
-              <a:ext uri="{FF2B5EF4-FFF2-40B4-BE49-F238E27FC236}">
-                <a16:creationId xmlns:a16="http://schemas.microsoft.com/office/drawing/2014/main" id="{59A92184-7090-2139-3A13-7BAC52BF628E}"/>
-              </a:ext>
-            </a:extLst>
-          </p:cNvPr>
-          <p:cNvSpPr>
-            <a:spLocks noChangeAspect="1"/>
-          </p:cNvSpPr>
-          <p:nvPr/>
-        </p:nvSpPr>
-        <p:spPr>
-          <a:xfrm>
-            <a:off x="2204042" y="5666833"/>
-            <a:ext cx="360000" cy="360000"/>
-          </a:xfrm>
-          <a:prstGeom prst="ellipse">
-            <a:avLst/>
-          </a:prstGeom>
-          <a:solidFill>
-            <a:srgbClr val="FFC000">
-              <a:alpha val="50000"/>
-            </a:srgbClr>
-          </a:solidFill>
-          <a:ln>
-            <a:solidFill>
-              <a:schemeClr val="tx1"/>
-            </a:solidFill>
-          </a:ln>
-        </p:spPr>
-        <p:style>
-          <a:lnRef idx="2">
-            <a:schemeClr val="accent1">
-              <a:shade val="15000"/>
-            </a:schemeClr>
-          </a:lnRef>
-          <a:fillRef idx="1">
-            <a:schemeClr val="accent1"/>
-          </a:fillRef>
-          <a:effectRef idx="0">
-            <a:schemeClr val="accent1"/>
-          </a:effectRef>
-          <a:fontRef idx="minor">
-            <a:schemeClr val="lt1"/>
-          </a:fontRef>
-        </p:style>
-        <p:txBody>
-          <a:bodyPr rtlCol="0" anchor="ctr"/>
-          <a:lstStyle/>
-          <a:p>
-            <a:pPr algn="ctr"/>
-            <a:endParaRPr lang="ko-KR" altLang="en-US"/>
-          </a:p>
-        </p:txBody>
-      </p:sp>
-      <p:sp>
-        <p:nvSpPr>
-          <p:cNvPr id="29" name="타원 28">
-            <a:extLst>
-              <a:ext uri="{FF2B5EF4-FFF2-40B4-BE49-F238E27FC236}">
-                <a16:creationId xmlns:a16="http://schemas.microsoft.com/office/drawing/2014/main" id="{BBD8E86C-AC1A-1992-9DB2-335D927EF022}"/>
-              </a:ext>
-            </a:extLst>
-          </p:cNvPr>
-          <p:cNvSpPr>
-            <a:spLocks noChangeAspect="1"/>
-          </p:cNvSpPr>
-          <p:nvPr/>
-        </p:nvSpPr>
-        <p:spPr>
-          <a:xfrm>
-            <a:off x="1178512" y="4672667"/>
-            <a:ext cx="360000" cy="360000"/>
-          </a:xfrm>
-          <a:prstGeom prst="ellipse">
-            <a:avLst/>
-          </a:prstGeom>
-          <a:solidFill>
-            <a:schemeClr val="accent1">
-              <a:lumMod val="40000"/>
-              <a:lumOff val="60000"/>
-              <a:alpha val="50000"/>
-            </a:schemeClr>
-          </a:solidFill>
-          <a:ln>
-            <a:solidFill>
-              <a:schemeClr val="tx1"/>
-            </a:solidFill>
-          </a:ln>
-        </p:spPr>
-        <p:style>
-          <a:lnRef idx="2">
-            <a:schemeClr val="accent1">
-              <a:shade val="15000"/>
-            </a:schemeClr>
-          </a:lnRef>
-          <a:fillRef idx="1">
-            <a:schemeClr val="accent1"/>
-          </a:fillRef>
-          <a:effectRef idx="0">
-            <a:schemeClr val="accent1"/>
-          </a:effectRef>
-          <a:fontRef idx="minor">
-            <a:schemeClr val="lt1"/>
-          </a:fontRef>
-        </p:style>
-        <p:txBody>
-          <a:bodyPr rtlCol="0" anchor="ctr"/>
-          <a:lstStyle/>
-          <a:p>
-            <a:pPr algn="ctr"/>
-            <a:endParaRPr lang="ko-KR" altLang="en-US"/>
-          </a:p>
-        </p:txBody>
-      </p:sp>
-      <p:sp>
-        <p:nvSpPr>
-          <p:cNvPr id="31" name="타원 30">
-            <a:extLst>
-              <a:ext uri="{FF2B5EF4-FFF2-40B4-BE49-F238E27FC236}">
-                <a16:creationId xmlns:a16="http://schemas.microsoft.com/office/drawing/2014/main" id="{8C4DE7D5-76A1-F30C-A402-E421D7F44E50}"/>
-              </a:ext>
-            </a:extLst>
-          </p:cNvPr>
-          <p:cNvSpPr>
-            <a:spLocks noChangeAspect="1"/>
-          </p:cNvSpPr>
-          <p:nvPr/>
-        </p:nvSpPr>
-        <p:spPr>
-          <a:xfrm>
-            <a:off x="1229952" y="5650433"/>
-            <a:ext cx="360000" cy="360000"/>
-          </a:xfrm>
-          <a:prstGeom prst="ellipse">
-            <a:avLst/>
-          </a:prstGeom>
-          <a:solidFill>
-            <a:schemeClr val="accent1">
-              <a:lumMod val="40000"/>
-              <a:lumOff val="60000"/>
-              <a:alpha val="50000"/>
-            </a:schemeClr>
-          </a:solidFill>
-          <a:ln>
-            <a:solidFill>
-              <a:schemeClr val="tx1"/>
-            </a:solidFill>
-          </a:ln>
-        </p:spPr>
-        <p:style>
-          <a:lnRef idx="2">
-            <a:schemeClr val="accent1">
-              <a:shade val="15000"/>
-            </a:schemeClr>
-          </a:lnRef>
-          <a:fillRef idx="1">
-            <a:schemeClr val="accent1"/>
-          </a:fillRef>
-          <a:effectRef idx="0">
-            <a:schemeClr val="accent1"/>
-          </a:effectRef>
-          <a:fontRef idx="minor">
-            <a:schemeClr val="lt1"/>
-          </a:fontRef>
-        </p:style>
-        <p:txBody>
-          <a:bodyPr rtlCol="0" anchor="ctr"/>
-          <a:lstStyle/>
-          <a:p>
-            <a:pPr algn="ctr"/>
-            <a:endParaRPr lang="ko-KR" altLang="en-US"/>
-          </a:p>
-        </p:txBody>
-      </p:sp>
       <p:grpSp>
         <p:nvGrpSpPr>
           <p:cNvPr id="47" name="그룹 46">
@@ -7883,135 +7645,6 @@
           </a:p>
         </p:txBody>
       </p:sp>
-      <p:sp>
-        <p:nvSpPr>
-          <p:cNvPr id="97" name="직사각형 96">
-            <a:extLst>
-              <a:ext uri="{FF2B5EF4-FFF2-40B4-BE49-F238E27FC236}">
-                <a16:creationId xmlns:a16="http://schemas.microsoft.com/office/drawing/2014/main" id="{CF690DB3-C2DD-E51D-9ECC-314F695E9C79}"/>
-              </a:ext>
-            </a:extLst>
-          </p:cNvPr>
-          <p:cNvSpPr>
-            <a:spLocks noChangeAspect="1"/>
-          </p:cNvSpPr>
-          <p:nvPr/>
-        </p:nvSpPr>
-        <p:spPr>
-          <a:xfrm>
-            <a:off x="990456" y="4436987"/>
-            <a:ext cx="1800000" cy="1800000"/>
-          </a:xfrm>
-          <a:prstGeom prst="rect">
-            <a:avLst/>
-          </a:prstGeom>
-          <a:noFill/>
-        </p:spPr>
-        <p:style>
-          <a:lnRef idx="2">
-            <a:schemeClr val="accent1">
-              <a:shade val="15000"/>
-            </a:schemeClr>
-          </a:lnRef>
-          <a:fillRef idx="1">
-            <a:schemeClr val="accent1"/>
-          </a:fillRef>
-          <a:effectRef idx="0">
-            <a:schemeClr val="accent1"/>
-          </a:effectRef>
-          <a:fontRef idx="minor">
-            <a:schemeClr val="lt1"/>
-          </a:fontRef>
-        </p:style>
-        <p:txBody>
-          <a:bodyPr rtlCol="0" anchor="ctr"/>
-          <a:lstStyle/>
-          <a:p>
-            <a:pPr algn="ctr"/>
-            <a:endParaRPr lang="ko-KR" altLang="en-US" dirty="0"/>
-          </a:p>
-        </p:txBody>
-      </p:sp>
-      <p:cxnSp>
-        <p:nvCxnSpPr>
-          <p:cNvPr id="98" name="직선 연결선 97">
-            <a:extLst>
-              <a:ext uri="{FF2B5EF4-FFF2-40B4-BE49-F238E27FC236}">
-                <a16:creationId xmlns:a16="http://schemas.microsoft.com/office/drawing/2014/main" id="{DF4C3009-1831-2C32-FBF7-D366BAA8BEF0}"/>
-              </a:ext>
-            </a:extLst>
-          </p:cNvPr>
-          <p:cNvCxnSpPr>
-            <a:cxnSpLocks/>
-            <a:stCxn id="97" idx="0"/>
-            <a:endCxn id="97" idx="2"/>
-          </p:cNvCxnSpPr>
-          <p:nvPr/>
-        </p:nvCxnSpPr>
-        <p:spPr>
-          <a:xfrm>
-            <a:off x="1890456" y="4436987"/>
-            <a:ext cx="0" cy="1800000"/>
-          </a:xfrm>
-          <a:prstGeom prst="line">
-            <a:avLst/>
-          </a:prstGeom>
-        </p:spPr>
-        <p:style>
-          <a:lnRef idx="2">
-            <a:schemeClr val="dk1"/>
-          </a:lnRef>
-          <a:fillRef idx="0">
-            <a:schemeClr val="dk1"/>
-          </a:fillRef>
-          <a:effectRef idx="1">
-            <a:schemeClr val="dk1"/>
-          </a:effectRef>
-          <a:fontRef idx="minor">
-            <a:schemeClr val="tx1"/>
-          </a:fontRef>
-        </p:style>
-      </p:cxnSp>
-      <p:cxnSp>
-        <p:nvCxnSpPr>
-          <p:cNvPr id="101" name="직선 연결선 100">
-            <a:extLst>
-              <a:ext uri="{FF2B5EF4-FFF2-40B4-BE49-F238E27FC236}">
-                <a16:creationId xmlns:a16="http://schemas.microsoft.com/office/drawing/2014/main" id="{D5970CAB-B7D6-53D4-2AFE-6574917358CD}"/>
-              </a:ext>
-            </a:extLst>
-          </p:cNvPr>
-          <p:cNvCxnSpPr>
-            <a:cxnSpLocks/>
-            <a:stCxn id="97" idx="1"/>
-            <a:endCxn id="97" idx="3"/>
-          </p:cNvCxnSpPr>
-          <p:nvPr/>
-        </p:nvCxnSpPr>
-        <p:spPr>
-          <a:xfrm>
-            <a:off x="990456" y="5336987"/>
-            <a:ext cx="1800000" cy="0"/>
-          </a:xfrm>
-          <a:prstGeom prst="line">
-            <a:avLst/>
-          </a:prstGeom>
-        </p:spPr>
-        <p:style>
-          <a:lnRef idx="2">
-            <a:schemeClr val="dk1"/>
-          </a:lnRef>
-          <a:fillRef idx="0">
-            <a:schemeClr val="dk1"/>
-          </a:fillRef>
-          <a:effectRef idx="1">
-            <a:schemeClr val="dk1"/>
-          </a:effectRef>
-          <a:fontRef idx="minor">
-            <a:schemeClr val="tx1"/>
-          </a:fontRef>
-        </p:style>
-      </p:cxnSp>
       <p:sp>
         <p:nvSpPr>
           <p:cNvPr id="104" name="TextBox 103">
@@ -8490,6 +8123,582 @@
           </a:p>
         </p:txBody>
       </p:sp>
+      <p:grpSp>
+        <p:nvGrpSpPr>
+          <p:cNvPr id="3" name="그룹 2">
+            <a:extLst>
+              <a:ext uri="{FF2B5EF4-FFF2-40B4-BE49-F238E27FC236}">
+                <a16:creationId xmlns:a16="http://schemas.microsoft.com/office/drawing/2014/main" id="{81BA51BD-2D37-DC9C-621F-37887D0A708F}"/>
+              </a:ext>
+            </a:extLst>
+          </p:cNvPr>
+          <p:cNvGrpSpPr/>
+          <p:nvPr/>
+        </p:nvGrpSpPr>
+        <p:grpSpPr>
+          <a:xfrm>
+            <a:off x="990456" y="4435760"/>
+            <a:ext cx="1801481" cy="1801227"/>
+            <a:chOff x="990456" y="4435760"/>
+            <a:chExt cx="1801481" cy="1801227"/>
+          </a:xfrm>
+        </p:grpSpPr>
+        <p:sp>
+          <p:nvSpPr>
+            <p:cNvPr id="7" name="타원 6">
+              <a:extLst>
+                <a:ext uri="{FF2B5EF4-FFF2-40B4-BE49-F238E27FC236}">
+                  <a16:creationId xmlns:a16="http://schemas.microsoft.com/office/drawing/2014/main" id="{0EA3F9A5-DFFC-8871-3FE1-7F8BB33BEB00}"/>
+                </a:ext>
+              </a:extLst>
+            </p:cNvPr>
+            <p:cNvSpPr>
+              <a:spLocks noChangeAspect="1"/>
+            </p:cNvSpPr>
+            <p:nvPr/>
+          </p:nvSpPr>
+          <p:spPr>
+            <a:xfrm>
+              <a:off x="2162087" y="4706369"/>
+              <a:ext cx="360000" cy="360000"/>
+            </a:xfrm>
+            <a:prstGeom prst="ellipse">
+              <a:avLst/>
+            </a:prstGeom>
+            <a:solidFill>
+              <a:schemeClr val="accent1">
+                <a:lumMod val="40000"/>
+                <a:lumOff val="60000"/>
+                <a:alpha val="50000"/>
+              </a:schemeClr>
+            </a:solidFill>
+            <a:ln>
+              <a:solidFill>
+                <a:schemeClr val="tx1"/>
+              </a:solidFill>
+            </a:ln>
+          </p:spPr>
+          <p:style>
+            <a:lnRef idx="2">
+              <a:schemeClr val="accent1">
+                <a:shade val="15000"/>
+              </a:schemeClr>
+            </a:lnRef>
+            <a:fillRef idx="1">
+              <a:schemeClr val="accent1"/>
+            </a:fillRef>
+            <a:effectRef idx="0">
+              <a:schemeClr val="accent1"/>
+            </a:effectRef>
+            <a:fontRef idx="minor">
+              <a:schemeClr val="lt1"/>
+            </a:fontRef>
+          </p:style>
+          <p:txBody>
+            <a:bodyPr rtlCol="0" anchor="ctr"/>
+            <a:lstStyle/>
+            <a:p>
+              <a:pPr algn="ctr"/>
+              <a:endParaRPr lang="ko-KR" altLang="en-US" dirty="0"/>
+            </a:p>
+          </p:txBody>
+        </p:sp>
+        <p:sp>
+          <p:nvSpPr>
+            <p:cNvPr id="8" name="타원 7">
+              <a:extLst>
+                <a:ext uri="{FF2B5EF4-FFF2-40B4-BE49-F238E27FC236}">
+                  <a16:creationId xmlns:a16="http://schemas.microsoft.com/office/drawing/2014/main" id="{B183DA46-EE5A-85C4-C235-ED814A92D7AC}"/>
+                </a:ext>
+              </a:extLst>
+            </p:cNvPr>
+            <p:cNvSpPr>
+              <a:spLocks noChangeAspect="1"/>
+            </p:cNvSpPr>
+            <p:nvPr/>
+          </p:nvSpPr>
+          <p:spPr>
+            <a:xfrm>
+              <a:off x="1260456" y="5606978"/>
+              <a:ext cx="360000" cy="360000"/>
+            </a:xfrm>
+            <a:prstGeom prst="ellipse">
+              <a:avLst/>
+            </a:prstGeom>
+            <a:solidFill>
+              <a:srgbClr val="FFC000">
+                <a:alpha val="50000"/>
+              </a:srgbClr>
+            </a:solidFill>
+            <a:ln>
+              <a:solidFill>
+                <a:schemeClr val="tx1"/>
+              </a:solidFill>
+            </a:ln>
+          </p:spPr>
+          <p:style>
+            <a:lnRef idx="2">
+              <a:schemeClr val="accent1">
+                <a:shade val="15000"/>
+              </a:schemeClr>
+            </a:lnRef>
+            <a:fillRef idx="1">
+              <a:schemeClr val="accent1"/>
+            </a:fillRef>
+            <a:effectRef idx="0">
+              <a:schemeClr val="accent1"/>
+            </a:effectRef>
+            <a:fontRef idx="minor">
+              <a:schemeClr val="lt1"/>
+            </a:fontRef>
+          </p:style>
+          <p:txBody>
+            <a:bodyPr rtlCol="0" anchor="ctr"/>
+            <a:lstStyle/>
+            <a:p>
+              <a:pPr algn="ctr"/>
+              <a:endParaRPr lang="ko-KR" altLang="en-US"/>
+            </a:p>
+          </p:txBody>
+        </p:sp>
+        <p:sp>
+          <p:nvSpPr>
+            <p:cNvPr id="9" name="타원 8">
+              <a:extLst>
+                <a:ext uri="{FF2B5EF4-FFF2-40B4-BE49-F238E27FC236}">
+                  <a16:creationId xmlns:a16="http://schemas.microsoft.com/office/drawing/2014/main" id="{BE664473-1BC3-1ADE-B19A-09A8C5463760}"/>
+                </a:ext>
+              </a:extLst>
+            </p:cNvPr>
+            <p:cNvSpPr>
+              <a:spLocks noChangeAspect="1"/>
+            </p:cNvSpPr>
+            <p:nvPr/>
+          </p:nvSpPr>
+          <p:spPr>
+            <a:xfrm>
+              <a:off x="1260456" y="4706369"/>
+              <a:ext cx="360000" cy="360000"/>
+            </a:xfrm>
+            <a:prstGeom prst="ellipse">
+              <a:avLst/>
+            </a:prstGeom>
+            <a:solidFill>
+              <a:schemeClr val="accent1">
+                <a:lumMod val="40000"/>
+                <a:lumOff val="60000"/>
+                <a:alpha val="50000"/>
+              </a:schemeClr>
+            </a:solidFill>
+            <a:ln>
+              <a:solidFill>
+                <a:schemeClr val="tx1"/>
+              </a:solidFill>
+            </a:ln>
+          </p:spPr>
+          <p:style>
+            <a:lnRef idx="2">
+              <a:schemeClr val="accent1">
+                <a:shade val="15000"/>
+              </a:schemeClr>
+            </a:lnRef>
+            <a:fillRef idx="1">
+              <a:schemeClr val="accent1"/>
+            </a:fillRef>
+            <a:effectRef idx="0">
+              <a:schemeClr val="accent1"/>
+            </a:effectRef>
+            <a:fontRef idx="minor">
+              <a:schemeClr val="lt1"/>
+            </a:fontRef>
+          </p:style>
+          <p:txBody>
+            <a:bodyPr rtlCol="0" anchor="ctr"/>
+            <a:lstStyle/>
+            <a:p>
+              <a:pPr algn="ctr"/>
+              <a:endParaRPr lang="ko-KR" altLang="en-US"/>
+            </a:p>
+          </p:txBody>
+        </p:sp>
+        <p:sp>
+          <p:nvSpPr>
+            <p:cNvPr id="11" name="타원 10">
+              <a:extLst>
+                <a:ext uri="{FF2B5EF4-FFF2-40B4-BE49-F238E27FC236}">
+                  <a16:creationId xmlns:a16="http://schemas.microsoft.com/office/drawing/2014/main" id="{80698FDD-24B8-40CD-3D59-C6B112DF3F68}"/>
+                </a:ext>
+              </a:extLst>
+            </p:cNvPr>
+            <p:cNvSpPr>
+              <a:spLocks noChangeAspect="1"/>
+            </p:cNvSpPr>
+            <p:nvPr/>
+          </p:nvSpPr>
+          <p:spPr>
+            <a:xfrm>
+              <a:off x="2160155" y="5598917"/>
+              <a:ext cx="360000" cy="360000"/>
+            </a:xfrm>
+            <a:prstGeom prst="ellipse">
+              <a:avLst/>
+            </a:prstGeom>
+            <a:solidFill>
+              <a:schemeClr val="accent1">
+                <a:lumMod val="40000"/>
+                <a:lumOff val="60000"/>
+                <a:alpha val="50000"/>
+              </a:schemeClr>
+            </a:solidFill>
+            <a:ln>
+              <a:solidFill>
+                <a:schemeClr val="tx1"/>
+              </a:solidFill>
+            </a:ln>
+          </p:spPr>
+          <p:style>
+            <a:lnRef idx="2">
+              <a:schemeClr val="accent1">
+                <a:shade val="15000"/>
+              </a:schemeClr>
+            </a:lnRef>
+            <a:fillRef idx="1">
+              <a:schemeClr val="accent1"/>
+            </a:fillRef>
+            <a:effectRef idx="0">
+              <a:schemeClr val="accent1"/>
+            </a:effectRef>
+            <a:fontRef idx="minor">
+              <a:schemeClr val="lt1"/>
+            </a:fontRef>
+          </p:style>
+          <p:txBody>
+            <a:bodyPr rtlCol="0" anchor="ctr"/>
+            <a:lstStyle/>
+            <a:p>
+              <a:pPr algn="ctr"/>
+              <a:endParaRPr lang="ko-KR" altLang="en-US" dirty="0"/>
+            </a:p>
+          </p:txBody>
+        </p:sp>
+        <p:sp>
+          <p:nvSpPr>
+            <p:cNvPr id="17" name="직사각형 16">
+              <a:extLst>
+                <a:ext uri="{FF2B5EF4-FFF2-40B4-BE49-F238E27FC236}">
+                  <a16:creationId xmlns:a16="http://schemas.microsoft.com/office/drawing/2014/main" id="{D3BB9B0D-F887-5CAE-597F-329007A1275D}"/>
+                </a:ext>
+              </a:extLst>
+            </p:cNvPr>
+            <p:cNvSpPr>
+              <a:spLocks noChangeAspect="1"/>
+            </p:cNvSpPr>
+            <p:nvPr/>
+          </p:nvSpPr>
+          <p:spPr>
+            <a:xfrm>
+              <a:off x="990456" y="4436987"/>
+              <a:ext cx="1800000" cy="1800000"/>
+            </a:xfrm>
+            <a:prstGeom prst="rect">
+              <a:avLst/>
+            </a:prstGeom>
+            <a:noFill/>
+          </p:spPr>
+          <p:style>
+            <a:lnRef idx="2">
+              <a:schemeClr val="accent1">
+                <a:shade val="15000"/>
+              </a:schemeClr>
+            </a:lnRef>
+            <a:fillRef idx="1">
+              <a:schemeClr val="accent1"/>
+            </a:fillRef>
+            <a:effectRef idx="0">
+              <a:schemeClr val="accent1"/>
+            </a:effectRef>
+            <a:fontRef idx="minor">
+              <a:schemeClr val="lt1"/>
+            </a:fontRef>
+          </p:style>
+          <p:txBody>
+            <a:bodyPr rtlCol="0" anchor="ctr"/>
+            <a:lstStyle/>
+            <a:p>
+              <a:pPr algn="ctr"/>
+              <a:endParaRPr lang="ko-KR" altLang="en-US" dirty="0"/>
+            </a:p>
+          </p:txBody>
+        </p:sp>
+        <p:cxnSp>
+          <p:nvCxnSpPr>
+            <p:cNvPr id="23" name="직선 연결선 22">
+              <a:extLst>
+                <a:ext uri="{FF2B5EF4-FFF2-40B4-BE49-F238E27FC236}">
+                  <a16:creationId xmlns:a16="http://schemas.microsoft.com/office/drawing/2014/main" id="{811DDA6F-78CE-3C67-14CF-8BE3CB510090}"/>
+                </a:ext>
+              </a:extLst>
+            </p:cNvPr>
+            <p:cNvCxnSpPr>
+              <a:cxnSpLocks/>
+              <a:stCxn id="17" idx="0"/>
+              <a:endCxn id="17" idx="2"/>
+            </p:cNvCxnSpPr>
+            <p:nvPr/>
+          </p:nvCxnSpPr>
+          <p:spPr>
+            <a:xfrm>
+              <a:off x="1890456" y="4436987"/>
+              <a:ext cx="0" cy="1800000"/>
+            </a:xfrm>
+            <a:prstGeom prst="line">
+              <a:avLst/>
+            </a:prstGeom>
+          </p:spPr>
+          <p:style>
+            <a:lnRef idx="2">
+              <a:schemeClr val="dk1"/>
+            </a:lnRef>
+            <a:fillRef idx="0">
+              <a:schemeClr val="dk1"/>
+            </a:fillRef>
+            <a:effectRef idx="1">
+              <a:schemeClr val="dk1"/>
+            </a:effectRef>
+            <a:fontRef idx="minor">
+              <a:schemeClr val="tx1"/>
+            </a:fontRef>
+          </p:style>
+        </p:cxnSp>
+        <p:cxnSp>
+          <p:nvCxnSpPr>
+            <p:cNvPr id="26" name="직선 연결선 25">
+              <a:extLst>
+                <a:ext uri="{FF2B5EF4-FFF2-40B4-BE49-F238E27FC236}">
+                  <a16:creationId xmlns:a16="http://schemas.microsoft.com/office/drawing/2014/main" id="{4A95B58C-95E4-5F9D-6E1C-B4A32837252D}"/>
+                </a:ext>
+              </a:extLst>
+            </p:cNvPr>
+            <p:cNvCxnSpPr>
+              <a:cxnSpLocks/>
+              <a:stCxn id="17" idx="1"/>
+              <a:endCxn id="17" idx="3"/>
+            </p:cNvCxnSpPr>
+            <p:nvPr/>
+          </p:nvCxnSpPr>
+          <p:spPr>
+            <a:xfrm>
+              <a:off x="990456" y="5336987"/>
+              <a:ext cx="1800000" cy="0"/>
+            </a:xfrm>
+            <a:prstGeom prst="line">
+              <a:avLst/>
+            </a:prstGeom>
+          </p:spPr>
+          <p:style>
+            <a:lnRef idx="2">
+              <a:schemeClr val="dk1"/>
+            </a:lnRef>
+            <a:fillRef idx="0">
+              <a:schemeClr val="dk1"/>
+            </a:fillRef>
+            <a:effectRef idx="1">
+              <a:schemeClr val="dk1"/>
+            </a:effectRef>
+            <a:fontRef idx="minor">
+              <a:schemeClr val="tx1"/>
+            </a:fontRef>
+          </p:style>
+        </p:cxnSp>
+        <p:sp>
+          <p:nvSpPr>
+            <p:cNvPr id="28" name="직사각형 27">
+              <a:extLst>
+                <a:ext uri="{FF2B5EF4-FFF2-40B4-BE49-F238E27FC236}">
+                  <a16:creationId xmlns:a16="http://schemas.microsoft.com/office/drawing/2014/main" id="{B3BC4A07-DB36-4077-8461-80F7243AF7C7}"/>
+                </a:ext>
+              </a:extLst>
+            </p:cNvPr>
+            <p:cNvSpPr/>
+            <p:nvPr/>
+          </p:nvSpPr>
+          <p:spPr>
+            <a:xfrm>
+              <a:off x="990755" y="4435760"/>
+              <a:ext cx="899699" cy="901219"/>
+            </a:xfrm>
+            <a:prstGeom prst="rect">
+              <a:avLst/>
+            </a:prstGeom>
+            <a:noFill/>
+          </p:spPr>
+          <p:style>
+            <a:lnRef idx="2">
+              <a:schemeClr val="accent1">
+                <a:shade val="15000"/>
+              </a:schemeClr>
+            </a:lnRef>
+            <a:fillRef idx="1">
+              <a:schemeClr val="accent1"/>
+            </a:fillRef>
+            <a:effectRef idx="0">
+              <a:schemeClr val="accent1"/>
+            </a:effectRef>
+            <a:fontRef idx="minor">
+              <a:schemeClr val="lt1"/>
+            </a:fontRef>
+          </p:style>
+          <p:txBody>
+            <a:bodyPr rtlCol="0" anchor="ctr"/>
+            <a:lstStyle/>
+            <a:p>
+              <a:pPr algn="ctr"/>
+              <a:endParaRPr lang="ko-KR" altLang="en-US"/>
+            </a:p>
+          </p:txBody>
+        </p:sp>
+        <p:sp>
+          <p:nvSpPr>
+            <p:cNvPr id="30" name="직사각형 29">
+              <a:extLst>
+                <a:ext uri="{FF2B5EF4-FFF2-40B4-BE49-F238E27FC236}">
+                  <a16:creationId xmlns:a16="http://schemas.microsoft.com/office/drawing/2014/main" id="{7CEAA0D8-8D8E-7159-D222-7BB1C4D0C011}"/>
+                </a:ext>
+              </a:extLst>
+            </p:cNvPr>
+            <p:cNvSpPr/>
+            <p:nvPr/>
+          </p:nvSpPr>
+          <p:spPr>
+            <a:xfrm>
+              <a:off x="1892238" y="4435760"/>
+              <a:ext cx="899699" cy="901219"/>
+            </a:xfrm>
+            <a:prstGeom prst="rect">
+              <a:avLst/>
+            </a:prstGeom>
+            <a:noFill/>
+          </p:spPr>
+          <p:style>
+            <a:lnRef idx="2">
+              <a:schemeClr val="accent1">
+                <a:shade val="15000"/>
+              </a:schemeClr>
+            </a:lnRef>
+            <a:fillRef idx="1">
+              <a:schemeClr val="accent1"/>
+            </a:fillRef>
+            <a:effectRef idx="0">
+              <a:schemeClr val="accent1"/>
+            </a:effectRef>
+            <a:fontRef idx="minor">
+              <a:schemeClr val="lt1"/>
+            </a:fontRef>
+          </p:style>
+          <p:txBody>
+            <a:bodyPr rtlCol="0" anchor="ctr"/>
+            <a:lstStyle/>
+            <a:p>
+              <a:pPr algn="ctr"/>
+              <a:endParaRPr lang="ko-KR" altLang="en-US"/>
+            </a:p>
+          </p:txBody>
+        </p:sp>
+        <p:sp>
+          <p:nvSpPr>
+            <p:cNvPr id="32" name="직사각형 31">
+              <a:extLst>
+                <a:ext uri="{FF2B5EF4-FFF2-40B4-BE49-F238E27FC236}">
+                  <a16:creationId xmlns:a16="http://schemas.microsoft.com/office/drawing/2014/main" id="{0E5D4B30-8E8D-D182-7340-AD3C6BCB0BA6}"/>
+                </a:ext>
+              </a:extLst>
+            </p:cNvPr>
+            <p:cNvSpPr/>
+            <p:nvPr/>
+          </p:nvSpPr>
+          <p:spPr>
+            <a:xfrm>
+              <a:off x="1892238" y="5329535"/>
+              <a:ext cx="899699" cy="901219"/>
+            </a:xfrm>
+            <a:prstGeom prst="rect">
+              <a:avLst/>
+            </a:prstGeom>
+            <a:noFill/>
+          </p:spPr>
+          <p:style>
+            <a:lnRef idx="2">
+              <a:schemeClr val="accent1">
+                <a:shade val="15000"/>
+              </a:schemeClr>
+            </a:lnRef>
+            <a:fillRef idx="1">
+              <a:schemeClr val="accent1"/>
+            </a:fillRef>
+            <a:effectRef idx="0">
+              <a:schemeClr val="accent1"/>
+            </a:effectRef>
+            <a:fontRef idx="minor">
+              <a:schemeClr val="lt1"/>
+            </a:fontRef>
+          </p:style>
+          <p:txBody>
+            <a:bodyPr rtlCol="0" anchor="ctr"/>
+            <a:lstStyle/>
+            <a:p>
+              <a:pPr algn="ctr"/>
+              <a:endParaRPr lang="ko-KR" altLang="en-US"/>
+            </a:p>
+          </p:txBody>
+        </p:sp>
+        <p:sp>
+          <p:nvSpPr>
+            <p:cNvPr id="33" name="직사각형 32">
+              <a:extLst>
+                <a:ext uri="{FF2B5EF4-FFF2-40B4-BE49-F238E27FC236}">
+                  <a16:creationId xmlns:a16="http://schemas.microsoft.com/office/drawing/2014/main" id="{1631EF89-5063-B8B1-C498-11F7814AF92D}"/>
+                </a:ext>
+              </a:extLst>
+            </p:cNvPr>
+            <p:cNvSpPr/>
+            <p:nvPr/>
+          </p:nvSpPr>
+          <p:spPr>
+            <a:xfrm>
+              <a:off x="990755" y="5329535"/>
+              <a:ext cx="899699" cy="901219"/>
+            </a:xfrm>
+            <a:prstGeom prst="rect">
+              <a:avLst/>
+            </a:prstGeom>
+            <a:noFill/>
+          </p:spPr>
+          <p:style>
+            <a:lnRef idx="2">
+              <a:schemeClr val="accent1">
+                <a:shade val="15000"/>
+              </a:schemeClr>
+            </a:lnRef>
+            <a:fillRef idx="1">
+              <a:schemeClr val="accent1"/>
+            </a:fillRef>
+            <a:effectRef idx="0">
+              <a:schemeClr val="accent1"/>
+            </a:effectRef>
+            <a:fontRef idx="minor">
+              <a:schemeClr val="lt1"/>
+            </a:fontRef>
+          </p:style>
+          <p:txBody>
+            <a:bodyPr rtlCol="0" anchor="ctr"/>
+            <a:lstStyle/>
+            <a:p>
+              <a:pPr algn="ctr"/>
+              <a:endParaRPr lang="ko-KR" altLang="en-US"/>
+            </a:p>
+          </p:txBody>
+        </p:sp>
+      </p:grpSp>
     </p:spTree>
     <p:extLst>
       <p:ext uri="{BB962C8B-B14F-4D97-AF65-F5344CB8AC3E}">

--- a/씬 별 UI.pptx
+++ b/씬 별 UI.pptx
@@ -7385,159 +7385,6 @@
         <p:spPr>
           <a:xfrm>
             <a:off x="10579070" y="657576"/>
-            <a:ext cx="540000" cy="540000"/>
-          </a:xfrm>
-          <a:prstGeom prst="ellipse">
-            <a:avLst/>
-          </a:prstGeom>
-          <a:solidFill>
-            <a:schemeClr val="bg2">
-              <a:lumMod val="90000"/>
-            </a:schemeClr>
-          </a:solidFill>
-        </p:spPr>
-        <p:style>
-          <a:lnRef idx="2">
-            <a:schemeClr val="accent1">
-              <a:shade val="15000"/>
-            </a:schemeClr>
-          </a:lnRef>
-          <a:fillRef idx="1">
-            <a:schemeClr val="accent1"/>
-          </a:fillRef>
-          <a:effectRef idx="0">
-            <a:schemeClr val="accent1"/>
-          </a:effectRef>
-          <a:fontRef idx="minor">
-            <a:schemeClr val="lt1"/>
-          </a:fontRef>
-        </p:style>
-        <p:txBody>
-          <a:bodyPr rtlCol="0" anchor="ctr"/>
-          <a:lstStyle/>
-          <a:p>
-            <a:pPr algn="ctr"/>
-            <a:endParaRPr lang="ko-KR" altLang="en-US"/>
-          </a:p>
-        </p:txBody>
-      </p:sp>
-      <p:sp>
-        <p:nvSpPr>
-          <p:cNvPr id="85" name="타원 84">
-            <a:extLst>
-              <a:ext uri="{FF2B5EF4-FFF2-40B4-BE49-F238E27FC236}">
-                <a16:creationId xmlns:a16="http://schemas.microsoft.com/office/drawing/2014/main" id="{C26FB5C6-F9C7-CC35-0840-89A8B3F8C423}"/>
-              </a:ext>
-            </a:extLst>
-          </p:cNvPr>
-          <p:cNvSpPr/>
-          <p:nvPr/>
-        </p:nvSpPr>
-        <p:spPr>
-          <a:xfrm>
-            <a:off x="9839920" y="657576"/>
-            <a:ext cx="540000" cy="540000"/>
-          </a:xfrm>
-          <a:prstGeom prst="ellipse">
-            <a:avLst/>
-          </a:prstGeom>
-          <a:solidFill>
-            <a:schemeClr val="bg2">
-              <a:lumMod val="90000"/>
-            </a:schemeClr>
-          </a:solidFill>
-        </p:spPr>
-        <p:style>
-          <a:lnRef idx="2">
-            <a:schemeClr val="accent1">
-              <a:shade val="15000"/>
-            </a:schemeClr>
-          </a:lnRef>
-          <a:fillRef idx="1">
-            <a:schemeClr val="accent1"/>
-          </a:fillRef>
-          <a:effectRef idx="0">
-            <a:schemeClr val="accent1"/>
-          </a:effectRef>
-          <a:fontRef idx="minor">
-            <a:schemeClr val="lt1"/>
-          </a:fontRef>
-        </p:style>
-        <p:txBody>
-          <a:bodyPr rtlCol="0" anchor="ctr"/>
-          <a:lstStyle/>
-          <a:p>
-            <a:pPr algn="ctr"/>
-            <a:endParaRPr lang="ko-KR" altLang="en-US"/>
-          </a:p>
-        </p:txBody>
-      </p:sp>
-      <p:sp>
-        <p:nvSpPr>
-          <p:cNvPr id="87" name="타원 86">
-            <a:extLst>
-              <a:ext uri="{FF2B5EF4-FFF2-40B4-BE49-F238E27FC236}">
-                <a16:creationId xmlns:a16="http://schemas.microsoft.com/office/drawing/2014/main" id="{46D855F1-05D1-3C51-663A-6AFF35C7082C}"/>
-              </a:ext>
-            </a:extLst>
-          </p:cNvPr>
-          <p:cNvSpPr/>
-          <p:nvPr/>
-        </p:nvSpPr>
-        <p:spPr>
-          <a:xfrm>
-            <a:off x="9100770" y="657576"/>
-            <a:ext cx="540000" cy="540000"/>
-          </a:xfrm>
-          <a:prstGeom prst="ellipse">
-            <a:avLst/>
-          </a:prstGeom>
-          <a:solidFill>
-            <a:schemeClr val="bg2">
-              <a:lumMod val="90000"/>
-            </a:schemeClr>
-          </a:solidFill>
-        </p:spPr>
-        <p:style>
-          <a:lnRef idx="2">
-            <a:schemeClr val="accent1">
-              <a:shade val="15000"/>
-            </a:schemeClr>
-          </a:lnRef>
-          <a:fillRef idx="1">
-            <a:schemeClr val="accent1"/>
-          </a:fillRef>
-          <a:effectRef idx="0">
-            <a:schemeClr val="accent1"/>
-          </a:effectRef>
-          <a:fontRef idx="minor">
-            <a:schemeClr val="lt1"/>
-          </a:fontRef>
-        </p:style>
-        <p:txBody>
-          <a:bodyPr rtlCol="0" anchor="ctr"/>
-          <a:lstStyle/>
-          <a:p>
-            <a:pPr algn="ctr"/>
-            <a:endParaRPr lang="ko-KR" altLang="en-US"/>
-          </a:p>
-        </p:txBody>
-      </p:sp>
-      <p:sp>
-        <p:nvSpPr>
-          <p:cNvPr id="89" name="타원 88">
-            <a:extLst>
-              <a:ext uri="{FF2B5EF4-FFF2-40B4-BE49-F238E27FC236}">
-                <a16:creationId xmlns:a16="http://schemas.microsoft.com/office/drawing/2014/main" id="{FBD238D4-FB9B-62AE-2BDC-8FA682715609}"/>
-              </a:ext>
-            </a:extLst>
-          </p:cNvPr>
-          <p:cNvSpPr/>
-          <p:nvPr/>
-        </p:nvSpPr>
-        <p:spPr>
-          <a:xfrm>
-            <a:off x="8361620" y="657576"/>
             <a:ext cx="540000" cy="540000"/>
           </a:xfrm>
           <a:prstGeom prst="ellipse">
@@ -8699,6 +8546,210 @@
           </p:txBody>
         </p:sp>
       </p:grpSp>
+      <p:grpSp>
+        <p:nvGrpSpPr>
+          <p:cNvPr id="25" name="그룹 24">
+            <a:extLst>
+              <a:ext uri="{FF2B5EF4-FFF2-40B4-BE49-F238E27FC236}">
+                <a16:creationId xmlns:a16="http://schemas.microsoft.com/office/drawing/2014/main" id="{DDE15867-69BC-DA30-1C8A-72F0A1105892}"/>
+              </a:ext>
+            </a:extLst>
+          </p:cNvPr>
+          <p:cNvGrpSpPr/>
+          <p:nvPr/>
+        </p:nvGrpSpPr>
+        <p:grpSpPr>
+          <a:xfrm>
+            <a:off x="1334347" y="1172337"/>
+            <a:ext cx="1494487" cy="276948"/>
+            <a:chOff x="990455" y="896744"/>
+            <a:chExt cx="1838379" cy="276948"/>
+          </a:xfrm>
+        </p:grpSpPr>
+        <p:sp>
+          <p:nvSpPr>
+            <p:cNvPr id="27" name="직사각형 26">
+              <a:extLst>
+                <a:ext uri="{FF2B5EF4-FFF2-40B4-BE49-F238E27FC236}">
+                  <a16:creationId xmlns:a16="http://schemas.microsoft.com/office/drawing/2014/main" id="{BB739C26-4D70-5133-3833-FF1559C77D27}"/>
+                </a:ext>
+              </a:extLst>
+            </p:cNvPr>
+            <p:cNvSpPr/>
+            <p:nvPr/>
+          </p:nvSpPr>
+          <p:spPr>
+            <a:xfrm>
+              <a:off x="990457" y="896744"/>
+              <a:ext cx="926570" cy="276948"/>
+            </a:xfrm>
+            <a:prstGeom prst="rect">
+              <a:avLst/>
+            </a:prstGeom>
+            <a:solidFill>
+              <a:srgbClr val="FFFF00"/>
+            </a:solidFill>
+            <a:ln>
+              <a:noFill/>
+            </a:ln>
+          </p:spPr>
+          <p:style>
+            <a:lnRef idx="2">
+              <a:schemeClr val="accent1">
+                <a:shade val="15000"/>
+              </a:schemeClr>
+            </a:lnRef>
+            <a:fillRef idx="1">
+              <a:schemeClr val="accent1"/>
+            </a:fillRef>
+            <a:effectRef idx="0">
+              <a:schemeClr val="accent1"/>
+            </a:effectRef>
+            <a:fontRef idx="minor">
+              <a:schemeClr val="lt1"/>
+            </a:fontRef>
+          </p:style>
+          <p:txBody>
+            <a:bodyPr rtlCol="0" anchor="ctr"/>
+            <a:lstStyle/>
+            <a:p>
+              <a:pPr algn="ctr"/>
+              <a:endParaRPr lang="ko-KR" altLang="en-US"/>
+            </a:p>
+          </p:txBody>
+        </p:sp>
+        <p:sp>
+          <p:nvSpPr>
+            <p:cNvPr id="29" name="직사각형 28">
+              <a:extLst>
+                <a:ext uri="{FF2B5EF4-FFF2-40B4-BE49-F238E27FC236}">
+                  <a16:creationId xmlns:a16="http://schemas.microsoft.com/office/drawing/2014/main" id="{CAF0B6BC-E8CD-0CF1-7D0E-80E54E0F7F0F}"/>
+                </a:ext>
+              </a:extLst>
+            </p:cNvPr>
+            <p:cNvSpPr/>
+            <p:nvPr/>
+          </p:nvSpPr>
+          <p:spPr>
+            <a:xfrm>
+              <a:off x="990455" y="896744"/>
+              <a:ext cx="1838379" cy="276948"/>
+            </a:xfrm>
+            <a:prstGeom prst="rect">
+              <a:avLst/>
+            </a:prstGeom>
+            <a:solidFill>
+              <a:schemeClr val="accent1">
+                <a:lumMod val="60000"/>
+                <a:lumOff val="40000"/>
+                <a:alpha val="10000"/>
+              </a:schemeClr>
+            </a:solidFill>
+            <a:ln>
+              <a:solidFill>
+                <a:schemeClr val="tx1"/>
+              </a:solidFill>
+            </a:ln>
+          </p:spPr>
+          <p:style>
+            <a:lnRef idx="2">
+              <a:schemeClr val="accent1">
+                <a:shade val="15000"/>
+              </a:schemeClr>
+            </a:lnRef>
+            <a:fillRef idx="1">
+              <a:schemeClr val="accent1"/>
+            </a:fillRef>
+            <a:effectRef idx="0">
+              <a:schemeClr val="accent1"/>
+            </a:effectRef>
+            <a:fontRef idx="minor">
+              <a:schemeClr val="lt1"/>
+            </a:fontRef>
+          </p:style>
+          <p:txBody>
+            <a:bodyPr rtlCol="0" anchor="ctr"/>
+            <a:lstStyle/>
+            <a:p>
+              <a:pPr algn="ctr"/>
+              <a:endParaRPr lang="ko-KR" altLang="en-US" dirty="0"/>
+            </a:p>
+          </p:txBody>
+        </p:sp>
+        <p:sp>
+          <p:nvSpPr>
+            <p:cNvPr id="31" name="TextBox 30">
+              <a:extLst>
+                <a:ext uri="{FF2B5EF4-FFF2-40B4-BE49-F238E27FC236}">
+                  <a16:creationId xmlns:a16="http://schemas.microsoft.com/office/drawing/2014/main" id="{83B33EF6-B30A-00B4-CEAF-0768BC4AFEB7}"/>
+                </a:ext>
+              </a:extLst>
+            </p:cNvPr>
+            <p:cNvSpPr txBox="1"/>
+            <p:nvPr/>
+          </p:nvSpPr>
+          <p:spPr>
+            <a:xfrm>
+              <a:off x="990455" y="902176"/>
+              <a:ext cx="1838377" cy="261610"/>
+            </a:xfrm>
+            <a:prstGeom prst="rect">
+              <a:avLst/>
+            </a:prstGeom>
+            <a:noFill/>
+          </p:spPr>
+          <p:txBody>
+            <a:bodyPr wrap="square" rtlCol="0">
+              <a:spAutoFit/>
+            </a:bodyPr>
+            <a:lstStyle/>
+            <a:p>
+              <a:pPr algn="ctr"/>
+              <a:r>
+                <a:rPr lang="en-US" altLang="ko-KR" sz="1100" b="1" dirty="0"/>
+                <a:t>100 / 50</a:t>
+              </a:r>
+              <a:endParaRPr lang="ko-KR" altLang="en-US" sz="1100" b="1" dirty="0"/>
+            </a:p>
+          </p:txBody>
+        </p:sp>
+      </p:grpSp>
+      <p:sp>
+        <p:nvSpPr>
+          <p:cNvPr id="35" name="TextBox 34">
+            <a:extLst>
+              <a:ext uri="{FF2B5EF4-FFF2-40B4-BE49-F238E27FC236}">
+                <a16:creationId xmlns:a16="http://schemas.microsoft.com/office/drawing/2014/main" id="{06767E78-E598-3C5B-B7DA-3CC025C5FED2}"/>
+              </a:ext>
+            </a:extLst>
+          </p:cNvPr>
+          <p:cNvSpPr txBox="1"/>
+          <p:nvPr/>
+        </p:nvSpPr>
+        <p:spPr>
+          <a:xfrm>
+            <a:off x="885228" y="1150768"/>
+            <a:ext cx="511871" cy="307777"/>
+          </a:xfrm>
+          <a:prstGeom prst="rect">
+            <a:avLst/>
+          </a:prstGeom>
+          <a:noFill/>
+        </p:spPr>
+        <p:txBody>
+          <a:bodyPr wrap="none" rtlCol="0">
+            <a:spAutoFit/>
+          </a:bodyPr>
+          <a:lstStyle/>
+          <a:p>
+            <a:r>
+              <a:rPr lang="en-US" altLang="ko-KR" sz="1400" b="1" dirty="0"/>
+              <a:t>EXP</a:t>
+            </a:r>
+            <a:endParaRPr lang="ko-KR" altLang="en-US" sz="1400" b="1" dirty="0"/>
+          </a:p>
+        </p:txBody>
+      </p:sp>
     </p:spTree>
     <p:extLst>
       <p:ext uri="{BB962C8B-B14F-4D97-AF65-F5344CB8AC3E}">

--- a/씬 별 UI.pptx
+++ b/씬 별 UI.pptx
@@ -1421,7 +1421,7 @@
           <a:p>
             <a:fld id="{077A12B5-C22A-4AF7-A62B-EF69F51B743A}" type="datetimeFigureOut">
               <a:rPr lang="ko-KR" altLang="en-US" smtClean="0"/>
-              <a:t>2026-10-22</a:t>
+              <a:t>2026-10-23</a:t>
             </a:fld>
             <a:endParaRPr lang="ko-KR" altLang="en-US"/>
           </a:p>
@@ -1835,7 +1835,7 @@
           <a:p>
             <a:fld id="{004137A2-7D2A-4EB2-87EC-F3BD120F3C23}" type="datetimeFigureOut">
               <a:rPr lang="ko-KR" altLang="en-US" smtClean="0"/>
-              <a:t>2026-10-22</a:t>
+              <a:t>2026-10-23</a:t>
             </a:fld>
             <a:endParaRPr lang="ko-KR" altLang="en-US"/>
           </a:p>
@@ -2033,7 +2033,7 @@
           <a:p>
             <a:fld id="{004137A2-7D2A-4EB2-87EC-F3BD120F3C23}" type="datetimeFigureOut">
               <a:rPr lang="ko-KR" altLang="en-US" smtClean="0"/>
-              <a:t>2026-10-22</a:t>
+              <a:t>2026-10-23</a:t>
             </a:fld>
             <a:endParaRPr lang="ko-KR" altLang="en-US"/>
           </a:p>
@@ -2241,7 +2241,7 @@
           <a:p>
             <a:fld id="{004137A2-7D2A-4EB2-87EC-F3BD120F3C23}" type="datetimeFigureOut">
               <a:rPr lang="ko-KR" altLang="en-US" smtClean="0"/>
-              <a:t>2026-10-22</a:t>
+              <a:t>2026-10-23</a:t>
             </a:fld>
             <a:endParaRPr lang="ko-KR" altLang="en-US"/>
           </a:p>
@@ -2439,7 +2439,7 @@
           <a:p>
             <a:fld id="{004137A2-7D2A-4EB2-87EC-F3BD120F3C23}" type="datetimeFigureOut">
               <a:rPr lang="ko-KR" altLang="en-US" smtClean="0"/>
-              <a:t>2026-10-22</a:t>
+              <a:t>2026-10-23</a:t>
             </a:fld>
             <a:endParaRPr lang="ko-KR" altLang="en-US"/>
           </a:p>
@@ -2714,7 +2714,7 @@
           <a:p>
             <a:fld id="{004137A2-7D2A-4EB2-87EC-F3BD120F3C23}" type="datetimeFigureOut">
               <a:rPr lang="ko-KR" altLang="en-US" smtClean="0"/>
-              <a:t>2026-10-22</a:t>
+              <a:t>2026-10-23</a:t>
             </a:fld>
             <a:endParaRPr lang="ko-KR" altLang="en-US"/>
           </a:p>
@@ -2979,7 +2979,7 @@
           <a:p>
             <a:fld id="{004137A2-7D2A-4EB2-87EC-F3BD120F3C23}" type="datetimeFigureOut">
               <a:rPr lang="ko-KR" altLang="en-US" smtClean="0"/>
-              <a:t>2026-10-22</a:t>
+              <a:t>2026-10-23</a:t>
             </a:fld>
             <a:endParaRPr lang="ko-KR" altLang="en-US"/>
           </a:p>
@@ -3391,7 +3391,7 @@
           <a:p>
             <a:fld id="{004137A2-7D2A-4EB2-87EC-F3BD120F3C23}" type="datetimeFigureOut">
               <a:rPr lang="ko-KR" altLang="en-US" smtClean="0"/>
-              <a:t>2026-10-22</a:t>
+              <a:t>2026-10-23</a:t>
             </a:fld>
             <a:endParaRPr lang="ko-KR" altLang="en-US"/>
           </a:p>
@@ -3532,7 +3532,7 @@
           <a:p>
             <a:fld id="{004137A2-7D2A-4EB2-87EC-F3BD120F3C23}" type="datetimeFigureOut">
               <a:rPr lang="ko-KR" altLang="en-US" smtClean="0"/>
-              <a:t>2026-10-22</a:t>
+              <a:t>2026-10-23</a:t>
             </a:fld>
             <a:endParaRPr lang="ko-KR" altLang="en-US"/>
           </a:p>
@@ -3645,7 +3645,7 @@
           <a:p>
             <a:fld id="{004137A2-7D2A-4EB2-87EC-F3BD120F3C23}" type="datetimeFigureOut">
               <a:rPr lang="ko-KR" altLang="en-US" smtClean="0"/>
-              <a:t>2026-10-22</a:t>
+              <a:t>2026-10-23</a:t>
             </a:fld>
             <a:endParaRPr lang="ko-KR" altLang="en-US"/>
           </a:p>
@@ -3956,7 +3956,7 @@
           <a:p>
             <a:fld id="{004137A2-7D2A-4EB2-87EC-F3BD120F3C23}" type="datetimeFigureOut">
               <a:rPr lang="ko-KR" altLang="en-US" smtClean="0"/>
-              <a:t>2026-10-22</a:t>
+              <a:t>2026-10-23</a:t>
             </a:fld>
             <a:endParaRPr lang="ko-KR" altLang="en-US"/>
           </a:p>
@@ -4244,7 +4244,7 @@
           <a:p>
             <a:fld id="{004137A2-7D2A-4EB2-87EC-F3BD120F3C23}" type="datetimeFigureOut">
               <a:rPr lang="ko-KR" altLang="en-US" smtClean="0"/>
-              <a:t>2026-10-22</a:t>
+              <a:t>2026-10-23</a:t>
             </a:fld>
             <a:endParaRPr lang="ko-KR" altLang="en-US"/>
           </a:p>
@@ -4485,7 +4485,7 @@
           <a:p>
             <a:fld id="{004137A2-7D2A-4EB2-87EC-F3BD120F3C23}" type="datetimeFigureOut">
               <a:rPr lang="ko-KR" altLang="en-US" smtClean="0"/>
-              <a:t>2026-10-22</a:t>
+              <a:t>2026-10-23</a:t>
             </a:fld>
             <a:endParaRPr lang="ko-KR" altLang="en-US"/>
           </a:p>
@@ -7151,122 +7151,6 @@
       </p:grpSp>
       <p:grpSp>
         <p:nvGrpSpPr>
-          <p:cNvPr id="47" name="그룹 46">
-            <a:extLst>
-              <a:ext uri="{FF2B5EF4-FFF2-40B4-BE49-F238E27FC236}">
-                <a16:creationId xmlns:a16="http://schemas.microsoft.com/office/drawing/2014/main" id="{29CDAC18-303E-AC2C-A334-69F1E0B36158}"/>
-              </a:ext>
-            </a:extLst>
-          </p:cNvPr>
-          <p:cNvGrpSpPr/>
-          <p:nvPr/>
-        </p:nvGrpSpPr>
-        <p:grpSpPr>
-          <a:xfrm>
-            <a:off x="5787571" y="3559790"/>
-            <a:ext cx="616857" cy="1463589"/>
-            <a:chOff x="5787571" y="3559790"/>
-            <a:chExt cx="616857" cy="1463589"/>
-          </a:xfrm>
-        </p:grpSpPr>
-        <p:sp>
-          <p:nvSpPr>
-            <p:cNvPr id="34" name="순서도: 자기 디스크 33">
-              <a:extLst>
-                <a:ext uri="{FF2B5EF4-FFF2-40B4-BE49-F238E27FC236}">
-                  <a16:creationId xmlns:a16="http://schemas.microsoft.com/office/drawing/2014/main" id="{0A7E11FF-90DF-5CE0-C893-2CEF08D7FA6D}"/>
-                </a:ext>
-              </a:extLst>
-            </p:cNvPr>
-            <p:cNvSpPr/>
-            <p:nvPr/>
-          </p:nvSpPr>
-          <p:spPr>
-            <a:xfrm>
-              <a:off x="5787571" y="3723090"/>
-              <a:ext cx="616857" cy="1300289"/>
-            </a:xfrm>
-            <a:prstGeom prst="flowChartMagneticDisk">
-              <a:avLst/>
-            </a:prstGeom>
-          </p:spPr>
-          <p:style>
-            <a:lnRef idx="2">
-              <a:schemeClr val="accent1">
-                <a:shade val="15000"/>
-              </a:schemeClr>
-            </a:lnRef>
-            <a:fillRef idx="1">
-              <a:schemeClr val="accent1"/>
-            </a:fillRef>
-            <a:effectRef idx="0">
-              <a:schemeClr val="accent1"/>
-            </a:effectRef>
-            <a:fontRef idx="minor">
-              <a:schemeClr val="lt1"/>
-            </a:fontRef>
-          </p:style>
-          <p:txBody>
-            <a:bodyPr rtlCol="0" anchor="ctr"/>
-            <a:lstStyle/>
-            <a:p>
-              <a:pPr algn="ctr"/>
-              <a:endParaRPr lang="ko-KR" altLang="en-US"/>
-            </a:p>
-          </p:txBody>
-        </p:sp>
-        <p:sp>
-          <p:nvSpPr>
-            <p:cNvPr id="46" name="직사각형 45">
-              <a:extLst>
-                <a:ext uri="{FF2B5EF4-FFF2-40B4-BE49-F238E27FC236}">
-                  <a16:creationId xmlns:a16="http://schemas.microsoft.com/office/drawing/2014/main" id="{D723A423-AC62-D286-1FA2-D45CBD071BCC}"/>
-                </a:ext>
-              </a:extLst>
-            </p:cNvPr>
-            <p:cNvSpPr/>
-            <p:nvPr/>
-          </p:nvSpPr>
-          <p:spPr>
-            <a:xfrm>
-              <a:off x="5842832" y="3559790"/>
-              <a:ext cx="506333" cy="97485"/>
-            </a:xfrm>
-            <a:prstGeom prst="rect">
-              <a:avLst/>
-            </a:prstGeom>
-            <a:solidFill>
-              <a:srgbClr val="FF0000"/>
-            </a:solidFill>
-          </p:spPr>
-          <p:style>
-            <a:lnRef idx="2">
-              <a:schemeClr val="accent1">
-                <a:shade val="15000"/>
-              </a:schemeClr>
-            </a:lnRef>
-            <a:fillRef idx="1">
-              <a:schemeClr val="accent1"/>
-            </a:fillRef>
-            <a:effectRef idx="0">
-              <a:schemeClr val="accent1"/>
-            </a:effectRef>
-            <a:fontRef idx="minor">
-              <a:schemeClr val="lt1"/>
-            </a:fontRef>
-          </p:style>
-          <p:txBody>
-            <a:bodyPr rtlCol="0" anchor="ctr"/>
-            <a:lstStyle/>
-            <a:p>
-              <a:pPr algn="ctr"/>
-              <a:endParaRPr lang="ko-KR" altLang="en-US"/>
-            </a:p>
-          </p:txBody>
-        </p:sp>
-      </p:grpSp>
-      <p:grpSp>
-        <p:nvGrpSpPr>
           <p:cNvPr id="95" name="그룹 94">
             <a:extLst>
               <a:ext uri="{FF2B5EF4-FFF2-40B4-BE49-F238E27FC236}">
@@ -7972,582 +7856,6 @@
       </p:sp>
       <p:grpSp>
         <p:nvGrpSpPr>
-          <p:cNvPr id="3" name="그룹 2">
-            <a:extLst>
-              <a:ext uri="{FF2B5EF4-FFF2-40B4-BE49-F238E27FC236}">
-                <a16:creationId xmlns:a16="http://schemas.microsoft.com/office/drawing/2014/main" id="{81BA51BD-2D37-DC9C-621F-37887D0A708F}"/>
-              </a:ext>
-            </a:extLst>
-          </p:cNvPr>
-          <p:cNvGrpSpPr/>
-          <p:nvPr/>
-        </p:nvGrpSpPr>
-        <p:grpSpPr>
-          <a:xfrm>
-            <a:off x="990456" y="4435760"/>
-            <a:ext cx="1801481" cy="1801227"/>
-            <a:chOff x="990456" y="4435760"/>
-            <a:chExt cx="1801481" cy="1801227"/>
-          </a:xfrm>
-        </p:grpSpPr>
-        <p:sp>
-          <p:nvSpPr>
-            <p:cNvPr id="7" name="타원 6">
-              <a:extLst>
-                <a:ext uri="{FF2B5EF4-FFF2-40B4-BE49-F238E27FC236}">
-                  <a16:creationId xmlns:a16="http://schemas.microsoft.com/office/drawing/2014/main" id="{0EA3F9A5-DFFC-8871-3FE1-7F8BB33BEB00}"/>
-                </a:ext>
-              </a:extLst>
-            </p:cNvPr>
-            <p:cNvSpPr>
-              <a:spLocks noChangeAspect="1"/>
-            </p:cNvSpPr>
-            <p:nvPr/>
-          </p:nvSpPr>
-          <p:spPr>
-            <a:xfrm>
-              <a:off x="2162087" y="4706369"/>
-              <a:ext cx="360000" cy="360000"/>
-            </a:xfrm>
-            <a:prstGeom prst="ellipse">
-              <a:avLst/>
-            </a:prstGeom>
-            <a:solidFill>
-              <a:schemeClr val="accent1">
-                <a:lumMod val="40000"/>
-                <a:lumOff val="60000"/>
-                <a:alpha val="50000"/>
-              </a:schemeClr>
-            </a:solidFill>
-            <a:ln>
-              <a:solidFill>
-                <a:schemeClr val="tx1"/>
-              </a:solidFill>
-            </a:ln>
-          </p:spPr>
-          <p:style>
-            <a:lnRef idx="2">
-              <a:schemeClr val="accent1">
-                <a:shade val="15000"/>
-              </a:schemeClr>
-            </a:lnRef>
-            <a:fillRef idx="1">
-              <a:schemeClr val="accent1"/>
-            </a:fillRef>
-            <a:effectRef idx="0">
-              <a:schemeClr val="accent1"/>
-            </a:effectRef>
-            <a:fontRef idx="minor">
-              <a:schemeClr val="lt1"/>
-            </a:fontRef>
-          </p:style>
-          <p:txBody>
-            <a:bodyPr rtlCol="0" anchor="ctr"/>
-            <a:lstStyle/>
-            <a:p>
-              <a:pPr algn="ctr"/>
-              <a:endParaRPr lang="ko-KR" altLang="en-US" dirty="0"/>
-            </a:p>
-          </p:txBody>
-        </p:sp>
-        <p:sp>
-          <p:nvSpPr>
-            <p:cNvPr id="8" name="타원 7">
-              <a:extLst>
-                <a:ext uri="{FF2B5EF4-FFF2-40B4-BE49-F238E27FC236}">
-                  <a16:creationId xmlns:a16="http://schemas.microsoft.com/office/drawing/2014/main" id="{B183DA46-EE5A-85C4-C235-ED814A92D7AC}"/>
-                </a:ext>
-              </a:extLst>
-            </p:cNvPr>
-            <p:cNvSpPr>
-              <a:spLocks noChangeAspect="1"/>
-            </p:cNvSpPr>
-            <p:nvPr/>
-          </p:nvSpPr>
-          <p:spPr>
-            <a:xfrm>
-              <a:off x="1260456" y="5606978"/>
-              <a:ext cx="360000" cy="360000"/>
-            </a:xfrm>
-            <a:prstGeom prst="ellipse">
-              <a:avLst/>
-            </a:prstGeom>
-            <a:solidFill>
-              <a:srgbClr val="FFC000">
-                <a:alpha val="50000"/>
-              </a:srgbClr>
-            </a:solidFill>
-            <a:ln>
-              <a:solidFill>
-                <a:schemeClr val="tx1"/>
-              </a:solidFill>
-            </a:ln>
-          </p:spPr>
-          <p:style>
-            <a:lnRef idx="2">
-              <a:schemeClr val="accent1">
-                <a:shade val="15000"/>
-              </a:schemeClr>
-            </a:lnRef>
-            <a:fillRef idx="1">
-              <a:schemeClr val="accent1"/>
-            </a:fillRef>
-            <a:effectRef idx="0">
-              <a:schemeClr val="accent1"/>
-            </a:effectRef>
-            <a:fontRef idx="minor">
-              <a:schemeClr val="lt1"/>
-            </a:fontRef>
-          </p:style>
-          <p:txBody>
-            <a:bodyPr rtlCol="0" anchor="ctr"/>
-            <a:lstStyle/>
-            <a:p>
-              <a:pPr algn="ctr"/>
-              <a:endParaRPr lang="ko-KR" altLang="en-US"/>
-            </a:p>
-          </p:txBody>
-        </p:sp>
-        <p:sp>
-          <p:nvSpPr>
-            <p:cNvPr id="9" name="타원 8">
-              <a:extLst>
-                <a:ext uri="{FF2B5EF4-FFF2-40B4-BE49-F238E27FC236}">
-                  <a16:creationId xmlns:a16="http://schemas.microsoft.com/office/drawing/2014/main" id="{BE664473-1BC3-1ADE-B19A-09A8C5463760}"/>
-                </a:ext>
-              </a:extLst>
-            </p:cNvPr>
-            <p:cNvSpPr>
-              <a:spLocks noChangeAspect="1"/>
-            </p:cNvSpPr>
-            <p:nvPr/>
-          </p:nvSpPr>
-          <p:spPr>
-            <a:xfrm>
-              <a:off x="1260456" y="4706369"/>
-              <a:ext cx="360000" cy="360000"/>
-            </a:xfrm>
-            <a:prstGeom prst="ellipse">
-              <a:avLst/>
-            </a:prstGeom>
-            <a:solidFill>
-              <a:schemeClr val="accent1">
-                <a:lumMod val="40000"/>
-                <a:lumOff val="60000"/>
-                <a:alpha val="50000"/>
-              </a:schemeClr>
-            </a:solidFill>
-            <a:ln>
-              <a:solidFill>
-                <a:schemeClr val="tx1"/>
-              </a:solidFill>
-            </a:ln>
-          </p:spPr>
-          <p:style>
-            <a:lnRef idx="2">
-              <a:schemeClr val="accent1">
-                <a:shade val="15000"/>
-              </a:schemeClr>
-            </a:lnRef>
-            <a:fillRef idx="1">
-              <a:schemeClr val="accent1"/>
-            </a:fillRef>
-            <a:effectRef idx="0">
-              <a:schemeClr val="accent1"/>
-            </a:effectRef>
-            <a:fontRef idx="minor">
-              <a:schemeClr val="lt1"/>
-            </a:fontRef>
-          </p:style>
-          <p:txBody>
-            <a:bodyPr rtlCol="0" anchor="ctr"/>
-            <a:lstStyle/>
-            <a:p>
-              <a:pPr algn="ctr"/>
-              <a:endParaRPr lang="ko-KR" altLang="en-US"/>
-            </a:p>
-          </p:txBody>
-        </p:sp>
-        <p:sp>
-          <p:nvSpPr>
-            <p:cNvPr id="11" name="타원 10">
-              <a:extLst>
-                <a:ext uri="{FF2B5EF4-FFF2-40B4-BE49-F238E27FC236}">
-                  <a16:creationId xmlns:a16="http://schemas.microsoft.com/office/drawing/2014/main" id="{80698FDD-24B8-40CD-3D59-C6B112DF3F68}"/>
-                </a:ext>
-              </a:extLst>
-            </p:cNvPr>
-            <p:cNvSpPr>
-              <a:spLocks noChangeAspect="1"/>
-            </p:cNvSpPr>
-            <p:nvPr/>
-          </p:nvSpPr>
-          <p:spPr>
-            <a:xfrm>
-              <a:off x="2160155" y="5598917"/>
-              <a:ext cx="360000" cy="360000"/>
-            </a:xfrm>
-            <a:prstGeom prst="ellipse">
-              <a:avLst/>
-            </a:prstGeom>
-            <a:solidFill>
-              <a:schemeClr val="accent1">
-                <a:lumMod val="40000"/>
-                <a:lumOff val="60000"/>
-                <a:alpha val="50000"/>
-              </a:schemeClr>
-            </a:solidFill>
-            <a:ln>
-              <a:solidFill>
-                <a:schemeClr val="tx1"/>
-              </a:solidFill>
-            </a:ln>
-          </p:spPr>
-          <p:style>
-            <a:lnRef idx="2">
-              <a:schemeClr val="accent1">
-                <a:shade val="15000"/>
-              </a:schemeClr>
-            </a:lnRef>
-            <a:fillRef idx="1">
-              <a:schemeClr val="accent1"/>
-            </a:fillRef>
-            <a:effectRef idx="0">
-              <a:schemeClr val="accent1"/>
-            </a:effectRef>
-            <a:fontRef idx="minor">
-              <a:schemeClr val="lt1"/>
-            </a:fontRef>
-          </p:style>
-          <p:txBody>
-            <a:bodyPr rtlCol="0" anchor="ctr"/>
-            <a:lstStyle/>
-            <a:p>
-              <a:pPr algn="ctr"/>
-              <a:endParaRPr lang="ko-KR" altLang="en-US" dirty="0"/>
-            </a:p>
-          </p:txBody>
-        </p:sp>
-        <p:sp>
-          <p:nvSpPr>
-            <p:cNvPr id="17" name="직사각형 16">
-              <a:extLst>
-                <a:ext uri="{FF2B5EF4-FFF2-40B4-BE49-F238E27FC236}">
-                  <a16:creationId xmlns:a16="http://schemas.microsoft.com/office/drawing/2014/main" id="{D3BB9B0D-F887-5CAE-597F-329007A1275D}"/>
-                </a:ext>
-              </a:extLst>
-            </p:cNvPr>
-            <p:cNvSpPr>
-              <a:spLocks noChangeAspect="1"/>
-            </p:cNvSpPr>
-            <p:nvPr/>
-          </p:nvSpPr>
-          <p:spPr>
-            <a:xfrm>
-              <a:off x="990456" y="4436987"/>
-              <a:ext cx="1800000" cy="1800000"/>
-            </a:xfrm>
-            <a:prstGeom prst="rect">
-              <a:avLst/>
-            </a:prstGeom>
-            <a:noFill/>
-          </p:spPr>
-          <p:style>
-            <a:lnRef idx="2">
-              <a:schemeClr val="accent1">
-                <a:shade val="15000"/>
-              </a:schemeClr>
-            </a:lnRef>
-            <a:fillRef idx="1">
-              <a:schemeClr val="accent1"/>
-            </a:fillRef>
-            <a:effectRef idx="0">
-              <a:schemeClr val="accent1"/>
-            </a:effectRef>
-            <a:fontRef idx="minor">
-              <a:schemeClr val="lt1"/>
-            </a:fontRef>
-          </p:style>
-          <p:txBody>
-            <a:bodyPr rtlCol="0" anchor="ctr"/>
-            <a:lstStyle/>
-            <a:p>
-              <a:pPr algn="ctr"/>
-              <a:endParaRPr lang="ko-KR" altLang="en-US" dirty="0"/>
-            </a:p>
-          </p:txBody>
-        </p:sp>
-        <p:cxnSp>
-          <p:nvCxnSpPr>
-            <p:cNvPr id="23" name="직선 연결선 22">
-              <a:extLst>
-                <a:ext uri="{FF2B5EF4-FFF2-40B4-BE49-F238E27FC236}">
-                  <a16:creationId xmlns:a16="http://schemas.microsoft.com/office/drawing/2014/main" id="{811DDA6F-78CE-3C67-14CF-8BE3CB510090}"/>
-                </a:ext>
-              </a:extLst>
-            </p:cNvPr>
-            <p:cNvCxnSpPr>
-              <a:cxnSpLocks/>
-              <a:stCxn id="17" idx="0"/>
-              <a:endCxn id="17" idx="2"/>
-            </p:cNvCxnSpPr>
-            <p:nvPr/>
-          </p:nvCxnSpPr>
-          <p:spPr>
-            <a:xfrm>
-              <a:off x="1890456" y="4436987"/>
-              <a:ext cx="0" cy="1800000"/>
-            </a:xfrm>
-            <a:prstGeom prst="line">
-              <a:avLst/>
-            </a:prstGeom>
-          </p:spPr>
-          <p:style>
-            <a:lnRef idx="2">
-              <a:schemeClr val="dk1"/>
-            </a:lnRef>
-            <a:fillRef idx="0">
-              <a:schemeClr val="dk1"/>
-            </a:fillRef>
-            <a:effectRef idx="1">
-              <a:schemeClr val="dk1"/>
-            </a:effectRef>
-            <a:fontRef idx="minor">
-              <a:schemeClr val="tx1"/>
-            </a:fontRef>
-          </p:style>
-        </p:cxnSp>
-        <p:cxnSp>
-          <p:nvCxnSpPr>
-            <p:cNvPr id="26" name="직선 연결선 25">
-              <a:extLst>
-                <a:ext uri="{FF2B5EF4-FFF2-40B4-BE49-F238E27FC236}">
-                  <a16:creationId xmlns:a16="http://schemas.microsoft.com/office/drawing/2014/main" id="{4A95B58C-95E4-5F9D-6E1C-B4A32837252D}"/>
-                </a:ext>
-              </a:extLst>
-            </p:cNvPr>
-            <p:cNvCxnSpPr>
-              <a:cxnSpLocks/>
-              <a:stCxn id="17" idx="1"/>
-              <a:endCxn id="17" idx="3"/>
-            </p:cNvCxnSpPr>
-            <p:nvPr/>
-          </p:nvCxnSpPr>
-          <p:spPr>
-            <a:xfrm>
-              <a:off x="990456" y="5336987"/>
-              <a:ext cx="1800000" cy="0"/>
-            </a:xfrm>
-            <a:prstGeom prst="line">
-              <a:avLst/>
-            </a:prstGeom>
-          </p:spPr>
-          <p:style>
-            <a:lnRef idx="2">
-              <a:schemeClr val="dk1"/>
-            </a:lnRef>
-            <a:fillRef idx="0">
-              <a:schemeClr val="dk1"/>
-            </a:fillRef>
-            <a:effectRef idx="1">
-              <a:schemeClr val="dk1"/>
-            </a:effectRef>
-            <a:fontRef idx="minor">
-              <a:schemeClr val="tx1"/>
-            </a:fontRef>
-          </p:style>
-        </p:cxnSp>
-        <p:sp>
-          <p:nvSpPr>
-            <p:cNvPr id="28" name="직사각형 27">
-              <a:extLst>
-                <a:ext uri="{FF2B5EF4-FFF2-40B4-BE49-F238E27FC236}">
-                  <a16:creationId xmlns:a16="http://schemas.microsoft.com/office/drawing/2014/main" id="{B3BC4A07-DB36-4077-8461-80F7243AF7C7}"/>
-                </a:ext>
-              </a:extLst>
-            </p:cNvPr>
-            <p:cNvSpPr/>
-            <p:nvPr/>
-          </p:nvSpPr>
-          <p:spPr>
-            <a:xfrm>
-              <a:off x="990755" y="4435760"/>
-              <a:ext cx="899699" cy="901219"/>
-            </a:xfrm>
-            <a:prstGeom prst="rect">
-              <a:avLst/>
-            </a:prstGeom>
-            <a:noFill/>
-          </p:spPr>
-          <p:style>
-            <a:lnRef idx="2">
-              <a:schemeClr val="accent1">
-                <a:shade val="15000"/>
-              </a:schemeClr>
-            </a:lnRef>
-            <a:fillRef idx="1">
-              <a:schemeClr val="accent1"/>
-            </a:fillRef>
-            <a:effectRef idx="0">
-              <a:schemeClr val="accent1"/>
-            </a:effectRef>
-            <a:fontRef idx="minor">
-              <a:schemeClr val="lt1"/>
-            </a:fontRef>
-          </p:style>
-          <p:txBody>
-            <a:bodyPr rtlCol="0" anchor="ctr"/>
-            <a:lstStyle/>
-            <a:p>
-              <a:pPr algn="ctr"/>
-              <a:endParaRPr lang="ko-KR" altLang="en-US"/>
-            </a:p>
-          </p:txBody>
-        </p:sp>
-        <p:sp>
-          <p:nvSpPr>
-            <p:cNvPr id="30" name="직사각형 29">
-              <a:extLst>
-                <a:ext uri="{FF2B5EF4-FFF2-40B4-BE49-F238E27FC236}">
-                  <a16:creationId xmlns:a16="http://schemas.microsoft.com/office/drawing/2014/main" id="{7CEAA0D8-8D8E-7159-D222-7BB1C4D0C011}"/>
-                </a:ext>
-              </a:extLst>
-            </p:cNvPr>
-            <p:cNvSpPr/>
-            <p:nvPr/>
-          </p:nvSpPr>
-          <p:spPr>
-            <a:xfrm>
-              <a:off x="1892238" y="4435760"/>
-              <a:ext cx="899699" cy="901219"/>
-            </a:xfrm>
-            <a:prstGeom prst="rect">
-              <a:avLst/>
-            </a:prstGeom>
-            <a:noFill/>
-          </p:spPr>
-          <p:style>
-            <a:lnRef idx="2">
-              <a:schemeClr val="accent1">
-                <a:shade val="15000"/>
-              </a:schemeClr>
-            </a:lnRef>
-            <a:fillRef idx="1">
-              <a:schemeClr val="accent1"/>
-            </a:fillRef>
-            <a:effectRef idx="0">
-              <a:schemeClr val="accent1"/>
-            </a:effectRef>
-            <a:fontRef idx="minor">
-              <a:schemeClr val="lt1"/>
-            </a:fontRef>
-          </p:style>
-          <p:txBody>
-            <a:bodyPr rtlCol="0" anchor="ctr"/>
-            <a:lstStyle/>
-            <a:p>
-              <a:pPr algn="ctr"/>
-              <a:endParaRPr lang="ko-KR" altLang="en-US"/>
-            </a:p>
-          </p:txBody>
-        </p:sp>
-        <p:sp>
-          <p:nvSpPr>
-            <p:cNvPr id="32" name="직사각형 31">
-              <a:extLst>
-                <a:ext uri="{FF2B5EF4-FFF2-40B4-BE49-F238E27FC236}">
-                  <a16:creationId xmlns:a16="http://schemas.microsoft.com/office/drawing/2014/main" id="{0E5D4B30-8E8D-D182-7340-AD3C6BCB0BA6}"/>
-                </a:ext>
-              </a:extLst>
-            </p:cNvPr>
-            <p:cNvSpPr/>
-            <p:nvPr/>
-          </p:nvSpPr>
-          <p:spPr>
-            <a:xfrm>
-              <a:off x="1892238" y="5329535"/>
-              <a:ext cx="899699" cy="901219"/>
-            </a:xfrm>
-            <a:prstGeom prst="rect">
-              <a:avLst/>
-            </a:prstGeom>
-            <a:noFill/>
-          </p:spPr>
-          <p:style>
-            <a:lnRef idx="2">
-              <a:schemeClr val="accent1">
-                <a:shade val="15000"/>
-              </a:schemeClr>
-            </a:lnRef>
-            <a:fillRef idx="1">
-              <a:schemeClr val="accent1"/>
-            </a:fillRef>
-            <a:effectRef idx="0">
-              <a:schemeClr val="accent1"/>
-            </a:effectRef>
-            <a:fontRef idx="minor">
-              <a:schemeClr val="lt1"/>
-            </a:fontRef>
-          </p:style>
-          <p:txBody>
-            <a:bodyPr rtlCol="0" anchor="ctr"/>
-            <a:lstStyle/>
-            <a:p>
-              <a:pPr algn="ctr"/>
-              <a:endParaRPr lang="ko-KR" altLang="en-US"/>
-            </a:p>
-          </p:txBody>
-        </p:sp>
-        <p:sp>
-          <p:nvSpPr>
-            <p:cNvPr id="33" name="직사각형 32">
-              <a:extLst>
-                <a:ext uri="{FF2B5EF4-FFF2-40B4-BE49-F238E27FC236}">
-                  <a16:creationId xmlns:a16="http://schemas.microsoft.com/office/drawing/2014/main" id="{1631EF89-5063-B8B1-C498-11F7814AF92D}"/>
-                </a:ext>
-              </a:extLst>
-            </p:cNvPr>
-            <p:cNvSpPr/>
-            <p:nvPr/>
-          </p:nvSpPr>
-          <p:spPr>
-            <a:xfrm>
-              <a:off x="990755" y="5329535"/>
-              <a:ext cx="899699" cy="901219"/>
-            </a:xfrm>
-            <a:prstGeom prst="rect">
-              <a:avLst/>
-            </a:prstGeom>
-            <a:noFill/>
-          </p:spPr>
-          <p:style>
-            <a:lnRef idx="2">
-              <a:schemeClr val="accent1">
-                <a:shade val="15000"/>
-              </a:schemeClr>
-            </a:lnRef>
-            <a:fillRef idx="1">
-              <a:schemeClr val="accent1"/>
-            </a:fillRef>
-            <a:effectRef idx="0">
-              <a:schemeClr val="accent1"/>
-            </a:effectRef>
-            <a:fontRef idx="minor">
-              <a:schemeClr val="lt1"/>
-            </a:fontRef>
-          </p:style>
-          <p:txBody>
-            <a:bodyPr rtlCol="0" anchor="ctr"/>
-            <a:lstStyle/>
-            <a:p>
-              <a:pPr algn="ctr"/>
-              <a:endParaRPr lang="ko-KR" altLang="en-US"/>
-            </a:p>
-          </p:txBody>
-        </p:sp>
-      </p:grpSp>
-      <p:grpSp>
-        <p:nvGrpSpPr>
           <p:cNvPr id="25" name="그룹 24">
             <a:extLst>
               <a:ext uri="{FF2B5EF4-FFF2-40B4-BE49-F238E27FC236}">
@@ -8750,6 +8058,510 @@
           </a:p>
         </p:txBody>
       </p:sp>
+      <p:sp>
+        <p:nvSpPr>
+          <p:cNvPr id="37" name="타원 36">
+            <a:extLst>
+              <a:ext uri="{FF2B5EF4-FFF2-40B4-BE49-F238E27FC236}">
+                <a16:creationId xmlns:a16="http://schemas.microsoft.com/office/drawing/2014/main" id="{4E2BECEA-20E8-523E-DDAA-2BA03C224FCE}"/>
+              </a:ext>
+            </a:extLst>
+          </p:cNvPr>
+          <p:cNvSpPr>
+            <a:spLocks noChangeAspect="1"/>
+          </p:cNvSpPr>
+          <p:nvPr/>
+        </p:nvSpPr>
+        <p:spPr>
+          <a:xfrm>
+            <a:off x="1229952" y="5606978"/>
+            <a:ext cx="360000" cy="360000"/>
+          </a:xfrm>
+          <a:prstGeom prst="ellipse">
+            <a:avLst/>
+          </a:prstGeom>
+          <a:solidFill>
+            <a:srgbClr val="FFC000">
+              <a:alpha val="50000"/>
+            </a:srgbClr>
+          </a:solidFill>
+          <a:ln>
+            <a:solidFill>
+              <a:schemeClr val="tx1"/>
+            </a:solidFill>
+          </a:ln>
+        </p:spPr>
+        <p:style>
+          <a:lnRef idx="2">
+            <a:schemeClr val="accent1">
+              <a:shade val="15000"/>
+            </a:schemeClr>
+          </a:lnRef>
+          <a:fillRef idx="1">
+            <a:schemeClr val="accent1"/>
+          </a:fillRef>
+          <a:effectRef idx="0">
+            <a:schemeClr val="accent1"/>
+          </a:effectRef>
+          <a:fontRef idx="minor">
+            <a:schemeClr val="lt1"/>
+          </a:fontRef>
+        </p:style>
+        <p:txBody>
+          <a:bodyPr rtlCol="0" anchor="ctr"/>
+          <a:lstStyle/>
+          <a:p>
+            <a:pPr algn="ctr"/>
+            <a:endParaRPr lang="ko-KR" altLang="en-US" sz="200" dirty="0">
+              <a:solidFill>
+                <a:schemeClr val="tx1"/>
+              </a:solidFill>
+            </a:endParaRPr>
+          </a:p>
+        </p:txBody>
+      </p:sp>
+      <p:sp>
+        <p:nvSpPr>
+          <p:cNvPr id="39" name="타원 38">
+            <a:extLst>
+              <a:ext uri="{FF2B5EF4-FFF2-40B4-BE49-F238E27FC236}">
+                <a16:creationId xmlns:a16="http://schemas.microsoft.com/office/drawing/2014/main" id="{95F18A1E-397B-05D3-50DA-ABFE0E6F4B4B}"/>
+              </a:ext>
+            </a:extLst>
+          </p:cNvPr>
+          <p:cNvSpPr>
+            <a:spLocks noChangeAspect="1"/>
+          </p:cNvSpPr>
+          <p:nvPr/>
+        </p:nvSpPr>
+        <p:spPr>
+          <a:xfrm>
+            <a:off x="1229952" y="5032302"/>
+            <a:ext cx="360000" cy="360000"/>
+          </a:xfrm>
+          <a:prstGeom prst="ellipse">
+            <a:avLst/>
+          </a:prstGeom>
+          <a:solidFill>
+            <a:schemeClr val="accent6">
+              <a:lumMod val="20000"/>
+              <a:lumOff val="80000"/>
+              <a:alpha val="50000"/>
+            </a:schemeClr>
+          </a:solidFill>
+          <a:ln>
+            <a:solidFill>
+              <a:schemeClr val="tx1"/>
+            </a:solidFill>
+          </a:ln>
+        </p:spPr>
+        <p:style>
+          <a:lnRef idx="2">
+            <a:schemeClr val="accent1">
+              <a:shade val="15000"/>
+            </a:schemeClr>
+          </a:lnRef>
+          <a:fillRef idx="1">
+            <a:schemeClr val="accent1"/>
+          </a:fillRef>
+          <a:effectRef idx="0">
+            <a:schemeClr val="accent1"/>
+          </a:effectRef>
+          <a:fontRef idx="minor">
+            <a:schemeClr val="lt1"/>
+          </a:fontRef>
+        </p:style>
+        <p:txBody>
+          <a:bodyPr rtlCol="0" anchor="ctr"/>
+          <a:lstStyle/>
+          <a:p>
+            <a:pPr algn="ctr"/>
+            <a:endParaRPr lang="ko-KR" altLang="en-US" dirty="0">
+              <a:solidFill>
+                <a:schemeClr val="tx1"/>
+              </a:solidFill>
+            </a:endParaRPr>
+          </a:p>
+        </p:txBody>
+      </p:sp>
+      <p:sp>
+        <p:nvSpPr>
+          <p:cNvPr id="42" name="TextBox 41">
+            <a:extLst>
+              <a:ext uri="{FF2B5EF4-FFF2-40B4-BE49-F238E27FC236}">
+                <a16:creationId xmlns:a16="http://schemas.microsoft.com/office/drawing/2014/main" id="{BE6D7526-C9C3-675D-6A20-D086EB9103C8}"/>
+              </a:ext>
+            </a:extLst>
+          </p:cNvPr>
+          <p:cNvSpPr txBox="1"/>
+          <p:nvPr/>
+        </p:nvSpPr>
+        <p:spPr>
+          <a:xfrm>
+            <a:off x="12939" y="5625304"/>
+            <a:ext cx="877163" cy="369332"/>
+          </a:xfrm>
+          <a:prstGeom prst="rect">
+            <a:avLst/>
+          </a:prstGeom>
+          <a:noFill/>
+        </p:spPr>
+        <p:txBody>
+          <a:bodyPr wrap="none" rtlCol="0">
+            <a:spAutoFit/>
+          </a:bodyPr>
+          <a:lstStyle/>
+          <a:p>
+            <a:pPr algn="r"/>
+            <a:r>
+              <a:rPr lang="ko-KR" altLang="en-US" dirty="0"/>
+              <a:t>구르기</a:t>
+            </a:r>
+          </a:p>
+        </p:txBody>
+      </p:sp>
+      <p:sp>
+        <p:nvSpPr>
+          <p:cNvPr id="52" name="TextBox 51">
+            <a:extLst>
+              <a:ext uri="{FF2B5EF4-FFF2-40B4-BE49-F238E27FC236}">
+                <a16:creationId xmlns:a16="http://schemas.microsoft.com/office/drawing/2014/main" id="{B01481F3-77AB-2DE8-DD53-D8A254185FAA}"/>
+              </a:ext>
+            </a:extLst>
+          </p:cNvPr>
+          <p:cNvSpPr txBox="1"/>
+          <p:nvPr/>
+        </p:nvSpPr>
+        <p:spPr>
+          <a:xfrm>
+            <a:off x="238897" y="5022023"/>
+            <a:ext cx="646331" cy="369332"/>
+          </a:xfrm>
+          <a:prstGeom prst="rect">
+            <a:avLst/>
+          </a:prstGeom>
+          <a:noFill/>
+        </p:spPr>
+        <p:txBody>
+          <a:bodyPr wrap="none" rtlCol="0">
+            <a:spAutoFit/>
+          </a:bodyPr>
+          <a:lstStyle/>
+          <a:p>
+            <a:pPr algn="r"/>
+            <a:r>
+              <a:rPr lang="ko-KR" altLang="en-US"/>
+              <a:t>막기</a:t>
+            </a:r>
+            <a:endParaRPr lang="ko-KR" altLang="en-US" dirty="0"/>
+          </a:p>
+        </p:txBody>
+      </p:sp>
+      <p:sp>
+        <p:nvSpPr>
+          <p:cNvPr id="54" name="타원 53">
+            <a:extLst>
+              <a:ext uri="{FF2B5EF4-FFF2-40B4-BE49-F238E27FC236}">
+                <a16:creationId xmlns:a16="http://schemas.microsoft.com/office/drawing/2014/main" id="{DCEF1B98-CEA9-35A8-136F-C37DA5C47BFF}"/>
+              </a:ext>
+            </a:extLst>
+          </p:cNvPr>
+          <p:cNvSpPr>
+            <a:spLocks noChangeAspect="1"/>
+          </p:cNvSpPr>
+          <p:nvPr/>
+        </p:nvSpPr>
+        <p:spPr>
+          <a:xfrm>
+            <a:off x="1229952" y="3882952"/>
+            <a:ext cx="360000" cy="360000"/>
+          </a:xfrm>
+          <a:prstGeom prst="ellipse">
+            <a:avLst/>
+          </a:prstGeom>
+          <a:solidFill>
+            <a:schemeClr val="accent1">
+              <a:lumMod val="40000"/>
+              <a:lumOff val="60000"/>
+              <a:alpha val="50000"/>
+            </a:schemeClr>
+          </a:solidFill>
+          <a:ln>
+            <a:solidFill>
+              <a:schemeClr val="tx1"/>
+            </a:solidFill>
+          </a:ln>
+        </p:spPr>
+        <p:style>
+          <a:lnRef idx="2">
+            <a:schemeClr val="accent1">
+              <a:shade val="15000"/>
+            </a:schemeClr>
+          </a:lnRef>
+          <a:fillRef idx="1">
+            <a:schemeClr val="accent1"/>
+          </a:fillRef>
+          <a:effectRef idx="0">
+            <a:schemeClr val="accent1"/>
+          </a:effectRef>
+          <a:fontRef idx="minor">
+            <a:schemeClr val="lt1"/>
+          </a:fontRef>
+        </p:style>
+        <p:txBody>
+          <a:bodyPr rtlCol="0" anchor="ctr"/>
+          <a:lstStyle/>
+          <a:p>
+            <a:pPr algn="ctr"/>
+            <a:r>
+              <a:rPr lang="ko-KR" altLang="en-US" dirty="0"/>
+              <a:t>강</a:t>
+            </a:r>
+          </a:p>
+        </p:txBody>
+      </p:sp>
+      <p:sp>
+        <p:nvSpPr>
+          <p:cNvPr id="56" name="타원 55">
+            <a:extLst>
+              <a:ext uri="{FF2B5EF4-FFF2-40B4-BE49-F238E27FC236}">
+                <a16:creationId xmlns:a16="http://schemas.microsoft.com/office/drawing/2014/main" id="{B0983DB5-4464-8B8D-015C-10B5A629D953}"/>
+              </a:ext>
+            </a:extLst>
+          </p:cNvPr>
+          <p:cNvSpPr>
+            <a:spLocks noChangeAspect="1"/>
+          </p:cNvSpPr>
+          <p:nvPr/>
+        </p:nvSpPr>
+        <p:spPr>
+          <a:xfrm>
+            <a:off x="1229952" y="4457627"/>
+            <a:ext cx="360000" cy="360000"/>
+          </a:xfrm>
+          <a:prstGeom prst="ellipse">
+            <a:avLst/>
+          </a:prstGeom>
+          <a:solidFill>
+            <a:schemeClr val="accent1">
+              <a:lumMod val="40000"/>
+              <a:lumOff val="60000"/>
+              <a:alpha val="50000"/>
+            </a:schemeClr>
+          </a:solidFill>
+          <a:ln>
+            <a:solidFill>
+              <a:schemeClr val="tx1"/>
+            </a:solidFill>
+          </a:ln>
+        </p:spPr>
+        <p:style>
+          <a:lnRef idx="2">
+            <a:schemeClr val="accent1">
+              <a:shade val="15000"/>
+            </a:schemeClr>
+          </a:lnRef>
+          <a:fillRef idx="1">
+            <a:schemeClr val="accent1"/>
+          </a:fillRef>
+          <a:effectRef idx="0">
+            <a:schemeClr val="accent1"/>
+          </a:effectRef>
+          <a:fontRef idx="minor">
+            <a:schemeClr val="lt1"/>
+          </a:fontRef>
+        </p:style>
+        <p:txBody>
+          <a:bodyPr rtlCol="0" anchor="ctr"/>
+          <a:lstStyle/>
+          <a:p>
+            <a:pPr algn="ctr"/>
+            <a:r>
+              <a:rPr lang="ko-KR" altLang="en-US" dirty="0"/>
+              <a:t>약</a:t>
+            </a:r>
+          </a:p>
+        </p:txBody>
+      </p:sp>
+      <p:sp>
+        <p:nvSpPr>
+          <p:cNvPr id="72" name="타원 71">
+            <a:extLst>
+              <a:ext uri="{FF2B5EF4-FFF2-40B4-BE49-F238E27FC236}">
+                <a16:creationId xmlns:a16="http://schemas.microsoft.com/office/drawing/2014/main" id="{5E06E911-DE03-BB8F-A4B5-E1498F03C258}"/>
+              </a:ext>
+            </a:extLst>
+          </p:cNvPr>
+          <p:cNvSpPr>
+            <a:spLocks noChangeAspect="1"/>
+          </p:cNvSpPr>
+          <p:nvPr/>
+        </p:nvSpPr>
+        <p:spPr>
+          <a:xfrm>
+            <a:off x="10716776" y="4017698"/>
+            <a:ext cx="360000" cy="360000"/>
+          </a:xfrm>
+          <a:prstGeom prst="ellipse">
+            <a:avLst/>
+          </a:prstGeom>
+          <a:solidFill>
+            <a:schemeClr val="accent1">
+              <a:lumMod val="40000"/>
+              <a:lumOff val="60000"/>
+              <a:alpha val="50000"/>
+            </a:schemeClr>
+          </a:solidFill>
+          <a:ln>
+            <a:solidFill>
+              <a:schemeClr val="tx1"/>
+            </a:solidFill>
+          </a:ln>
+        </p:spPr>
+        <p:style>
+          <a:lnRef idx="2">
+            <a:schemeClr val="accent1">
+              <a:shade val="15000"/>
+            </a:schemeClr>
+          </a:lnRef>
+          <a:fillRef idx="1">
+            <a:schemeClr val="accent1"/>
+          </a:fillRef>
+          <a:effectRef idx="0">
+            <a:schemeClr val="accent1"/>
+          </a:effectRef>
+          <a:fontRef idx="minor">
+            <a:schemeClr val="lt1"/>
+          </a:fontRef>
+        </p:style>
+        <p:txBody>
+          <a:bodyPr rtlCol="0" anchor="ctr"/>
+          <a:lstStyle/>
+          <a:p>
+            <a:pPr algn="ctr"/>
+            <a:r>
+              <a:rPr lang="ko-KR" altLang="en-US" dirty="0"/>
+              <a:t>전</a:t>
+            </a:r>
+          </a:p>
+        </p:txBody>
+      </p:sp>
+      <p:grpSp>
+        <p:nvGrpSpPr>
+          <p:cNvPr id="73" name="그룹 72">
+            <a:extLst>
+              <a:ext uri="{FF2B5EF4-FFF2-40B4-BE49-F238E27FC236}">
+                <a16:creationId xmlns:a16="http://schemas.microsoft.com/office/drawing/2014/main" id="{0DB2CE56-C274-ADA2-4153-2EF8D345FF20}"/>
+              </a:ext>
+            </a:extLst>
+          </p:cNvPr>
+          <p:cNvGrpSpPr/>
+          <p:nvPr/>
+        </p:nvGrpSpPr>
+        <p:grpSpPr>
+          <a:xfrm>
+            <a:off x="5671513" y="3532282"/>
+            <a:ext cx="428591" cy="710670"/>
+            <a:chOff x="5787571" y="3559790"/>
+            <a:chExt cx="616857" cy="1463589"/>
+          </a:xfrm>
+        </p:grpSpPr>
+        <p:sp>
+          <p:nvSpPr>
+            <p:cNvPr id="74" name="순서도: 자기 디스크 73">
+              <a:extLst>
+                <a:ext uri="{FF2B5EF4-FFF2-40B4-BE49-F238E27FC236}">
+                  <a16:creationId xmlns:a16="http://schemas.microsoft.com/office/drawing/2014/main" id="{21EBF995-948A-10DD-ECA7-5F2365D1381B}"/>
+                </a:ext>
+              </a:extLst>
+            </p:cNvPr>
+            <p:cNvSpPr/>
+            <p:nvPr/>
+          </p:nvSpPr>
+          <p:spPr>
+            <a:xfrm>
+              <a:off x="5787571" y="3723090"/>
+              <a:ext cx="616857" cy="1300289"/>
+            </a:xfrm>
+            <a:prstGeom prst="flowChartMagneticDisk">
+              <a:avLst/>
+            </a:prstGeom>
+          </p:spPr>
+          <p:style>
+            <a:lnRef idx="2">
+              <a:schemeClr val="accent1">
+                <a:shade val="15000"/>
+              </a:schemeClr>
+            </a:lnRef>
+            <a:fillRef idx="1">
+              <a:schemeClr val="accent1"/>
+            </a:fillRef>
+            <a:effectRef idx="0">
+              <a:schemeClr val="accent1"/>
+            </a:effectRef>
+            <a:fontRef idx="minor">
+              <a:schemeClr val="lt1"/>
+            </a:fontRef>
+          </p:style>
+          <p:txBody>
+            <a:bodyPr rtlCol="0" anchor="ctr"/>
+            <a:lstStyle/>
+            <a:p>
+              <a:pPr algn="ctr"/>
+              <a:endParaRPr lang="ko-KR" altLang="en-US"/>
+            </a:p>
+          </p:txBody>
+        </p:sp>
+        <p:sp>
+          <p:nvSpPr>
+            <p:cNvPr id="75" name="직사각형 74">
+              <a:extLst>
+                <a:ext uri="{FF2B5EF4-FFF2-40B4-BE49-F238E27FC236}">
+                  <a16:creationId xmlns:a16="http://schemas.microsoft.com/office/drawing/2014/main" id="{A692D6CF-F773-7E65-91D3-EB38B2BA952E}"/>
+                </a:ext>
+              </a:extLst>
+            </p:cNvPr>
+            <p:cNvSpPr/>
+            <p:nvPr/>
+          </p:nvSpPr>
+          <p:spPr>
+            <a:xfrm>
+              <a:off x="5842832" y="3559790"/>
+              <a:ext cx="506333" cy="97485"/>
+            </a:xfrm>
+            <a:prstGeom prst="rect">
+              <a:avLst/>
+            </a:prstGeom>
+            <a:solidFill>
+              <a:srgbClr val="FF0000"/>
+            </a:solidFill>
+          </p:spPr>
+          <p:style>
+            <a:lnRef idx="2">
+              <a:schemeClr val="accent1">
+                <a:shade val="15000"/>
+              </a:schemeClr>
+            </a:lnRef>
+            <a:fillRef idx="1">
+              <a:schemeClr val="accent1"/>
+            </a:fillRef>
+            <a:effectRef idx="0">
+              <a:schemeClr val="accent1"/>
+            </a:effectRef>
+            <a:fontRef idx="minor">
+              <a:schemeClr val="lt1"/>
+            </a:fontRef>
+          </p:style>
+          <p:txBody>
+            <a:bodyPr rtlCol="0" anchor="ctr"/>
+            <a:lstStyle/>
+            <a:p>
+              <a:pPr algn="ctr"/>
+              <a:endParaRPr lang="ko-KR" altLang="en-US"/>
+            </a:p>
+          </p:txBody>
+        </p:sp>
+      </p:grpSp>
     </p:spTree>
     <p:extLst>
       <p:ext uri="{BB962C8B-B14F-4D97-AF65-F5344CB8AC3E}">

--- a/씬 별 UI.pptx
+++ b/씬 별 UI.pptx
@@ -5,13 +5,15 @@
     <p:sldMasterId id="2147483648" r:id="rId1"/>
   </p:sldMasterIdLst>
   <p:notesMasterIdLst>
-    <p:notesMasterId r:id="rId6"/>
+    <p:notesMasterId r:id="rId8"/>
   </p:notesMasterIdLst>
   <p:sldIdLst>
     <p:sldId id="303" r:id="rId2"/>
     <p:sldId id="292" r:id="rId3"/>
     <p:sldId id="311" r:id="rId4"/>
     <p:sldId id="310" r:id="rId5"/>
+    <p:sldId id="312" r:id="rId6"/>
+    <p:sldId id="313" r:id="rId7"/>
   </p:sldIdLst>
   <p:sldSz cx="12192000" cy="6858000"/>
   <p:notesSz cx="6858000" cy="9144000"/>
@@ -1421,7 +1423,7 @@
           <a:p>
             <a:fld id="{077A12B5-C22A-4AF7-A62B-EF69F51B743A}" type="datetimeFigureOut">
               <a:rPr lang="ko-KR" altLang="en-US" smtClean="0"/>
-              <a:t>2026-10-22</a:t>
+              <a:t>2026-10-23</a:t>
             </a:fld>
             <a:endParaRPr lang="ko-KR" altLang="en-US"/>
           </a:p>
@@ -1835,7 +1837,7 @@
           <a:p>
             <a:fld id="{004137A2-7D2A-4EB2-87EC-F3BD120F3C23}" type="datetimeFigureOut">
               <a:rPr lang="ko-KR" altLang="en-US" smtClean="0"/>
-              <a:t>2026-10-22</a:t>
+              <a:t>2026-10-23</a:t>
             </a:fld>
             <a:endParaRPr lang="ko-KR" altLang="en-US"/>
           </a:p>
@@ -2033,7 +2035,7 @@
           <a:p>
             <a:fld id="{004137A2-7D2A-4EB2-87EC-F3BD120F3C23}" type="datetimeFigureOut">
               <a:rPr lang="ko-KR" altLang="en-US" smtClean="0"/>
-              <a:t>2026-10-22</a:t>
+              <a:t>2026-10-23</a:t>
             </a:fld>
             <a:endParaRPr lang="ko-KR" altLang="en-US"/>
           </a:p>
@@ -2241,7 +2243,7 @@
           <a:p>
             <a:fld id="{004137A2-7D2A-4EB2-87EC-F3BD120F3C23}" type="datetimeFigureOut">
               <a:rPr lang="ko-KR" altLang="en-US" smtClean="0"/>
-              <a:t>2026-10-22</a:t>
+              <a:t>2026-10-23</a:t>
             </a:fld>
             <a:endParaRPr lang="ko-KR" altLang="en-US"/>
           </a:p>
@@ -2439,7 +2441,7 @@
           <a:p>
             <a:fld id="{004137A2-7D2A-4EB2-87EC-F3BD120F3C23}" type="datetimeFigureOut">
               <a:rPr lang="ko-KR" altLang="en-US" smtClean="0"/>
-              <a:t>2026-10-22</a:t>
+              <a:t>2026-10-23</a:t>
             </a:fld>
             <a:endParaRPr lang="ko-KR" altLang="en-US"/>
           </a:p>
@@ -2714,7 +2716,7 @@
           <a:p>
             <a:fld id="{004137A2-7D2A-4EB2-87EC-F3BD120F3C23}" type="datetimeFigureOut">
               <a:rPr lang="ko-KR" altLang="en-US" smtClean="0"/>
-              <a:t>2026-10-22</a:t>
+              <a:t>2026-10-23</a:t>
             </a:fld>
             <a:endParaRPr lang="ko-KR" altLang="en-US"/>
           </a:p>
@@ -2979,7 +2981,7 @@
           <a:p>
             <a:fld id="{004137A2-7D2A-4EB2-87EC-F3BD120F3C23}" type="datetimeFigureOut">
               <a:rPr lang="ko-KR" altLang="en-US" smtClean="0"/>
-              <a:t>2026-10-22</a:t>
+              <a:t>2026-10-23</a:t>
             </a:fld>
             <a:endParaRPr lang="ko-KR" altLang="en-US"/>
           </a:p>
@@ -3391,7 +3393,7 @@
           <a:p>
             <a:fld id="{004137A2-7D2A-4EB2-87EC-F3BD120F3C23}" type="datetimeFigureOut">
               <a:rPr lang="ko-KR" altLang="en-US" smtClean="0"/>
-              <a:t>2026-10-22</a:t>
+              <a:t>2026-10-23</a:t>
             </a:fld>
             <a:endParaRPr lang="ko-KR" altLang="en-US"/>
           </a:p>
@@ -3532,7 +3534,7 @@
           <a:p>
             <a:fld id="{004137A2-7D2A-4EB2-87EC-F3BD120F3C23}" type="datetimeFigureOut">
               <a:rPr lang="ko-KR" altLang="en-US" smtClean="0"/>
-              <a:t>2026-10-22</a:t>
+              <a:t>2026-10-23</a:t>
             </a:fld>
             <a:endParaRPr lang="ko-KR" altLang="en-US"/>
           </a:p>
@@ -3645,7 +3647,7 @@
           <a:p>
             <a:fld id="{004137A2-7D2A-4EB2-87EC-F3BD120F3C23}" type="datetimeFigureOut">
               <a:rPr lang="ko-KR" altLang="en-US" smtClean="0"/>
-              <a:t>2026-10-22</a:t>
+              <a:t>2026-10-23</a:t>
             </a:fld>
             <a:endParaRPr lang="ko-KR" altLang="en-US"/>
           </a:p>
@@ -3956,7 +3958,7 @@
           <a:p>
             <a:fld id="{004137A2-7D2A-4EB2-87EC-F3BD120F3C23}" type="datetimeFigureOut">
               <a:rPr lang="ko-KR" altLang="en-US" smtClean="0"/>
-              <a:t>2026-10-22</a:t>
+              <a:t>2026-10-23</a:t>
             </a:fld>
             <a:endParaRPr lang="ko-KR" altLang="en-US"/>
           </a:p>
@@ -4244,7 +4246,7 @@
           <a:p>
             <a:fld id="{004137A2-7D2A-4EB2-87EC-F3BD120F3C23}" type="datetimeFigureOut">
               <a:rPr lang="ko-KR" altLang="en-US" smtClean="0"/>
-              <a:t>2026-10-22</a:t>
+              <a:t>2026-10-23</a:t>
             </a:fld>
             <a:endParaRPr lang="ko-KR" altLang="en-US"/>
           </a:p>
@@ -4485,7 +4487,7 @@
           <a:p>
             <a:fld id="{004137A2-7D2A-4EB2-87EC-F3BD120F3C23}" type="datetimeFigureOut">
               <a:rPr lang="ko-KR" altLang="en-US" smtClean="0"/>
-              <a:t>2026-10-22</a:t>
+              <a:t>2026-10-23</a:t>
             </a:fld>
             <a:endParaRPr lang="ko-KR" altLang="en-US"/>
           </a:p>
@@ -7151,10 +7153,10 @@
       </p:grpSp>
       <p:grpSp>
         <p:nvGrpSpPr>
-          <p:cNvPr id="47" name="그룹 46">
-            <a:extLst>
-              <a:ext uri="{FF2B5EF4-FFF2-40B4-BE49-F238E27FC236}">
-                <a16:creationId xmlns:a16="http://schemas.microsoft.com/office/drawing/2014/main" id="{29CDAC18-303E-AC2C-A334-69F1E0B36158}"/>
+          <p:cNvPr id="95" name="그룹 94">
+            <a:extLst>
+              <a:ext uri="{FF2B5EF4-FFF2-40B4-BE49-F238E27FC236}">
+                <a16:creationId xmlns:a16="http://schemas.microsoft.com/office/drawing/2014/main" id="{27F614AB-E5E6-31B6-2B1F-844DB1161576}"/>
               </a:ext>
             </a:extLst>
           </p:cNvPr>
@@ -7163,123 +7165,7 @@
         </p:nvGrpSpPr>
         <p:grpSpPr>
           <a:xfrm>
-            <a:off x="5787571" y="3559790"/>
-            <a:ext cx="616857" cy="1463589"/>
-            <a:chOff x="5787571" y="3559790"/>
-            <a:chExt cx="616857" cy="1463589"/>
-          </a:xfrm>
-        </p:grpSpPr>
-        <p:sp>
-          <p:nvSpPr>
-            <p:cNvPr id="34" name="순서도: 자기 디스크 33">
-              <a:extLst>
-                <a:ext uri="{FF2B5EF4-FFF2-40B4-BE49-F238E27FC236}">
-                  <a16:creationId xmlns:a16="http://schemas.microsoft.com/office/drawing/2014/main" id="{0A7E11FF-90DF-5CE0-C893-2CEF08D7FA6D}"/>
-                </a:ext>
-              </a:extLst>
-            </p:cNvPr>
-            <p:cNvSpPr/>
-            <p:nvPr/>
-          </p:nvSpPr>
-          <p:spPr>
-            <a:xfrm>
-              <a:off x="5787571" y="3723090"/>
-              <a:ext cx="616857" cy="1300289"/>
-            </a:xfrm>
-            <a:prstGeom prst="flowChartMagneticDisk">
-              <a:avLst/>
-            </a:prstGeom>
-          </p:spPr>
-          <p:style>
-            <a:lnRef idx="2">
-              <a:schemeClr val="accent1">
-                <a:shade val="15000"/>
-              </a:schemeClr>
-            </a:lnRef>
-            <a:fillRef idx="1">
-              <a:schemeClr val="accent1"/>
-            </a:fillRef>
-            <a:effectRef idx="0">
-              <a:schemeClr val="accent1"/>
-            </a:effectRef>
-            <a:fontRef idx="minor">
-              <a:schemeClr val="lt1"/>
-            </a:fontRef>
-          </p:style>
-          <p:txBody>
-            <a:bodyPr rtlCol="0" anchor="ctr"/>
-            <a:lstStyle/>
-            <a:p>
-              <a:pPr algn="ctr"/>
-              <a:endParaRPr lang="ko-KR" altLang="en-US"/>
-            </a:p>
-          </p:txBody>
-        </p:sp>
-        <p:sp>
-          <p:nvSpPr>
-            <p:cNvPr id="46" name="직사각형 45">
-              <a:extLst>
-                <a:ext uri="{FF2B5EF4-FFF2-40B4-BE49-F238E27FC236}">
-                  <a16:creationId xmlns:a16="http://schemas.microsoft.com/office/drawing/2014/main" id="{D723A423-AC62-D286-1FA2-D45CBD071BCC}"/>
-                </a:ext>
-              </a:extLst>
-            </p:cNvPr>
-            <p:cNvSpPr/>
-            <p:nvPr/>
-          </p:nvSpPr>
-          <p:spPr>
-            <a:xfrm>
-              <a:off x="5842832" y="3559790"/>
-              <a:ext cx="506333" cy="97485"/>
-            </a:xfrm>
-            <a:prstGeom prst="rect">
-              <a:avLst/>
-            </a:prstGeom>
-            <a:solidFill>
-              <a:srgbClr val="FF0000"/>
-            </a:solidFill>
-          </p:spPr>
-          <p:style>
-            <a:lnRef idx="2">
-              <a:schemeClr val="accent1">
-                <a:shade val="15000"/>
-              </a:schemeClr>
-            </a:lnRef>
-            <a:fillRef idx="1">
-              <a:schemeClr val="accent1"/>
-            </a:fillRef>
-            <a:effectRef idx="0">
-              <a:schemeClr val="accent1"/>
-            </a:effectRef>
-            <a:fontRef idx="minor">
-              <a:schemeClr val="lt1"/>
-            </a:fontRef>
-          </p:style>
-          <p:txBody>
-            <a:bodyPr rtlCol="0" anchor="ctr"/>
-            <a:lstStyle/>
-            <a:p>
-              <a:pPr algn="ctr"/>
-              <a:endParaRPr lang="ko-KR" altLang="en-US"/>
-            </a:p>
-          </p:txBody>
-        </p:sp>
-      </p:grpSp>
-      <p:grpSp>
-        <p:nvGrpSpPr>
-          <p:cNvPr id="95" name="그룹 94">
-            <a:extLst>
-              <a:ext uri="{FF2B5EF4-FFF2-40B4-BE49-F238E27FC236}">
-                <a16:creationId xmlns:a16="http://schemas.microsoft.com/office/drawing/2014/main" id="{27F614AB-E5E6-31B6-2B1F-844DB1161576}"/>
-              </a:ext>
-            </a:extLst>
-          </p:cNvPr>
-          <p:cNvGrpSpPr/>
-          <p:nvPr/>
-        </p:nvGrpSpPr>
-        <p:grpSpPr>
-          <a:xfrm>
-            <a:off x="3104041" y="5502193"/>
+            <a:off x="2862181" y="5502193"/>
             <a:ext cx="6034244" cy="413049"/>
             <a:chOff x="2223232" y="5433771"/>
             <a:chExt cx="6034244" cy="413049"/>
@@ -7506,7 +7392,7 @@
         </p:nvSpPr>
         <p:spPr>
           <a:xfrm>
-            <a:off x="165864" y="4574028"/>
+            <a:off x="256171" y="4248905"/>
             <a:ext cx="646331" cy="369332"/>
           </a:xfrm>
           <a:prstGeom prst="rect">
@@ -7901,42 +7787,6 @@
       </p:sp>
       <p:sp>
         <p:nvSpPr>
-          <p:cNvPr id="50" name="TextBox 49">
-            <a:extLst>
-              <a:ext uri="{FF2B5EF4-FFF2-40B4-BE49-F238E27FC236}">
-                <a16:creationId xmlns:a16="http://schemas.microsoft.com/office/drawing/2014/main" id="{6469D87F-41E3-9521-F4FE-627E70A7D6CD}"/>
-              </a:ext>
-            </a:extLst>
-          </p:cNvPr>
-          <p:cNvSpPr txBox="1"/>
-          <p:nvPr/>
-        </p:nvSpPr>
-        <p:spPr>
-          <a:xfrm>
-            <a:off x="928358" y="883816"/>
-            <a:ext cx="468398" cy="307777"/>
-          </a:xfrm>
-          <a:prstGeom prst="rect">
-            <a:avLst/>
-          </a:prstGeom>
-          <a:noFill/>
-        </p:spPr>
-        <p:txBody>
-          <a:bodyPr wrap="none" rtlCol="0">
-            <a:spAutoFit/>
-          </a:bodyPr>
-          <a:lstStyle/>
-          <a:p>
-            <a:r>
-              <a:rPr lang="en-US" altLang="ko-KR" sz="1400" b="1" dirty="0"/>
-              <a:t>MP</a:t>
-            </a:r>
-            <a:endParaRPr lang="ko-KR" altLang="en-US" sz="1400" b="1" dirty="0"/>
-          </a:p>
-        </p:txBody>
-      </p:sp>
-      <p:sp>
-        <p:nvSpPr>
           <p:cNvPr id="51" name="TextBox 50">
             <a:extLst>
               <a:ext uri="{FF2B5EF4-FFF2-40B4-BE49-F238E27FC236}">
@@ -7970,12 +7820,435 @@
           </a:p>
         </p:txBody>
       </p:sp>
+      <p:sp>
+        <p:nvSpPr>
+          <p:cNvPr id="35" name="TextBox 34">
+            <a:extLst>
+              <a:ext uri="{FF2B5EF4-FFF2-40B4-BE49-F238E27FC236}">
+                <a16:creationId xmlns:a16="http://schemas.microsoft.com/office/drawing/2014/main" id="{06767E78-E598-3C5B-B7DA-3CC025C5FED2}"/>
+              </a:ext>
+            </a:extLst>
+          </p:cNvPr>
+          <p:cNvSpPr txBox="1"/>
+          <p:nvPr/>
+        </p:nvSpPr>
+        <p:spPr>
+          <a:xfrm>
+            <a:off x="885228" y="1155488"/>
+            <a:ext cx="511871" cy="307777"/>
+          </a:xfrm>
+          <a:prstGeom prst="rect">
+            <a:avLst/>
+          </a:prstGeom>
+          <a:noFill/>
+        </p:spPr>
+        <p:txBody>
+          <a:bodyPr wrap="none" rtlCol="0">
+            <a:spAutoFit/>
+          </a:bodyPr>
+          <a:lstStyle/>
+          <a:p>
+            <a:r>
+              <a:rPr lang="en-US" altLang="ko-KR" sz="1400" b="1" dirty="0"/>
+              <a:t>EXP</a:t>
+            </a:r>
+            <a:endParaRPr lang="ko-KR" altLang="en-US" sz="1400" b="1" dirty="0"/>
+          </a:p>
+        </p:txBody>
+      </p:sp>
+      <p:sp>
+        <p:nvSpPr>
+          <p:cNvPr id="37" name="타원 36">
+            <a:extLst>
+              <a:ext uri="{FF2B5EF4-FFF2-40B4-BE49-F238E27FC236}">
+                <a16:creationId xmlns:a16="http://schemas.microsoft.com/office/drawing/2014/main" id="{4E2BECEA-20E8-523E-DDAA-2BA03C224FCE}"/>
+              </a:ext>
+            </a:extLst>
+          </p:cNvPr>
+          <p:cNvSpPr>
+            <a:spLocks noChangeAspect="1"/>
+          </p:cNvSpPr>
+          <p:nvPr/>
+        </p:nvSpPr>
+        <p:spPr>
+          <a:xfrm>
+            <a:off x="1229952" y="5606978"/>
+            <a:ext cx="360000" cy="360000"/>
+          </a:xfrm>
+          <a:prstGeom prst="ellipse">
+            <a:avLst/>
+          </a:prstGeom>
+          <a:solidFill>
+            <a:srgbClr val="FFC000">
+              <a:alpha val="50000"/>
+            </a:srgbClr>
+          </a:solidFill>
+          <a:ln>
+            <a:solidFill>
+              <a:schemeClr val="tx1"/>
+            </a:solidFill>
+          </a:ln>
+        </p:spPr>
+        <p:style>
+          <a:lnRef idx="2">
+            <a:schemeClr val="accent1">
+              <a:shade val="15000"/>
+            </a:schemeClr>
+          </a:lnRef>
+          <a:fillRef idx="1">
+            <a:schemeClr val="accent1"/>
+          </a:fillRef>
+          <a:effectRef idx="0">
+            <a:schemeClr val="accent1"/>
+          </a:effectRef>
+          <a:fontRef idx="minor">
+            <a:schemeClr val="lt1"/>
+          </a:fontRef>
+        </p:style>
+        <p:txBody>
+          <a:bodyPr rtlCol="0" anchor="ctr"/>
+          <a:lstStyle/>
+          <a:p>
+            <a:pPr algn="ctr"/>
+            <a:endParaRPr lang="ko-KR" altLang="en-US" sz="200" dirty="0">
+              <a:solidFill>
+                <a:schemeClr val="tx1"/>
+              </a:solidFill>
+            </a:endParaRPr>
+          </a:p>
+        </p:txBody>
+      </p:sp>
+      <p:sp>
+        <p:nvSpPr>
+          <p:cNvPr id="39" name="타원 38">
+            <a:extLst>
+              <a:ext uri="{FF2B5EF4-FFF2-40B4-BE49-F238E27FC236}">
+                <a16:creationId xmlns:a16="http://schemas.microsoft.com/office/drawing/2014/main" id="{95F18A1E-397B-05D3-50DA-ABFE0E6F4B4B}"/>
+              </a:ext>
+            </a:extLst>
+          </p:cNvPr>
+          <p:cNvSpPr>
+            <a:spLocks noChangeAspect="1"/>
+          </p:cNvSpPr>
+          <p:nvPr/>
+        </p:nvSpPr>
+        <p:spPr>
+          <a:xfrm>
+            <a:off x="1219698" y="5035090"/>
+            <a:ext cx="360000" cy="360000"/>
+          </a:xfrm>
+          <a:prstGeom prst="ellipse">
+            <a:avLst/>
+          </a:prstGeom>
+          <a:solidFill>
+            <a:schemeClr val="accent6">
+              <a:lumMod val="20000"/>
+              <a:lumOff val="80000"/>
+              <a:alpha val="50000"/>
+            </a:schemeClr>
+          </a:solidFill>
+          <a:ln>
+            <a:solidFill>
+              <a:schemeClr val="tx1"/>
+            </a:solidFill>
+          </a:ln>
+        </p:spPr>
+        <p:style>
+          <a:lnRef idx="2">
+            <a:schemeClr val="accent1">
+              <a:shade val="15000"/>
+            </a:schemeClr>
+          </a:lnRef>
+          <a:fillRef idx="1">
+            <a:schemeClr val="accent1"/>
+          </a:fillRef>
+          <a:effectRef idx="0">
+            <a:schemeClr val="accent1"/>
+          </a:effectRef>
+          <a:fontRef idx="minor">
+            <a:schemeClr val="lt1"/>
+          </a:fontRef>
+        </p:style>
+        <p:txBody>
+          <a:bodyPr rtlCol="0" anchor="ctr"/>
+          <a:lstStyle/>
+          <a:p>
+            <a:pPr algn="ctr"/>
+            <a:endParaRPr lang="ko-KR" altLang="en-US" dirty="0">
+              <a:solidFill>
+                <a:schemeClr val="tx1"/>
+              </a:solidFill>
+            </a:endParaRPr>
+          </a:p>
+        </p:txBody>
+      </p:sp>
+      <p:sp>
+        <p:nvSpPr>
+          <p:cNvPr id="42" name="TextBox 41">
+            <a:extLst>
+              <a:ext uri="{FF2B5EF4-FFF2-40B4-BE49-F238E27FC236}">
+                <a16:creationId xmlns:a16="http://schemas.microsoft.com/office/drawing/2014/main" id="{BE6D7526-C9C3-675D-6A20-D086EB9103C8}"/>
+              </a:ext>
+            </a:extLst>
+          </p:cNvPr>
+          <p:cNvSpPr txBox="1"/>
+          <p:nvPr/>
+        </p:nvSpPr>
+        <p:spPr>
+          <a:xfrm>
+            <a:off x="243771" y="5621166"/>
+            <a:ext cx="646331" cy="369332"/>
+          </a:xfrm>
+          <a:prstGeom prst="rect">
+            <a:avLst/>
+          </a:prstGeom>
+          <a:noFill/>
+        </p:spPr>
+        <p:txBody>
+          <a:bodyPr wrap="none" rtlCol="0">
+            <a:spAutoFit/>
+          </a:bodyPr>
+          <a:lstStyle/>
+          <a:p>
+            <a:pPr algn="r"/>
+            <a:r>
+              <a:rPr lang="ko-KR" altLang="en-US" dirty="0"/>
+              <a:t>점멸</a:t>
+            </a:r>
+          </a:p>
+        </p:txBody>
+      </p:sp>
+      <p:sp>
+        <p:nvSpPr>
+          <p:cNvPr id="52" name="TextBox 51">
+            <a:extLst>
+              <a:ext uri="{FF2B5EF4-FFF2-40B4-BE49-F238E27FC236}">
+                <a16:creationId xmlns:a16="http://schemas.microsoft.com/office/drawing/2014/main" id="{B01481F3-77AB-2DE8-DD53-D8A254185FAA}"/>
+              </a:ext>
+            </a:extLst>
+          </p:cNvPr>
+          <p:cNvSpPr txBox="1"/>
+          <p:nvPr/>
+        </p:nvSpPr>
+        <p:spPr>
+          <a:xfrm>
+            <a:off x="237495" y="5050564"/>
+            <a:ext cx="646331" cy="369332"/>
+          </a:xfrm>
+          <a:prstGeom prst="rect">
+            <a:avLst/>
+          </a:prstGeom>
+          <a:noFill/>
+        </p:spPr>
+        <p:txBody>
+          <a:bodyPr wrap="none" rtlCol="0">
+            <a:spAutoFit/>
+          </a:bodyPr>
+          <a:lstStyle/>
+          <a:p>
+            <a:pPr algn="r"/>
+            <a:r>
+              <a:rPr lang="ko-KR" altLang="en-US" dirty="0"/>
+              <a:t>막기</a:t>
+            </a:r>
+          </a:p>
+        </p:txBody>
+      </p:sp>
+      <p:sp>
+        <p:nvSpPr>
+          <p:cNvPr id="54" name="타원 53">
+            <a:extLst>
+              <a:ext uri="{FF2B5EF4-FFF2-40B4-BE49-F238E27FC236}">
+                <a16:creationId xmlns:a16="http://schemas.microsoft.com/office/drawing/2014/main" id="{DCEF1B98-CEA9-35A8-136F-C37DA5C47BFF}"/>
+              </a:ext>
+            </a:extLst>
+          </p:cNvPr>
+          <p:cNvSpPr>
+            <a:spLocks noChangeAspect="1"/>
+          </p:cNvSpPr>
+          <p:nvPr/>
+        </p:nvSpPr>
+        <p:spPr>
+          <a:xfrm>
+            <a:off x="1229952" y="3882952"/>
+            <a:ext cx="360000" cy="360000"/>
+          </a:xfrm>
+          <a:prstGeom prst="ellipse">
+            <a:avLst/>
+          </a:prstGeom>
+          <a:solidFill>
+            <a:schemeClr val="accent1">
+              <a:lumMod val="40000"/>
+              <a:lumOff val="60000"/>
+              <a:alpha val="50000"/>
+            </a:schemeClr>
+          </a:solidFill>
+          <a:ln>
+            <a:solidFill>
+              <a:schemeClr val="tx1"/>
+            </a:solidFill>
+          </a:ln>
+        </p:spPr>
+        <p:style>
+          <a:lnRef idx="2">
+            <a:schemeClr val="accent1">
+              <a:shade val="15000"/>
+            </a:schemeClr>
+          </a:lnRef>
+          <a:fillRef idx="1">
+            <a:schemeClr val="accent1"/>
+          </a:fillRef>
+          <a:effectRef idx="0">
+            <a:schemeClr val="accent1"/>
+          </a:effectRef>
+          <a:fontRef idx="minor">
+            <a:schemeClr val="lt1"/>
+          </a:fontRef>
+        </p:style>
+        <p:txBody>
+          <a:bodyPr rtlCol="0" anchor="ctr"/>
+          <a:lstStyle/>
+          <a:p>
+            <a:pPr algn="ctr"/>
+            <a:r>
+              <a:rPr lang="ko-KR" altLang="en-US" dirty="0"/>
+              <a:t>강</a:t>
+            </a:r>
+          </a:p>
+        </p:txBody>
+      </p:sp>
+      <p:sp>
+        <p:nvSpPr>
+          <p:cNvPr id="56" name="타원 55">
+            <a:extLst>
+              <a:ext uri="{FF2B5EF4-FFF2-40B4-BE49-F238E27FC236}">
+                <a16:creationId xmlns:a16="http://schemas.microsoft.com/office/drawing/2014/main" id="{B0983DB5-4464-8B8D-015C-10B5A629D953}"/>
+              </a:ext>
+            </a:extLst>
+          </p:cNvPr>
+          <p:cNvSpPr>
+            <a:spLocks noChangeAspect="1"/>
+          </p:cNvSpPr>
+          <p:nvPr/>
+        </p:nvSpPr>
+        <p:spPr>
+          <a:xfrm>
+            <a:off x="1229952" y="4457627"/>
+            <a:ext cx="360000" cy="360000"/>
+          </a:xfrm>
+          <a:prstGeom prst="ellipse">
+            <a:avLst/>
+          </a:prstGeom>
+          <a:solidFill>
+            <a:schemeClr val="accent1">
+              <a:lumMod val="40000"/>
+              <a:lumOff val="60000"/>
+              <a:alpha val="50000"/>
+            </a:schemeClr>
+          </a:solidFill>
+          <a:ln>
+            <a:solidFill>
+              <a:schemeClr val="tx1"/>
+            </a:solidFill>
+          </a:ln>
+        </p:spPr>
+        <p:style>
+          <a:lnRef idx="2">
+            <a:schemeClr val="accent1">
+              <a:shade val="15000"/>
+            </a:schemeClr>
+          </a:lnRef>
+          <a:fillRef idx="1">
+            <a:schemeClr val="accent1"/>
+          </a:fillRef>
+          <a:effectRef idx="0">
+            <a:schemeClr val="accent1"/>
+          </a:effectRef>
+          <a:fontRef idx="minor">
+            <a:schemeClr val="lt1"/>
+          </a:fontRef>
+        </p:style>
+        <p:txBody>
+          <a:bodyPr rtlCol="0" anchor="ctr"/>
+          <a:lstStyle/>
+          <a:p>
+            <a:pPr algn="ctr"/>
+            <a:r>
+              <a:rPr lang="ko-KR" altLang="en-US" dirty="0"/>
+              <a:t>약</a:t>
+            </a:r>
+          </a:p>
+        </p:txBody>
+      </p:sp>
+      <p:sp>
+        <p:nvSpPr>
+          <p:cNvPr id="72" name="타원 71">
+            <a:extLst>
+              <a:ext uri="{FF2B5EF4-FFF2-40B4-BE49-F238E27FC236}">
+                <a16:creationId xmlns:a16="http://schemas.microsoft.com/office/drawing/2014/main" id="{5E06E911-DE03-BB8F-A4B5-E1498F03C258}"/>
+              </a:ext>
+            </a:extLst>
+          </p:cNvPr>
+          <p:cNvSpPr>
+            <a:spLocks noChangeAspect="1"/>
+          </p:cNvSpPr>
+          <p:nvPr/>
+        </p:nvSpPr>
+        <p:spPr>
+          <a:xfrm>
+            <a:off x="10424828" y="3891135"/>
+            <a:ext cx="360000" cy="360000"/>
+          </a:xfrm>
+          <a:prstGeom prst="ellipse">
+            <a:avLst/>
+          </a:prstGeom>
+          <a:solidFill>
+            <a:schemeClr val="accent1">
+              <a:lumMod val="40000"/>
+              <a:lumOff val="60000"/>
+              <a:alpha val="50000"/>
+            </a:schemeClr>
+          </a:solidFill>
+          <a:ln>
+            <a:solidFill>
+              <a:schemeClr val="tx1"/>
+            </a:solidFill>
+          </a:ln>
+        </p:spPr>
+        <p:style>
+          <a:lnRef idx="2">
+            <a:schemeClr val="accent1">
+              <a:shade val="15000"/>
+            </a:schemeClr>
+          </a:lnRef>
+          <a:fillRef idx="1">
+            <a:schemeClr val="accent1"/>
+          </a:fillRef>
+          <a:effectRef idx="0">
+            <a:schemeClr val="accent1"/>
+          </a:effectRef>
+          <a:fontRef idx="minor">
+            <a:schemeClr val="lt1"/>
+          </a:fontRef>
+        </p:style>
+        <p:txBody>
+          <a:bodyPr rtlCol="0" anchor="ctr"/>
+          <a:lstStyle/>
+          <a:p>
+            <a:pPr algn="ctr"/>
+            <a:r>
+              <a:rPr lang="ko-KR" altLang="en-US" dirty="0"/>
+              <a:t>전</a:t>
+            </a:r>
+          </a:p>
+        </p:txBody>
+      </p:sp>
       <p:grpSp>
         <p:nvGrpSpPr>
-          <p:cNvPr id="3" name="그룹 2">
-            <a:extLst>
-              <a:ext uri="{FF2B5EF4-FFF2-40B4-BE49-F238E27FC236}">
-                <a16:creationId xmlns:a16="http://schemas.microsoft.com/office/drawing/2014/main" id="{81BA51BD-2D37-DC9C-621F-37887D0A708F}"/>
+          <p:cNvPr id="73" name="그룹 72">
+            <a:extLst>
+              <a:ext uri="{FF2B5EF4-FFF2-40B4-BE49-F238E27FC236}">
+                <a16:creationId xmlns:a16="http://schemas.microsoft.com/office/drawing/2014/main" id="{0DB2CE56-C274-ADA2-4153-2EF8D345FF20}"/>
               </a:ext>
             </a:extLst>
           </p:cNvPr>
@@ -7984,104 +8257,32 @@
         </p:nvGrpSpPr>
         <p:grpSpPr>
           <a:xfrm>
-            <a:off x="990456" y="4435760"/>
-            <a:ext cx="1801481" cy="1801227"/>
-            <a:chOff x="990456" y="4435760"/>
-            <a:chExt cx="1801481" cy="1801227"/>
+            <a:off x="5854137" y="3073664"/>
+            <a:ext cx="428591" cy="710670"/>
+            <a:chOff x="5787571" y="3559790"/>
+            <a:chExt cx="616857" cy="1463589"/>
           </a:xfrm>
         </p:grpSpPr>
         <p:sp>
           <p:nvSpPr>
-            <p:cNvPr id="7" name="타원 6">
+            <p:cNvPr id="74" name="순서도: 자기 디스크 73">
               <a:extLst>
                 <a:ext uri="{FF2B5EF4-FFF2-40B4-BE49-F238E27FC236}">
-                  <a16:creationId xmlns:a16="http://schemas.microsoft.com/office/drawing/2014/main" id="{0EA3F9A5-DFFC-8871-3FE1-7F8BB33BEB00}"/>
+                  <a16:creationId xmlns:a16="http://schemas.microsoft.com/office/drawing/2014/main" id="{21EBF995-948A-10DD-ECA7-5F2365D1381B}"/>
                 </a:ext>
               </a:extLst>
             </p:cNvPr>
-            <p:cNvSpPr>
-              <a:spLocks noChangeAspect="1"/>
-            </p:cNvSpPr>
+            <p:cNvSpPr/>
             <p:nvPr/>
           </p:nvSpPr>
           <p:spPr>
             <a:xfrm>
-              <a:off x="2162087" y="4706369"/>
-              <a:ext cx="360000" cy="360000"/>
+              <a:off x="5787571" y="3723090"/>
+              <a:ext cx="616857" cy="1300289"/>
             </a:xfrm>
-            <a:prstGeom prst="ellipse">
+            <a:prstGeom prst="flowChartMagneticDisk">
               <a:avLst/>
             </a:prstGeom>
-            <a:solidFill>
-              <a:schemeClr val="accent1">
-                <a:lumMod val="40000"/>
-                <a:lumOff val="60000"/>
-                <a:alpha val="50000"/>
-              </a:schemeClr>
-            </a:solidFill>
-            <a:ln>
-              <a:solidFill>
-                <a:schemeClr val="tx1"/>
-              </a:solidFill>
-            </a:ln>
-          </p:spPr>
-          <p:style>
-            <a:lnRef idx="2">
-              <a:schemeClr val="accent1">
-                <a:shade val="15000"/>
-              </a:schemeClr>
-            </a:lnRef>
-            <a:fillRef idx="1">
-              <a:schemeClr val="accent1"/>
-            </a:fillRef>
-            <a:effectRef idx="0">
-              <a:schemeClr val="accent1"/>
-            </a:effectRef>
-            <a:fontRef idx="minor">
-              <a:schemeClr val="lt1"/>
-            </a:fontRef>
-          </p:style>
-          <p:txBody>
-            <a:bodyPr rtlCol="0" anchor="ctr"/>
-            <a:lstStyle/>
-            <a:p>
-              <a:pPr algn="ctr"/>
-              <a:endParaRPr lang="ko-KR" altLang="en-US" dirty="0"/>
-            </a:p>
-          </p:txBody>
-        </p:sp>
-        <p:sp>
-          <p:nvSpPr>
-            <p:cNvPr id="8" name="타원 7">
-              <a:extLst>
-                <a:ext uri="{FF2B5EF4-FFF2-40B4-BE49-F238E27FC236}">
-                  <a16:creationId xmlns:a16="http://schemas.microsoft.com/office/drawing/2014/main" id="{B183DA46-EE5A-85C4-C235-ED814A92D7AC}"/>
-                </a:ext>
-              </a:extLst>
-            </p:cNvPr>
-            <p:cNvSpPr>
-              <a:spLocks noChangeAspect="1"/>
-            </p:cNvSpPr>
-            <p:nvPr/>
-          </p:nvSpPr>
-          <p:spPr>
-            <a:xfrm>
-              <a:off x="1260456" y="5606978"/>
-              <a:ext cx="360000" cy="360000"/>
-            </a:xfrm>
-            <a:prstGeom prst="ellipse">
-              <a:avLst/>
-            </a:prstGeom>
-            <a:solidFill>
-              <a:srgbClr val="FFC000">
-                <a:alpha val="50000"/>
-              </a:srgbClr>
-            </a:solidFill>
-            <a:ln>
-              <a:solidFill>
-                <a:schemeClr val="tx1"/>
-              </a:solidFill>
-            </a:ln>
           </p:spPr>
           <p:style>
             <a:lnRef idx="2">
@@ -8110,259 +8311,10 @@
         </p:sp>
         <p:sp>
           <p:nvSpPr>
-            <p:cNvPr id="9" name="타원 8">
+            <p:cNvPr id="75" name="직사각형 74">
               <a:extLst>
                 <a:ext uri="{FF2B5EF4-FFF2-40B4-BE49-F238E27FC236}">
-                  <a16:creationId xmlns:a16="http://schemas.microsoft.com/office/drawing/2014/main" id="{BE664473-1BC3-1ADE-B19A-09A8C5463760}"/>
-                </a:ext>
-              </a:extLst>
-            </p:cNvPr>
-            <p:cNvSpPr>
-              <a:spLocks noChangeAspect="1"/>
-            </p:cNvSpPr>
-            <p:nvPr/>
-          </p:nvSpPr>
-          <p:spPr>
-            <a:xfrm>
-              <a:off x="1260456" y="4706369"/>
-              <a:ext cx="360000" cy="360000"/>
-            </a:xfrm>
-            <a:prstGeom prst="ellipse">
-              <a:avLst/>
-            </a:prstGeom>
-            <a:solidFill>
-              <a:schemeClr val="accent1">
-                <a:lumMod val="40000"/>
-                <a:lumOff val="60000"/>
-                <a:alpha val="50000"/>
-              </a:schemeClr>
-            </a:solidFill>
-            <a:ln>
-              <a:solidFill>
-                <a:schemeClr val="tx1"/>
-              </a:solidFill>
-            </a:ln>
-          </p:spPr>
-          <p:style>
-            <a:lnRef idx="2">
-              <a:schemeClr val="accent1">
-                <a:shade val="15000"/>
-              </a:schemeClr>
-            </a:lnRef>
-            <a:fillRef idx="1">
-              <a:schemeClr val="accent1"/>
-            </a:fillRef>
-            <a:effectRef idx="0">
-              <a:schemeClr val="accent1"/>
-            </a:effectRef>
-            <a:fontRef idx="minor">
-              <a:schemeClr val="lt1"/>
-            </a:fontRef>
-          </p:style>
-          <p:txBody>
-            <a:bodyPr rtlCol="0" anchor="ctr"/>
-            <a:lstStyle/>
-            <a:p>
-              <a:pPr algn="ctr"/>
-              <a:endParaRPr lang="ko-KR" altLang="en-US"/>
-            </a:p>
-          </p:txBody>
-        </p:sp>
-        <p:sp>
-          <p:nvSpPr>
-            <p:cNvPr id="11" name="타원 10">
-              <a:extLst>
-                <a:ext uri="{FF2B5EF4-FFF2-40B4-BE49-F238E27FC236}">
-                  <a16:creationId xmlns:a16="http://schemas.microsoft.com/office/drawing/2014/main" id="{80698FDD-24B8-40CD-3D59-C6B112DF3F68}"/>
-                </a:ext>
-              </a:extLst>
-            </p:cNvPr>
-            <p:cNvSpPr>
-              <a:spLocks noChangeAspect="1"/>
-            </p:cNvSpPr>
-            <p:nvPr/>
-          </p:nvSpPr>
-          <p:spPr>
-            <a:xfrm>
-              <a:off x="2160155" y="5598917"/>
-              <a:ext cx="360000" cy="360000"/>
-            </a:xfrm>
-            <a:prstGeom prst="ellipse">
-              <a:avLst/>
-            </a:prstGeom>
-            <a:solidFill>
-              <a:schemeClr val="accent1">
-                <a:lumMod val="40000"/>
-                <a:lumOff val="60000"/>
-                <a:alpha val="50000"/>
-              </a:schemeClr>
-            </a:solidFill>
-            <a:ln>
-              <a:solidFill>
-                <a:schemeClr val="tx1"/>
-              </a:solidFill>
-            </a:ln>
-          </p:spPr>
-          <p:style>
-            <a:lnRef idx="2">
-              <a:schemeClr val="accent1">
-                <a:shade val="15000"/>
-              </a:schemeClr>
-            </a:lnRef>
-            <a:fillRef idx="1">
-              <a:schemeClr val="accent1"/>
-            </a:fillRef>
-            <a:effectRef idx="0">
-              <a:schemeClr val="accent1"/>
-            </a:effectRef>
-            <a:fontRef idx="minor">
-              <a:schemeClr val="lt1"/>
-            </a:fontRef>
-          </p:style>
-          <p:txBody>
-            <a:bodyPr rtlCol="0" anchor="ctr"/>
-            <a:lstStyle/>
-            <a:p>
-              <a:pPr algn="ctr"/>
-              <a:endParaRPr lang="ko-KR" altLang="en-US" dirty="0"/>
-            </a:p>
-          </p:txBody>
-        </p:sp>
-        <p:sp>
-          <p:nvSpPr>
-            <p:cNvPr id="17" name="직사각형 16">
-              <a:extLst>
-                <a:ext uri="{FF2B5EF4-FFF2-40B4-BE49-F238E27FC236}">
-                  <a16:creationId xmlns:a16="http://schemas.microsoft.com/office/drawing/2014/main" id="{D3BB9B0D-F887-5CAE-597F-329007A1275D}"/>
-                </a:ext>
-              </a:extLst>
-            </p:cNvPr>
-            <p:cNvSpPr>
-              <a:spLocks noChangeAspect="1"/>
-            </p:cNvSpPr>
-            <p:nvPr/>
-          </p:nvSpPr>
-          <p:spPr>
-            <a:xfrm>
-              <a:off x="990456" y="4436987"/>
-              <a:ext cx="1800000" cy="1800000"/>
-            </a:xfrm>
-            <a:prstGeom prst="rect">
-              <a:avLst/>
-            </a:prstGeom>
-            <a:noFill/>
-          </p:spPr>
-          <p:style>
-            <a:lnRef idx="2">
-              <a:schemeClr val="accent1">
-                <a:shade val="15000"/>
-              </a:schemeClr>
-            </a:lnRef>
-            <a:fillRef idx="1">
-              <a:schemeClr val="accent1"/>
-            </a:fillRef>
-            <a:effectRef idx="0">
-              <a:schemeClr val="accent1"/>
-            </a:effectRef>
-            <a:fontRef idx="minor">
-              <a:schemeClr val="lt1"/>
-            </a:fontRef>
-          </p:style>
-          <p:txBody>
-            <a:bodyPr rtlCol="0" anchor="ctr"/>
-            <a:lstStyle/>
-            <a:p>
-              <a:pPr algn="ctr"/>
-              <a:endParaRPr lang="ko-KR" altLang="en-US" dirty="0"/>
-            </a:p>
-          </p:txBody>
-        </p:sp>
-        <p:cxnSp>
-          <p:nvCxnSpPr>
-            <p:cNvPr id="23" name="직선 연결선 22">
-              <a:extLst>
-                <a:ext uri="{FF2B5EF4-FFF2-40B4-BE49-F238E27FC236}">
-                  <a16:creationId xmlns:a16="http://schemas.microsoft.com/office/drawing/2014/main" id="{811DDA6F-78CE-3C67-14CF-8BE3CB510090}"/>
-                </a:ext>
-              </a:extLst>
-            </p:cNvPr>
-            <p:cNvCxnSpPr>
-              <a:cxnSpLocks/>
-              <a:stCxn id="17" idx="0"/>
-              <a:endCxn id="17" idx="2"/>
-            </p:cNvCxnSpPr>
-            <p:nvPr/>
-          </p:nvCxnSpPr>
-          <p:spPr>
-            <a:xfrm>
-              <a:off x="1890456" y="4436987"/>
-              <a:ext cx="0" cy="1800000"/>
-            </a:xfrm>
-            <a:prstGeom prst="line">
-              <a:avLst/>
-            </a:prstGeom>
-          </p:spPr>
-          <p:style>
-            <a:lnRef idx="2">
-              <a:schemeClr val="dk1"/>
-            </a:lnRef>
-            <a:fillRef idx="0">
-              <a:schemeClr val="dk1"/>
-            </a:fillRef>
-            <a:effectRef idx="1">
-              <a:schemeClr val="dk1"/>
-            </a:effectRef>
-            <a:fontRef idx="minor">
-              <a:schemeClr val="tx1"/>
-            </a:fontRef>
-          </p:style>
-        </p:cxnSp>
-        <p:cxnSp>
-          <p:nvCxnSpPr>
-            <p:cNvPr id="26" name="직선 연결선 25">
-              <a:extLst>
-                <a:ext uri="{FF2B5EF4-FFF2-40B4-BE49-F238E27FC236}">
-                  <a16:creationId xmlns:a16="http://schemas.microsoft.com/office/drawing/2014/main" id="{4A95B58C-95E4-5F9D-6E1C-B4A32837252D}"/>
-                </a:ext>
-              </a:extLst>
-            </p:cNvPr>
-            <p:cNvCxnSpPr>
-              <a:cxnSpLocks/>
-              <a:stCxn id="17" idx="1"/>
-              <a:endCxn id="17" idx="3"/>
-            </p:cNvCxnSpPr>
-            <p:nvPr/>
-          </p:nvCxnSpPr>
-          <p:spPr>
-            <a:xfrm>
-              <a:off x="990456" y="5336987"/>
-              <a:ext cx="1800000" cy="0"/>
-            </a:xfrm>
-            <a:prstGeom prst="line">
-              <a:avLst/>
-            </a:prstGeom>
-          </p:spPr>
-          <p:style>
-            <a:lnRef idx="2">
-              <a:schemeClr val="dk1"/>
-            </a:lnRef>
-            <a:fillRef idx="0">
-              <a:schemeClr val="dk1"/>
-            </a:fillRef>
-            <a:effectRef idx="1">
-              <a:schemeClr val="dk1"/>
-            </a:effectRef>
-            <a:fontRef idx="minor">
-              <a:schemeClr val="tx1"/>
-            </a:fontRef>
-          </p:style>
-        </p:cxnSp>
-        <p:sp>
-          <p:nvSpPr>
-            <p:cNvPr id="28" name="직사각형 27">
-              <a:extLst>
-                <a:ext uri="{FF2B5EF4-FFF2-40B4-BE49-F238E27FC236}">
-                  <a16:creationId xmlns:a16="http://schemas.microsoft.com/office/drawing/2014/main" id="{B3BC4A07-DB36-4077-8461-80F7243AF7C7}"/>
+                  <a16:creationId xmlns:a16="http://schemas.microsoft.com/office/drawing/2014/main" id="{A692D6CF-F773-7E65-91D3-EB38B2BA952E}"/>
                 </a:ext>
               </a:extLst>
             </p:cNvPr>
@@ -8371,154 +8323,15 @@
           </p:nvSpPr>
           <p:spPr>
             <a:xfrm>
-              <a:off x="990755" y="4435760"/>
-              <a:ext cx="899699" cy="901219"/>
+              <a:off x="5842832" y="3559790"/>
+              <a:ext cx="506333" cy="97485"/>
             </a:xfrm>
             <a:prstGeom prst="rect">
               <a:avLst/>
             </a:prstGeom>
-            <a:noFill/>
-          </p:spPr>
-          <p:style>
-            <a:lnRef idx="2">
-              <a:schemeClr val="accent1">
-                <a:shade val="15000"/>
-              </a:schemeClr>
-            </a:lnRef>
-            <a:fillRef idx="1">
-              <a:schemeClr val="accent1"/>
-            </a:fillRef>
-            <a:effectRef idx="0">
-              <a:schemeClr val="accent1"/>
-            </a:effectRef>
-            <a:fontRef idx="minor">
-              <a:schemeClr val="lt1"/>
-            </a:fontRef>
-          </p:style>
-          <p:txBody>
-            <a:bodyPr rtlCol="0" anchor="ctr"/>
-            <a:lstStyle/>
-            <a:p>
-              <a:pPr algn="ctr"/>
-              <a:endParaRPr lang="ko-KR" altLang="en-US"/>
-            </a:p>
-          </p:txBody>
-        </p:sp>
-        <p:sp>
-          <p:nvSpPr>
-            <p:cNvPr id="30" name="직사각형 29">
-              <a:extLst>
-                <a:ext uri="{FF2B5EF4-FFF2-40B4-BE49-F238E27FC236}">
-                  <a16:creationId xmlns:a16="http://schemas.microsoft.com/office/drawing/2014/main" id="{7CEAA0D8-8D8E-7159-D222-7BB1C4D0C011}"/>
-                </a:ext>
-              </a:extLst>
-            </p:cNvPr>
-            <p:cNvSpPr/>
-            <p:nvPr/>
-          </p:nvSpPr>
-          <p:spPr>
-            <a:xfrm>
-              <a:off x="1892238" y="4435760"/>
-              <a:ext cx="899699" cy="901219"/>
-            </a:xfrm>
-            <a:prstGeom prst="rect">
-              <a:avLst/>
-            </a:prstGeom>
-            <a:noFill/>
-          </p:spPr>
-          <p:style>
-            <a:lnRef idx="2">
-              <a:schemeClr val="accent1">
-                <a:shade val="15000"/>
-              </a:schemeClr>
-            </a:lnRef>
-            <a:fillRef idx="1">
-              <a:schemeClr val="accent1"/>
-            </a:fillRef>
-            <a:effectRef idx="0">
-              <a:schemeClr val="accent1"/>
-            </a:effectRef>
-            <a:fontRef idx="minor">
-              <a:schemeClr val="lt1"/>
-            </a:fontRef>
-          </p:style>
-          <p:txBody>
-            <a:bodyPr rtlCol="0" anchor="ctr"/>
-            <a:lstStyle/>
-            <a:p>
-              <a:pPr algn="ctr"/>
-              <a:endParaRPr lang="ko-KR" altLang="en-US"/>
-            </a:p>
-          </p:txBody>
-        </p:sp>
-        <p:sp>
-          <p:nvSpPr>
-            <p:cNvPr id="32" name="직사각형 31">
-              <a:extLst>
-                <a:ext uri="{FF2B5EF4-FFF2-40B4-BE49-F238E27FC236}">
-                  <a16:creationId xmlns:a16="http://schemas.microsoft.com/office/drawing/2014/main" id="{0E5D4B30-8E8D-D182-7340-AD3C6BCB0BA6}"/>
-                </a:ext>
-              </a:extLst>
-            </p:cNvPr>
-            <p:cNvSpPr/>
-            <p:nvPr/>
-          </p:nvSpPr>
-          <p:spPr>
-            <a:xfrm>
-              <a:off x="1892238" y="5329535"/>
-              <a:ext cx="899699" cy="901219"/>
-            </a:xfrm>
-            <a:prstGeom prst="rect">
-              <a:avLst/>
-            </a:prstGeom>
-            <a:noFill/>
-          </p:spPr>
-          <p:style>
-            <a:lnRef idx="2">
-              <a:schemeClr val="accent1">
-                <a:shade val="15000"/>
-              </a:schemeClr>
-            </a:lnRef>
-            <a:fillRef idx="1">
-              <a:schemeClr val="accent1"/>
-            </a:fillRef>
-            <a:effectRef idx="0">
-              <a:schemeClr val="accent1"/>
-            </a:effectRef>
-            <a:fontRef idx="minor">
-              <a:schemeClr val="lt1"/>
-            </a:fontRef>
-          </p:style>
-          <p:txBody>
-            <a:bodyPr rtlCol="0" anchor="ctr"/>
-            <a:lstStyle/>
-            <a:p>
-              <a:pPr algn="ctr"/>
-              <a:endParaRPr lang="ko-KR" altLang="en-US"/>
-            </a:p>
-          </p:txBody>
-        </p:sp>
-        <p:sp>
-          <p:nvSpPr>
-            <p:cNvPr id="33" name="직사각형 32">
-              <a:extLst>
-                <a:ext uri="{FF2B5EF4-FFF2-40B4-BE49-F238E27FC236}">
-                  <a16:creationId xmlns:a16="http://schemas.microsoft.com/office/drawing/2014/main" id="{1631EF89-5063-B8B1-C498-11F7814AF92D}"/>
-                </a:ext>
-              </a:extLst>
-            </p:cNvPr>
-            <p:cNvSpPr/>
-            <p:nvPr/>
-          </p:nvSpPr>
-          <p:spPr>
-            <a:xfrm>
-              <a:off x="990755" y="5329535"/>
-              <a:ext cx="899699" cy="901219"/>
-            </a:xfrm>
-            <a:prstGeom prst="rect">
-              <a:avLst/>
-            </a:prstGeom>
-            <a:noFill/>
+            <a:solidFill>
+              <a:srgbClr val="FF0000"/>
+            </a:solidFill>
           </p:spPr>
           <p:style>
             <a:lnRef idx="2">
@@ -8548,10 +8361,10 @@
       </p:grpSp>
       <p:grpSp>
         <p:nvGrpSpPr>
-          <p:cNvPr id="25" name="그룹 24">
-            <a:extLst>
-              <a:ext uri="{FF2B5EF4-FFF2-40B4-BE49-F238E27FC236}">
-                <a16:creationId xmlns:a16="http://schemas.microsoft.com/office/drawing/2014/main" id="{DDE15867-69BC-DA30-1C8A-72F0A1105892}"/>
+          <p:cNvPr id="3" name="그룹 2">
+            <a:extLst>
+              <a:ext uri="{FF2B5EF4-FFF2-40B4-BE49-F238E27FC236}">
+                <a16:creationId xmlns:a16="http://schemas.microsoft.com/office/drawing/2014/main" id="{5B929978-75E3-7BE8-7940-F1DF3180CC19}"/>
               </a:ext>
             </a:extLst>
           </p:cNvPr>
@@ -8560,7 +8373,7 @@
         </p:nvGrpSpPr>
         <p:grpSpPr>
           <a:xfrm>
-            <a:off x="1334347" y="1172337"/>
+            <a:off x="1339039" y="1170239"/>
             <a:ext cx="1494487" cy="276948"/>
             <a:chOff x="990455" y="896744"/>
             <a:chExt cx="1838379" cy="276948"/>
@@ -8568,10 +8381,10 @@
         </p:grpSpPr>
         <p:sp>
           <p:nvSpPr>
-            <p:cNvPr id="27" name="직사각형 26">
+            <p:cNvPr id="7" name="직사각형 6">
               <a:extLst>
                 <a:ext uri="{FF2B5EF4-FFF2-40B4-BE49-F238E27FC236}">
-                  <a16:creationId xmlns:a16="http://schemas.microsoft.com/office/drawing/2014/main" id="{BB739C26-4D70-5133-3833-FF1559C77D27}"/>
+                  <a16:creationId xmlns:a16="http://schemas.microsoft.com/office/drawing/2014/main" id="{0AA0E7F8-3DE2-B563-345E-8CD4F4C66EEE}"/>
                 </a:ext>
               </a:extLst>
             </p:cNvPr>
@@ -8620,10 +8433,10 @@
         </p:sp>
         <p:sp>
           <p:nvSpPr>
-            <p:cNvPr id="29" name="직사각형 28">
+            <p:cNvPr id="8" name="직사각형 7">
               <a:extLst>
                 <a:ext uri="{FF2B5EF4-FFF2-40B4-BE49-F238E27FC236}">
-                  <a16:creationId xmlns:a16="http://schemas.microsoft.com/office/drawing/2014/main" id="{CAF0B6BC-E8CD-0CF1-7D0E-80E54E0F7F0F}"/>
+                  <a16:creationId xmlns:a16="http://schemas.microsoft.com/office/drawing/2014/main" id="{1F780CA7-A716-EA5A-2137-4E1EABB683C9}"/>
                 </a:ext>
               </a:extLst>
             </p:cNvPr>
@@ -8678,10 +8491,10 @@
         </p:sp>
         <p:sp>
           <p:nvSpPr>
-            <p:cNvPr id="31" name="TextBox 30">
+            <p:cNvPr id="9" name="TextBox 8">
               <a:extLst>
                 <a:ext uri="{FF2B5EF4-FFF2-40B4-BE49-F238E27FC236}">
-                  <a16:creationId xmlns:a16="http://schemas.microsoft.com/office/drawing/2014/main" id="{83B33EF6-B30A-00B4-CEAF-0768BC4AFEB7}"/>
+                  <a16:creationId xmlns:a16="http://schemas.microsoft.com/office/drawing/2014/main" id="{71937925-6EB4-5217-A3CB-1063B4CFDA89}"/>
                 </a:ext>
               </a:extLst>
             </p:cNvPr>
@@ -8716,10 +8529,10 @@
       </p:grpSp>
       <p:sp>
         <p:nvSpPr>
-          <p:cNvPr id="35" name="TextBox 34">
-            <a:extLst>
-              <a:ext uri="{FF2B5EF4-FFF2-40B4-BE49-F238E27FC236}">
-                <a16:creationId xmlns:a16="http://schemas.microsoft.com/office/drawing/2014/main" id="{06767E78-E598-3C5B-B7DA-3CC025C5FED2}"/>
+          <p:cNvPr id="11" name="TextBox 10">
+            <a:extLst>
+              <a:ext uri="{FF2B5EF4-FFF2-40B4-BE49-F238E27FC236}">
+                <a16:creationId xmlns:a16="http://schemas.microsoft.com/office/drawing/2014/main" id="{136875A4-EC35-0517-7EB9-4832EDA06AC2}"/>
               </a:ext>
             </a:extLst>
           </p:cNvPr>
@@ -8728,7 +8541,1375 @@
         </p:nvSpPr>
         <p:spPr>
           <a:xfrm>
-            <a:off x="885228" y="1150768"/>
+            <a:off x="928357" y="874344"/>
+            <a:ext cx="468398" cy="307777"/>
+          </a:xfrm>
+          <a:prstGeom prst="rect">
+            <a:avLst/>
+          </a:prstGeom>
+          <a:noFill/>
+        </p:spPr>
+        <p:txBody>
+          <a:bodyPr wrap="none" rtlCol="0">
+            <a:spAutoFit/>
+          </a:bodyPr>
+          <a:lstStyle/>
+          <a:p>
+            <a:r>
+              <a:rPr lang="en-US" altLang="ko-KR" sz="1400" b="1" dirty="0"/>
+              <a:t>MP</a:t>
+            </a:r>
+            <a:endParaRPr lang="ko-KR" altLang="en-US" sz="1400" b="1" dirty="0"/>
+          </a:p>
+        </p:txBody>
+      </p:sp>
+      <p:sp>
+        <p:nvSpPr>
+          <p:cNvPr id="17" name="TextBox 16">
+            <a:extLst>
+              <a:ext uri="{FF2B5EF4-FFF2-40B4-BE49-F238E27FC236}">
+                <a16:creationId xmlns:a16="http://schemas.microsoft.com/office/drawing/2014/main" id="{52C40E03-26F4-4719-1223-4D7D207E58D6}"/>
+              </a:ext>
+            </a:extLst>
+          </p:cNvPr>
+          <p:cNvSpPr txBox="1"/>
+          <p:nvPr/>
+        </p:nvSpPr>
+        <p:spPr>
+          <a:xfrm>
+            <a:off x="10775340" y="3873068"/>
+            <a:ext cx="409086" cy="369332"/>
+          </a:xfrm>
+          <a:prstGeom prst="rect">
+            <a:avLst/>
+          </a:prstGeom>
+          <a:noFill/>
+        </p:spPr>
+        <p:txBody>
+          <a:bodyPr wrap="none" rtlCol="0">
+            <a:spAutoFit/>
+          </a:bodyPr>
+          <a:lstStyle/>
+          <a:p>
+            <a:r>
+              <a:rPr lang="en-US" altLang="ko-KR" dirty="0"/>
+              <a:t>*5</a:t>
+            </a:r>
+            <a:endParaRPr lang="ko-KR" altLang="en-US" dirty="0"/>
+          </a:p>
+        </p:txBody>
+      </p:sp>
+      <p:grpSp>
+        <p:nvGrpSpPr>
+          <p:cNvPr id="161" name="그룹 160">
+            <a:extLst>
+              <a:ext uri="{FF2B5EF4-FFF2-40B4-BE49-F238E27FC236}">
+                <a16:creationId xmlns:a16="http://schemas.microsoft.com/office/drawing/2014/main" id="{3EF22CDA-438E-9F63-6F16-8DEC91B7BCE7}"/>
+              </a:ext>
+            </a:extLst>
+          </p:cNvPr>
+          <p:cNvGrpSpPr/>
+          <p:nvPr/>
+        </p:nvGrpSpPr>
+        <p:grpSpPr>
+          <a:xfrm>
+            <a:off x="10052550" y="2246899"/>
+            <a:ext cx="623235" cy="1150334"/>
+            <a:chOff x="7112870" y="2496755"/>
+            <a:chExt cx="623235" cy="1150334"/>
+          </a:xfrm>
+        </p:grpSpPr>
+        <p:sp>
+          <p:nvSpPr>
+            <p:cNvPr id="162" name="순서도: 자기 디스크 161">
+              <a:extLst>
+                <a:ext uri="{FF2B5EF4-FFF2-40B4-BE49-F238E27FC236}">
+                  <a16:creationId xmlns:a16="http://schemas.microsoft.com/office/drawing/2014/main" id="{0A895888-D4BA-9C04-20D7-73A005F4D5F1}"/>
+                </a:ext>
+              </a:extLst>
+            </p:cNvPr>
+            <p:cNvSpPr/>
+            <p:nvPr/>
+          </p:nvSpPr>
+          <p:spPr>
+            <a:xfrm>
+              <a:off x="7117554" y="2627091"/>
+              <a:ext cx="613868" cy="1019998"/>
+            </a:xfrm>
+            <a:prstGeom prst="flowChartMagneticDisk">
+              <a:avLst/>
+            </a:prstGeom>
+            <a:solidFill>
+              <a:srgbClr val="FF0000">
+                <a:alpha val="30000"/>
+              </a:srgbClr>
+            </a:solidFill>
+          </p:spPr>
+          <p:style>
+            <a:lnRef idx="2">
+              <a:schemeClr val="accent1">
+                <a:shade val="15000"/>
+              </a:schemeClr>
+            </a:lnRef>
+            <a:fillRef idx="1">
+              <a:schemeClr val="accent1"/>
+            </a:fillRef>
+            <a:effectRef idx="0">
+              <a:schemeClr val="accent1"/>
+            </a:effectRef>
+            <a:fontRef idx="minor">
+              <a:schemeClr val="lt1"/>
+            </a:fontRef>
+          </p:style>
+          <p:txBody>
+            <a:bodyPr rtlCol="0" anchor="ctr"/>
+            <a:lstStyle/>
+            <a:p>
+              <a:pPr algn="ctr"/>
+              <a:endParaRPr lang="ko-KR" altLang="en-US"/>
+            </a:p>
+          </p:txBody>
+        </p:sp>
+        <p:sp>
+          <p:nvSpPr>
+            <p:cNvPr id="163" name="직사각형 162">
+              <a:extLst>
+                <a:ext uri="{FF2B5EF4-FFF2-40B4-BE49-F238E27FC236}">
+                  <a16:creationId xmlns:a16="http://schemas.microsoft.com/office/drawing/2014/main" id="{C131EA1E-CBEB-1612-8B7A-C9F045FEEBD5}"/>
+                </a:ext>
+              </a:extLst>
+            </p:cNvPr>
+            <p:cNvSpPr/>
+            <p:nvPr/>
+          </p:nvSpPr>
+          <p:spPr>
+            <a:xfrm>
+              <a:off x="7112870" y="2496755"/>
+              <a:ext cx="623235" cy="47335"/>
+            </a:xfrm>
+            <a:prstGeom prst="rect">
+              <a:avLst/>
+            </a:prstGeom>
+            <a:solidFill>
+              <a:schemeClr val="accent1">
+                <a:lumMod val="40000"/>
+                <a:lumOff val="60000"/>
+              </a:schemeClr>
+            </a:solidFill>
+          </p:spPr>
+          <p:style>
+            <a:lnRef idx="2">
+              <a:schemeClr val="accent1">
+                <a:shade val="15000"/>
+              </a:schemeClr>
+            </a:lnRef>
+            <a:fillRef idx="1">
+              <a:schemeClr val="accent1"/>
+            </a:fillRef>
+            <a:effectRef idx="0">
+              <a:schemeClr val="accent1"/>
+            </a:effectRef>
+            <a:fontRef idx="minor">
+              <a:schemeClr val="lt1"/>
+            </a:fontRef>
+          </p:style>
+          <p:txBody>
+            <a:bodyPr rtlCol="0" anchor="ctr"/>
+            <a:lstStyle/>
+            <a:p>
+              <a:pPr algn="ctr"/>
+              <a:endParaRPr lang="ko-KR" altLang="en-US"/>
+            </a:p>
+          </p:txBody>
+        </p:sp>
+      </p:grpSp>
+    </p:spTree>
+    <p:extLst>
+      <p:ext uri="{BB962C8B-B14F-4D97-AF65-F5344CB8AC3E}">
+        <p14:creationId xmlns:p14="http://schemas.microsoft.com/office/powerpoint/2010/main" val="958616514"/>
+      </p:ext>
+    </p:extLst>
+  </p:cSld>
+  <p:clrMapOvr>
+    <a:masterClrMapping/>
+  </p:clrMapOvr>
+</p:sld>
+</file>
+
+<file path=ppt/slides/slide5.xml><?xml version="1.0" encoding="utf-8"?>
+<p:sld xmlns:a="http://schemas.openxmlformats.org/drawingml/2006/main" xmlns:r="http://schemas.openxmlformats.org/officeDocument/2006/relationships" xmlns:p="http://schemas.openxmlformats.org/presentationml/2006/main">
+  <p:cSld>
+    <p:spTree>
+      <p:nvGrpSpPr>
+        <p:cNvPr id="1" name="">
+          <a:extLst>
+            <a:ext uri="{FF2B5EF4-FFF2-40B4-BE49-F238E27FC236}">
+              <a16:creationId xmlns:a16="http://schemas.microsoft.com/office/drawing/2014/main" id="{AE9F2656-B7B2-0976-761D-067EEB96042C}"/>
+            </a:ext>
+          </a:extLst>
+        </p:cNvPr>
+        <p:cNvGrpSpPr/>
+        <p:nvPr/>
+      </p:nvGrpSpPr>
+      <p:grpSpPr>
+        <a:xfrm>
+          <a:off x="0" y="0"/>
+          <a:ext cx="0" cy="0"/>
+          <a:chOff x="0" y="0"/>
+          <a:chExt cx="0" cy="0"/>
+        </a:xfrm>
+      </p:grpSpPr>
+      <p:sp>
+        <p:nvSpPr>
+          <p:cNvPr id="5" name="직사각형 4">
+            <a:extLst>
+              <a:ext uri="{FF2B5EF4-FFF2-40B4-BE49-F238E27FC236}">
+                <a16:creationId xmlns:a16="http://schemas.microsoft.com/office/drawing/2014/main" id="{692E12F6-7442-F5C2-2E0D-48CE7618D599}"/>
+              </a:ext>
+            </a:extLst>
+          </p:cNvPr>
+          <p:cNvSpPr>
+            <a:spLocks noChangeAspect="1"/>
+          </p:cNvSpPr>
+          <p:nvPr/>
+        </p:nvSpPr>
+        <p:spPr>
+          <a:xfrm>
+            <a:off x="912000" y="513000"/>
+            <a:ext cx="10368000" cy="5831999"/>
+          </a:xfrm>
+          <a:prstGeom prst="rect">
+            <a:avLst/>
+          </a:prstGeom>
+          <a:noFill/>
+        </p:spPr>
+        <p:style>
+          <a:lnRef idx="2">
+            <a:schemeClr val="accent1">
+              <a:shade val="15000"/>
+            </a:schemeClr>
+          </a:lnRef>
+          <a:fillRef idx="1">
+            <a:schemeClr val="accent1"/>
+          </a:fillRef>
+          <a:effectRef idx="0">
+            <a:schemeClr val="accent1"/>
+          </a:effectRef>
+          <a:fontRef idx="minor">
+            <a:schemeClr val="lt1"/>
+          </a:fontRef>
+        </p:style>
+        <p:txBody>
+          <a:bodyPr rtlCol="0" anchor="ctr"/>
+          <a:lstStyle/>
+          <a:p>
+            <a:pPr algn="ctr"/>
+            <a:endParaRPr lang="ko-KR" altLang="en-US" dirty="0"/>
+          </a:p>
+        </p:txBody>
+      </p:sp>
+      <p:grpSp>
+        <p:nvGrpSpPr>
+          <p:cNvPr id="22" name="그룹 21">
+            <a:extLst>
+              <a:ext uri="{FF2B5EF4-FFF2-40B4-BE49-F238E27FC236}">
+                <a16:creationId xmlns:a16="http://schemas.microsoft.com/office/drawing/2014/main" id="{8A9E8C1B-046A-CA79-5382-70DF4CAA0256}"/>
+              </a:ext>
+            </a:extLst>
+          </p:cNvPr>
+          <p:cNvGrpSpPr/>
+          <p:nvPr/>
+        </p:nvGrpSpPr>
+        <p:grpSpPr>
+          <a:xfrm>
+            <a:off x="1090683" y="4335230"/>
+            <a:ext cx="1800000" cy="1800000"/>
+            <a:chOff x="9296400" y="4152899"/>
+            <a:chExt cx="1800000" cy="1800000"/>
+          </a:xfrm>
+        </p:grpSpPr>
+        <p:grpSp>
+          <p:nvGrpSpPr>
+            <p:cNvPr id="20" name="그룹 19">
+              <a:extLst>
+                <a:ext uri="{FF2B5EF4-FFF2-40B4-BE49-F238E27FC236}">
+                  <a16:creationId xmlns:a16="http://schemas.microsoft.com/office/drawing/2014/main" id="{E6946781-04FC-4464-64AA-8F9570D5D546}"/>
+                </a:ext>
+              </a:extLst>
+            </p:cNvPr>
+            <p:cNvGrpSpPr/>
+            <p:nvPr/>
+          </p:nvGrpSpPr>
+          <p:grpSpPr>
+            <a:xfrm>
+              <a:off x="9296400" y="4152899"/>
+              <a:ext cx="1800000" cy="1800000"/>
+              <a:chOff x="9296400" y="4152899"/>
+              <a:chExt cx="1800000" cy="1800000"/>
+            </a:xfrm>
+          </p:grpSpPr>
+          <p:sp>
+            <p:nvSpPr>
+              <p:cNvPr id="2" name="타원 1">
+                <a:extLst>
+                  <a:ext uri="{FF2B5EF4-FFF2-40B4-BE49-F238E27FC236}">
+                    <a16:creationId xmlns:a16="http://schemas.microsoft.com/office/drawing/2014/main" id="{A0F82132-FAE0-4DA3-3BF5-A99E8FF42D2C}"/>
+                  </a:ext>
+                </a:extLst>
+              </p:cNvPr>
+              <p:cNvSpPr>
+                <a:spLocks noChangeAspect="1"/>
+              </p:cNvSpPr>
+              <p:nvPr/>
+            </p:nvSpPr>
+            <p:spPr>
+              <a:xfrm>
+                <a:off x="9296400" y="4152899"/>
+                <a:ext cx="1800000" cy="1800000"/>
+              </a:xfrm>
+              <a:prstGeom prst="ellipse">
+                <a:avLst/>
+              </a:prstGeom>
+              <a:noFill/>
+            </p:spPr>
+            <p:style>
+              <a:lnRef idx="2">
+                <a:schemeClr val="accent1">
+                  <a:shade val="15000"/>
+                </a:schemeClr>
+              </a:lnRef>
+              <a:fillRef idx="1">
+                <a:schemeClr val="accent1"/>
+              </a:fillRef>
+              <a:effectRef idx="0">
+                <a:schemeClr val="accent1"/>
+              </a:effectRef>
+              <a:fontRef idx="minor">
+                <a:schemeClr val="lt1"/>
+              </a:fontRef>
+            </p:style>
+            <p:txBody>
+              <a:bodyPr rtlCol="0" anchor="ctr"/>
+              <a:lstStyle/>
+              <a:p>
+                <a:pPr algn="ctr"/>
+                <a:endParaRPr lang="ko-KR" altLang="en-US" dirty="0"/>
+              </a:p>
+            </p:txBody>
+          </p:sp>
+          <p:cxnSp>
+            <p:nvCxnSpPr>
+              <p:cNvPr id="4" name="직선 연결선 3">
+                <a:extLst>
+                  <a:ext uri="{FF2B5EF4-FFF2-40B4-BE49-F238E27FC236}">
+                    <a16:creationId xmlns:a16="http://schemas.microsoft.com/office/drawing/2014/main" id="{FB7C4B45-2BC9-48F0-1690-FF0FA8AD5787}"/>
+                  </a:ext>
+                </a:extLst>
+              </p:cNvPr>
+              <p:cNvCxnSpPr>
+                <a:cxnSpLocks/>
+                <a:stCxn id="2" idx="7"/>
+                <a:endCxn id="2" idx="3"/>
+              </p:cNvCxnSpPr>
+              <p:nvPr/>
+            </p:nvCxnSpPr>
+            <p:spPr>
+              <a:xfrm flipH="1">
+                <a:off x="9560004" y="4416503"/>
+                <a:ext cx="1272792" cy="1272792"/>
+              </a:xfrm>
+              <a:prstGeom prst="line">
+                <a:avLst/>
+              </a:prstGeom>
+            </p:spPr>
+            <p:style>
+              <a:lnRef idx="2">
+                <a:schemeClr val="dk1"/>
+              </a:lnRef>
+              <a:fillRef idx="0">
+                <a:schemeClr val="dk1"/>
+              </a:fillRef>
+              <a:effectRef idx="1">
+                <a:schemeClr val="dk1"/>
+              </a:effectRef>
+              <a:fontRef idx="minor">
+                <a:schemeClr val="tx1"/>
+              </a:fontRef>
+            </p:style>
+          </p:cxnSp>
+          <p:cxnSp>
+            <p:nvCxnSpPr>
+              <p:cNvPr id="10" name="직선 연결선 9">
+                <a:extLst>
+                  <a:ext uri="{FF2B5EF4-FFF2-40B4-BE49-F238E27FC236}">
+                    <a16:creationId xmlns:a16="http://schemas.microsoft.com/office/drawing/2014/main" id="{4575A712-1DFF-FA37-69F3-1E6220962431}"/>
+                  </a:ext>
+                </a:extLst>
+              </p:cNvPr>
+              <p:cNvCxnSpPr>
+                <a:cxnSpLocks/>
+                <a:stCxn id="2" idx="1"/>
+                <a:endCxn id="2" idx="5"/>
+              </p:cNvCxnSpPr>
+              <p:nvPr/>
+            </p:nvCxnSpPr>
+            <p:spPr>
+              <a:xfrm>
+                <a:off x="9560004" y="4416503"/>
+                <a:ext cx="1272792" cy="1272792"/>
+              </a:xfrm>
+              <a:prstGeom prst="line">
+                <a:avLst/>
+              </a:prstGeom>
+            </p:spPr>
+            <p:style>
+              <a:lnRef idx="2">
+                <a:schemeClr val="dk1"/>
+              </a:lnRef>
+              <a:fillRef idx="0">
+                <a:schemeClr val="dk1"/>
+              </a:fillRef>
+              <a:effectRef idx="1">
+                <a:schemeClr val="dk1"/>
+              </a:effectRef>
+              <a:fontRef idx="minor">
+                <a:schemeClr val="tx1"/>
+              </a:fontRef>
+            </p:style>
+          </p:cxnSp>
+          <p:sp>
+            <p:nvSpPr>
+              <p:cNvPr id="13" name="TextBox 12">
+                <a:extLst>
+                  <a:ext uri="{FF2B5EF4-FFF2-40B4-BE49-F238E27FC236}">
+                    <a16:creationId xmlns:a16="http://schemas.microsoft.com/office/drawing/2014/main" id="{56831C37-48AA-F924-CC21-E216B2B09898}"/>
+                  </a:ext>
+                </a:extLst>
+              </p:cNvPr>
+              <p:cNvSpPr txBox="1"/>
+              <p:nvPr/>
+            </p:nvSpPr>
+            <p:spPr>
+              <a:xfrm>
+                <a:off x="9988651" y="4279462"/>
+                <a:ext cx="415498" cy="369332"/>
+              </a:xfrm>
+              <a:prstGeom prst="rect">
+                <a:avLst/>
+              </a:prstGeom>
+              <a:noFill/>
+            </p:spPr>
+            <p:txBody>
+              <a:bodyPr wrap="none" rtlCol="0">
+                <a:spAutoFit/>
+              </a:bodyPr>
+              <a:lstStyle/>
+              <a:p>
+                <a:r>
+                  <a:rPr lang="ko-KR" altLang="en-US" dirty="0"/>
+                  <a:t>▲</a:t>
+                </a:r>
+              </a:p>
+            </p:txBody>
+          </p:sp>
+          <p:sp>
+            <p:nvSpPr>
+              <p:cNvPr id="14" name="TextBox 13">
+                <a:extLst>
+                  <a:ext uri="{FF2B5EF4-FFF2-40B4-BE49-F238E27FC236}">
+                    <a16:creationId xmlns:a16="http://schemas.microsoft.com/office/drawing/2014/main" id="{30E1C95A-DF5B-50BC-50BD-ED220B9BEACF}"/>
+                  </a:ext>
+                </a:extLst>
+              </p:cNvPr>
+              <p:cNvSpPr txBox="1"/>
+              <p:nvPr/>
+            </p:nvSpPr>
+            <p:spPr>
+              <a:xfrm>
+                <a:off x="9988651" y="5437954"/>
+                <a:ext cx="415498" cy="369332"/>
+              </a:xfrm>
+              <a:prstGeom prst="rect">
+                <a:avLst/>
+              </a:prstGeom>
+              <a:noFill/>
+            </p:spPr>
+            <p:txBody>
+              <a:bodyPr wrap="none" rtlCol="0">
+                <a:spAutoFit/>
+              </a:bodyPr>
+              <a:lstStyle/>
+              <a:p>
+                <a:r>
+                  <a:rPr lang="ko-KR" altLang="en-US" dirty="0"/>
+                  <a:t>▼</a:t>
+                </a:r>
+              </a:p>
+            </p:txBody>
+          </p:sp>
+          <p:sp>
+            <p:nvSpPr>
+              <p:cNvPr id="15" name="TextBox 14">
+                <a:extLst>
+                  <a:ext uri="{FF2B5EF4-FFF2-40B4-BE49-F238E27FC236}">
+                    <a16:creationId xmlns:a16="http://schemas.microsoft.com/office/drawing/2014/main" id="{F9571110-C01A-8365-34BC-8D1F83E2B7B0}"/>
+                  </a:ext>
+                </a:extLst>
+              </p:cNvPr>
+              <p:cNvSpPr txBox="1"/>
+              <p:nvPr/>
+            </p:nvSpPr>
+            <p:spPr>
+              <a:xfrm>
+                <a:off x="9399880" y="4868233"/>
+                <a:ext cx="415498" cy="369332"/>
+              </a:xfrm>
+              <a:prstGeom prst="rect">
+                <a:avLst/>
+              </a:prstGeom>
+              <a:noFill/>
+            </p:spPr>
+            <p:txBody>
+              <a:bodyPr wrap="none" rtlCol="0">
+                <a:spAutoFit/>
+              </a:bodyPr>
+              <a:lstStyle/>
+              <a:p>
+                <a:r>
+                  <a:rPr lang="ko-KR" altLang="en-US" dirty="0"/>
+                  <a:t>◀</a:t>
+                </a:r>
+              </a:p>
+            </p:txBody>
+          </p:sp>
+          <p:sp>
+            <p:nvSpPr>
+              <p:cNvPr id="16" name="TextBox 15">
+                <a:extLst>
+                  <a:ext uri="{FF2B5EF4-FFF2-40B4-BE49-F238E27FC236}">
+                    <a16:creationId xmlns:a16="http://schemas.microsoft.com/office/drawing/2014/main" id="{778C9286-2BD5-4BE0-13D7-04BDCB64C5BC}"/>
+                  </a:ext>
+                </a:extLst>
+              </p:cNvPr>
+              <p:cNvSpPr txBox="1"/>
+              <p:nvPr/>
+            </p:nvSpPr>
+            <p:spPr>
+              <a:xfrm>
+                <a:off x="10577422" y="4828948"/>
+                <a:ext cx="415498" cy="369332"/>
+              </a:xfrm>
+              <a:prstGeom prst="rect">
+                <a:avLst/>
+              </a:prstGeom>
+              <a:noFill/>
+            </p:spPr>
+            <p:txBody>
+              <a:bodyPr wrap="none" rtlCol="0">
+                <a:spAutoFit/>
+              </a:bodyPr>
+              <a:lstStyle/>
+              <a:p>
+                <a:r>
+                  <a:rPr lang="ko-KR" altLang="en-US" dirty="0"/>
+                  <a:t>▶</a:t>
+                </a:r>
+              </a:p>
+            </p:txBody>
+          </p:sp>
+          <p:sp>
+            <p:nvSpPr>
+              <p:cNvPr id="19" name="타원 18">
+                <a:extLst>
+                  <a:ext uri="{FF2B5EF4-FFF2-40B4-BE49-F238E27FC236}">
+                    <a16:creationId xmlns:a16="http://schemas.microsoft.com/office/drawing/2014/main" id="{FDD8776B-FBB4-9C47-5C34-62C0A2BC42FF}"/>
+                  </a:ext>
+                </a:extLst>
+              </p:cNvPr>
+              <p:cNvSpPr>
+                <a:spLocks noChangeAspect="1"/>
+              </p:cNvSpPr>
+              <p:nvPr/>
+            </p:nvSpPr>
+            <p:spPr>
+              <a:xfrm>
+                <a:off x="9476400" y="4332899"/>
+                <a:ext cx="1440000" cy="1440000"/>
+              </a:xfrm>
+              <a:prstGeom prst="ellipse">
+                <a:avLst/>
+              </a:prstGeom>
+              <a:noFill/>
+            </p:spPr>
+            <p:style>
+              <a:lnRef idx="2">
+                <a:schemeClr val="accent1">
+                  <a:shade val="15000"/>
+                </a:schemeClr>
+              </a:lnRef>
+              <a:fillRef idx="1">
+                <a:schemeClr val="accent1"/>
+              </a:fillRef>
+              <a:effectRef idx="0">
+                <a:schemeClr val="accent1"/>
+              </a:effectRef>
+              <a:fontRef idx="minor">
+                <a:schemeClr val="lt1"/>
+              </a:fontRef>
+            </p:style>
+            <p:txBody>
+              <a:bodyPr rtlCol="0" anchor="ctr"/>
+              <a:lstStyle/>
+              <a:p>
+                <a:pPr algn="ctr"/>
+                <a:endParaRPr lang="ko-KR" altLang="en-US" dirty="0"/>
+              </a:p>
+            </p:txBody>
+          </p:sp>
+        </p:grpSp>
+        <p:sp>
+          <p:nvSpPr>
+            <p:cNvPr id="21" name="타원 20">
+              <a:extLst>
+                <a:ext uri="{FF2B5EF4-FFF2-40B4-BE49-F238E27FC236}">
+                  <a16:creationId xmlns:a16="http://schemas.microsoft.com/office/drawing/2014/main" id="{A467C5F7-D34E-45BC-69BF-6D5C9DE850BD}"/>
+                </a:ext>
+              </a:extLst>
+            </p:cNvPr>
+            <p:cNvSpPr>
+              <a:spLocks noChangeAspect="1"/>
+            </p:cNvSpPr>
+            <p:nvPr/>
+          </p:nvSpPr>
+          <p:spPr>
+            <a:xfrm>
+              <a:off x="10033822" y="4865854"/>
+              <a:ext cx="360000" cy="360000"/>
+            </a:xfrm>
+            <a:prstGeom prst="ellipse">
+              <a:avLst/>
+            </a:prstGeom>
+            <a:solidFill>
+              <a:schemeClr val="bg2">
+                <a:alpha val="50000"/>
+              </a:schemeClr>
+            </a:solidFill>
+            <a:ln>
+              <a:solidFill>
+                <a:schemeClr val="tx1"/>
+              </a:solidFill>
+            </a:ln>
+          </p:spPr>
+          <p:style>
+            <a:lnRef idx="2">
+              <a:schemeClr val="accent1">
+                <a:shade val="15000"/>
+              </a:schemeClr>
+            </a:lnRef>
+            <a:fillRef idx="1">
+              <a:schemeClr val="accent1"/>
+            </a:fillRef>
+            <a:effectRef idx="0">
+              <a:schemeClr val="accent1"/>
+            </a:effectRef>
+            <a:fontRef idx="minor">
+              <a:schemeClr val="lt1"/>
+            </a:fontRef>
+          </p:style>
+          <p:txBody>
+            <a:bodyPr rtlCol="0" anchor="ctr"/>
+            <a:lstStyle/>
+            <a:p>
+              <a:pPr algn="ctr"/>
+              <a:endParaRPr lang="ko-KR" altLang="en-US" dirty="0"/>
+            </a:p>
+          </p:txBody>
+        </p:sp>
+      </p:grpSp>
+      <p:grpSp>
+        <p:nvGrpSpPr>
+          <p:cNvPr id="95" name="그룹 94">
+            <a:extLst>
+              <a:ext uri="{FF2B5EF4-FFF2-40B4-BE49-F238E27FC236}">
+                <a16:creationId xmlns:a16="http://schemas.microsoft.com/office/drawing/2014/main" id="{1A6EBD2A-C4A0-F163-47D2-74A2FF5F014E}"/>
+              </a:ext>
+            </a:extLst>
+          </p:cNvPr>
+          <p:cNvGrpSpPr/>
+          <p:nvPr/>
+        </p:nvGrpSpPr>
+        <p:grpSpPr>
+          <a:xfrm>
+            <a:off x="2862181" y="5502193"/>
+            <a:ext cx="6034244" cy="413049"/>
+            <a:chOff x="2223232" y="5433771"/>
+            <a:chExt cx="6034244" cy="413049"/>
+          </a:xfrm>
+        </p:grpSpPr>
+        <p:sp>
+          <p:nvSpPr>
+            <p:cNvPr id="68" name="직사각형 67">
+              <a:extLst>
+                <a:ext uri="{FF2B5EF4-FFF2-40B4-BE49-F238E27FC236}">
+                  <a16:creationId xmlns:a16="http://schemas.microsoft.com/office/drawing/2014/main" id="{AB625CB0-B6C4-E2CF-6EF7-42414C735FEA}"/>
+                </a:ext>
+              </a:extLst>
+            </p:cNvPr>
+            <p:cNvSpPr/>
+            <p:nvPr/>
+          </p:nvSpPr>
+          <p:spPr>
+            <a:xfrm>
+              <a:off x="2223232" y="5743665"/>
+              <a:ext cx="6034244" cy="103155"/>
+            </a:xfrm>
+            <a:prstGeom prst="rect">
+              <a:avLst/>
+            </a:prstGeom>
+            <a:solidFill>
+              <a:srgbClr val="FF0000"/>
+            </a:solidFill>
+          </p:spPr>
+          <p:style>
+            <a:lnRef idx="2">
+              <a:schemeClr val="accent1">
+                <a:shade val="15000"/>
+              </a:schemeClr>
+            </a:lnRef>
+            <a:fillRef idx="1">
+              <a:schemeClr val="accent1"/>
+            </a:fillRef>
+            <a:effectRef idx="0">
+              <a:schemeClr val="accent1"/>
+            </a:effectRef>
+            <a:fontRef idx="minor">
+              <a:schemeClr val="lt1"/>
+            </a:fontRef>
+          </p:style>
+          <p:txBody>
+            <a:bodyPr rtlCol="0" anchor="ctr"/>
+            <a:lstStyle/>
+            <a:p>
+              <a:pPr algn="ctr"/>
+              <a:endParaRPr lang="ko-KR" altLang="en-US"/>
+            </a:p>
+          </p:txBody>
+        </p:sp>
+        <p:sp>
+          <p:nvSpPr>
+            <p:cNvPr id="70" name="TextBox 69">
+              <a:extLst>
+                <a:ext uri="{FF2B5EF4-FFF2-40B4-BE49-F238E27FC236}">
+                  <a16:creationId xmlns:a16="http://schemas.microsoft.com/office/drawing/2014/main" id="{CF3BB291-F1D9-1F67-F37A-EF0069E34845}"/>
+                </a:ext>
+              </a:extLst>
+            </p:cNvPr>
+            <p:cNvSpPr txBox="1"/>
+            <p:nvPr/>
+          </p:nvSpPr>
+          <p:spPr>
+            <a:xfrm>
+              <a:off x="4732524" y="5433771"/>
+              <a:ext cx="965329" cy="307777"/>
+            </a:xfrm>
+            <a:prstGeom prst="rect">
+              <a:avLst/>
+            </a:prstGeom>
+            <a:noFill/>
+          </p:spPr>
+          <p:txBody>
+            <a:bodyPr wrap="none" rtlCol="0">
+              <a:spAutoFit/>
+            </a:bodyPr>
+            <a:lstStyle/>
+            <a:p>
+              <a:r>
+                <a:rPr lang="ko-KR" altLang="en-US" sz="1400" dirty="0"/>
+                <a:t>보스 이름</a:t>
+              </a:r>
+            </a:p>
+          </p:txBody>
+        </p:sp>
+      </p:grpSp>
+      <p:sp>
+        <p:nvSpPr>
+          <p:cNvPr id="83" name="타원 82">
+            <a:extLst>
+              <a:ext uri="{FF2B5EF4-FFF2-40B4-BE49-F238E27FC236}">
+                <a16:creationId xmlns:a16="http://schemas.microsoft.com/office/drawing/2014/main" id="{912DD26A-9972-FBAF-9249-215F3829AF7F}"/>
+              </a:ext>
+            </a:extLst>
+          </p:cNvPr>
+          <p:cNvSpPr/>
+          <p:nvPr/>
+        </p:nvSpPr>
+        <p:spPr>
+          <a:xfrm>
+            <a:off x="10579070" y="657576"/>
+            <a:ext cx="540000" cy="540000"/>
+          </a:xfrm>
+          <a:prstGeom prst="ellipse">
+            <a:avLst/>
+          </a:prstGeom>
+          <a:solidFill>
+            <a:schemeClr val="bg2">
+              <a:lumMod val="90000"/>
+            </a:schemeClr>
+          </a:solidFill>
+        </p:spPr>
+        <p:style>
+          <a:lnRef idx="2">
+            <a:schemeClr val="accent1">
+              <a:shade val="15000"/>
+            </a:schemeClr>
+          </a:lnRef>
+          <a:fillRef idx="1">
+            <a:schemeClr val="accent1"/>
+          </a:fillRef>
+          <a:effectRef idx="0">
+            <a:schemeClr val="accent1"/>
+          </a:effectRef>
+          <a:fontRef idx="minor">
+            <a:schemeClr val="lt1"/>
+          </a:fontRef>
+        </p:style>
+        <p:txBody>
+          <a:bodyPr rtlCol="0" anchor="ctr"/>
+          <a:lstStyle/>
+          <a:p>
+            <a:pPr algn="ctr"/>
+            <a:endParaRPr lang="ko-KR" altLang="en-US"/>
+          </a:p>
+        </p:txBody>
+      </p:sp>
+      <p:sp>
+        <p:nvSpPr>
+          <p:cNvPr id="90" name="TextBox 89">
+            <a:extLst>
+              <a:ext uri="{FF2B5EF4-FFF2-40B4-BE49-F238E27FC236}">
+                <a16:creationId xmlns:a16="http://schemas.microsoft.com/office/drawing/2014/main" id="{1A797771-BA77-2725-E115-744FF1848EF4}"/>
+              </a:ext>
+            </a:extLst>
+          </p:cNvPr>
+          <p:cNvSpPr txBox="1"/>
+          <p:nvPr/>
+        </p:nvSpPr>
+        <p:spPr>
+          <a:xfrm>
+            <a:off x="0" y="67859"/>
+            <a:ext cx="958917" cy="369332"/>
+          </a:xfrm>
+          <a:prstGeom prst="rect">
+            <a:avLst/>
+          </a:prstGeom>
+          <a:noFill/>
+        </p:spPr>
+        <p:txBody>
+          <a:bodyPr wrap="none" rtlCol="0">
+            <a:spAutoFit/>
+          </a:bodyPr>
+          <a:lstStyle/>
+          <a:p>
+            <a:r>
+              <a:rPr lang="ko-KR" altLang="en-US" dirty="0"/>
+              <a:t>게임 씬</a:t>
+            </a:r>
+            <a:endParaRPr lang="en-US" altLang="ko-KR" dirty="0"/>
+          </a:p>
+        </p:txBody>
+      </p:sp>
+      <p:sp>
+        <p:nvSpPr>
+          <p:cNvPr id="93" name="TextBox 92">
+            <a:extLst>
+              <a:ext uri="{FF2B5EF4-FFF2-40B4-BE49-F238E27FC236}">
+                <a16:creationId xmlns:a16="http://schemas.microsoft.com/office/drawing/2014/main" id="{A5D04B3E-BC1A-2F67-C794-28F310F1FFAA}"/>
+              </a:ext>
+            </a:extLst>
+          </p:cNvPr>
+          <p:cNvSpPr txBox="1"/>
+          <p:nvPr/>
+        </p:nvSpPr>
+        <p:spPr>
+          <a:xfrm>
+            <a:off x="9607865" y="115243"/>
+            <a:ext cx="1651414" cy="369332"/>
+          </a:xfrm>
+          <a:prstGeom prst="rect">
+            <a:avLst/>
+          </a:prstGeom>
+          <a:noFill/>
+        </p:spPr>
+        <p:txBody>
+          <a:bodyPr wrap="none" rtlCol="0">
+            <a:spAutoFit/>
+          </a:bodyPr>
+          <a:lstStyle/>
+          <a:p>
+            <a:r>
+              <a:rPr lang="ko-KR" altLang="en-US" dirty="0"/>
+              <a:t>시스템 아이콘</a:t>
+            </a:r>
+          </a:p>
+        </p:txBody>
+      </p:sp>
+      <p:sp>
+        <p:nvSpPr>
+          <p:cNvPr id="104" name="TextBox 103">
+            <a:extLst>
+              <a:ext uri="{FF2B5EF4-FFF2-40B4-BE49-F238E27FC236}">
+                <a16:creationId xmlns:a16="http://schemas.microsoft.com/office/drawing/2014/main" id="{7B9C3415-0D36-7987-06F4-B98095DCA8B1}"/>
+              </a:ext>
+            </a:extLst>
+          </p:cNvPr>
+          <p:cNvSpPr txBox="1"/>
+          <p:nvPr/>
+        </p:nvSpPr>
+        <p:spPr>
+          <a:xfrm>
+            <a:off x="237495" y="4452961"/>
+            <a:ext cx="646331" cy="369332"/>
+          </a:xfrm>
+          <a:prstGeom prst="rect">
+            <a:avLst/>
+          </a:prstGeom>
+          <a:noFill/>
+        </p:spPr>
+        <p:txBody>
+          <a:bodyPr wrap="none" rtlCol="0">
+            <a:spAutoFit/>
+          </a:bodyPr>
+          <a:lstStyle/>
+          <a:p>
+            <a:r>
+              <a:rPr lang="ko-KR" altLang="en-US" dirty="0"/>
+              <a:t>스킬</a:t>
+            </a:r>
+          </a:p>
+        </p:txBody>
+      </p:sp>
+      <p:grpSp>
+        <p:nvGrpSpPr>
+          <p:cNvPr id="48" name="그룹 47">
+            <a:extLst>
+              <a:ext uri="{FF2B5EF4-FFF2-40B4-BE49-F238E27FC236}">
+                <a16:creationId xmlns:a16="http://schemas.microsoft.com/office/drawing/2014/main" id="{BC012EC0-72A5-2A56-5DA6-1EA4E4933E1F}"/>
+              </a:ext>
+            </a:extLst>
+          </p:cNvPr>
+          <p:cNvGrpSpPr/>
+          <p:nvPr/>
+        </p:nvGrpSpPr>
+        <p:grpSpPr>
+          <a:xfrm>
+            <a:off x="1334347" y="896744"/>
+            <a:ext cx="1494486" cy="276948"/>
+            <a:chOff x="990455" y="896744"/>
+            <a:chExt cx="1838378" cy="276948"/>
+          </a:xfrm>
+        </p:grpSpPr>
+        <p:sp>
+          <p:nvSpPr>
+            <p:cNvPr id="24" name="직사각형 23">
+              <a:extLst>
+                <a:ext uri="{FF2B5EF4-FFF2-40B4-BE49-F238E27FC236}">
+                  <a16:creationId xmlns:a16="http://schemas.microsoft.com/office/drawing/2014/main" id="{9CDDECB0-EA3D-1B96-2973-23134B318405}"/>
+                </a:ext>
+              </a:extLst>
+            </p:cNvPr>
+            <p:cNvSpPr/>
+            <p:nvPr/>
+          </p:nvSpPr>
+          <p:spPr>
+            <a:xfrm>
+              <a:off x="990457" y="896744"/>
+              <a:ext cx="742710" cy="276948"/>
+            </a:xfrm>
+            <a:prstGeom prst="rect">
+              <a:avLst/>
+            </a:prstGeom>
+            <a:solidFill>
+              <a:schemeClr val="accent1">
+                <a:lumMod val="60000"/>
+                <a:lumOff val="40000"/>
+              </a:schemeClr>
+            </a:solidFill>
+            <a:ln>
+              <a:noFill/>
+            </a:ln>
+          </p:spPr>
+          <p:style>
+            <a:lnRef idx="2">
+              <a:schemeClr val="accent1">
+                <a:shade val="15000"/>
+              </a:schemeClr>
+            </a:lnRef>
+            <a:fillRef idx="1">
+              <a:schemeClr val="accent1"/>
+            </a:fillRef>
+            <a:effectRef idx="0">
+              <a:schemeClr val="accent1"/>
+            </a:effectRef>
+            <a:fontRef idx="minor">
+              <a:schemeClr val="lt1"/>
+            </a:fontRef>
+          </p:style>
+          <p:txBody>
+            <a:bodyPr rtlCol="0" anchor="ctr"/>
+            <a:lstStyle/>
+            <a:p>
+              <a:pPr algn="ctr"/>
+              <a:endParaRPr lang="ko-KR" altLang="en-US"/>
+            </a:p>
+          </p:txBody>
+        </p:sp>
+        <p:sp>
+          <p:nvSpPr>
+            <p:cNvPr id="12" name="직사각형 11">
+              <a:extLst>
+                <a:ext uri="{FF2B5EF4-FFF2-40B4-BE49-F238E27FC236}">
+                  <a16:creationId xmlns:a16="http://schemas.microsoft.com/office/drawing/2014/main" id="{DAB791A0-2F66-E881-A127-08138AB8A62B}"/>
+                </a:ext>
+              </a:extLst>
+            </p:cNvPr>
+            <p:cNvSpPr/>
+            <p:nvPr/>
+          </p:nvSpPr>
+          <p:spPr>
+            <a:xfrm>
+              <a:off x="990456" y="896744"/>
+              <a:ext cx="1838377" cy="276948"/>
+            </a:xfrm>
+            <a:prstGeom prst="rect">
+              <a:avLst/>
+            </a:prstGeom>
+            <a:solidFill>
+              <a:schemeClr val="accent1">
+                <a:lumMod val="60000"/>
+                <a:lumOff val="40000"/>
+                <a:alpha val="10000"/>
+              </a:schemeClr>
+            </a:solidFill>
+            <a:ln>
+              <a:solidFill>
+                <a:schemeClr val="tx1"/>
+              </a:solidFill>
+            </a:ln>
+          </p:spPr>
+          <p:style>
+            <a:lnRef idx="2">
+              <a:schemeClr val="accent1">
+                <a:shade val="15000"/>
+              </a:schemeClr>
+            </a:lnRef>
+            <a:fillRef idx="1">
+              <a:schemeClr val="accent1"/>
+            </a:fillRef>
+            <a:effectRef idx="0">
+              <a:schemeClr val="accent1"/>
+            </a:effectRef>
+            <a:fontRef idx="minor">
+              <a:schemeClr val="lt1"/>
+            </a:fontRef>
+          </p:style>
+          <p:txBody>
+            <a:bodyPr rtlCol="0" anchor="ctr"/>
+            <a:lstStyle/>
+            <a:p>
+              <a:pPr algn="ctr"/>
+              <a:endParaRPr lang="ko-KR" altLang="en-US"/>
+            </a:p>
+          </p:txBody>
+        </p:sp>
+        <p:sp>
+          <p:nvSpPr>
+            <p:cNvPr id="40" name="TextBox 39">
+              <a:extLst>
+                <a:ext uri="{FF2B5EF4-FFF2-40B4-BE49-F238E27FC236}">
+                  <a16:creationId xmlns:a16="http://schemas.microsoft.com/office/drawing/2014/main" id="{F2EC1C04-36EB-EF6E-47B6-CEE4A4E246F6}"/>
+                </a:ext>
+              </a:extLst>
+            </p:cNvPr>
+            <p:cNvSpPr txBox="1"/>
+            <p:nvPr/>
+          </p:nvSpPr>
+          <p:spPr>
+            <a:xfrm>
+              <a:off x="990455" y="904035"/>
+              <a:ext cx="1838377" cy="261610"/>
+            </a:xfrm>
+            <a:prstGeom prst="rect">
+              <a:avLst/>
+            </a:prstGeom>
+            <a:noFill/>
+          </p:spPr>
+          <p:txBody>
+            <a:bodyPr wrap="square" rtlCol="0">
+              <a:spAutoFit/>
+            </a:bodyPr>
+            <a:lstStyle/>
+            <a:p>
+              <a:pPr algn="ctr"/>
+              <a:r>
+                <a:rPr lang="en-US" altLang="ko-KR" sz="1100" b="1" dirty="0"/>
+                <a:t>100 / 40</a:t>
+              </a:r>
+              <a:endParaRPr lang="ko-KR" altLang="en-US" sz="1100" b="1" dirty="0"/>
+            </a:p>
+          </p:txBody>
+        </p:sp>
+      </p:grpSp>
+      <p:grpSp>
+        <p:nvGrpSpPr>
+          <p:cNvPr id="45" name="그룹 44">
+            <a:extLst>
+              <a:ext uri="{FF2B5EF4-FFF2-40B4-BE49-F238E27FC236}">
+                <a16:creationId xmlns:a16="http://schemas.microsoft.com/office/drawing/2014/main" id="{2901C81C-C694-4C10-0DDA-2C7C5A6D7C26}"/>
+              </a:ext>
+            </a:extLst>
+          </p:cNvPr>
+          <p:cNvGrpSpPr/>
+          <p:nvPr/>
+        </p:nvGrpSpPr>
+        <p:grpSpPr>
+          <a:xfrm>
+            <a:off x="1334347" y="618534"/>
+            <a:ext cx="1494486" cy="276948"/>
+            <a:chOff x="990455" y="618534"/>
+            <a:chExt cx="1838378" cy="276948"/>
+          </a:xfrm>
+        </p:grpSpPr>
+        <p:sp>
+          <p:nvSpPr>
+            <p:cNvPr id="18" name="직사각형 17">
+              <a:extLst>
+                <a:ext uri="{FF2B5EF4-FFF2-40B4-BE49-F238E27FC236}">
+                  <a16:creationId xmlns:a16="http://schemas.microsoft.com/office/drawing/2014/main" id="{418882F6-376E-6433-1297-7E03263B2C5F}"/>
+                </a:ext>
+              </a:extLst>
+            </p:cNvPr>
+            <p:cNvSpPr/>
+            <p:nvPr/>
+          </p:nvSpPr>
+          <p:spPr>
+            <a:xfrm>
+              <a:off x="990457" y="618534"/>
+              <a:ext cx="1174698" cy="276948"/>
+            </a:xfrm>
+            <a:prstGeom prst="rect">
+              <a:avLst/>
+            </a:prstGeom>
+            <a:solidFill>
+              <a:srgbClr val="FF0000"/>
+            </a:solidFill>
+            <a:ln>
+              <a:noFill/>
+            </a:ln>
+          </p:spPr>
+          <p:style>
+            <a:lnRef idx="2">
+              <a:schemeClr val="accent1">
+                <a:shade val="15000"/>
+              </a:schemeClr>
+            </a:lnRef>
+            <a:fillRef idx="1">
+              <a:schemeClr val="accent1"/>
+            </a:fillRef>
+            <a:effectRef idx="0">
+              <a:schemeClr val="accent1"/>
+            </a:effectRef>
+            <a:fontRef idx="minor">
+              <a:schemeClr val="lt1"/>
+            </a:fontRef>
+          </p:style>
+          <p:txBody>
+            <a:bodyPr rtlCol="0" anchor="ctr"/>
+            <a:lstStyle/>
+            <a:p>
+              <a:pPr algn="ctr"/>
+              <a:endParaRPr lang="ko-KR" altLang="en-US"/>
+            </a:p>
+          </p:txBody>
+        </p:sp>
+        <p:sp>
+          <p:nvSpPr>
+            <p:cNvPr id="6" name="직사각형 5">
+              <a:extLst>
+                <a:ext uri="{FF2B5EF4-FFF2-40B4-BE49-F238E27FC236}">
+                  <a16:creationId xmlns:a16="http://schemas.microsoft.com/office/drawing/2014/main" id="{B845DD76-0BBE-B958-4841-D4098614E512}"/>
+                </a:ext>
+              </a:extLst>
+            </p:cNvPr>
+            <p:cNvSpPr/>
+            <p:nvPr/>
+          </p:nvSpPr>
+          <p:spPr>
+            <a:xfrm>
+              <a:off x="990456" y="618534"/>
+              <a:ext cx="1838377" cy="276948"/>
+            </a:xfrm>
+            <a:prstGeom prst="rect">
+              <a:avLst/>
+            </a:prstGeom>
+            <a:solidFill>
+              <a:srgbClr val="FF0000">
+                <a:alpha val="10000"/>
+              </a:srgbClr>
+            </a:solidFill>
+            <a:ln>
+              <a:solidFill>
+                <a:schemeClr val="tx1"/>
+              </a:solidFill>
+            </a:ln>
+          </p:spPr>
+          <p:style>
+            <a:lnRef idx="2">
+              <a:schemeClr val="accent1">
+                <a:shade val="15000"/>
+              </a:schemeClr>
+            </a:lnRef>
+            <a:fillRef idx="1">
+              <a:schemeClr val="accent1"/>
+            </a:fillRef>
+            <a:effectRef idx="0">
+              <a:schemeClr val="accent1"/>
+            </a:effectRef>
+            <a:fontRef idx="minor">
+              <a:schemeClr val="lt1"/>
+            </a:fontRef>
+          </p:style>
+          <p:txBody>
+            <a:bodyPr rtlCol="0" anchor="ctr"/>
+            <a:lstStyle/>
+            <a:p>
+              <a:pPr algn="ctr"/>
+              <a:endParaRPr lang="ko-KR" altLang="en-US"/>
+            </a:p>
+          </p:txBody>
+        </p:sp>
+        <p:sp>
+          <p:nvSpPr>
+            <p:cNvPr id="44" name="TextBox 43">
+              <a:extLst>
+                <a:ext uri="{FF2B5EF4-FFF2-40B4-BE49-F238E27FC236}">
+                  <a16:creationId xmlns:a16="http://schemas.microsoft.com/office/drawing/2014/main" id="{1AF95D16-2477-3044-B599-A60DDB43E8CD}"/>
+                </a:ext>
+              </a:extLst>
+            </p:cNvPr>
+            <p:cNvSpPr txBox="1"/>
+            <p:nvPr/>
+          </p:nvSpPr>
+          <p:spPr>
+            <a:xfrm>
+              <a:off x="990455" y="626124"/>
+              <a:ext cx="1838377" cy="261610"/>
+            </a:xfrm>
+            <a:prstGeom prst="rect">
+              <a:avLst/>
+            </a:prstGeom>
+            <a:noFill/>
+          </p:spPr>
+          <p:txBody>
+            <a:bodyPr wrap="square" rtlCol="0">
+              <a:spAutoFit/>
+            </a:bodyPr>
+            <a:lstStyle/>
+            <a:p>
+              <a:pPr algn="ctr"/>
+              <a:r>
+                <a:rPr lang="en-US" altLang="ko-KR" sz="1100" b="1" dirty="0"/>
+                <a:t>100 / 75</a:t>
+              </a:r>
+            </a:p>
+          </p:txBody>
+        </p:sp>
+      </p:grpSp>
+      <p:sp>
+        <p:nvSpPr>
+          <p:cNvPr id="49" name="TextBox 48">
+            <a:extLst>
+              <a:ext uri="{FF2B5EF4-FFF2-40B4-BE49-F238E27FC236}">
+                <a16:creationId xmlns:a16="http://schemas.microsoft.com/office/drawing/2014/main" id="{D0449803-EC87-205A-172D-F124996C1DB9}"/>
+              </a:ext>
+            </a:extLst>
+          </p:cNvPr>
+          <p:cNvSpPr txBox="1"/>
+          <p:nvPr/>
+        </p:nvSpPr>
+        <p:spPr>
+          <a:xfrm>
+            <a:off x="956851" y="603040"/>
+            <a:ext cx="433132" cy="307777"/>
+          </a:xfrm>
+          <a:prstGeom prst="rect">
+            <a:avLst/>
+          </a:prstGeom>
+          <a:noFill/>
+        </p:spPr>
+        <p:txBody>
+          <a:bodyPr wrap="none" rtlCol="0">
+            <a:spAutoFit/>
+          </a:bodyPr>
+          <a:lstStyle/>
+          <a:p>
+            <a:r>
+              <a:rPr lang="en-US" altLang="ko-KR" sz="1400" b="1" dirty="0"/>
+              <a:t>HP</a:t>
+            </a:r>
+            <a:endParaRPr lang="ko-KR" altLang="en-US" sz="1400" b="1" dirty="0"/>
+          </a:p>
+        </p:txBody>
+      </p:sp>
+      <p:sp>
+        <p:nvSpPr>
+          <p:cNvPr id="51" name="TextBox 50">
+            <a:extLst>
+              <a:ext uri="{FF2B5EF4-FFF2-40B4-BE49-F238E27FC236}">
+                <a16:creationId xmlns:a16="http://schemas.microsoft.com/office/drawing/2014/main" id="{BE11087F-4009-1FF2-AC6B-D10360246355}"/>
+              </a:ext>
+            </a:extLst>
+          </p:cNvPr>
+          <p:cNvSpPr txBox="1"/>
+          <p:nvPr/>
+        </p:nvSpPr>
+        <p:spPr>
+          <a:xfrm>
+            <a:off x="9588698" y="6428000"/>
+            <a:ext cx="1189749" cy="369332"/>
+          </a:xfrm>
+          <a:prstGeom prst="rect">
+            <a:avLst/>
+          </a:prstGeom>
+          <a:noFill/>
+        </p:spPr>
+        <p:txBody>
+          <a:bodyPr wrap="none" rtlCol="0">
+            <a:spAutoFit/>
+          </a:bodyPr>
+          <a:lstStyle/>
+          <a:p>
+            <a:r>
+              <a:rPr lang="ko-KR" altLang="en-US"/>
+              <a:t>이동 패드</a:t>
+            </a:r>
+          </a:p>
+        </p:txBody>
+      </p:sp>
+      <p:sp>
+        <p:nvSpPr>
+          <p:cNvPr id="35" name="TextBox 34">
+            <a:extLst>
+              <a:ext uri="{FF2B5EF4-FFF2-40B4-BE49-F238E27FC236}">
+                <a16:creationId xmlns:a16="http://schemas.microsoft.com/office/drawing/2014/main" id="{A9BBFE2F-F563-7DE5-E70E-00BCB6DFC172}"/>
+              </a:ext>
+            </a:extLst>
+          </p:cNvPr>
+          <p:cNvSpPr txBox="1"/>
+          <p:nvPr/>
+        </p:nvSpPr>
+        <p:spPr>
+          <a:xfrm>
+            <a:off x="885228" y="1155488"/>
             <a:ext cx="511871" cy="307777"/>
           </a:xfrm>
           <a:prstGeom prst="rect">
@@ -8750,10 +9931,3619 @@
           </a:p>
         </p:txBody>
       </p:sp>
+      <p:sp>
+        <p:nvSpPr>
+          <p:cNvPr id="42" name="TextBox 41">
+            <a:extLst>
+              <a:ext uri="{FF2B5EF4-FFF2-40B4-BE49-F238E27FC236}">
+                <a16:creationId xmlns:a16="http://schemas.microsoft.com/office/drawing/2014/main" id="{2785FB05-1D85-D68A-FF5C-97A7E930C9C6}"/>
+              </a:ext>
+            </a:extLst>
+          </p:cNvPr>
+          <p:cNvSpPr txBox="1"/>
+          <p:nvPr/>
+        </p:nvSpPr>
+        <p:spPr>
+          <a:xfrm>
+            <a:off x="243771" y="5621166"/>
+            <a:ext cx="646331" cy="369332"/>
+          </a:xfrm>
+          <a:prstGeom prst="rect">
+            <a:avLst/>
+          </a:prstGeom>
+          <a:noFill/>
+        </p:spPr>
+        <p:txBody>
+          <a:bodyPr wrap="none" rtlCol="0">
+            <a:spAutoFit/>
+          </a:bodyPr>
+          <a:lstStyle/>
+          <a:p>
+            <a:pPr algn="r"/>
+            <a:r>
+              <a:rPr lang="ko-KR" altLang="en-US" dirty="0"/>
+              <a:t>점멸</a:t>
+            </a:r>
+          </a:p>
+        </p:txBody>
+      </p:sp>
+      <p:sp>
+        <p:nvSpPr>
+          <p:cNvPr id="52" name="TextBox 51">
+            <a:extLst>
+              <a:ext uri="{FF2B5EF4-FFF2-40B4-BE49-F238E27FC236}">
+                <a16:creationId xmlns:a16="http://schemas.microsoft.com/office/drawing/2014/main" id="{B8A282E3-76A0-7048-3A09-08FE72E3D3C6}"/>
+              </a:ext>
+            </a:extLst>
+          </p:cNvPr>
+          <p:cNvSpPr txBox="1"/>
+          <p:nvPr/>
+        </p:nvSpPr>
+        <p:spPr>
+          <a:xfrm>
+            <a:off x="237495" y="5050564"/>
+            <a:ext cx="646331" cy="369332"/>
+          </a:xfrm>
+          <a:prstGeom prst="rect">
+            <a:avLst/>
+          </a:prstGeom>
+          <a:noFill/>
+        </p:spPr>
+        <p:txBody>
+          <a:bodyPr wrap="none" rtlCol="0">
+            <a:spAutoFit/>
+          </a:bodyPr>
+          <a:lstStyle/>
+          <a:p>
+            <a:pPr algn="r"/>
+            <a:r>
+              <a:rPr lang="ko-KR" altLang="en-US" dirty="0"/>
+              <a:t>막기</a:t>
+            </a:r>
+          </a:p>
+        </p:txBody>
+      </p:sp>
+      <p:sp>
+        <p:nvSpPr>
+          <p:cNvPr id="72" name="타원 71">
+            <a:extLst>
+              <a:ext uri="{FF2B5EF4-FFF2-40B4-BE49-F238E27FC236}">
+                <a16:creationId xmlns:a16="http://schemas.microsoft.com/office/drawing/2014/main" id="{56D37840-6800-488F-4033-82D2C3B5D0D0}"/>
+              </a:ext>
+            </a:extLst>
+          </p:cNvPr>
+          <p:cNvSpPr>
+            <a:spLocks noChangeAspect="1"/>
+          </p:cNvSpPr>
+          <p:nvPr/>
+        </p:nvSpPr>
+        <p:spPr>
+          <a:xfrm>
+            <a:off x="1029983" y="4045657"/>
+            <a:ext cx="360000" cy="360000"/>
+          </a:xfrm>
+          <a:prstGeom prst="ellipse">
+            <a:avLst/>
+          </a:prstGeom>
+          <a:solidFill>
+            <a:schemeClr val="accent1">
+              <a:lumMod val="40000"/>
+              <a:lumOff val="60000"/>
+              <a:alpha val="50000"/>
+            </a:schemeClr>
+          </a:solidFill>
+          <a:ln>
+            <a:solidFill>
+              <a:schemeClr val="tx1"/>
+            </a:solidFill>
+          </a:ln>
+        </p:spPr>
+        <p:style>
+          <a:lnRef idx="2">
+            <a:schemeClr val="accent1">
+              <a:shade val="15000"/>
+            </a:schemeClr>
+          </a:lnRef>
+          <a:fillRef idx="1">
+            <a:schemeClr val="accent1"/>
+          </a:fillRef>
+          <a:effectRef idx="0">
+            <a:schemeClr val="accent1"/>
+          </a:effectRef>
+          <a:fontRef idx="minor">
+            <a:schemeClr val="lt1"/>
+          </a:fontRef>
+        </p:style>
+        <p:txBody>
+          <a:bodyPr rtlCol="0" anchor="ctr"/>
+          <a:lstStyle/>
+          <a:p>
+            <a:pPr algn="ctr"/>
+            <a:r>
+              <a:rPr lang="ko-KR" altLang="en-US" dirty="0"/>
+              <a:t>전</a:t>
+            </a:r>
+          </a:p>
+        </p:txBody>
+      </p:sp>
+      <p:grpSp>
+        <p:nvGrpSpPr>
+          <p:cNvPr id="73" name="그룹 72">
+            <a:extLst>
+              <a:ext uri="{FF2B5EF4-FFF2-40B4-BE49-F238E27FC236}">
+                <a16:creationId xmlns:a16="http://schemas.microsoft.com/office/drawing/2014/main" id="{73382064-6C92-9787-FFD4-9539C9C439B6}"/>
+              </a:ext>
+            </a:extLst>
+          </p:cNvPr>
+          <p:cNvGrpSpPr/>
+          <p:nvPr/>
+        </p:nvGrpSpPr>
+        <p:grpSpPr>
+          <a:xfrm>
+            <a:off x="5854137" y="3073664"/>
+            <a:ext cx="428591" cy="710670"/>
+            <a:chOff x="5787571" y="3559790"/>
+            <a:chExt cx="616857" cy="1463589"/>
+          </a:xfrm>
+        </p:grpSpPr>
+        <p:sp>
+          <p:nvSpPr>
+            <p:cNvPr id="74" name="순서도: 자기 디스크 73">
+              <a:extLst>
+                <a:ext uri="{FF2B5EF4-FFF2-40B4-BE49-F238E27FC236}">
+                  <a16:creationId xmlns:a16="http://schemas.microsoft.com/office/drawing/2014/main" id="{6458FA2F-C94C-318B-C34C-DAEBBACEB0A7}"/>
+                </a:ext>
+              </a:extLst>
+            </p:cNvPr>
+            <p:cNvSpPr/>
+            <p:nvPr/>
+          </p:nvSpPr>
+          <p:spPr>
+            <a:xfrm>
+              <a:off x="5787571" y="3723090"/>
+              <a:ext cx="616857" cy="1300289"/>
+            </a:xfrm>
+            <a:prstGeom prst="flowChartMagneticDisk">
+              <a:avLst/>
+            </a:prstGeom>
+          </p:spPr>
+          <p:style>
+            <a:lnRef idx="2">
+              <a:schemeClr val="accent1">
+                <a:shade val="15000"/>
+              </a:schemeClr>
+            </a:lnRef>
+            <a:fillRef idx="1">
+              <a:schemeClr val="accent1"/>
+            </a:fillRef>
+            <a:effectRef idx="0">
+              <a:schemeClr val="accent1"/>
+            </a:effectRef>
+            <a:fontRef idx="minor">
+              <a:schemeClr val="lt1"/>
+            </a:fontRef>
+          </p:style>
+          <p:txBody>
+            <a:bodyPr rtlCol="0" anchor="ctr"/>
+            <a:lstStyle/>
+            <a:p>
+              <a:pPr algn="ctr"/>
+              <a:endParaRPr lang="ko-KR" altLang="en-US"/>
+            </a:p>
+          </p:txBody>
+        </p:sp>
+        <p:sp>
+          <p:nvSpPr>
+            <p:cNvPr id="75" name="직사각형 74">
+              <a:extLst>
+                <a:ext uri="{FF2B5EF4-FFF2-40B4-BE49-F238E27FC236}">
+                  <a16:creationId xmlns:a16="http://schemas.microsoft.com/office/drawing/2014/main" id="{023E62D2-27CC-E776-30E2-019A54C876B6}"/>
+                </a:ext>
+              </a:extLst>
+            </p:cNvPr>
+            <p:cNvSpPr/>
+            <p:nvPr/>
+          </p:nvSpPr>
+          <p:spPr>
+            <a:xfrm>
+              <a:off x="5842832" y="3559790"/>
+              <a:ext cx="506333" cy="97485"/>
+            </a:xfrm>
+            <a:prstGeom prst="rect">
+              <a:avLst/>
+            </a:prstGeom>
+            <a:solidFill>
+              <a:srgbClr val="FF0000"/>
+            </a:solidFill>
+          </p:spPr>
+          <p:style>
+            <a:lnRef idx="2">
+              <a:schemeClr val="accent1">
+                <a:shade val="15000"/>
+              </a:schemeClr>
+            </a:lnRef>
+            <a:fillRef idx="1">
+              <a:schemeClr val="accent1"/>
+            </a:fillRef>
+            <a:effectRef idx="0">
+              <a:schemeClr val="accent1"/>
+            </a:effectRef>
+            <a:fontRef idx="minor">
+              <a:schemeClr val="lt1"/>
+            </a:fontRef>
+          </p:style>
+          <p:txBody>
+            <a:bodyPr rtlCol="0" anchor="ctr"/>
+            <a:lstStyle/>
+            <a:p>
+              <a:pPr algn="ctr"/>
+              <a:endParaRPr lang="ko-KR" altLang="en-US"/>
+            </a:p>
+          </p:txBody>
+        </p:sp>
+      </p:grpSp>
+      <p:grpSp>
+        <p:nvGrpSpPr>
+          <p:cNvPr id="3" name="그룹 2">
+            <a:extLst>
+              <a:ext uri="{FF2B5EF4-FFF2-40B4-BE49-F238E27FC236}">
+                <a16:creationId xmlns:a16="http://schemas.microsoft.com/office/drawing/2014/main" id="{AC91286A-6A8A-7F80-34FC-719611DA3F78}"/>
+              </a:ext>
+            </a:extLst>
+          </p:cNvPr>
+          <p:cNvGrpSpPr/>
+          <p:nvPr/>
+        </p:nvGrpSpPr>
+        <p:grpSpPr>
+          <a:xfrm>
+            <a:off x="1339039" y="1170239"/>
+            <a:ext cx="1494487" cy="276948"/>
+            <a:chOff x="990455" y="896744"/>
+            <a:chExt cx="1838379" cy="276948"/>
+          </a:xfrm>
+        </p:grpSpPr>
+        <p:sp>
+          <p:nvSpPr>
+            <p:cNvPr id="7" name="직사각형 6">
+              <a:extLst>
+                <a:ext uri="{FF2B5EF4-FFF2-40B4-BE49-F238E27FC236}">
+                  <a16:creationId xmlns:a16="http://schemas.microsoft.com/office/drawing/2014/main" id="{79FCEFE9-9C60-ECB6-84CB-9C5ACD9913BA}"/>
+                </a:ext>
+              </a:extLst>
+            </p:cNvPr>
+            <p:cNvSpPr/>
+            <p:nvPr/>
+          </p:nvSpPr>
+          <p:spPr>
+            <a:xfrm>
+              <a:off x="990457" y="896744"/>
+              <a:ext cx="926570" cy="276948"/>
+            </a:xfrm>
+            <a:prstGeom prst="rect">
+              <a:avLst/>
+            </a:prstGeom>
+            <a:solidFill>
+              <a:srgbClr val="FFFF00"/>
+            </a:solidFill>
+            <a:ln>
+              <a:noFill/>
+            </a:ln>
+          </p:spPr>
+          <p:style>
+            <a:lnRef idx="2">
+              <a:schemeClr val="accent1">
+                <a:shade val="15000"/>
+              </a:schemeClr>
+            </a:lnRef>
+            <a:fillRef idx="1">
+              <a:schemeClr val="accent1"/>
+            </a:fillRef>
+            <a:effectRef idx="0">
+              <a:schemeClr val="accent1"/>
+            </a:effectRef>
+            <a:fontRef idx="minor">
+              <a:schemeClr val="lt1"/>
+            </a:fontRef>
+          </p:style>
+          <p:txBody>
+            <a:bodyPr rtlCol="0" anchor="ctr"/>
+            <a:lstStyle/>
+            <a:p>
+              <a:pPr algn="ctr"/>
+              <a:endParaRPr lang="ko-KR" altLang="en-US"/>
+            </a:p>
+          </p:txBody>
+        </p:sp>
+        <p:sp>
+          <p:nvSpPr>
+            <p:cNvPr id="8" name="직사각형 7">
+              <a:extLst>
+                <a:ext uri="{FF2B5EF4-FFF2-40B4-BE49-F238E27FC236}">
+                  <a16:creationId xmlns:a16="http://schemas.microsoft.com/office/drawing/2014/main" id="{6685D79F-FB7F-6567-9FA1-1D07B0A3BA37}"/>
+                </a:ext>
+              </a:extLst>
+            </p:cNvPr>
+            <p:cNvSpPr/>
+            <p:nvPr/>
+          </p:nvSpPr>
+          <p:spPr>
+            <a:xfrm>
+              <a:off x="990455" y="896744"/>
+              <a:ext cx="1838379" cy="276948"/>
+            </a:xfrm>
+            <a:prstGeom prst="rect">
+              <a:avLst/>
+            </a:prstGeom>
+            <a:solidFill>
+              <a:schemeClr val="accent1">
+                <a:lumMod val="60000"/>
+                <a:lumOff val="40000"/>
+                <a:alpha val="10000"/>
+              </a:schemeClr>
+            </a:solidFill>
+            <a:ln>
+              <a:solidFill>
+                <a:schemeClr val="tx1"/>
+              </a:solidFill>
+            </a:ln>
+          </p:spPr>
+          <p:style>
+            <a:lnRef idx="2">
+              <a:schemeClr val="accent1">
+                <a:shade val="15000"/>
+              </a:schemeClr>
+            </a:lnRef>
+            <a:fillRef idx="1">
+              <a:schemeClr val="accent1"/>
+            </a:fillRef>
+            <a:effectRef idx="0">
+              <a:schemeClr val="accent1"/>
+            </a:effectRef>
+            <a:fontRef idx="minor">
+              <a:schemeClr val="lt1"/>
+            </a:fontRef>
+          </p:style>
+          <p:txBody>
+            <a:bodyPr rtlCol="0" anchor="ctr"/>
+            <a:lstStyle/>
+            <a:p>
+              <a:pPr algn="ctr"/>
+              <a:endParaRPr lang="ko-KR" altLang="en-US" dirty="0"/>
+            </a:p>
+          </p:txBody>
+        </p:sp>
+        <p:sp>
+          <p:nvSpPr>
+            <p:cNvPr id="9" name="TextBox 8">
+              <a:extLst>
+                <a:ext uri="{FF2B5EF4-FFF2-40B4-BE49-F238E27FC236}">
+                  <a16:creationId xmlns:a16="http://schemas.microsoft.com/office/drawing/2014/main" id="{32A63A96-C1B7-FD2D-401C-2E1879CFEF92}"/>
+                </a:ext>
+              </a:extLst>
+            </p:cNvPr>
+            <p:cNvSpPr txBox="1"/>
+            <p:nvPr/>
+          </p:nvSpPr>
+          <p:spPr>
+            <a:xfrm>
+              <a:off x="990455" y="902176"/>
+              <a:ext cx="1838377" cy="261610"/>
+            </a:xfrm>
+            <a:prstGeom prst="rect">
+              <a:avLst/>
+            </a:prstGeom>
+            <a:noFill/>
+          </p:spPr>
+          <p:txBody>
+            <a:bodyPr wrap="square" rtlCol="0">
+              <a:spAutoFit/>
+            </a:bodyPr>
+            <a:lstStyle/>
+            <a:p>
+              <a:pPr algn="ctr"/>
+              <a:r>
+                <a:rPr lang="en-US" altLang="ko-KR" sz="1100" b="1" dirty="0"/>
+                <a:t>100 / 50</a:t>
+              </a:r>
+              <a:endParaRPr lang="ko-KR" altLang="en-US" sz="1100" b="1" dirty="0"/>
+            </a:p>
+          </p:txBody>
+        </p:sp>
+      </p:grpSp>
+      <p:sp>
+        <p:nvSpPr>
+          <p:cNvPr id="11" name="TextBox 10">
+            <a:extLst>
+              <a:ext uri="{FF2B5EF4-FFF2-40B4-BE49-F238E27FC236}">
+                <a16:creationId xmlns:a16="http://schemas.microsoft.com/office/drawing/2014/main" id="{1FAA5697-ABD9-E81B-5506-D58B733786F0}"/>
+              </a:ext>
+            </a:extLst>
+          </p:cNvPr>
+          <p:cNvSpPr txBox="1"/>
+          <p:nvPr/>
+        </p:nvSpPr>
+        <p:spPr>
+          <a:xfrm>
+            <a:off x="928357" y="874344"/>
+            <a:ext cx="468398" cy="307777"/>
+          </a:xfrm>
+          <a:prstGeom prst="rect">
+            <a:avLst/>
+          </a:prstGeom>
+          <a:noFill/>
+        </p:spPr>
+        <p:txBody>
+          <a:bodyPr wrap="none" rtlCol="0">
+            <a:spAutoFit/>
+          </a:bodyPr>
+          <a:lstStyle/>
+          <a:p>
+            <a:r>
+              <a:rPr lang="en-US" altLang="ko-KR" sz="1400" b="1" dirty="0"/>
+              <a:t>MP</a:t>
+            </a:r>
+            <a:endParaRPr lang="ko-KR" altLang="en-US" sz="1400" b="1" dirty="0"/>
+          </a:p>
+        </p:txBody>
+      </p:sp>
+      <p:sp>
+        <p:nvSpPr>
+          <p:cNvPr id="17" name="TextBox 16">
+            <a:extLst>
+              <a:ext uri="{FF2B5EF4-FFF2-40B4-BE49-F238E27FC236}">
+                <a16:creationId xmlns:a16="http://schemas.microsoft.com/office/drawing/2014/main" id="{59714725-51DE-78A4-6FD8-0D91DCA7A6E2}"/>
+              </a:ext>
+            </a:extLst>
+          </p:cNvPr>
+          <p:cNvSpPr txBox="1"/>
+          <p:nvPr/>
+        </p:nvSpPr>
+        <p:spPr>
+          <a:xfrm>
+            <a:off x="1380495" y="4027590"/>
+            <a:ext cx="409086" cy="369332"/>
+          </a:xfrm>
+          <a:prstGeom prst="rect">
+            <a:avLst/>
+          </a:prstGeom>
+          <a:noFill/>
+        </p:spPr>
+        <p:txBody>
+          <a:bodyPr wrap="none" rtlCol="0">
+            <a:spAutoFit/>
+          </a:bodyPr>
+          <a:lstStyle/>
+          <a:p>
+            <a:r>
+              <a:rPr lang="en-US" altLang="ko-KR" dirty="0"/>
+              <a:t>*5</a:t>
+            </a:r>
+            <a:endParaRPr lang="ko-KR" altLang="en-US" dirty="0"/>
+          </a:p>
+        </p:txBody>
+      </p:sp>
+      <p:grpSp>
+        <p:nvGrpSpPr>
+          <p:cNvPr id="161" name="그룹 160">
+            <a:extLst>
+              <a:ext uri="{FF2B5EF4-FFF2-40B4-BE49-F238E27FC236}">
+                <a16:creationId xmlns:a16="http://schemas.microsoft.com/office/drawing/2014/main" id="{C68676B1-7DCE-6E06-BB26-399F01D8FE81}"/>
+              </a:ext>
+            </a:extLst>
+          </p:cNvPr>
+          <p:cNvGrpSpPr/>
+          <p:nvPr/>
+        </p:nvGrpSpPr>
+        <p:grpSpPr>
+          <a:xfrm>
+            <a:off x="10052550" y="2246899"/>
+            <a:ext cx="623235" cy="1150334"/>
+            <a:chOff x="7112870" y="2496755"/>
+            <a:chExt cx="623235" cy="1150334"/>
+          </a:xfrm>
+        </p:grpSpPr>
+        <p:sp>
+          <p:nvSpPr>
+            <p:cNvPr id="162" name="순서도: 자기 디스크 161">
+              <a:extLst>
+                <a:ext uri="{FF2B5EF4-FFF2-40B4-BE49-F238E27FC236}">
+                  <a16:creationId xmlns:a16="http://schemas.microsoft.com/office/drawing/2014/main" id="{A51E5B63-1B9B-C74A-10F8-8834CB94A29D}"/>
+                </a:ext>
+              </a:extLst>
+            </p:cNvPr>
+            <p:cNvSpPr/>
+            <p:nvPr/>
+          </p:nvSpPr>
+          <p:spPr>
+            <a:xfrm>
+              <a:off x="7117554" y="2627091"/>
+              <a:ext cx="613868" cy="1019998"/>
+            </a:xfrm>
+            <a:prstGeom prst="flowChartMagneticDisk">
+              <a:avLst/>
+            </a:prstGeom>
+            <a:solidFill>
+              <a:srgbClr val="FF0000">
+                <a:alpha val="30000"/>
+              </a:srgbClr>
+            </a:solidFill>
+          </p:spPr>
+          <p:style>
+            <a:lnRef idx="2">
+              <a:schemeClr val="accent1">
+                <a:shade val="15000"/>
+              </a:schemeClr>
+            </a:lnRef>
+            <a:fillRef idx="1">
+              <a:schemeClr val="accent1"/>
+            </a:fillRef>
+            <a:effectRef idx="0">
+              <a:schemeClr val="accent1"/>
+            </a:effectRef>
+            <a:fontRef idx="minor">
+              <a:schemeClr val="lt1"/>
+            </a:fontRef>
+          </p:style>
+          <p:txBody>
+            <a:bodyPr rtlCol="0" anchor="ctr"/>
+            <a:lstStyle/>
+            <a:p>
+              <a:pPr algn="ctr"/>
+              <a:endParaRPr lang="ko-KR" altLang="en-US"/>
+            </a:p>
+          </p:txBody>
+        </p:sp>
+        <p:sp>
+          <p:nvSpPr>
+            <p:cNvPr id="163" name="직사각형 162">
+              <a:extLst>
+                <a:ext uri="{FF2B5EF4-FFF2-40B4-BE49-F238E27FC236}">
+                  <a16:creationId xmlns:a16="http://schemas.microsoft.com/office/drawing/2014/main" id="{F640FCC5-0B44-FDCF-2119-02410398180D}"/>
+                </a:ext>
+              </a:extLst>
+            </p:cNvPr>
+            <p:cNvSpPr/>
+            <p:nvPr/>
+          </p:nvSpPr>
+          <p:spPr>
+            <a:xfrm>
+              <a:off x="7112870" y="2496755"/>
+              <a:ext cx="623235" cy="47335"/>
+            </a:xfrm>
+            <a:prstGeom prst="rect">
+              <a:avLst/>
+            </a:prstGeom>
+            <a:solidFill>
+              <a:schemeClr val="accent1">
+                <a:lumMod val="40000"/>
+                <a:lumOff val="60000"/>
+              </a:schemeClr>
+            </a:solidFill>
+          </p:spPr>
+          <p:style>
+            <a:lnRef idx="2">
+              <a:schemeClr val="accent1">
+                <a:shade val="15000"/>
+              </a:schemeClr>
+            </a:lnRef>
+            <a:fillRef idx="1">
+              <a:schemeClr val="accent1"/>
+            </a:fillRef>
+            <a:effectRef idx="0">
+              <a:schemeClr val="accent1"/>
+            </a:effectRef>
+            <a:fontRef idx="minor">
+              <a:schemeClr val="lt1"/>
+            </a:fontRef>
+          </p:style>
+          <p:txBody>
+            <a:bodyPr rtlCol="0" anchor="ctr"/>
+            <a:lstStyle/>
+            <a:p>
+              <a:pPr algn="ctr"/>
+              <a:endParaRPr lang="ko-KR" altLang="en-US"/>
+            </a:p>
+          </p:txBody>
+        </p:sp>
+      </p:grpSp>
+      <p:sp>
+        <p:nvSpPr>
+          <p:cNvPr id="25" name="타원 24">
+            <a:extLst>
+              <a:ext uri="{FF2B5EF4-FFF2-40B4-BE49-F238E27FC236}">
+                <a16:creationId xmlns:a16="http://schemas.microsoft.com/office/drawing/2014/main" id="{1708AE11-6426-E8C1-D6D7-5A7491FEEFA1}"/>
+              </a:ext>
+            </a:extLst>
+          </p:cNvPr>
+          <p:cNvSpPr>
+            <a:spLocks noChangeAspect="1"/>
+          </p:cNvSpPr>
+          <p:nvPr/>
+        </p:nvSpPr>
+        <p:spPr>
+          <a:xfrm>
+            <a:off x="9969254" y="5606978"/>
+            <a:ext cx="360000" cy="360000"/>
+          </a:xfrm>
+          <a:prstGeom prst="ellipse">
+            <a:avLst/>
+          </a:prstGeom>
+          <a:solidFill>
+            <a:srgbClr val="FFC000">
+              <a:alpha val="50000"/>
+            </a:srgbClr>
+          </a:solidFill>
+          <a:ln>
+            <a:solidFill>
+              <a:schemeClr val="tx1"/>
+            </a:solidFill>
+          </a:ln>
+        </p:spPr>
+        <p:style>
+          <a:lnRef idx="2">
+            <a:schemeClr val="accent1">
+              <a:shade val="15000"/>
+            </a:schemeClr>
+          </a:lnRef>
+          <a:fillRef idx="1">
+            <a:schemeClr val="accent1"/>
+          </a:fillRef>
+          <a:effectRef idx="0">
+            <a:schemeClr val="accent1"/>
+          </a:effectRef>
+          <a:fontRef idx="minor">
+            <a:schemeClr val="lt1"/>
+          </a:fontRef>
+        </p:style>
+        <p:txBody>
+          <a:bodyPr rtlCol="0" anchor="ctr"/>
+          <a:lstStyle/>
+          <a:p>
+            <a:pPr algn="ctr"/>
+            <a:endParaRPr lang="ko-KR" altLang="en-US" sz="200" dirty="0">
+              <a:solidFill>
+                <a:schemeClr val="tx1"/>
+              </a:solidFill>
+            </a:endParaRPr>
+          </a:p>
+        </p:txBody>
+      </p:sp>
+      <p:sp>
+        <p:nvSpPr>
+          <p:cNvPr id="27" name="타원 26">
+            <a:extLst>
+              <a:ext uri="{FF2B5EF4-FFF2-40B4-BE49-F238E27FC236}">
+                <a16:creationId xmlns:a16="http://schemas.microsoft.com/office/drawing/2014/main" id="{4DBD4567-FCE2-7645-02E1-158A1BC4EC5F}"/>
+              </a:ext>
+            </a:extLst>
+          </p:cNvPr>
+          <p:cNvSpPr>
+            <a:spLocks noChangeAspect="1"/>
+          </p:cNvSpPr>
+          <p:nvPr/>
+        </p:nvSpPr>
+        <p:spPr>
+          <a:xfrm>
+            <a:off x="9969254" y="5069260"/>
+            <a:ext cx="360000" cy="360000"/>
+          </a:xfrm>
+          <a:prstGeom prst="ellipse">
+            <a:avLst/>
+          </a:prstGeom>
+          <a:solidFill>
+            <a:schemeClr val="accent6">
+              <a:lumMod val="20000"/>
+              <a:lumOff val="80000"/>
+              <a:alpha val="50000"/>
+            </a:schemeClr>
+          </a:solidFill>
+          <a:ln>
+            <a:solidFill>
+              <a:schemeClr val="tx1"/>
+            </a:solidFill>
+          </a:ln>
+        </p:spPr>
+        <p:style>
+          <a:lnRef idx="2">
+            <a:schemeClr val="accent1">
+              <a:shade val="15000"/>
+            </a:schemeClr>
+          </a:lnRef>
+          <a:fillRef idx="1">
+            <a:schemeClr val="accent1"/>
+          </a:fillRef>
+          <a:effectRef idx="0">
+            <a:schemeClr val="accent1"/>
+          </a:effectRef>
+          <a:fontRef idx="minor">
+            <a:schemeClr val="lt1"/>
+          </a:fontRef>
+        </p:style>
+        <p:txBody>
+          <a:bodyPr rtlCol="0" anchor="ctr"/>
+          <a:lstStyle/>
+          <a:p>
+            <a:pPr algn="ctr"/>
+            <a:endParaRPr lang="ko-KR" altLang="en-US" dirty="0">
+              <a:solidFill>
+                <a:schemeClr val="tx1"/>
+              </a:solidFill>
+            </a:endParaRPr>
+          </a:p>
+        </p:txBody>
+      </p:sp>
+      <p:sp>
+        <p:nvSpPr>
+          <p:cNvPr id="29" name="타원 28">
+            <a:extLst>
+              <a:ext uri="{FF2B5EF4-FFF2-40B4-BE49-F238E27FC236}">
+                <a16:creationId xmlns:a16="http://schemas.microsoft.com/office/drawing/2014/main" id="{1134F022-1CAA-B634-948F-CC62D086AFA4}"/>
+              </a:ext>
+            </a:extLst>
+          </p:cNvPr>
+          <p:cNvSpPr>
+            <a:spLocks noChangeAspect="1"/>
+          </p:cNvSpPr>
+          <p:nvPr/>
+        </p:nvSpPr>
+        <p:spPr>
+          <a:xfrm>
+            <a:off x="9969254" y="3882952"/>
+            <a:ext cx="360000" cy="360000"/>
+          </a:xfrm>
+          <a:prstGeom prst="ellipse">
+            <a:avLst/>
+          </a:prstGeom>
+          <a:solidFill>
+            <a:schemeClr val="accent1">
+              <a:lumMod val="40000"/>
+              <a:lumOff val="60000"/>
+              <a:alpha val="50000"/>
+            </a:schemeClr>
+          </a:solidFill>
+          <a:ln>
+            <a:solidFill>
+              <a:schemeClr val="tx1"/>
+            </a:solidFill>
+          </a:ln>
+        </p:spPr>
+        <p:style>
+          <a:lnRef idx="2">
+            <a:schemeClr val="accent1">
+              <a:shade val="15000"/>
+            </a:schemeClr>
+          </a:lnRef>
+          <a:fillRef idx="1">
+            <a:schemeClr val="accent1"/>
+          </a:fillRef>
+          <a:effectRef idx="0">
+            <a:schemeClr val="accent1"/>
+          </a:effectRef>
+          <a:fontRef idx="minor">
+            <a:schemeClr val="lt1"/>
+          </a:fontRef>
+        </p:style>
+        <p:txBody>
+          <a:bodyPr rtlCol="0" anchor="ctr"/>
+          <a:lstStyle/>
+          <a:p>
+            <a:pPr algn="ctr"/>
+            <a:r>
+              <a:rPr lang="ko-KR" altLang="en-US" dirty="0"/>
+              <a:t>강</a:t>
+            </a:r>
+          </a:p>
+        </p:txBody>
+      </p:sp>
+      <p:sp>
+        <p:nvSpPr>
+          <p:cNvPr id="31" name="타원 30">
+            <a:extLst>
+              <a:ext uri="{FF2B5EF4-FFF2-40B4-BE49-F238E27FC236}">
+                <a16:creationId xmlns:a16="http://schemas.microsoft.com/office/drawing/2014/main" id="{45F8E757-959E-D734-6B5D-1A979B935235}"/>
+              </a:ext>
+            </a:extLst>
+          </p:cNvPr>
+          <p:cNvSpPr>
+            <a:spLocks noChangeAspect="1"/>
+          </p:cNvSpPr>
+          <p:nvPr/>
+        </p:nvSpPr>
+        <p:spPr>
+          <a:xfrm>
+            <a:off x="9969254" y="4457627"/>
+            <a:ext cx="360000" cy="360000"/>
+          </a:xfrm>
+          <a:prstGeom prst="ellipse">
+            <a:avLst/>
+          </a:prstGeom>
+          <a:solidFill>
+            <a:schemeClr val="accent1">
+              <a:lumMod val="40000"/>
+              <a:lumOff val="60000"/>
+              <a:alpha val="50000"/>
+            </a:schemeClr>
+          </a:solidFill>
+          <a:ln>
+            <a:solidFill>
+              <a:schemeClr val="tx1"/>
+            </a:solidFill>
+          </a:ln>
+        </p:spPr>
+        <p:style>
+          <a:lnRef idx="2">
+            <a:schemeClr val="accent1">
+              <a:shade val="15000"/>
+            </a:schemeClr>
+          </a:lnRef>
+          <a:fillRef idx="1">
+            <a:schemeClr val="accent1"/>
+          </a:fillRef>
+          <a:effectRef idx="0">
+            <a:schemeClr val="accent1"/>
+          </a:effectRef>
+          <a:fontRef idx="minor">
+            <a:schemeClr val="lt1"/>
+          </a:fontRef>
+        </p:style>
+        <p:txBody>
+          <a:bodyPr rtlCol="0" anchor="ctr"/>
+          <a:lstStyle/>
+          <a:p>
+            <a:pPr algn="ctr"/>
+            <a:r>
+              <a:rPr lang="ko-KR" altLang="en-US" dirty="0"/>
+              <a:t>약</a:t>
+            </a:r>
+          </a:p>
+        </p:txBody>
+      </p:sp>
     </p:spTree>
     <p:extLst>
       <p:ext uri="{BB962C8B-B14F-4D97-AF65-F5344CB8AC3E}">
-        <p14:creationId xmlns:p14="http://schemas.microsoft.com/office/powerpoint/2010/main" val="958616514"/>
+        <p14:creationId xmlns:p14="http://schemas.microsoft.com/office/powerpoint/2010/main" val="966437843"/>
+      </p:ext>
+    </p:extLst>
+  </p:cSld>
+  <p:clrMapOvr>
+    <a:masterClrMapping/>
+  </p:clrMapOvr>
+</p:sld>
+</file>
+
+<file path=ppt/slides/slide6.xml><?xml version="1.0" encoding="utf-8"?>
+<p:sld xmlns:a="http://schemas.openxmlformats.org/drawingml/2006/main" xmlns:r="http://schemas.openxmlformats.org/officeDocument/2006/relationships" xmlns:p="http://schemas.openxmlformats.org/presentationml/2006/main">
+  <p:cSld>
+    <p:spTree>
+      <p:nvGrpSpPr>
+        <p:cNvPr id="1" name="">
+          <a:extLst>
+            <a:ext uri="{FF2B5EF4-FFF2-40B4-BE49-F238E27FC236}">
+              <a16:creationId xmlns:a16="http://schemas.microsoft.com/office/drawing/2014/main" id="{20432182-87B4-FD4F-FF08-E99119CEFD32}"/>
+            </a:ext>
+          </a:extLst>
+        </p:cNvPr>
+        <p:cNvGrpSpPr/>
+        <p:nvPr/>
+      </p:nvGrpSpPr>
+      <p:grpSpPr>
+        <a:xfrm>
+          <a:off x="0" y="0"/>
+          <a:ext cx="0" cy="0"/>
+          <a:chOff x="0" y="0"/>
+          <a:chExt cx="0" cy="0"/>
+        </a:xfrm>
+      </p:grpSpPr>
+      <p:sp>
+        <p:nvSpPr>
+          <p:cNvPr id="5" name="직사각형 4">
+            <a:extLst>
+              <a:ext uri="{FF2B5EF4-FFF2-40B4-BE49-F238E27FC236}">
+                <a16:creationId xmlns:a16="http://schemas.microsoft.com/office/drawing/2014/main" id="{CFDB3EA9-74CC-FD35-B87F-01232813D494}"/>
+              </a:ext>
+            </a:extLst>
+          </p:cNvPr>
+          <p:cNvSpPr>
+            <a:spLocks noChangeAspect="1"/>
+          </p:cNvSpPr>
+          <p:nvPr/>
+        </p:nvSpPr>
+        <p:spPr>
+          <a:xfrm>
+            <a:off x="912000" y="513000"/>
+            <a:ext cx="10368000" cy="5831999"/>
+          </a:xfrm>
+          <a:prstGeom prst="rect">
+            <a:avLst/>
+          </a:prstGeom>
+          <a:noFill/>
+        </p:spPr>
+        <p:style>
+          <a:lnRef idx="2">
+            <a:schemeClr val="accent1">
+              <a:shade val="15000"/>
+            </a:schemeClr>
+          </a:lnRef>
+          <a:fillRef idx="1">
+            <a:schemeClr val="accent1"/>
+          </a:fillRef>
+          <a:effectRef idx="0">
+            <a:schemeClr val="accent1"/>
+          </a:effectRef>
+          <a:fontRef idx="minor">
+            <a:schemeClr val="lt1"/>
+          </a:fontRef>
+        </p:style>
+        <p:txBody>
+          <a:bodyPr rtlCol="0" anchor="ctr"/>
+          <a:lstStyle/>
+          <a:p>
+            <a:pPr algn="ctr"/>
+            <a:endParaRPr lang="ko-KR" altLang="en-US" dirty="0"/>
+          </a:p>
+        </p:txBody>
+      </p:sp>
+      <p:grpSp>
+        <p:nvGrpSpPr>
+          <p:cNvPr id="22" name="그룹 21">
+            <a:extLst>
+              <a:ext uri="{FF2B5EF4-FFF2-40B4-BE49-F238E27FC236}">
+                <a16:creationId xmlns:a16="http://schemas.microsoft.com/office/drawing/2014/main" id="{75217DAA-77AC-C17A-0CD6-987FEAAEEBEA}"/>
+              </a:ext>
+            </a:extLst>
+          </p:cNvPr>
+          <p:cNvGrpSpPr/>
+          <p:nvPr/>
+        </p:nvGrpSpPr>
+        <p:grpSpPr>
+          <a:xfrm>
+            <a:off x="1090683" y="4335230"/>
+            <a:ext cx="1800000" cy="1800000"/>
+            <a:chOff x="9296400" y="4152899"/>
+            <a:chExt cx="1800000" cy="1800000"/>
+          </a:xfrm>
+        </p:grpSpPr>
+        <p:grpSp>
+          <p:nvGrpSpPr>
+            <p:cNvPr id="20" name="그룹 19">
+              <a:extLst>
+                <a:ext uri="{FF2B5EF4-FFF2-40B4-BE49-F238E27FC236}">
+                  <a16:creationId xmlns:a16="http://schemas.microsoft.com/office/drawing/2014/main" id="{0760B1A1-574B-BF87-1EAF-0F6F49CB9D35}"/>
+                </a:ext>
+              </a:extLst>
+            </p:cNvPr>
+            <p:cNvGrpSpPr/>
+            <p:nvPr/>
+          </p:nvGrpSpPr>
+          <p:grpSpPr>
+            <a:xfrm>
+              <a:off x="9296400" y="4152899"/>
+              <a:ext cx="1800000" cy="1800000"/>
+              <a:chOff x="9296400" y="4152899"/>
+              <a:chExt cx="1800000" cy="1800000"/>
+            </a:xfrm>
+          </p:grpSpPr>
+          <p:sp>
+            <p:nvSpPr>
+              <p:cNvPr id="2" name="타원 1">
+                <a:extLst>
+                  <a:ext uri="{FF2B5EF4-FFF2-40B4-BE49-F238E27FC236}">
+                    <a16:creationId xmlns:a16="http://schemas.microsoft.com/office/drawing/2014/main" id="{940A863A-141A-20BE-63C7-5B31BDCC5F50}"/>
+                  </a:ext>
+                </a:extLst>
+              </p:cNvPr>
+              <p:cNvSpPr>
+                <a:spLocks noChangeAspect="1"/>
+              </p:cNvSpPr>
+              <p:nvPr/>
+            </p:nvSpPr>
+            <p:spPr>
+              <a:xfrm>
+                <a:off x="9296400" y="4152899"/>
+                <a:ext cx="1800000" cy="1800000"/>
+              </a:xfrm>
+              <a:prstGeom prst="ellipse">
+                <a:avLst/>
+              </a:prstGeom>
+              <a:noFill/>
+            </p:spPr>
+            <p:style>
+              <a:lnRef idx="2">
+                <a:schemeClr val="accent1">
+                  <a:shade val="15000"/>
+                </a:schemeClr>
+              </a:lnRef>
+              <a:fillRef idx="1">
+                <a:schemeClr val="accent1"/>
+              </a:fillRef>
+              <a:effectRef idx="0">
+                <a:schemeClr val="accent1"/>
+              </a:effectRef>
+              <a:fontRef idx="minor">
+                <a:schemeClr val="lt1"/>
+              </a:fontRef>
+            </p:style>
+            <p:txBody>
+              <a:bodyPr rtlCol="0" anchor="ctr"/>
+              <a:lstStyle/>
+              <a:p>
+                <a:pPr algn="ctr"/>
+                <a:endParaRPr lang="ko-KR" altLang="en-US" dirty="0"/>
+              </a:p>
+            </p:txBody>
+          </p:sp>
+          <p:cxnSp>
+            <p:nvCxnSpPr>
+              <p:cNvPr id="4" name="직선 연결선 3">
+                <a:extLst>
+                  <a:ext uri="{FF2B5EF4-FFF2-40B4-BE49-F238E27FC236}">
+                    <a16:creationId xmlns:a16="http://schemas.microsoft.com/office/drawing/2014/main" id="{0E77409B-5D0E-BA22-B6FB-F6910BE51611}"/>
+                  </a:ext>
+                </a:extLst>
+              </p:cNvPr>
+              <p:cNvCxnSpPr>
+                <a:cxnSpLocks/>
+                <a:stCxn id="2" idx="7"/>
+                <a:endCxn id="2" idx="3"/>
+              </p:cNvCxnSpPr>
+              <p:nvPr/>
+            </p:nvCxnSpPr>
+            <p:spPr>
+              <a:xfrm flipH="1">
+                <a:off x="9560004" y="4416503"/>
+                <a:ext cx="1272792" cy="1272792"/>
+              </a:xfrm>
+              <a:prstGeom prst="line">
+                <a:avLst/>
+              </a:prstGeom>
+            </p:spPr>
+            <p:style>
+              <a:lnRef idx="2">
+                <a:schemeClr val="dk1"/>
+              </a:lnRef>
+              <a:fillRef idx="0">
+                <a:schemeClr val="dk1"/>
+              </a:fillRef>
+              <a:effectRef idx="1">
+                <a:schemeClr val="dk1"/>
+              </a:effectRef>
+              <a:fontRef idx="minor">
+                <a:schemeClr val="tx1"/>
+              </a:fontRef>
+            </p:style>
+          </p:cxnSp>
+          <p:cxnSp>
+            <p:nvCxnSpPr>
+              <p:cNvPr id="10" name="직선 연결선 9">
+                <a:extLst>
+                  <a:ext uri="{FF2B5EF4-FFF2-40B4-BE49-F238E27FC236}">
+                    <a16:creationId xmlns:a16="http://schemas.microsoft.com/office/drawing/2014/main" id="{3878F559-F996-2BF9-9077-9F2B227822B9}"/>
+                  </a:ext>
+                </a:extLst>
+              </p:cNvPr>
+              <p:cNvCxnSpPr>
+                <a:cxnSpLocks/>
+                <a:stCxn id="2" idx="1"/>
+                <a:endCxn id="2" idx="5"/>
+              </p:cNvCxnSpPr>
+              <p:nvPr/>
+            </p:nvCxnSpPr>
+            <p:spPr>
+              <a:xfrm>
+                <a:off x="9560004" y="4416503"/>
+                <a:ext cx="1272792" cy="1272792"/>
+              </a:xfrm>
+              <a:prstGeom prst="line">
+                <a:avLst/>
+              </a:prstGeom>
+            </p:spPr>
+            <p:style>
+              <a:lnRef idx="2">
+                <a:schemeClr val="dk1"/>
+              </a:lnRef>
+              <a:fillRef idx="0">
+                <a:schemeClr val="dk1"/>
+              </a:fillRef>
+              <a:effectRef idx="1">
+                <a:schemeClr val="dk1"/>
+              </a:effectRef>
+              <a:fontRef idx="minor">
+                <a:schemeClr val="tx1"/>
+              </a:fontRef>
+            </p:style>
+          </p:cxnSp>
+          <p:sp>
+            <p:nvSpPr>
+              <p:cNvPr id="13" name="TextBox 12">
+                <a:extLst>
+                  <a:ext uri="{FF2B5EF4-FFF2-40B4-BE49-F238E27FC236}">
+                    <a16:creationId xmlns:a16="http://schemas.microsoft.com/office/drawing/2014/main" id="{5E738979-EB42-6A9B-BFD2-397BFCCDF04C}"/>
+                  </a:ext>
+                </a:extLst>
+              </p:cNvPr>
+              <p:cNvSpPr txBox="1"/>
+              <p:nvPr/>
+            </p:nvSpPr>
+            <p:spPr>
+              <a:xfrm>
+                <a:off x="9988651" y="4279462"/>
+                <a:ext cx="415498" cy="369332"/>
+              </a:xfrm>
+              <a:prstGeom prst="rect">
+                <a:avLst/>
+              </a:prstGeom>
+              <a:noFill/>
+            </p:spPr>
+            <p:txBody>
+              <a:bodyPr wrap="none" rtlCol="0">
+                <a:spAutoFit/>
+              </a:bodyPr>
+              <a:lstStyle/>
+              <a:p>
+                <a:r>
+                  <a:rPr lang="ko-KR" altLang="en-US" dirty="0"/>
+                  <a:t>▲</a:t>
+                </a:r>
+              </a:p>
+            </p:txBody>
+          </p:sp>
+          <p:sp>
+            <p:nvSpPr>
+              <p:cNvPr id="14" name="TextBox 13">
+                <a:extLst>
+                  <a:ext uri="{FF2B5EF4-FFF2-40B4-BE49-F238E27FC236}">
+                    <a16:creationId xmlns:a16="http://schemas.microsoft.com/office/drawing/2014/main" id="{CFE68E84-1F2A-7B5E-A875-E70DC4F1EA59}"/>
+                  </a:ext>
+                </a:extLst>
+              </p:cNvPr>
+              <p:cNvSpPr txBox="1"/>
+              <p:nvPr/>
+            </p:nvSpPr>
+            <p:spPr>
+              <a:xfrm>
+                <a:off x="9988651" y="5437954"/>
+                <a:ext cx="415498" cy="369332"/>
+              </a:xfrm>
+              <a:prstGeom prst="rect">
+                <a:avLst/>
+              </a:prstGeom>
+              <a:noFill/>
+            </p:spPr>
+            <p:txBody>
+              <a:bodyPr wrap="none" rtlCol="0">
+                <a:spAutoFit/>
+              </a:bodyPr>
+              <a:lstStyle/>
+              <a:p>
+                <a:r>
+                  <a:rPr lang="ko-KR" altLang="en-US" dirty="0"/>
+                  <a:t>▼</a:t>
+                </a:r>
+              </a:p>
+            </p:txBody>
+          </p:sp>
+          <p:sp>
+            <p:nvSpPr>
+              <p:cNvPr id="15" name="TextBox 14">
+                <a:extLst>
+                  <a:ext uri="{FF2B5EF4-FFF2-40B4-BE49-F238E27FC236}">
+                    <a16:creationId xmlns:a16="http://schemas.microsoft.com/office/drawing/2014/main" id="{700AA437-45A1-221A-A8D3-287AD1FC3FE2}"/>
+                  </a:ext>
+                </a:extLst>
+              </p:cNvPr>
+              <p:cNvSpPr txBox="1"/>
+              <p:nvPr/>
+            </p:nvSpPr>
+            <p:spPr>
+              <a:xfrm>
+                <a:off x="9399880" y="4868233"/>
+                <a:ext cx="415498" cy="369332"/>
+              </a:xfrm>
+              <a:prstGeom prst="rect">
+                <a:avLst/>
+              </a:prstGeom>
+              <a:noFill/>
+            </p:spPr>
+            <p:txBody>
+              <a:bodyPr wrap="none" rtlCol="0">
+                <a:spAutoFit/>
+              </a:bodyPr>
+              <a:lstStyle/>
+              <a:p>
+                <a:r>
+                  <a:rPr lang="ko-KR" altLang="en-US" dirty="0"/>
+                  <a:t>◀</a:t>
+                </a:r>
+              </a:p>
+            </p:txBody>
+          </p:sp>
+          <p:sp>
+            <p:nvSpPr>
+              <p:cNvPr id="16" name="TextBox 15">
+                <a:extLst>
+                  <a:ext uri="{FF2B5EF4-FFF2-40B4-BE49-F238E27FC236}">
+                    <a16:creationId xmlns:a16="http://schemas.microsoft.com/office/drawing/2014/main" id="{4D41E73D-791E-6F05-99A3-16D0543B1692}"/>
+                  </a:ext>
+                </a:extLst>
+              </p:cNvPr>
+              <p:cNvSpPr txBox="1"/>
+              <p:nvPr/>
+            </p:nvSpPr>
+            <p:spPr>
+              <a:xfrm>
+                <a:off x="10577422" y="4828948"/>
+                <a:ext cx="415498" cy="369332"/>
+              </a:xfrm>
+              <a:prstGeom prst="rect">
+                <a:avLst/>
+              </a:prstGeom>
+              <a:noFill/>
+            </p:spPr>
+            <p:txBody>
+              <a:bodyPr wrap="none" rtlCol="0">
+                <a:spAutoFit/>
+              </a:bodyPr>
+              <a:lstStyle/>
+              <a:p>
+                <a:r>
+                  <a:rPr lang="ko-KR" altLang="en-US" dirty="0"/>
+                  <a:t>▶</a:t>
+                </a:r>
+              </a:p>
+            </p:txBody>
+          </p:sp>
+          <p:sp>
+            <p:nvSpPr>
+              <p:cNvPr id="19" name="타원 18">
+                <a:extLst>
+                  <a:ext uri="{FF2B5EF4-FFF2-40B4-BE49-F238E27FC236}">
+                    <a16:creationId xmlns:a16="http://schemas.microsoft.com/office/drawing/2014/main" id="{B4BDE9A3-1489-2E10-E059-E162088F2B60}"/>
+                  </a:ext>
+                </a:extLst>
+              </p:cNvPr>
+              <p:cNvSpPr>
+                <a:spLocks noChangeAspect="1"/>
+              </p:cNvSpPr>
+              <p:nvPr/>
+            </p:nvSpPr>
+            <p:spPr>
+              <a:xfrm>
+                <a:off x="9476400" y="4332899"/>
+                <a:ext cx="1440000" cy="1440000"/>
+              </a:xfrm>
+              <a:prstGeom prst="ellipse">
+                <a:avLst/>
+              </a:prstGeom>
+              <a:noFill/>
+            </p:spPr>
+            <p:style>
+              <a:lnRef idx="2">
+                <a:schemeClr val="accent1">
+                  <a:shade val="15000"/>
+                </a:schemeClr>
+              </a:lnRef>
+              <a:fillRef idx="1">
+                <a:schemeClr val="accent1"/>
+              </a:fillRef>
+              <a:effectRef idx="0">
+                <a:schemeClr val="accent1"/>
+              </a:effectRef>
+              <a:fontRef idx="minor">
+                <a:schemeClr val="lt1"/>
+              </a:fontRef>
+            </p:style>
+            <p:txBody>
+              <a:bodyPr rtlCol="0" anchor="ctr"/>
+              <a:lstStyle/>
+              <a:p>
+                <a:pPr algn="ctr"/>
+                <a:endParaRPr lang="ko-KR" altLang="en-US" dirty="0"/>
+              </a:p>
+            </p:txBody>
+          </p:sp>
+        </p:grpSp>
+        <p:sp>
+          <p:nvSpPr>
+            <p:cNvPr id="21" name="타원 20">
+              <a:extLst>
+                <a:ext uri="{FF2B5EF4-FFF2-40B4-BE49-F238E27FC236}">
+                  <a16:creationId xmlns:a16="http://schemas.microsoft.com/office/drawing/2014/main" id="{4ADE8DDE-A324-0159-13DB-FE59C7413B15}"/>
+                </a:ext>
+              </a:extLst>
+            </p:cNvPr>
+            <p:cNvSpPr>
+              <a:spLocks noChangeAspect="1"/>
+            </p:cNvSpPr>
+            <p:nvPr/>
+          </p:nvSpPr>
+          <p:spPr>
+            <a:xfrm>
+              <a:off x="10033822" y="4865854"/>
+              <a:ext cx="360000" cy="360000"/>
+            </a:xfrm>
+            <a:prstGeom prst="ellipse">
+              <a:avLst/>
+            </a:prstGeom>
+            <a:solidFill>
+              <a:schemeClr val="bg2">
+                <a:alpha val="50000"/>
+              </a:schemeClr>
+            </a:solidFill>
+            <a:ln>
+              <a:solidFill>
+                <a:schemeClr val="tx1"/>
+              </a:solidFill>
+            </a:ln>
+          </p:spPr>
+          <p:style>
+            <a:lnRef idx="2">
+              <a:schemeClr val="accent1">
+                <a:shade val="15000"/>
+              </a:schemeClr>
+            </a:lnRef>
+            <a:fillRef idx="1">
+              <a:schemeClr val="accent1"/>
+            </a:fillRef>
+            <a:effectRef idx="0">
+              <a:schemeClr val="accent1"/>
+            </a:effectRef>
+            <a:fontRef idx="minor">
+              <a:schemeClr val="lt1"/>
+            </a:fontRef>
+          </p:style>
+          <p:txBody>
+            <a:bodyPr rtlCol="0" anchor="ctr"/>
+            <a:lstStyle/>
+            <a:p>
+              <a:pPr algn="ctr"/>
+              <a:endParaRPr lang="ko-KR" altLang="en-US" dirty="0"/>
+            </a:p>
+          </p:txBody>
+        </p:sp>
+      </p:grpSp>
+      <p:grpSp>
+        <p:nvGrpSpPr>
+          <p:cNvPr id="95" name="그룹 94">
+            <a:extLst>
+              <a:ext uri="{FF2B5EF4-FFF2-40B4-BE49-F238E27FC236}">
+                <a16:creationId xmlns:a16="http://schemas.microsoft.com/office/drawing/2014/main" id="{FE8A5528-A6DD-3FC5-0708-CD09243254DA}"/>
+              </a:ext>
+            </a:extLst>
+          </p:cNvPr>
+          <p:cNvGrpSpPr/>
+          <p:nvPr/>
+        </p:nvGrpSpPr>
+        <p:grpSpPr>
+          <a:xfrm>
+            <a:off x="2862181" y="5502193"/>
+            <a:ext cx="6034244" cy="413049"/>
+            <a:chOff x="2223232" y="5433771"/>
+            <a:chExt cx="6034244" cy="413049"/>
+          </a:xfrm>
+        </p:grpSpPr>
+        <p:sp>
+          <p:nvSpPr>
+            <p:cNvPr id="68" name="직사각형 67">
+              <a:extLst>
+                <a:ext uri="{FF2B5EF4-FFF2-40B4-BE49-F238E27FC236}">
+                  <a16:creationId xmlns:a16="http://schemas.microsoft.com/office/drawing/2014/main" id="{27D0304C-E847-D0F1-C76A-73097A700D63}"/>
+                </a:ext>
+              </a:extLst>
+            </p:cNvPr>
+            <p:cNvSpPr/>
+            <p:nvPr/>
+          </p:nvSpPr>
+          <p:spPr>
+            <a:xfrm>
+              <a:off x="2223232" y="5743665"/>
+              <a:ext cx="6034244" cy="103155"/>
+            </a:xfrm>
+            <a:prstGeom prst="rect">
+              <a:avLst/>
+            </a:prstGeom>
+            <a:solidFill>
+              <a:srgbClr val="FF0000"/>
+            </a:solidFill>
+          </p:spPr>
+          <p:style>
+            <a:lnRef idx="2">
+              <a:schemeClr val="accent1">
+                <a:shade val="15000"/>
+              </a:schemeClr>
+            </a:lnRef>
+            <a:fillRef idx="1">
+              <a:schemeClr val="accent1"/>
+            </a:fillRef>
+            <a:effectRef idx="0">
+              <a:schemeClr val="accent1"/>
+            </a:effectRef>
+            <a:fontRef idx="minor">
+              <a:schemeClr val="lt1"/>
+            </a:fontRef>
+          </p:style>
+          <p:txBody>
+            <a:bodyPr rtlCol="0" anchor="ctr"/>
+            <a:lstStyle/>
+            <a:p>
+              <a:pPr algn="ctr"/>
+              <a:endParaRPr lang="ko-KR" altLang="en-US"/>
+            </a:p>
+          </p:txBody>
+        </p:sp>
+        <p:sp>
+          <p:nvSpPr>
+            <p:cNvPr id="70" name="TextBox 69">
+              <a:extLst>
+                <a:ext uri="{FF2B5EF4-FFF2-40B4-BE49-F238E27FC236}">
+                  <a16:creationId xmlns:a16="http://schemas.microsoft.com/office/drawing/2014/main" id="{9A06719D-7C34-F7B9-B322-E70469EE96F2}"/>
+                </a:ext>
+              </a:extLst>
+            </p:cNvPr>
+            <p:cNvSpPr txBox="1"/>
+            <p:nvPr/>
+          </p:nvSpPr>
+          <p:spPr>
+            <a:xfrm>
+              <a:off x="4732524" y="5433771"/>
+              <a:ext cx="965329" cy="307777"/>
+            </a:xfrm>
+            <a:prstGeom prst="rect">
+              <a:avLst/>
+            </a:prstGeom>
+            <a:noFill/>
+          </p:spPr>
+          <p:txBody>
+            <a:bodyPr wrap="none" rtlCol="0">
+              <a:spAutoFit/>
+            </a:bodyPr>
+            <a:lstStyle/>
+            <a:p>
+              <a:r>
+                <a:rPr lang="ko-KR" altLang="en-US" sz="1400" dirty="0"/>
+                <a:t>보스 이름</a:t>
+              </a:r>
+            </a:p>
+          </p:txBody>
+        </p:sp>
+      </p:grpSp>
+      <p:sp>
+        <p:nvSpPr>
+          <p:cNvPr id="83" name="타원 82">
+            <a:extLst>
+              <a:ext uri="{FF2B5EF4-FFF2-40B4-BE49-F238E27FC236}">
+                <a16:creationId xmlns:a16="http://schemas.microsoft.com/office/drawing/2014/main" id="{49EB759A-2559-FC3F-0527-D2E332CC0E94}"/>
+              </a:ext>
+            </a:extLst>
+          </p:cNvPr>
+          <p:cNvSpPr/>
+          <p:nvPr/>
+        </p:nvSpPr>
+        <p:spPr>
+          <a:xfrm>
+            <a:off x="10579070" y="657576"/>
+            <a:ext cx="540000" cy="540000"/>
+          </a:xfrm>
+          <a:prstGeom prst="ellipse">
+            <a:avLst/>
+          </a:prstGeom>
+          <a:solidFill>
+            <a:schemeClr val="bg2">
+              <a:lumMod val="90000"/>
+            </a:schemeClr>
+          </a:solidFill>
+        </p:spPr>
+        <p:style>
+          <a:lnRef idx="2">
+            <a:schemeClr val="accent1">
+              <a:shade val="15000"/>
+            </a:schemeClr>
+          </a:lnRef>
+          <a:fillRef idx="1">
+            <a:schemeClr val="accent1"/>
+          </a:fillRef>
+          <a:effectRef idx="0">
+            <a:schemeClr val="accent1"/>
+          </a:effectRef>
+          <a:fontRef idx="minor">
+            <a:schemeClr val="lt1"/>
+          </a:fontRef>
+        </p:style>
+        <p:txBody>
+          <a:bodyPr rtlCol="0" anchor="ctr"/>
+          <a:lstStyle/>
+          <a:p>
+            <a:pPr algn="ctr"/>
+            <a:endParaRPr lang="ko-KR" altLang="en-US"/>
+          </a:p>
+        </p:txBody>
+      </p:sp>
+      <p:sp>
+        <p:nvSpPr>
+          <p:cNvPr id="90" name="TextBox 89">
+            <a:extLst>
+              <a:ext uri="{FF2B5EF4-FFF2-40B4-BE49-F238E27FC236}">
+                <a16:creationId xmlns:a16="http://schemas.microsoft.com/office/drawing/2014/main" id="{58A94CE1-F28E-9F85-DC37-9D21AF545461}"/>
+              </a:ext>
+            </a:extLst>
+          </p:cNvPr>
+          <p:cNvSpPr txBox="1"/>
+          <p:nvPr/>
+        </p:nvSpPr>
+        <p:spPr>
+          <a:xfrm>
+            <a:off x="0" y="67859"/>
+            <a:ext cx="958917" cy="369332"/>
+          </a:xfrm>
+          <a:prstGeom prst="rect">
+            <a:avLst/>
+          </a:prstGeom>
+          <a:noFill/>
+        </p:spPr>
+        <p:txBody>
+          <a:bodyPr wrap="none" rtlCol="0">
+            <a:spAutoFit/>
+          </a:bodyPr>
+          <a:lstStyle/>
+          <a:p>
+            <a:r>
+              <a:rPr lang="ko-KR" altLang="en-US" dirty="0"/>
+              <a:t>게임 씬</a:t>
+            </a:r>
+            <a:endParaRPr lang="en-US" altLang="ko-KR" dirty="0"/>
+          </a:p>
+        </p:txBody>
+      </p:sp>
+      <p:sp>
+        <p:nvSpPr>
+          <p:cNvPr id="93" name="TextBox 92">
+            <a:extLst>
+              <a:ext uri="{FF2B5EF4-FFF2-40B4-BE49-F238E27FC236}">
+                <a16:creationId xmlns:a16="http://schemas.microsoft.com/office/drawing/2014/main" id="{0FAEE7B3-CB02-20B1-70B3-56A5BDFB8F72}"/>
+              </a:ext>
+            </a:extLst>
+          </p:cNvPr>
+          <p:cNvSpPr txBox="1"/>
+          <p:nvPr/>
+        </p:nvSpPr>
+        <p:spPr>
+          <a:xfrm>
+            <a:off x="9607865" y="115243"/>
+            <a:ext cx="1651414" cy="369332"/>
+          </a:xfrm>
+          <a:prstGeom prst="rect">
+            <a:avLst/>
+          </a:prstGeom>
+          <a:noFill/>
+        </p:spPr>
+        <p:txBody>
+          <a:bodyPr wrap="none" rtlCol="0">
+            <a:spAutoFit/>
+          </a:bodyPr>
+          <a:lstStyle/>
+          <a:p>
+            <a:r>
+              <a:rPr lang="ko-KR" altLang="en-US" dirty="0"/>
+              <a:t>시스템 아이콘</a:t>
+            </a:r>
+          </a:p>
+        </p:txBody>
+      </p:sp>
+      <p:sp>
+        <p:nvSpPr>
+          <p:cNvPr id="104" name="TextBox 103">
+            <a:extLst>
+              <a:ext uri="{FF2B5EF4-FFF2-40B4-BE49-F238E27FC236}">
+                <a16:creationId xmlns:a16="http://schemas.microsoft.com/office/drawing/2014/main" id="{00D9F1A1-14FB-7D80-C98C-C9F7899BAC94}"/>
+              </a:ext>
+            </a:extLst>
+          </p:cNvPr>
+          <p:cNvSpPr txBox="1"/>
+          <p:nvPr/>
+        </p:nvSpPr>
+        <p:spPr>
+          <a:xfrm>
+            <a:off x="237495" y="4452961"/>
+            <a:ext cx="646331" cy="369332"/>
+          </a:xfrm>
+          <a:prstGeom prst="rect">
+            <a:avLst/>
+          </a:prstGeom>
+          <a:noFill/>
+        </p:spPr>
+        <p:txBody>
+          <a:bodyPr wrap="none" rtlCol="0">
+            <a:spAutoFit/>
+          </a:bodyPr>
+          <a:lstStyle/>
+          <a:p>
+            <a:r>
+              <a:rPr lang="ko-KR" altLang="en-US" dirty="0"/>
+              <a:t>스킬</a:t>
+            </a:r>
+          </a:p>
+        </p:txBody>
+      </p:sp>
+      <p:grpSp>
+        <p:nvGrpSpPr>
+          <p:cNvPr id="48" name="그룹 47">
+            <a:extLst>
+              <a:ext uri="{FF2B5EF4-FFF2-40B4-BE49-F238E27FC236}">
+                <a16:creationId xmlns:a16="http://schemas.microsoft.com/office/drawing/2014/main" id="{73A5BE72-89FD-7EF0-D7B7-A9D7F5A0D7BD}"/>
+              </a:ext>
+            </a:extLst>
+          </p:cNvPr>
+          <p:cNvGrpSpPr/>
+          <p:nvPr/>
+        </p:nvGrpSpPr>
+        <p:grpSpPr>
+          <a:xfrm>
+            <a:off x="1334347" y="896744"/>
+            <a:ext cx="1494486" cy="276948"/>
+            <a:chOff x="990455" y="896744"/>
+            <a:chExt cx="1838378" cy="276948"/>
+          </a:xfrm>
+        </p:grpSpPr>
+        <p:sp>
+          <p:nvSpPr>
+            <p:cNvPr id="24" name="직사각형 23">
+              <a:extLst>
+                <a:ext uri="{FF2B5EF4-FFF2-40B4-BE49-F238E27FC236}">
+                  <a16:creationId xmlns:a16="http://schemas.microsoft.com/office/drawing/2014/main" id="{B4505F1E-8395-AA6C-0A12-743B1CB743B2}"/>
+                </a:ext>
+              </a:extLst>
+            </p:cNvPr>
+            <p:cNvSpPr/>
+            <p:nvPr/>
+          </p:nvSpPr>
+          <p:spPr>
+            <a:xfrm>
+              <a:off x="990457" y="896744"/>
+              <a:ext cx="742710" cy="276948"/>
+            </a:xfrm>
+            <a:prstGeom prst="rect">
+              <a:avLst/>
+            </a:prstGeom>
+            <a:solidFill>
+              <a:schemeClr val="accent1">
+                <a:lumMod val="60000"/>
+                <a:lumOff val="40000"/>
+              </a:schemeClr>
+            </a:solidFill>
+            <a:ln>
+              <a:noFill/>
+            </a:ln>
+          </p:spPr>
+          <p:style>
+            <a:lnRef idx="2">
+              <a:schemeClr val="accent1">
+                <a:shade val="15000"/>
+              </a:schemeClr>
+            </a:lnRef>
+            <a:fillRef idx="1">
+              <a:schemeClr val="accent1"/>
+            </a:fillRef>
+            <a:effectRef idx="0">
+              <a:schemeClr val="accent1"/>
+            </a:effectRef>
+            <a:fontRef idx="minor">
+              <a:schemeClr val="lt1"/>
+            </a:fontRef>
+          </p:style>
+          <p:txBody>
+            <a:bodyPr rtlCol="0" anchor="ctr"/>
+            <a:lstStyle/>
+            <a:p>
+              <a:pPr algn="ctr"/>
+              <a:endParaRPr lang="ko-KR" altLang="en-US"/>
+            </a:p>
+          </p:txBody>
+        </p:sp>
+        <p:sp>
+          <p:nvSpPr>
+            <p:cNvPr id="12" name="직사각형 11">
+              <a:extLst>
+                <a:ext uri="{FF2B5EF4-FFF2-40B4-BE49-F238E27FC236}">
+                  <a16:creationId xmlns:a16="http://schemas.microsoft.com/office/drawing/2014/main" id="{0A398828-E2AD-E597-CABC-92C6F3976716}"/>
+                </a:ext>
+              </a:extLst>
+            </p:cNvPr>
+            <p:cNvSpPr/>
+            <p:nvPr/>
+          </p:nvSpPr>
+          <p:spPr>
+            <a:xfrm>
+              <a:off x="990456" y="896744"/>
+              <a:ext cx="1838377" cy="276948"/>
+            </a:xfrm>
+            <a:prstGeom prst="rect">
+              <a:avLst/>
+            </a:prstGeom>
+            <a:solidFill>
+              <a:schemeClr val="accent1">
+                <a:lumMod val="60000"/>
+                <a:lumOff val="40000"/>
+                <a:alpha val="10000"/>
+              </a:schemeClr>
+            </a:solidFill>
+            <a:ln>
+              <a:solidFill>
+                <a:schemeClr val="tx1"/>
+              </a:solidFill>
+            </a:ln>
+          </p:spPr>
+          <p:style>
+            <a:lnRef idx="2">
+              <a:schemeClr val="accent1">
+                <a:shade val="15000"/>
+              </a:schemeClr>
+            </a:lnRef>
+            <a:fillRef idx="1">
+              <a:schemeClr val="accent1"/>
+            </a:fillRef>
+            <a:effectRef idx="0">
+              <a:schemeClr val="accent1"/>
+            </a:effectRef>
+            <a:fontRef idx="minor">
+              <a:schemeClr val="lt1"/>
+            </a:fontRef>
+          </p:style>
+          <p:txBody>
+            <a:bodyPr rtlCol="0" anchor="ctr"/>
+            <a:lstStyle/>
+            <a:p>
+              <a:pPr algn="ctr"/>
+              <a:endParaRPr lang="ko-KR" altLang="en-US"/>
+            </a:p>
+          </p:txBody>
+        </p:sp>
+        <p:sp>
+          <p:nvSpPr>
+            <p:cNvPr id="40" name="TextBox 39">
+              <a:extLst>
+                <a:ext uri="{FF2B5EF4-FFF2-40B4-BE49-F238E27FC236}">
+                  <a16:creationId xmlns:a16="http://schemas.microsoft.com/office/drawing/2014/main" id="{C06FC48E-B735-28B2-7EDA-BBFC4F36264D}"/>
+                </a:ext>
+              </a:extLst>
+            </p:cNvPr>
+            <p:cNvSpPr txBox="1"/>
+            <p:nvPr/>
+          </p:nvSpPr>
+          <p:spPr>
+            <a:xfrm>
+              <a:off x="990455" y="904035"/>
+              <a:ext cx="1838377" cy="261610"/>
+            </a:xfrm>
+            <a:prstGeom prst="rect">
+              <a:avLst/>
+            </a:prstGeom>
+            <a:noFill/>
+          </p:spPr>
+          <p:txBody>
+            <a:bodyPr wrap="square" rtlCol="0">
+              <a:spAutoFit/>
+            </a:bodyPr>
+            <a:lstStyle/>
+            <a:p>
+              <a:pPr algn="ctr"/>
+              <a:r>
+                <a:rPr lang="en-US" altLang="ko-KR" sz="1100" b="1" dirty="0"/>
+                <a:t>100 / 40</a:t>
+              </a:r>
+              <a:endParaRPr lang="ko-KR" altLang="en-US" sz="1100" b="1" dirty="0"/>
+            </a:p>
+          </p:txBody>
+        </p:sp>
+      </p:grpSp>
+      <p:grpSp>
+        <p:nvGrpSpPr>
+          <p:cNvPr id="45" name="그룹 44">
+            <a:extLst>
+              <a:ext uri="{FF2B5EF4-FFF2-40B4-BE49-F238E27FC236}">
+                <a16:creationId xmlns:a16="http://schemas.microsoft.com/office/drawing/2014/main" id="{7DFA5A94-E011-2472-B93C-0EFDF63F77BC}"/>
+              </a:ext>
+            </a:extLst>
+          </p:cNvPr>
+          <p:cNvGrpSpPr/>
+          <p:nvPr/>
+        </p:nvGrpSpPr>
+        <p:grpSpPr>
+          <a:xfrm>
+            <a:off x="1334347" y="618534"/>
+            <a:ext cx="1494486" cy="276948"/>
+            <a:chOff x="990455" y="618534"/>
+            <a:chExt cx="1838378" cy="276948"/>
+          </a:xfrm>
+        </p:grpSpPr>
+        <p:sp>
+          <p:nvSpPr>
+            <p:cNvPr id="18" name="직사각형 17">
+              <a:extLst>
+                <a:ext uri="{FF2B5EF4-FFF2-40B4-BE49-F238E27FC236}">
+                  <a16:creationId xmlns:a16="http://schemas.microsoft.com/office/drawing/2014/main" id="{9DA2DAB7-D31F-42A2-6557-8E3A909FC581}"/>
+                </a:ext>
+              </a:extLst>
+            </p:cNvPr>
+            <p:cNvSpPr/>
+            <p:nvPr/>
+          </p:nvSpPr>
+          <p:spPr>
+            <a:xfrm>
+              <a:off x="990457" y="618534"/>
+              <a:ext cx="1174698" cy="276948"/>
+            </a:xfrm>
+            <a:prstGeom prst="rect">
+              <a:avLst/>
+            </a:prstGeom>
+            <a:solidFill>
+              <a:srgbClr val="FF0000"/>
+            </a:solidFill>
+            <a:ln>
+              <a:noFill/>
+            </a:ln>
+          </p:spPr>
+          <p:style>
+            <a:lnRef idx="2">
+              <a:schemeClr val="accent1">
+                <a:shade val="15000"/>
+              </a:schemeClr>
+            </a:lnRef>
+            <a:fillRef idx="1">
+              <a:schemeClr val="accent1"/>
+            </a:fillRef>
+            <a:effectRef idx="0">
+              <a:schemeClr val="accent1"/>
+            </a:effectRef>
+            <a:fontRef idx="minor">
+              <a:schemeClr val="lt1"/>
+            </a:fontRef>
+          </p:style>
+          <p:txBody>
+            <a:bodyPr rtlCol="0" anchor="ctr"/>
+            <a:lstStyle/>
+            <a:p>
+              <a:pPr algn="ctr"/>
+              <a:endParaRPr lang="ko-KR" altLang="en-US"/>
+            </a:p>
+          </p:txBody>
+        </p:sp>
+        <p:sp>
+          <p:nvSpPr>
+            <p:cNvPr id="6" name="직사각형 5">
+              <a:extLst>
+                <a:ext uri="{FF2B5EF4-FFF2-40B4-BE49-F238E27FC236}">
+                  <a16:creationId xmlns:a16="http://schemas.microsoft.com/office/drawing/2014/main" id="{58CD3CBE-E9C9-C4DD-0C69-5BAC2BA05378}"/>
+                </a:ext>
+              </a:extLst>
+            </p:cNvPr>
+            <p:cNvSpPr/>
+            <p:nvPr/>
+          </p:nvSpPr>
+          <p:spPr>
+            <a:xfrm>
+              <a:off x="990456" y="618534"/>
+              <a:ext cx="1838377" cy="276948"/>
+            </a:xfrm>
+            <a:prstGeom prst="rect">
+              <a:avLst/>
+            </a:prstGeom>
+            <a:solidFill>
+              <a:srgbClr val="FF0000">
+                <a:alpha val="10000"/>
+              </a:srgbClr>
+            </a:solidFill>
+            <a:ln>
+              <a:solidFill>
+                <a:schemeClr val="tx1"/>
+              </a:solidFill>
+            </a:ln>
+          </p:spPr>
+          <p:style>
+            <a:lnRef idx="2">
+              <a:schemeClr val="accent1">
+                <a:shade val="15000"/>
+              </a:schemeClr>
+            </a:lnRef>
+            <a:fillRef idx="1">
+              <a:schemeClr val="accent1"/>
+            </a:fillRef>
+            <a:effectRef idx="0">
+              <a:schemeClr val="accent1"/>
+            </a:effectRef>
+            <a:fontRef idx="minor">
+              <a:schemeClr val="lt1"/>
+            </a:fontRef>
+          </p:style>
+          <p:txBody>
+            <a:bodyPr rtlCol="0" anchor="ctr"/>
+            <a:lstStyle/>
+            <a:p>
+              <a:pPr algn="ctr"/>
+              <a:endParaRPr lang="ko-KR" altLang="en-US"/>
+            </a:p>
+          </p:txBody>
+        </p:sp>
+        <p:sp>
+          <p:nvSpPr>
+            <p:cNvPr id="44" name="TextBox 43">
+              <a:extLst>
+                <a:ext uri="{FF2B5EF4-FFF2-40B4-BE49-F238E27FC236}">
+                  <a16:creationId xmlns:a16="http://schemas.microsoft.com/office/drawing/2014/main" id="{4CB1DBDD-5FF7-4E25-3A3D-8F02D84D3710}"/>
+                </a:ext>
+              </a:extLst>
+            </p:cNvPr>
+            <p:cNvSpPr txBox="1"/>
+            <p:nvPr/>
+          </p:nvSpPr>
+          <p:spPr>
+            <a:xfrm>
+              <a:off x="990455" y="626124"/>
+              <a:ext cx="1838377" cy="261610"/>
+            </a:xfrm>
+            <a:prstGeom prst="rect">
+              <a:avLst/>
+            </a:prstGeom>
+            <a:noFill/>
+          </p:spPr>
+          <p:txBody>
+            <a:bodyPr wrap="square" rtlCol="0">
+              <a:spAutoFit/>
+            </a:bodyPr>
+            <a:lstStyle/>
+            <a:p>
+              <a:pPr algn="ctr"/>
+              <a:r>
+                <a:rPr lang="en-US" altLang="ko-KR" sz="1100" b="1" dirty="0"/>
+                <a:t>100 / 75</a:t>
+              </a:r>
+            </a:p>
+          </p:txBody>
+        </p:sp>
+      </p:grpSp>
+      <p:sp>
+        <p:nvSpPr>
+          <p:cNvPr id="49" name="TextBox 48">
+            <a:extLst>
+              <a:ext uri="{FF2B5EF4-FFF2-40B4-BE49-F238E27FC236}">
+                <a16:creationId xmlns:a16="http://schemas.microsoft.com/office/drawing/2014/main" id="{FBF52B8C-9B48-F2CB-B3BF-1817BEE663FF}"/>
+              </a:ext>
+            </a:extLst>
+          </p:cNvPr>
+          <p:cNvSpPr txBox="1"/>
+          <p:nvPr/>
+        </p:nvSpPr>
+        <p:spPr>
+          <a:xfrm>
+            <a:off x="956851" y="603040"/>
+            <a:ext cx="433132" cy="307777"/>
+          </a:xfrm>
+          <a:prstGeom prst="rect">
+            <a:avLst/>
+          </a:prstGeom>
+          <a:noFill/>
+        </p:spPr>
+        <p:txBody>
+          <a:bodyPr wrap="none" rtlCol="0">
+            <a:spAutoFit/>
+          </a:bodyPr>
+          <a:lstStyle/>
+          <a:p>
+            <a:r>
+              <a:rPr lang="en-US" altLang="ko-KR" sz="1400" b="1" dirty="0"/>
+              <a:t>HP</a:t>
+            </a:r>
+            <a:endParaRPr lang="ko-KR" altLang="en-US" sz="1400" b="1" dirty="0"/>
+          </a:p>
+        </p:txBody>
+      </p:sp>
+      <p:sp>
+        <p:nvSpPr>
+          <p:cNvPr id="51" name="TextBox 50">
+            <a:extLst>
+              <a:ext uri="{FF2B5EF4-FFF2-40B4-BE49-F238E27FC236}">
+                <a16:creationId xmlns:a16="http://schemas.microsoft.com/office/drawing/2014/main" id="{C1463970-81D7-2564-0C1D-DDBCFEFADD04}"/>
+              </a:ext>
+            </a:extLst>
+          </p:cNvPr>
+          <p:cNvSpPr txBox="1"/>
+          <p:nvPr/>
+        </p:nvSpPr>
+        <p:spPr>
+          <a:xfrm>
+            <a:off x="9588698" y="6428000"/>
+            <a:ext cx="1189749" cy="369332"/>
+          </a:xfrm>
+          <a:prstGeom prst="rect">
+            <a:avLst/>
+          </a:prstGeom>
+          <a:noFill/>
+        </p:spPr>
+        <p:txBody>
+          <a:bodyPr wrap="none" rtlCol="0">
+            <a:spAutoFit/>
+          </a:bodyPr>
+          <a:lstStyle/>
+          <a:p>
+            <a:r>
+              <a:rPr lang="ko-KR" altLang="en-US"/>
+              <a:t>이동 패드</a:t>
+            </a:r>
+          </a:p>
+        </p:txBody>
+      </p:sp>
+      <p:sp>
+        <p:nvSpPr>
+          <p:cNvPr id="35" name="TextBox 34">
+            <a:extLst>
+              <a:ext uri="{FF2B5EF4-FFF2-40B4-BE49-F238E27FC236}">
+                <a16:creationId xmlns:a16="http://schemas.microsoft.com/office/drawing/2014/main" id="{6E30F830-FCD7-D063-5EFB-CA2E785FAC2A}"/>
+              </a:ext>
+            </a:extLst>
+          </p:cNvPr>
+          <p:cNvSpPr txBox="1"/>
+          <p:nvPr/>
+        </p:nvSpPr>
+        <p:spPr>
+          <a:xfrm>
+            <a:off x="885228" y="1155488"/>
+            <a:ext cx="511871" cy="307777"/>
+          </a:xfrm>
+          <a:prstGeom prst="rect">
+            <a:avLst/>
+          </a:prstGeom>
+          <a:noFill/>
+        </p:spPr>
+        <p:txBody>
+          <a:bodyPr wrap="none" rtlCol="0">
+            <a:spAutoFit/>
+          </a:bodyPr>
+          <a:lstStyle/>
+          <a:p>
+            <a:r>
+              <a:rPr lang="en-US" altLang="ko-KR" sz="1400" b="1" dirty="0"/>
+              <a:t>EXP</a:t>
+            </a:r>
+            <a:endParaRPr lang="ko-KR" altLang="en-US" sz="1400" b="1" dirty="0"/>
+          </a:p>
+        </p:txBody>
+      </p:sp>
+      <p:sp>
+        <p:nvSpPr>
+          <p:cNvPr id="42" name="TextBox 41">
+            <a:extLst>
+              <a:ext uri="{FF2B5EF4-FFF2-40B4-BE49-F238E27FC236}">
+                <a16:creationId xmlns:a16="http://schemas.microsoft.com/office/drawing/2014/main" id="{061B3255-7D87-EC32-428C-7B2124FEBEA0}"/>
+              </a:ext>
+            </a:extLst>
+          </p:cNvPr>
+          <p:cNvSpPr txBox="1"/>
+          <p:nvPr/>
+        </p:nvSpPr>
+        <p:spPr>
+          <a:xfrm>
+            <a:off x="243771" y="5621166"/>
+            <a:ext cx="646331" cy="369332"/>
+          </a:xfrm>
+          <a:prstGeom prst="rect">
+            <a:avLst/>
+          </a:prstGeom>
+          <a:noFill/>
+        </p:spPr>
+        <p:txBody>
+          <a:bodyPr wrap="none" rtlCol="0">
+            <a:spAutoFit/>
+          </a:bodyPr>
+          <a:lstStyle/>
+          <a:p>
+            <a:pPr algn="r"/>
+            <a:r>
+              <a:rPr lang="ko-KR" altLang="en-US" dirty="0"/>
+              <a:t>점멸</a:t>
+            </a:r>
+          </a:p>
+        </p:txBody>
+      </p:sp>
+      <p:sp>
+        <p:nvSpPr>
+          <p:cNvPr id="52" name="TextBox 51">
+            <a:extLst>
+              <a:ext uri="{FF2B5EF4-FFF2-40B4-BE49-F238E27FC236}">
+                <a16:creationId xmlns:a16="http://schemas.microsoft.com/office/drawing/2014/main" id="{FA64D6D3-31CE-0291-0229-71ED223DA003}"/>
+              </a:ext>
+            </a:extLst>
+          </p:cNvPr>
+          <p:cNvSpPr txBox="1"/>
+          <p:nvPr/>
+        </p:nvSpPr>
+        <p:spPr>
+          <a:xfrm>
+            <a:off x="237495" y="5050564"/>
+            <a:ext cx="646331" cy="369332"/>
+          </a:xfrm>
+          <a:prstGeom prst="rect">
+            <a:avLst/>
+          </a:prstGeom>
+          <a:noFill/>
+        </p:spPr>
+        <p:txBody>
+          <a:bodyPr wrap="none" rtlCol="0">
+            <a:spAutoFit/>
+          </a:bodyPr>
+          <a:lstStyle/>
+          <a:p>
+            <a:pPr algn="r"/>
+            <a:r>
+              <a:rPr lang="ko-KR" altLang="en-US" dirty="0"/>
+              <a:t>막기</a:t>
+            </a:r>
+          </a:p>
+        </p:txBody>
+      </p:sp>
+      <p:sp>
+        <p:nvSpPr>
+          <p:cNvPr id="72" name="타원 71">
+            <a:extLst>
+              <a:ext uri="{FF2B5EF4-FFF2-40B4-BE49-F238E27FC236}">
+                <a16:creationId xmlns:a16="http://schemas.microsoft.com/office/drawing/2014/main" id="{4A2056E7-20E4-F7F8-BF28-3BCD59195C6A}"/>
+              </a:ext>
+            </a:extLst>
+          </p:cNvPr>
+          <p:cNvSpPr>
+            <a:spLocks noChangeAspect="1"/>
+          </p:cNvSpPr>
+          <p:nvPr/>
+        </p:nvSpPr>
+        <p:spPr>
+          <a:xfrm>
+            <a:off x="9305365" y="5020611"/>
+            <a:ext cx="360000" cy="360000"/>
+          </a:xfrm>
+          <a:prstGeom prst="ellipse">
+            <a:avLst/>
+          </a:prstGeom>
+          <a:solidFill>
+            <a:schemeClr val="accent1">
+              <a:lumMod val="40000"/>
+              <a:lumOff val="60000"/>
+              <a:alpha val="50000"/>
+            </a:schemeClr>
+          </a:solidFill>
+          <a:ln>
+            <a:solidFill>
+              <a:schemeClr val="tx1"/>
+            </a:solidFill>
+          </a:ln>
+        </p:spPr>
+        <p:style>
+          <a:lnRef idx="2">
+            <a:schemeClr val="accent1">
+              <a:shade val="15000"/>
+            </a:schemeClr>
+          </a:lnRef>
+          <a:fillRef idx="1">
+            <a:schemeClr val="accent1"/>
+          </a:fillRef>
+          <a:effectRef idx="0">
+            <a:schemeClr val="accent1"/>
+          </a:effectRef>
+          <a:fontRef idx="minor">
+            <a:schemeClr val="lt1"/>
+          </a:fontRef>
+        </p:style>
+        <p:txBody>
+          <a:bodyPr rtlCol="0" anchor="ctr"/>
+          <a:lstStyle/>
+          <a:p>
+            <a:pPr algn="ctr"/>
+            <a:r>
+              <a:rPr lang="ko-KR" altLang="en-US" dirty="0"/>
+              <a:t>전</a:t>
+            </a:r>
+          </a:p>
+        </p:txBody>
+      </p:sp>
+      <p:grpSp>
+        <p:nvGrpSpPr>
+          <p:cNvPr id="73" name="그룹 72">
+            <a:extLst>
+              <a:ext uri="{FF2B5EF4-FFF2-40B4-BE49-F238E27FC236}">
+                <a16:creationId xmlns:a16="http://schemas.microsoft.com/office/drawing/2014/main" id="{C121F5EE-AD02-0A6D-5EED-8C246EE2D793}"/>
+              </a:ext>
+            </a:extLst>
+          </p:cNvPr>
+          <p:cNvGrpSpPr/>
+          <p:nvPr/>
+        </p:nvGrpSpPr>
+        <p:grpSpPr>
+          <a:xfrm>
+            <a:off x="5879303" y="3141711"/>
+            <a:ext cx="428591" cy="710670"/>
+            <a:chOff x="5787571" y="3559790"/>
+            <a:chExt cx="616857" cy="1463589"/>
+          </a:xfrm>
+        </p:grpSpPr>
+        <p:sp>
+          <p:nvSpPr>
+            <p:cNvPr id="74" name="순서도: 자기 디스크 73">
+              <a:extLst>
+                <a:ext uri="{FF2B5EF4-FFF2-40B4-BE49-F238E27FC236}">
+                  <a16:creationId xmlns:a16="http://schemas.microsoft.com/office/drawing/2014/main" id="{F5649F32-4A5A-40CF-71F7-8D0EA06178EE}"/>
+                </a:ext>
+              </a:extLst>
+            </p:cNvPr>
+            <p:cNvSpPr/>
+            <p:nvPr/>
+          </p:nvSpPr>
+          <p:spPr>
+            <a:xfrm>
+              <a:off x="5787571" y="3723090"/>
+              <a:ext cx="616857" cy="1300289"/>
+            </a:xfrm>
+            <a:prstGeom prst="flowChartMagneticDisk">
+              <a:avLst/>
+            </a:prstGeom>
+          </p:spPr>
+          <p:style>
+            <a:lnRef idx="2">
+              <a:schemeClr val="accent1">
+                <a:shade val="15000"/>
+              </a:schemeClr>
+            </a:lnRef>
+            <a:fillRef idx="1">
+              <a:schemeClr val="accent1"/>
+            </a:fillRef>
+            <a:effectRef idx="0">
+              <a:schemeClr val="accent1"/>
+            </a:effectRef>
+            <a:fontRef idx="minor">
+              <a:schemeClr val="lt1"/>
+            </a:fontRef>
+          </p:style>
+          <p:txBody>
+            <a:bodyPr rtlCol="0" anchor="ctr"/>
+            <a:lstStyle/>
+            <a:p>
+              <a:pPr algn="ctr"/>
+              <a:endParaRPr lang="ko-KR" altLang="en-US"/>
+            </a:p>
+          </p:txBody>
+        </p:sp>
+        <p:sp>
+          <p:nvSpPr>
+            <p:cNvPr id="75" name="직사각형 74">
+              <a:extLst>
+                <a:ext uri="{FF2B5EF4-FFF2-40B4-BE49-F238E27FC236}">
+                  <a16:creationId xmlns:a16="http://schemas.microsoft.com/office/drawing/2014/main" id="{83B8623E-EFE0-608A-2A3A-2D7255B91F1D}"/>
+                </a:ext>
+              </a:extLst>
+            </p:cNvPr>
+            <p:cNvSpPr/>
+            <p:nvPr/>
+          </p:nvSpPr>
+          <p:spPr>
+            <a:xfrm>
+              <a:off x="5842832" y="3559790"/>
+              <a:ext cx="506333" cy="97485"/>
+            </a:xfrm>
+            <a:prstGeom prst="rect">
+              <a:avLst/>
+            </a:prstGeom>
+            <a:solidFill>
+              <a:srgbClr val="FF0000"/>
+            </a:solidFill>
+          </p:spPr>
+          <p:style>
+            <a:lnRef idx="2">
+              <a:schemeClr val="accent1">
+                <a:shade val="15000"/>
+              </a:schemeClr>
+            </a:lnRef>
+            <a:fillRef idx="1">
+              <a:schemeClr val="accent1"/>
+            </a:fillRef>
+            <a:effectRef idx="0">
+              <a:schemeClr val="accent1"/>
+            </a:effectRef>
+            <a:fontRef idx="minor">
+              <a:schemeClr val="lt1"/>
+            </a:fontRef>
+          </p:style>
+          <p:txBody>
+            <a:bodyPr rtlCol="0" anchor="ctr"/>
+            <a:lstStyle/>
+            <a:p>
+              <a:pPr algn="ctr"/>
+              <a:endParaRPr lang="ko-KR" altLang="en-US"/>
+            </a:p>
+          </p:txBody>
+        </p:sp>
+      </p:grpSp>
+      <p:grpSp>
+        <p:nvGrpSpPr>
+          <p:cNvPr id="3" name="그룹 2">
+            <a:extLst>
+              <a:ext uri="{FF2B5EF4-FFF2-40B4-BE49-F238E27FC236}">
+                <a16:creationId xmlns:a16="http://schemas.microsoft.com/office/drawing/2014/main" id="{58B2D2E7-7F65-92D8-41DC-D34B70E5FED2}"/>
+              </a:ext>
+            </a:extLst>
+          </p:cNvPr>
+          <p:cNvGrpSpPr/>
+          <p:nvPr/>
+        </p:nvGrpSpPr>
+        <p:grpSpPr>
+          <a:xfrm>
+            <a:off x="1339039" y="1170239"/>
+            <a:ext cx="1494487" cy="276948"/>
+            <a:chOff x="990455" y="896744"/>
+            <a:chExt cx="1838379" cy="276948"/>
+          </a:xfrm>
+        </p:grpSpPr>
+        <p:sp>
+          <p:nvSpPr>
+            <p:cNvPr id="7" name="직사각형 6">
+              <a:extLst>
+                <a:ext uri="{FF2B5EF4-FFF2-40B4-BE49-F238E27FC236}">
+                  <a16:creationId xmlns:a16="http://schemas.microsoft.com/office/drawing/2014/main" id="{6F59E207-DD06-EEF0-E14F-E056500A518B}"/>
+                </a:ext>
+              </a:extLst>
+            </p:cNvPr>
+            <p:cNvSpPr/>
+            <p:nvPr/>
+          </p:nvSpPr>
+          <p:spPr>
+            <a:xfrm>
+              <a:off x="990457" y="896744"/>
+              <a:ext cx="926570" cy="276948"/>
+            </a:xfrm>
+            <a:prstGeom prst="rect">
+              <a:avLst/>
+            </a:prstGeom>
+            <a:solidFill>
+              <a:srgbClr val="FFFF00"/>
+            </a:solidFill>
+            <a:ln>
+              <a:noFill/>
+            </a:ln>
+          </p:spPr>
+          <p:style>
+            <a:lnRef idx="2">
+              <a:schemeClr val="accent1">
+                <a:shade val="15000"/>
+              </a:schemeClr>
+            </a:lnRef>
+            <a:fillRef idx="1">
+              <a:schemeClr val="accent1"/>
+            </a:fillRef>
+            <a:effectRef idx="0">
+              <a:schemeClr val="accent1"/>
+            </a:effectRef>
+            <a:fontRef idx="minor">
+              <a:schemeClr val="lt1"/>
+            </a:fontRef>
+          </p:style>
+          <p:txBody>
+            <a:bodyPr rtlCol="0" anchor="ctr"/>
+            <a:lstStyle/>
+            <a:p>
+              <a:pPr algn="ctr"/>
+              <a:endParaRPr lang="ko-KR" altLang="en-US"/>
+            </a:p>
+          </p:txBody>
+        </p:sp>
+        <p:sp>
+          <p:nvSpPr>
+            <p:cNvPr id="8" name="직사각형 7">
+              <a:extLst>
+                <a:ext uri="{FF2B5EF4-FFF2-40B4-BE49-F238E27FC236}">
+                  <a16:creationId xmlns:a16="http://schemas.microsoft.com/office/drawing/2014/main" id="{B3CFE9DC-D01E-FC06-835B-D384C9752880}"/>
+                </a:ext>
+              </a:extLst>
+            </p:cNvPr>
+            <p:cNvSpPr/>
+            <p:nvPr/>
+          </p:nvSpPr>
+          <p:spPr>
+            <a:xfrm>
+              <a:off x="990455" y="896744"/>
+              <a:ext cx="1838379" cy="276948"/>
+            </a:xfrm>
+            <a:prstGeom prst="rect">
+              <a:avLst/>
+            </a:prstGeom>
+            <a:solidFill>
+              <a:schemeClr val="accent1">
+                <a:lumMod val="60000"/>
+                <a:lumOff val="40000"/>
+                <a:alpha val="10000"/>
+              </a:schemeClr>
+            </a:solidFill>
+            <a:ln>
+              <a:solidFill>
+                <a:schemeClr val="tx1"/>
+              </a:solidFill>
+            </a:ln>
+          </p:spPr>
+          <p:style>
+            <a:lnRef idx="2">
+              <a:schemeClr val="accent1">
+                <a:shade val="15000"/>
+              </a:schemeClr>
+            </a:lnRef>
+            <a:fillRef idx="1">
+              <a:schemeClr val="accent1"/>
+            </a:fillRef>
+            <a:effectRef idx="0">
+              <a:schemeClr val="accent1"/>
+            </a:effectRef>
+            <a:fontRef idx="minor">
+              <a:schemeClr val="lt1"/>
+            </a:fontRef>
+          </p:style>
+          <p:txBody>
+            <a:bodyPr rtlCol="0" anchor="ctr"/>
+            <a:lstStyle/>
+            <a:p>
+              <a:pPr algn="ctr"/>
+              <a:endParaRPr lang="ko-KR" altLang="en-US" dirty="0"/>
+            </a:p>
+          </p:txBody>
+        </p:sp>
+        <p:sp>
+          <p:nvSpPr>
+            <p:cNvPr id="9" name="TextBox 8">
+              <a:extLst>
+                <a:ext uri="{FF2B5EF4-FFF2-40B4-BE49-F238E27FC236}">
+                  <a16:creationId xmlns:a16="http://schemas.microsoft.com/office/drawing/2014/main" id="{C1C294F6-3A40-A975-3D8A-37027BB37F7B}"/>
+                </a:ext>
+              </a:extLst>
+            </p:cNvPr>
+            <p:cNvSpPr txBox="1"/>
+            <p:nvPr/>
+          </p:nvSpPr>
+          <p:spPr>
+            <a:xfrm>
+              <a:off x="990455" y="902176"/>
+              <a:ext cx="1838377" cy="261610"/>
+            </a:xfrm>
+            <a:prstGeom prst="rect">
+              <a:avLst/>
+            </a:prstGeom>
+            <a:noFill/>
+          </p:spPr>
+          <p:txBody>
+            <a:bodyPr wrap="square" rtlCol="0">
+              <a:spAutoFit/>
+            </a:bodyPr>
+            <a:lstStyle/>
+            <a:p>
+              <a:pPr algn="ctr"/>
+              <a:r>
+                <a:rPr lang="en-US" altLang="ko-KR" sz="1100" b="1" dirty="0"/>
+                <a:t>100 / 50</a:t>
+              </a:r>
+              <a:endParaRPr lang="ko-KR" altLang="en-US" sz="1100" b="1" dirty="0"/>
+            </a:p>
+          </p:txBody>
+        </p:sp>
+      </p:grpSp>
+      <p:sp>
+        <p:nvSpPr>
+          <p:cNvPr id="11" name="TextBox 10">
+            <a:extLst>
+              <a:ext uri="{FF2B5EF4-FFF2-40B4-BE49-F238E27FC236}">
+                <a16:creationId xmlns:a16="http://schemas.microsoft.com/office/drawing/2014/main" id="{DBED1E8B-DACD-9267-09B7-9A2EC5002FD9}"/>
+              </a:ext>
+            </a:extLst>
+          </p:cNvPr>
+          <p:cNvSpPr txBox="1"/>
+          <p:nvPr/>
+        </p:nvSpPr>
+        <p:spPr>
+          <a:xfrm>
+            <a:off x="928357" y="874344"/>
+            <a:ext cx="468398" cy="307777"/>
+          </a:xfrm>
+          <a:prstGeom prst="rect">
+            <a:avLst/>
+          </a:prstGeom>
+          <a:noFill/>
+        </p:spPr>
+        <p:txBody>
+          <a:bodyPr wrap="none" rtlCol="0">
+            <a:spAutoFit/>
+          </a:bodyPr>
+          <a:lstStyle/>
+          <a:p>
+            <a:r>
+              <a:rPr lang="en-US" altLang="ko-KR" sz="1400" b="1" dirty="0"/>
+              <a:t>MP</a:t>
+            </a:r>
+            <a:endParaRPr lang="ko-KR" altLang="en-US" sz="1400" b="1" dirty="0"/>
+          </a:p>
+        </p:txBody>
+      </p:sp>
+      <p:sp>
+        <p:nvSpPr>
+          <p:cNvPr id="17" name="TextBox 16">
+            <a:extLst>
+              <a:ext uri="{FF2B5EF4-FFF2-40B4-BE49-F238E27FC236}">
+                <a16:creationId xmlns:a16="http://schemas.microsoft.com/office/drawing/2014/main" id="{9AA72D47-0CA9-651C-55A5-3CCB8C42F0FF}"/>
+              </a:ext>
+            </a:extLst>
+          </p:cNvPr>
+          <p:cNvSpPr txBox="1"/>
+          <p:nvPr/>
+        </p:nvSpPr>
+        <p:spPr>
+          <a:xfrm>
+            <a:off x="1380495" y="4027590"/>
+            <a:ext cx="409086" cy="369332"/>
+          </a:xfrm>
+          <a:prstGeom prst="rect">
+            <a:avLst/>
+          </a:prstGeom>
+          <a:noFill/>
+        </p:spPr>
+        <p:txBody>
+          <a:bodyPr wrap="none" rtlCol="0">
+            <a:spAutoFit/>
+          </a:bodyPr>
+          <a:lstStyle/>
+          <a:p>
+            <a:r>
+              <a:rPr lang="en-US" altLang="ko-KR" dirty="0"/>
+              <a:t>*5</a:t>
+            </a:r>
+            <a:endParaRPr lang="ko-KR" altLang="en-US" dirty="0"/>
+          </a:p>
+        </p:txBody>
+      </p:sp>
+      <p:grpSp>
+        <p:nvGrpSpPr>
+          <p:cNvPr id="41" name="그룹 40">
+            <a:extLst>
+              <a:ext uri="{FF2B5EF4-FFF2-40B4-BE49-F238E27FC236}">
+                <a16:creationId xmlns:a16="http://schemas.microsoft.com/office/drawing/2014/main" id="{C76E83F4-6029-DDC4-E946-74F2F559B374}"/>
+              </a:ext>
+            </a:extLst>
+          </p:cNvPr>
+          <p:cNvGrpSpPr/>
+          <p:nvPr/>
+        </p:nvGrpSpPr>
+        <p:grpSpPr>
+          <a:xfrm>
+            <a:off x="9152550" y="4295945"/>
+            <a:ext cx="1800000" cy="1800000"/>
+            <a:chOff x="7881364" y="3342952"/>
+            <a:chExt cx="1800000" cy="1800000"/>
+          </a:xfrm>
+        </p:grpSpPr>
+        <p:sp>
+          <p:nvSpPr>
+            <p:cNvPr id="25" name="타원 24">
+              <a:extLst>
+                <a:ext uri="{FF2B5EF4-FFF2-40B4-BE49-F238E27FC236}">
+                  <a16:creationId xmlns:a16="http://schemas.microsoft.com/office/drawing/2014/main" id="{39032F28-1F7B-6957-8D53-A919EB90BB4E}"/>
+                </a:ext>
+              </a:extLst>
+            </p:cNvPr>
+            <p:cNvSpPr>
+              <a:spLocks noChangeAspect="1"/>
+            </p:cNvSpPr>
+            <p:nvPr/>
+          </p:nvSpPr>
+          <p:spPr>
+            <a:xfrm>
+              <a:off x="8601364" y="4592155"/>
+              <a:ext cx="360000" cy="360000"/>
+            </a:xfrm>
+            <a:prstGeom prst="ellipse">
+              <a:avLst/>
+            </a:prstGeom>
+            <a:solidFill>
+              <a:srgbClr val="FFC000">
+                <a:alpha val="50000"/>
+              </a:srgbClr>
+            </a:solidFill>
+            <a:ln>
+              <a:solidFill>
+                <a:schemeClr val="tx1"/>
+              </a:solidFill>
+            </a:ln>
+          </p:spPr>
+          <p:style>
+            <a:lnRef idx="2">
+              <a:schemeClr val="accent1">
+                <a:shade val="15000"/>
+              </a:schemeClr>
+            </a:lnRef>
+            <a:fillRef idx="1">
+              <a:schemeClr val="accent1"/>
+            </a:fillRef>
+            <a:effectRef idx="0">
+              <a:schemeClr val="accent1"/>
+            </a:effectRef>
+            <a:fontRef idx="minor">
+              <a:schemeClr val="lt1"/>
+            </a:fontRef>
+          </p:style>
+          <p:txBody>
+            <a:bodyPr rtlCol="0" anchor="ctr"/>
+            <a:lstStyle/>
+            <a:p>
+              <a:pPr algn="ctr"/>
+              <a:endParaRPr lang="ko-KR" altLang="en-US" sz="200" dirty="0">
+                <a:solidFill>
+                  <a:schemeClr val="tx1"/>
+                </a:solidFill>
+              </a:endParaRPr>
+            </a:p>
+          </p:txBody>
+        </p:sp>
+        <p:sp>
+          <p:nvSpPr>
+            <p:cNvPr id="27" name="타원 26">
+              <a:extLst>
+                <a:ext uri="{FF2B5EF4-FFF2-40B4-BE49-F238E27FC236}">
+                  <a16:creationId xmlns:a16="http://schemas.microsoft.com/office/drawing/2014/main" id="{9A799CA1-B378-BC8D-1641-6F644725C567}"/>
+                </a:ext>
+              </a:extLst>
+            </p:cNvPr>
+            <p:cNvSpPr>
+              <a:spLocks noChangeAspect="1"/>
+            </p:cNvSpPr>
+            <p:nvPr/>
+          </p:nvSpPr>
+          <p:spPr>
+            <a:xfrm>
+              <a:off x="9163262" y="4044154"/>
+              <a:ext cx="360000" cy="360000"/>
+            </a:xfrm>
+            <a:prstGeom prst="ellipse">
+              <a:avLst/>
+            </a:prstGeom>
+            <a:solidFill>
+              <a:schemeClr val="accent6">
+                <a:lumMod val="20000"/>
+                <a:lumOff val="80000"/>
+                <a:alpha val="50000"/>
+              </a:schemeClr>
+            </a:solidFill>
+            <a:ln>
+              <a:solidFill>
+                <a:schemeClr val="tx1"/>
+              </a:solidFill>
+            </a:ln>
+          </p:spPr>
+          <p:style>
+            <a:lnRef idx="2">
+              <a:schemeClr val="accent1">
+                <a:shade val="15000"/>
+              </a:schemeClr>
+            </a:lnRef>
+            <a:fillRef idx="1">
+              <a:schemeClr val="accent1"/>
+            </a:fillRef>
+            <a:effectRef idx="0">
+              <a:schemeClr val="accent1"/>
+            </a:effectRef>
+            <a:fontRef idx="minor">
+              <a:schemeClr val="lt1"/>
+            </a:fontRef>
+          </p:style>
+          <p:txBody>
+            <a:bodyPr rtlCol="0" anchor="ctr"/>
+            <a:lstStyle/>
+            <a:p>
+              <a:pPr algn="ctr"/>
+              <a:endParaRPr lang="ko-KR" altLang="en-US" dirty="0">
+                <a:solidFill>
+                  <a:schemeClr val="tx1"/>
+                </a:solidFill>
+              </a:endParaRPr>
+            </a:p>
+          </p:txBody>
+        </p:sp>
+        <p:sp>
+          <p:nvSpPr>
+            <p:cNvPr id="29" name="타원 28">
+              <a:extLst>
+                <a:ext uri="{FF2B5EF4-FFF2-40B4-BE49-F238E27FC236}">
+                  <a16:creationId xmlns:a16="http://schemas.microsoft.com/office/drawing/2014/main" id="{C504586B-4DB3-B9FA-A81C-84F8AAA49882}"/>
+                </a:ext>
+              </a:extLst>
+            </p:cNvPr>
+            <p:cNvSpPr>
+              <a:spLocks noChangeAspect="1"/>
+            </p:cNvSpPr>
+            <p:nvPr/>
+          </p:nvSpPr>
+          <p:spPr>
+            <a:xfrm>
+              <a:off x="8614562" y="3541340"/>
+              <a:ext cx="360000" cy="360000"/>
+            </a:xfrm>
+            <a:prstGeom prst="ellipse">
+              <a:avLst/>
+            </a:prstGeom>
+            <a:solidFill>
+              <a:schemeClr val="accent1">
+                <a:lumMod val="40000"/>
+                <a:lumOff val="60000"/>
+                <a:alpha val="50000"/>
+              </a:schemeClr>
+            </a:solidFill>
+            <a:ln>
+              <a:solidFill>
+                <a:schemeClr val="tx1"/>
+              </a:solidFill>
+            </a:ln>
+          </p:spPr>
+          <p:style>
+            <a:lnRef idx="2">
+              <a:schemeClr val="accent1">
+                <a:shade val="15000"/>
+              </a:schemeClr>
+            </a:lnRef>
+            <a:fillRef idx="1">
+              <a:schemeClr val="accent1"/>
+            </a:fillRef>
+            <a:effectRef idx="0">
+              <a:schemeClr val="accent1"/>
+            </a:effectRef>
+            <a:fontRef idx="minor">
+              <a:schemeClr val="lt1"/>
+            </a:fontRef>
+          </p:style>
+          <p:txBody>
+            <a:bodyPr rtlCol="0" anchor="ctr"/>
+            <a:lstStyle/>
+            <a:p>
+              <a:pPr algn="ctr"/>
+              <a:r>
+                <a:rPr lang="ko-KR" altLang="en-US" dirty="0"/>
+                <a:t>강</a:t>
+              </a:r>
+            </a:p>
+          </p:txBody>
+        </p:sp>
+        <p:grpSp>
+          <p:nvGrpSpPr>
+            <p:cNvPr id="23" name="그룹 22">
+              <a:extLst>
+                <a:ext uri="{FF2B5EF4-FFF2-40B4-BE49-F238E27FC236}">
+                  <a16:creationId xmlns:a16="http://schemas.microsoft.com/office/drawing/2014/main" id="{F2514AE3-F6F2-1A37-3B7F-1EC28F7B375C}"/>
+                </a:ext>
+              </a:extLst>
+            </p:cNvPr>
+            <p:cNvGrpSpPr/>
+            <p:nvPr/>
+          </p:nvGrpSpPr>
+          <p:grpSpPr>
+            <a:xfrm>
+              <a:off x="7881364" y="3342952"/>
+              <a:ext cx="1800000" cy="1800000"/>
+              <a:chOff x="9296400" y="4152899"/>
+              <a:chExt cx="1800000" cy="1800000"/>
+            </a:xfrm>
+          </p:grpSpPr>
+          <p:grpSp>
+            <p:nvGrpSpPr>
+              <p:cNvPr id="26" name="그룹 25">
+                <a:extLst>
+                  <a:ext uri="{FF2B5EF4-FFF2-40B4-BE49-F238E27FC236}">
+                    <a16:creationId xmlns:a16="http://schemas.microsoft.com/office/drawing/2014/main" id="{3E2C844A-3B2F-CC37-2322-520EBBE49CCC}"/>
+                  </a:ext>
+                </a:extLst>
+              </p:cNvPr>
+              <p:cNvGrpSpPr/>
+              <p:nvPr/>
+            </p:nvGrpSpPr>
+            <p:grpSpPr>
+              <a:xfrm>
+                <a:off x="9296400" y="4152899"/>
+                <a:ext cx="1800000" cy="1800000"/>
+                <a:chOff x="9296400" y="4152899"/>
+                <a:chExt cx="1800000" cy="1800000"/>
+              </a:xfrm>
+            </p:grpSpPr>
+            <p:sp>
+              <p:nvSpPr>
+                <p:cNvPr id="30" name="타원 29">
+                  <a:extLst>
+                    <a:ext uri="{FF2B5EF4-FFF2-40B4-BE49-F238E27FC236}">
+                      <a16:creationId xmlns:a16="http://schemas.microsoft.com/office/drawing/2014/main" id="{5223BEDB-014B-47C8-D072-4F365C172890}"/>
+                    </a:ext>
+                  </a:extLst>
+                </p:cNvPr>
+                <p:cNvSpPr>
+                  <a:spLocks noChangeAspect="1"/>
+                </p:cNvSpPr>
+                <p:nvPr/>
+              </p:nvSpPr>
+              <p:spPr>
+                <a:xfrm>
+                  <a:off x="9296400" y="4152899"/>
+                  <a:ext cx="1800000" cy="1800000"/>
+                </a:xfrm>
+                <a:prstGeom prst="ellipse">
+                  <a:avLst/>
+                </a:prstGeom>
+                <a:noFill/>
+              </p:spPr>
+              <p:style>
+                <a:lnRef idx="2">
+                  <a:schemeClr val="accent1">
+                    <a:shade val="15000"/>
+                  </a:schemeClr>
+                </a:lnRef>
+                <a:fillRef idx="1">
+                  <a:schemeClr val="accent1"/>
+                </a:fillRef>
+                <a:effectRef idx="0">
+                  <a:schemeClr val="accent1"/>
+                </a:effectRef>
+                <a:fontRef idx="minor">
+                  <a:schemeClr val="lt1"/>
+                </a:fontRef>
+              </p:style>
+              <p:txBody>
+                <a:bodyPr rtlCol="0" anchor="ctr"/>
+                <a:lstStyle/>
+                <a:p>
+                  <a:pPr algn="ctr"/>
+                  <a:endParaRPr lang="ko-KR" altLang="en-US" dirty="0"/>
+                </a:p>
+              </p:txBody>
+            </p:sp>
+            <p:cxnSp>
+              <p:nvCxnSpPr>
+                <p:cNvPr id="32" name="직선 연결선 31">
+                  <a:extLst>
+                    <a:ext uri="{FF2B5EF4-FFF2-40B4-BE49-F238E27FC236}">
+                      <a16:creationId xmlns:a16="http://schemas.microsoft.com/office/drawing/2014/main" id="{65BD0852-7A23-1B7D-ACE7-1D082617881B}"/>
+                    </a:ext>
+                  </a:extLst>
+                </p:cNvPr>
+                <p:cNvCxnSpPr>
+                  <a:cxnSpLocks/>
+                  <a:stCxn id="30" idx="7"/>
+                  <a:endCxn id="30" idx="3"/>
+                </p:cNvCxnSpPr>
+                <p:nvPr/>
+              </p:nvCxnSpPr>
+              <p:spPr>
+                <a:xfrm flipH="1">
+                  <a:off x="9560004" y="4416503"/>
+                  <a:ext cx="1272792" cy="1272792"/>
+                </a:xfrm>
+                <a:prstGeom prst="line">
+                  <a:avLst/>
+                </a:prstGeom>
+              </p:spPr>
+              <p:style>
+                <a:lnRef idx="2">
+                  <a:schemeClr val="dk1"/>
+                </a:lnRef>
+                <a:fillRef idx="0">
+                  <a:schemeClr val="dk1"/>
+                </a:fillRef>
+                <a:effectRef idx="1">
+                  <a:schemeClr val="dk1"/>
+                </a:effectRef>
+                <a:fontRef idx="minor">
+                  <a:schemeClr val="tx1"/>
+                </a:fontRef>
+              </p:style>
+            </p:cxnSp>
+            <p:cxnSp>
+              <p:nvCxnSpPr>
+                <p:cNvPr id="33" name="직선 연결선 32">
+                  <a:extLst>
+                    <a:ext uri="{FF2B5EF4-FFF2-40B4-BE49-F238E27FC236}">
+                      <a16:creationId xmlns:a16="http://schemas.microsoft.com/office/drawing/2014/main" id="{43179258-DEB5-5C69-B12E-FD6E4F3B415C}"/>
+                    </a:ext>
+                  </a:extLst>
+                </p:cNvPr>
+                <p:cNvCxnSpPr>
+                  <a:cxnSpLocks/>
+                  <a:stCxn id="30" idx="1"/>
+                  <a:endCxn id="30" idx="5"/>
+                </p:cNvCxnSpPr>
+                <p:nvPr/>
+              </p:nvCxnSpPr>
+              <p:spPr>
+                <a:xfrm>
+                  <a:off x="9560004" y="4416503"/>
+                  <a:ext cx="1272792" cy="1272792"/>
+                </a:xfrm>
+                <a:prstGeom prst="line">
+                  <a:avLst/>
+                </a:prstGeom>
+              </p:spPr>
+              <p:style>
+                <a:lnRef idx="2">
+                  <a:schemeClr val="dk1"/>
+                </a:lnRef>
+                <a:fillRef idx="0">
+                  <a:schemeClr val="dk1"/>
+                </a:fillRef>
+                <a:effectRef idx="1">
+                  <a:schemeClr val="dk1"/>
+                </a:effectRef>
+                <a:fontRef idx="minor">
+                  <a:schemeClr val="tx1"/>
+                </a:fontRef>
+              </p:style>
+            </p:cxnSp>
+            <p:sp>
+              <p:nvSpPr>
+                <p:cNvPr id="34" name="TextBox 33">
+                  <a:extLst>
+                    <a:ext uri="{FF2B5EF4-FFF2-40B4-BE49-F238E27FC236}">
+                      <a16:creationId xmlns:a16="http://schemas.microsoft.com/office/drawing/2014/main" id="{712E30DD-A66B-D606-1015-775D2D5B5D65}"/>
+                    </a:ext>
+                  </a:extLst>
+                </p:cNvPr>
+                <p:cNvSpPr txBox="1"/>
+                <p:nvPr/>
+              </p:nvSpPr>
+              <p:spPr>
+                <a:xfrm>
+                  <a:off x="9988651" y="4279462"/>
+                  <a:ext cx="415498" cy="369332"/>
+                </a:xfrm>
+                <a:prstGeom prst="rect">
+                  <a:avLst/>
+                </a:prstGeom>
+                <a:noFill/>
+              </p:spPr>
+              <p:txBody>
+                <a:bodyPr wrap="none" rtlCol="0">
+                  <a:spAutoFit/>
+                </a:bodyPr>
+                <a:lstStyle/>
+                <a:p>
+                  <a:r>
+                    <a:rPr lang="ko-KR" altLang="en-US" dirty="0"/>
+                    <a:t>▲</a:t>
+                  </a:r>
+                </a:p>
+              </p:txBody>
+            </p:sp>
+            <p:sp>
+              <p:nvSpPr>
+                <p:cNvPr id="36" name="TextBox 35">
+                  <a:extLst>
+                    <a:ext uri="{FF2B5EF4-FFF2-40B4-BE49-F238E27FC236}">
+                      <a16:creationId xmlns:a16="http://schemas.microsoft.com/office/drawing/2014/main" id="{0CACB24D-E9DC-BDA9-C8C5-38041FF88519}"/>
+                    </a:ext>
+                  </a:extLst>
+                </p:cNvPr>
+                <p:cNvSpPr txBox="1"/>
+                <p:nvPr/>
+              </p:nvSpPr>
+              <p:spPr>
+                <a:xfrm>
+                  <a:off x="9988651" y="5437954"/>
+                  <a:ext cx="415498" cy="369332"/>
+                </a:xfrm>
+                <a:prstGeom prst="rect">
+                  <a:avLst/>
+                </a:prstGeom>
+                <a:noFill/>
+              </p:spPr>
+              <p:txBody>
+                <a:bodyPr wrap="none" rtlCol="0">
+                  <a:spAutoFit/>
+                </a:bodyPr>
+                <a:lstStyle/>
+                <a:p>
+                  <a:r>
+                    <a:rPr lang="ko-KR" altLang="en-US" dirty="0"/>
+                    <a:t>▼</a:t>
+                  </a:r>
+                </a:p>
+              </p:txBody>
+            </p:sp>
+            <p:sp>
+              <p:nvSpPr>
+                <p:cNvPr id="37" name="TextBox 36">
+                  <a:extLst>
+                    <a:ext uri="{FF2B5EF4-FFF2-40B4-BE49-F238E27FC236}">
+                      <a16:creationId xmlns:a16="http://schemas.microsoft.com/office/drawing/2014/main" id="{BBE5AA2A-91A2-C416-836A-863B1333C9C4}"/>
+                    </a:ext>
+                  </a:extLst>
+                </p:cNvPr>
+                <p:cNvSpPr txBox="1"/>
+                <p:nvPr/>
+              </p:nvSpPr>
+              <p:spPr>
+                <a:xfrm>
+                  <a:off x="9399880" y="4868233"/>
+                  <a:ext cx="415498" cy="369332"/>
+                </a:xfrm>
+                <a:prstGeom prst="rect">
+                  <a:avLst/>
+                </a:prstGeom>
+                <a:noFill/>
+              </p:spPr>
+              <p:txBody>
+                <a:bodyPr wrap="none" rtlCol="0">
+                  <a:spAutoFit/>
+                </a:bodyPr>
+                <a:lstStyle/>
+                <a:p>
+                  <a:r>
+                    <a:rPr lang="ko-KR" altLang="en-US" dirty="0"/>
+                    <a:t>◀</a:t>
+                  </a:r>
+                </a:p>
+              </p:txBody>
+            </p:sp>
+            <p:sp>
+              <p:nvSpPr>
+                <p:cNvPr id="38" name="TextBox 37">
+                  <a:extLst>
+                    <a:ext uri="{FF2B5EF4-FFF2-40B4-BE49-F238E27FC236}">
+                      <a16:creationId xmlns:a16="http://schemas.microsoft.com/office/drawing/2014/main" id="{270854AD-986A-6699-BEA8-71861408D39A}"/>
+                    </a:ext>
+                  </a:extLst>
+                </p:cNvPr>
+                <p:cNvSpPr txBox="1"/>
+                <p:nvPr/>
+              </p:nvSpPr>
+              <p:spPr>
+                <a:xfrm>
+                  <a:off x="10577422" y="4828948"/>
+                  <a:ext cx="415498" cy="369332"/>
+                </a:xfrm>
+                <a:prstGeom prst="rect">
+                  <a:avLst/>
+                </a:prstGeom>
+                <a:noFill/>
+              </p:spPr>
+              <p:txBody>
+                <a:bodyPr wrap="none" rtlCol="0">
+                  <a:spAutoFit/>
+                </a:bodyPr>
+                <a:lstStyle/>
+                <a:p>
+                  <a:r>
+                    <a:rPr lang="ko-KR" altLang="en-US" dirty="0"/>
+                    <a:t>▶</a:t>
+                  </a:r>
+                </a:p>
+              </p:txBody>
+            </p:sp>
+            <p:sp>
+              <p:nvSpPr>
+                <p:cNvPr id="39" name="타원 38">
+                  <a:extLst>
+                    <a:ext uri="{FF2B5EF4-FFF2-40B4-BE49-F238E27FC236}">
+                      <a16:creationId xmlns:a16="http://schemas.microsoft.com/office/drawing/2014/main" id="{7C5A8F90-2E14-D93C-7CC3-10E9E2F296F2}"/>
+                    </a:ext>
+                  </a:extLst>
+                </p:cNvPr>
+                <p:cNvSpPr>
+                  <a:spLocks noChangeAspect="1"/>
+                </p:cNvSpPr>
+                <p:nvPr/>
+              </p:nvSpPr>
+              <p:spPr>
+                <a:xfrm>
+                  <a:off x="9476400" y="4332899"/>
+                  <a:ext cx="1440000" cy="1440000"/>
+                </a:xfrm>
+                <a:prstGeom prst="ellipse">
+                  <a:avLst/>
+                </a:prstGeom>
+                <a:noFill/>
+              </p:spPr>
+              <p:style>
+                <a:lnRef idx="2">
+                  <a:schemeClr val="accent1">
+                    <a:shade val="15000"/>
+                  </a:schemeClr>
+                </a:lnRef>
+                <a:fillRef idx="1">
+                  <a:schemeClr val="accent1"/>
+                </a:fillRef>
+                <a:effectRef idx="0">
+                  <a:schemeClr val="accent1"/>
+                </a:effectRef>
+                <a:fontRef idx="minor">
+                  <a:schemeClr val="lt1"/>
+                </a:fontRef>
+              </p:style>
+              <p:txBody>
+                <a:bodyPr rtlCol="0" anchor="ctr"/>
+                <a:lstStyle/>
+                <a:p>
+                  <a:pPr algn="ctr"/>
+                  <a:endParaRPr lang="ko-KR" altLang="en-US" dirty="0"/>
+                </a:p>
+              </p:txBody>
+            </p:sp>
+          </p:grpSp>
+          <p:sp>
+            <p:nvSpPr>
+              <p:cNvPr id="28" name="타원 27">
+                <a:extLst>
+                  <a:ext uri="{FF2B5EF4-FFF2-40B4-BE49-F238E27FC236}">
+                    <a16:creationId xmlns:a16="http://schemas.microsoft.com/office/drawing/2014/main" id="{BFD6E097-F20A-0084-C78F-AD399F78E295}"/>
+                  </a:ext>
+                </a:extLst>
+              </p:cNvPr>
+              <p:cNvSpPr>
+                <a:spLocks noChangeAspect="1"/>
+              </p:cNvSpPr>
+              <p:nvPr/>
+            </p:nvSpPr>
+            <p:spPr>
+              <a:xfrm>
+                <a:off x="10023335" y="4859640"/>
+                <a:ext cx="360000" cy="360000"/>
+              </a:xfrm>
+              <a:prstGeom prst="ellipse">
+                <a:avLst/>
+              </a:prstGeom>
+              <a:solidFill>
+                <a:schemeClr val="bg2">
+                  <a:alpha val="50000"/>
+                </a:schemeClr>
+              </a:solidFill>
+              <a:ln>
+                <a:solidFill>
+                  <a:schemeClr val="tx1"/>
+                </a:solidFill>
+              </a:ln>
+            </p:spPr>
+            <p:style>
+              <a:lnRef idx="2">
+                <a:schemeClr val="accent1">
+                  <a:shade val="15000"/>
+                </a:schemeClr>
+              </a:lnRef>
+              <a:fillRef idx="1">
+                <a:schemeClr val="accent1"/>
+              </a:fillRef>
+              <a:effectRef idx="0">
+                <a:schemeClr val="accent1"/>
+              </a:effectRef>
+              <a:fontRef idx="minor">
+                <a:schemeClr val="lt1"/>
+              </a:fontRef>
+            </p:style>
+            <p:txBody>
+              <a:bodyPr rtlCol="0" anchor="ctr"/>
+              <a:lstStyle/>
+              <a:p>
+                <a:pPr algn="ctr"/>
+                <a:r>
+                  <a:rPr lang="ko-KR" altLang="en-US" dirty="0">
+                    <a:solidFill>
+                      <a:schemeClr val="tx1"/>
+                    </a:solidFill>
+                  </a:rPr>
+                  <a:t>약</a:t>
+                </a:r>
+              </a:p>
+            </p:txBody>
+          </p:sp>
+        </p:grpSp>
+      </p:grpSp>
+      <p:sp>
+        <p:nvSpPr>
+          <p:cNvPr id="46" name="타원 45">
+            <a:extLst>
+              <a:ext uri="{FF2B5EF4-FFF2-40B4-BE49-F238E27FC236}">
+                <a16:creationId xmlns:a16="http://schemas.microsoft.com/office/drawing/2014/main" id="{2E32937B-719F-CD4A-2D97-BFD16A0EAA96}"/>
+              </a:ext>
+            </a:extLst>
+          </p:cNvPr>
+          <p:cNvSpPr>
+            <a:spLocks noChangeAspect="1"/>
+          </p:cNvSpPr>
+          <p:nvPr/>
+        </p:nvSpPr>
+        <p:spPr>
+          <a:xfrm>
+            <a:off x="9568969" y="4694500"/>
+            <a:ext cx="1010481" cy="1010481"/>
+          </a:xfrm>
+          <a:prstGeom prst="ellipse">
+            <a:avLst/>
+          </a:prstGeom>
+          <a:noFill/>
+        </p:spPr>
+        <p:style>
+          <a:lnRef idx="2">
+            <a:schemeClr val="accent1">
+              <a:shade val="15000"/>
+            </a:schemeClr>
+          </a:lnRef>
+          <a:fillRef idx="1">
+            <a:schemeClr val="accent1"/>
+          </a:fillRef>
+          <a:effectRef idx="0">
+            <a:schemeClr val="accent1"/>
+          </a:effectRef>
+          <a:fontRef idx="minor">
+            <a:schemeClr val="lt1"/>
+          </a:fontRef>
+        </p:style>
+        <p:txBody>
+          <a:bodyPr rtlCol="0" anchor="ctr"/>
+          <a:lstStyle/>
+          <a:p>
+            <a:pPr algn="ctr"/>
+            <a:endParaRPr lang="ko-KR" altLang="en-US" dirty="0"/>
+          </a:p>
+        </p:txBody>
+      </p:sp>
+      <p:sp>
+        <p:nvSpPr>
+          <p:cNvPr id="58" name="TextBox 57">
+            <a:extLst>
+              <a:ext uri="{FF2B5EF4-FFF2-40B4-BE49-F238E27FC236}">
+                <a16:creationId xmlns:a16="http://schemas.microsoft.com/office/drawing/2014/main" id="{29A1FE30-A343-9D3B-221F-4DF155DE8ACD}"/>
+              </a:ext>
+            </a:extLst>
+          </p:cNvPr>
+          <p:cNvSpPr txBox="1"/>
+          <p:nvPr/>
+        </p:nvSpPr>
+        <p:spPr>
+          <a:xfrm>
+            <a:off x="5814163" y="2143130"/>
+            <a:ext cx="564578" cy="369332"/>
+          </a:xfrm>
+          <a:prstGeom prst="rect">
+            <a:avLst/>
+          </a:prstGeom>
+          <a:noFill/>
+        </p:spPr>
+        <p:txBody>
+          <a:bodyPr wrap="none" rtlCol="0">
+            <a:spAutoFit/>
+          </a:bodyPr>
+          <a:lstStyle/>
+          <a:p>
+            <a:r>
+              <a:rPr lang="en-US" altLang="ko-KR" dirty="0"/>
+              <a:t>200</a:t>
+            </a:r>
+            <a:endParaRPr lang="ko-KR" altLang="en-US" dirty="0"/>
+          </a:p>
+        </p:txBody>
+      </p:sp>
+      <p:grpSp>
+        <p:nvGrpSpPr>
+          <p:cNvPr id="67" name="그룹 66">
+            <a:extLst>
+              <a:ext uri="{FF2B5EF4-FFF2-40B4-BE49-F238E27FC236}">
+                <a16:creationId xmlns:a16="http://schemas.microsoft.com/office/drawing/2014/main" id="{44C08B9C-1E18-D1B5-EF19-1149ED6C439F}"/>
+              </a:ext>
+            </a:extLst>
+          </p:cNvPr>
+          <p:cNvGrpSpPr/>
+          <p:nvPr/>
+        </p:nvGrpSpPr>
+        <p:grpSpPr>
+          <a:xfrm>
+            <a:off x="5786023" y="2830445"/>
+            <a:ext cx="615148" cy="1197145"/>
+            <a:chOff x="5763593" y="2694953"/>
+            <a:chExt cx="615148" cy="1197145"/>
+          </a:xfrm>
+        </p:grpSpPr>
+        <p:sp>
+          <p:nvSpPr>
+            <p:cNvPr id="162" name="순서도: 자기 디스크 161">
+              <a:extLst>
+                <a:ext uri="{FF2B5EF4-FFF2-40B4-BE49-F238E27FC236}">
+                  <a16:creationId xmlns:a16="http://schemas.microsoft.com/office/drawing/2014/main" id="{F0997B16-77B2-B6C5-D91A-2636B6D5CA26}"/>
+                </a:ext>
+              </a:extLst>
+            </p:cNvPr>
+            <p:cNvSpPr/>
+            <p:nvPr/>
+          </p:nvSpPr>
+          <p:spPr>
+            <a:xfrm>
+              <a:off x="5764873" y="2872100"/>
+              <a:ext cx="613868" cy="1019998"/>
+            </a:xfrm>
+            <a:prstGeom prst="flowChartMagneticDisk">
+              <a:avLst/>
+            </a:prstGeom>
+            <a:solidFill>
+              <a:srgbClr val="FF0000">
+                <a:alpha val="30000"/>
+              </a:srgbClr>
+            </a:solidFill>
+          </p:spPr>
+          <p:style>
+            <a:lnRef idx="2">
+              <a:schemeClr val="accent1">
+                <a:shade val="15000"/>
+              </a:schemeClr>
+            </a:lnRef>
+            <a:fillRef idx="1">
+              <a:schemeClr val="accent1"/>
+            </a:fillRef>
+            <a:effectRef idx="0">
+              <a:schemeClr val="accent1"/>
+            </a:effectRef>
+            <a:fontRef idx="minor">
+              <a:schemeClr val="lt1"/>
+            </a:fontRef>
+          </p:style>
+          <p:txBody>
+            <a:bodyPr rtlCol="0" anchor="ctr"/>
+            <a:lstStyle/>
+            <a:p>
+              <a:pPr algn="ctr"/>
+              <a:endParaRPr lang="ko-KR" altLang="en-US" dirty="0"/>
+            </a:p>
+          </p:txBody>
+        </p:sp>
+        <p:sp>
+          <p:nvSpPr>
+            <p:cNvPr id="66" name="직사각형 65">
+              <a:extLst>
+                <a:ext uri="{FF2B5EF4-FFF2-40B4-BE49-F238E27FC236}">
+                  <a16:creationId xmlns:a16="http://schemas.microsoft.com/office/drawing/2014/main" id="{77BF8009-4887-5532-2676-73A60BFC1E45}"/>
+                </a:ext>
+              </a:extLst>
+            </p:cNvPr>
+            <p:cNvSpPr/>
+            <p:nvPr/>
+          </p:nvSpPr>
+          <p:spPr>
+            <a:xfrm>
+              <a:off x="5763593" y="2694953"/>
+              <a:ext cx="609672" cy="105131"/>
+            </a:xfrm>
+            <a:prstGeom prst="rect">
+              <a:avLst/>
+            </a:prstGeom>
+            <a:solidFill>
+              <a:schemeClr val="accent1">
+                <a:lumMod val="40000"/>
+                <a:lumOff val="60000"/>
+              </a:schemeClr>
+            </a:solidFill>
+          </p:spPr>
+          <p:style>
+            <a:lnRef idx="2">
+              <a:schemeClr val="accent1">
+                <a:shade val="15000"/>
+              </a:schemeClr>
+            </a:lnRef>
+            <a:fillRef idx="1">
+              <a:schemeClr val="accent1"/>
+            </a:fillRef>
+            <a:effectRef idx="0">
+              <a:schemeClr val="accent1"/>
+            </a:effectRef>
+            <a:fontRef idx="minor">
+              <a:schemeClr val="lt1"/>
+            </a:fontRef>
+          </p:style>
+          <p:txBody>
+            <a:bodyPr rtlCol="0" anchor="ctr"/>
+            <a:lstStyle/>
+            <a:p>
+              <a:pPr algn="ctr"/>
+              <a:endParaRPr lang="ko-KR" altLang="en-US"/>
+            </a:p>
+          </p:txBody>
+        </p:sp>
+      </p:grpSp>
+      <p:sp>
+        <p:nvSpPr>
+          <p:cNvPr id="71" name="타원 70">
+            <a:extLst>
+              <a:ext uri="{FF2B5EF4-FFF2-40B4-BE49-F238E27FC236}">
+                <a16:creationId xmlns:a16="http://schemas.microsoft.com/office/drawing/2014/main" id="{B0FF62DD-9EA1-8BF5-4B4B-5DDFBC2F2DDF}"/>
+              </a:ext>
+            </a:extLst>
+          </p:cNvPr>
+          <p:cNvSpPr>
+            <a:spLocks noChangeAspect="1"/>
+          </p:cNvSpPr>
+          <p:nvPr/>
+        </p:nvSpPr>
+        <p:spPr>
+          <a:xfrm>
+            <a:off x="1055589" y="4036922"/>
+            <a:ext cx="360000" cy="360000"/>
+          </a:xfrm>
+          <a:prstGeom prst="ellipse">
+            <a:avLst/>
+          </a:prstGeom>
+          <a:solidFill>
+            <a:schemeClr val="accent1">
+              <a:lumMod val="40000"/>
+              <a:lumOff val="60000"/>
+              <a:alpha val="50000"/>
+            </a:schemeClr>
+          </a:solidFill>
+          <a:ln>
+            <a:solidFill>
+              <a:schemeClr val="tx1"/>
+            </a:solidFill>
+          </a:ln>
+        </p:spPr>
+        <p:style>
+          <a:lnRef idx="2">
+            <a:schemeClr val="accent1">
+              <a:shade val="15000"/>
+            </a:schemeClr>
+          </a:lnRef>
+          <a:fillRef idx="1">
+            <a:schemeClr val="accent1"/>
+          </a:fillRef>
+          <a:effectRef idx="0">
+            <a:schemeClr val="accent1"/>
+          </a:effectRef>
+          <a:fontRef idx="minor">
+            <a:schemeClr val="lt1"/>
+          </a:fontRef>
+        </p:style>
+        <p:txBody>
+          <a:bodyPr rtlCol="0" anchor="ctr"/>
+          <a:lstStyle/>
+          <a:p>
+            <a:pPr algn="ctr"/>
+            <a:r>
+              <a:rPr lang="ko-KR" altLang="en-US" dirty="0"/>
+              <a:t>전</a:t>
+            </a:r>
+          </a:p>
+        </p:txBody>
+      </p:sp>
+      <p:sp>
+        <p:nvSpPr>
+          <p:cNvPr id="76" name="TextBox 75">
+            <a:extLst>
+              <a:ext uri="{FF2B5EF4-FFF2-40B4-BE49-F238E27FC236}">
+                <a16:creationId xmlns:a16="http://schemas.microsoft.com/office/drawing/2014/main" id="{8967ED3F-1F73-3FD7-1170-A2B2FF30F972}"/>
+              </a:ext>
+            </a:extLst>
+          </p:cNvPr>
+          <p:cNvSpPr txBox="1"/>
+          <p:nvPr/>
+        </p:nvSpPr>
+        <p:spPr>
+          <a:xfrm>
+            <a:off x="7749540" y="1653540"/>
+            <a:ext cx="1316386" cy="1477328"/>
+          </a:xfrm>
+          <a:prstGeom prst="rect">
+            <a:avLst/>
+          </a:prstGeom>
+          <a:noFill/>
+        </p:spPr>
+        <p:txBody>
+          <a:bodyPr wrap="none" rtlCol="0">
+            <a:spAutoFit/>
+          </a:bodyPr>
+          <a:lstStyle/>
+          <a:p>
+            <a:r>
+              <a:rPr lang="en-US" altLang="ko-KR" dirty="0"/>
+              <a:t>3</a:t>
+            </a:r>
+            <a:r>
+              <a:rPr lang="ko-KR" altLang="en-US" dirty="0"/>
+              <a:t>단계 공격</a:t>
+            </a:r>
+            <a:endParaRPr lang="en-US" altLang="ko-KR" dirty="0"/>
+          </a:p>
+          <a:p>
+            <a:endParaRPr lang="en-US" altLang="ko-KR" dirty="0"/>
+          </a:p>
+          <a:p>
+            <a:r>
+              <a:rPr lang="en-US" altLang="ko-KR" dirty="0"/>
+              <a:t>1</a:t>
+            </a:r>
+            <a:r>
+              <a:rPr lang="ko-KR" altLang="en-US" dirty="0"/>
+              <a:t>단계 </a:t>
+            </a:r>
+            <a:r>
+              <a:rPr lang="en-US" altLang="ko-KR" dirty="0"/>
+              <a:t>10%</a:t>
+            </a:r>
+            <a:br>
+              <a:rPr lang="en-US" altLang="ko-KR" dirty="0"/>
+            </a:br>
+            <a:r>
+              <a:rPr lang="en-US" altLang="ko-KR" dirty="0"/>
+              <a:t>2</a:t>
+            </a:r>
+            <a:r>
+              <a:rPr lang="ko-KR" altLang="en-US" dirty="0"/>
+              <a:t>단계 </a:t>
+            </a:r>
+            <a:r>
+              <a:rPr lang="en-US" altLang="ko-KR" dirty="0"/>
+              <a:t>10%</a:t>
+            </a:r>
+            <a:br>
+              <a:rPr lang="en-US" altLang="ko-KR" dirty="0"/>
+            </a:br>
+            <a:r>
+              <a:rPr lang="en-US" altLang="ko-KR" dirty="0"/>
+              <a:t>3</a:t>
+            </a:r>
+            <a:r>
+              <a:rPr lang="ko-KR" altLang="en-US" dirty="0"/>
+              <a:t>단계 </a:t>
+            </a:r>
+            <a:r>
+              <a:rPr lang="en-US" altLang="ko-KR" dirty="0"/>
+              <a:t>50%</a:t>
+            </a:r>
+            <a:endParaRPr lang="ko-KR" altLang="en-US" dirty="0"/>
+          </a:p>
+        </p:txBody>
+      </p:sp>
+      <p:sp>
+        <p:nvSpPr>
+          <p:cNvPr id="79" name="TextBox 78">
+            <a:extLst>
+              <a:ext uri="{FF2B5EF4-FFF2-40B4-BE49-F238E27FC236}">
+                <a16:creationId xmlns:a16="http://schemas.microsoft.com/office/drawing/2014/main" id="{8A7E063D-3995-EEE6-507A-2C7AA68D8BA0}"/>
+              </a:ext>
+            </a:extLst>
+          </p:cNvPr>
+          <p:cNvSpPr txBox="1"/>
+          <p:nvPr/>
+        </p:nvSpPr>
+        <p:spPr>
+          <a:xfrm>
+            <a:off x="8919226" y="2739055"/>
+            <a:ext cx="2682145" cy="369332"/>
+          </a:xfrm>
+          <a:prstGeom prst="rect">
+            <a:avLst/>
+          </a:prstGeom>
+          <a:noFill/>
+        </p:spPr>
+        <p:txBody>
+          <a:bodyPr wrap="none" rtlCol="0">
+            <a:spAutoFit/>
+          </a:bodyPr>
+          <a:lstStyle/>
+          <a:p>
+            <a:r>
+              <a:rPr lang="ko-KR" altLang="en-US" dirty="0"/>
+              <a:t>회피 불가 </a:t>
+            </a:r>
+            <a:r>
+              <a:rPr lang="en-US" altLang="ko-KR" dirty="0"/>
+              <a:t>== </a:t>
+            </a:r>
+            <a:r>
+              <a:rPr lang="ko-KR" altLang="en-US" dirty="0"/>
+              <a:t>공격 </a:t>
+            </a:r>
+            <a:r>
+              <a:rPr lang="ko-KR" altLang="en-US" dirty="0" err="1"/>
+              <a:t>기믹</a:t>
+            </a:r>
+            <a:endParaRPr lang="ko-KR" altLang="en-US" dirty="0"/>
+          </a:p>
+        </p:txBody>
+      </p:sp>
+    </p:spTree>
+    <p:extLst>
+      <p:ext uri="{BB962C8B-B14F-4D97-AF65-F5344CB8AC3E}">
+        <p14:creationId xmlns:p14="http://schemas.microsoft.com/office/powerpoint/2010/main" val="1306465783"/>
       </p:ext>
     </p:extLst>
   </p:cSld>

--- a/씬 별 UI.pptx
+++ b/씬 별 UI.pptx
@@ -1423,7 +1423,7 @@
           <a:p>
             <a:fld id="{077A12B5-C22A-4AF7-A62B-EF69F51B743A}" type="datetimeFigureOut">
               <a:rPr lang="ko-KR" altLang="en-US" smtClean="0"/>
-              <a:t>2026-10-23</a:t>
+              <a:t>2026-10-26</a:t>
             </a:fld>
             <a:endParaRPr lang="ko-KR" altLang="en-US"/>
           </a:p>
@@ -1837,7 +1837,7 @@
           <a:p>
             <a:fld id="{004137A2-7D2A-4EB2-87EC-F3BD120F3C23}" type="datetimeFigureOut">
               <a:rPr lang="ko-KR" altLang="en-US" smtClean="0"/>
-              <a:t>2026-10-23</a:t>
+              <a:t>2026-10-26</a:t>
             </a:fld>
             <a:endParaRPr lang="ko-KR" altLang="en-US"/>
           </a:p>
@@ -2035,7 +2035,7 @@
           <a:p>
             <a:fld id="{004137A2-7D2A-4EB2-87EC-F3BD120F3C23}" type="datetimeFigureOut">
               <a:rPr lang="ko-KR" altLang="en-US" smtClean="0"/>
-              <a:t>2026-10-23</a:t>
+              <a:t>2026-10-26</a:t>
             </a:fld>
             <a:endParaRPr lang="ko-KR" altLang="en-US"/>
           </a:p>
@@ -2243,7 +2243,7 @@
           <a:p>
             <a:fld id="{004137A2-7D2A-4EB2-87EC-F3BD120F3C23}" type="datetimeFigureOut">
               <a:rPr lang="ko-KR" altLang="en-US" smtClean="0"/>
-              <a:t>2026-10-23</a:t>
+              <a:t>2026-10-26</a:t>
             </a:fld>
             <a:endParaRPr lang="ko-KR" altLang="en-US"/>
           </a:p>
@@ -2441,7 +2441,7 @@
           <a:p>
             <a:fld id="{004137A2-7D2A-4EB2-87EC-F3BD120F3C23}" type="datetimeFigureOut">
               <a:rPr lang="ko-KR" altLang="en-US" smtClean="0"/>
-              <a:t>2026-10-23</a:t>
+              <a:t>2026-10-26</a:t>
             </a:fld>
             <a:endParaRPr lang="ko-KR" altLang="en-US"/>
           </a:p>
@@ -2716,7 +2716,7 @@
           <a:p>
             <a:fld id="{004137A2-7D2A-4EB2-87EC-F3BD120F3C23}" type="datetimeFigureOut">
               <a:rPr lang="ko-KR" altLang="en-US" smtClean="0"/>
-              <a:t>2026-10-23</a:t>
+              <a:t>2026-10-26</a:t>
             </a:fld>
             <a:endParaRPr lang="ko-KR" altLang="en-US"/>
           </a:p>
@@ -2981,7 +2981,7 @@
           <a:p>
             <a:fld id="{004137A2-7D2A-4EB2-87EC-F3BD120F3C23}" type="datetimeFigureOut">
               <a:rPr lang="ko-KR" altLang="en-US" smtClean="0"/>
-              <a:t>2026-10-23</a:t>
+              <a:t>2026-10-26</a:t>
             </a:fld>
             <a:endParaRPr lang="ko-KR" altLang="en-US"/>
           </a:p>
@@ -3393,7 +3393,7 @@
           <a:p>
             <a:fld id="{004137A2-7D2A-4EB2-87EC-F3BD120F3C23}" type="datetimeFigureOut">
               <a:rPr lang="ko-KR" altLang="en-US" smtClean="0"/>
-              <a:t>2026-10-23</a:t>
+              <a:t>2026-10-26</a:t>
             </a:fld>
             <a:endParaRPr lang="ko-KR" altLang="en-US"/>
           </a:p>
@@ -3534,7 +3534,7 @@
           <a:p>
             <a:fld id="{004137A2-7D2A-4EB2-87EC-F3BD120F3C23}" type="datetimeFigureOut">
               <a:rPr lang="ko-KR" altLang="en-US" smtClean="0"/>
-              <a:t>2026-10-23</a:t>
+              <a:t>2026-10-26</a:t>
             </a:fld>
             <a:endParaRPr lang="ko-KR" altLang="en-US"/>
           </a:p>
@@ -3647,7 +3647,7 @@
           <a:p>
             <a:fld id="{004137A2-7D2A-4EB2-87EC-F3BD120F3C23}" type="datetimeFigureOut">
               <a:rPr lang="ko-KR" altLang="en-US" smtClean="0"/>
-              <a:t>2026-10-23</a:t>
+              <a:t>2026-10-26</a:t>
             </a:fld>
             <a:endParaRPr lang="ko-KR" altLang="en-US"/>
           </a:p>
@@ -3958,7 +3958,7 @@
           <a:p>
             <a:fld id="{004137A2-7D2A-4EB2-87EC-F3BD120F3C23}" type="datetimeFigureOut">
               <a:rPr lang="ko-KR" altLang="en-US" smtClean="0"/>
-              <a:t>2026-10-23</a:t>
+              <a:t>2026-10-26</a:t>
             </a:fld>
             <a:endParaRPr lang="ko-KR" altLang="en-US"/>
           </a:p>
@@ -4246,7 +4246,7 @@
           <a:p>
             <a:fld id="{004137A2-7D2A-4EB2-87EC-F3BD120F3C23}" type="datetimeFigureOut">
               <a:rPr lang="ko-KR" altLang="en-US" smtClean="0"/>
-              <a:t>2026-10-23</a:t>
+              <a:t>2026-10-26</a:t>
             </a:fld>
             <a:endParaRPr lang="ko-KR" altLang="en-US"/>
           </a:p>
@@ -4487,7 +4487,7 @@
           <a:p>
             <a:fld id="{004137A2-7D2A-4EB2-87EC-F3BD120F3C23}" type="datetimeFigureOut">
               <a:rPr lang="ko-KR" altLang="en-US" smtClean="0"/>
-              <a:t>2026-10-23</a:t>
+              <a:t>2026-10-26</a:t>
             </a:fld>
             <a:endParaRPr lang="ko-KR" altLang="en-US"/>
           </a:p>

--- a/씬 별 UI.pptx
+++ b/씬 별 UI.pptx
@@ -8529,42 +8529,6 @@
       </p:grpSp>
       <p:sp>
         <p:nvSpPr>
-          <p:cNvPr id="11" name="TextBox 10">
-            <a:extLst>
-              <a:ext uri="{FF2B5EF4-FFF2-40B4-BE49-F238E27FC236}">
-                <a16:creationId xmlns:a16="http://schemas.microsoft.com/office/drawing/2014/main" id="{136875A4-EC35-0517-7EB9-4832EDA06AC2}"/>
-              </a:ext>
-            </a:extLst>
-          </p:cNvPr>
-          <p:cNvSpPr txBox="1"/>
-          <p:nvPr/>
-        </p:nvSpPr>
-        <p:spPr>
-          <a:xfrm>
-            <a:off x="928357" y="874344"/>
-            <a:ext cx="468398" cy="307777"/>
-          </a:xfrm>
-          <a:prstGeom prst="rect">
-            <a:avLst/>
-          </a:prstGeom>
-          <a:noFill/>
-        </p:spPr>
-        <p:txBody>
-          <a:bodyPr wrap="none" rtlCol="0">
-            <a:spAutoFit/>
-          </a:bodyPr>
-          <a:lstStyle/>
-          <a:p>
-            <a:r>
-              <a:rPr lang="en-US" altLang="ko-KR" sz="1400" b="1" dirty="0"/>
-              <a:t>MP</a:t>
-            </a:r>
-            <a:endParaRPr lang="ko-KR" altLang="en-US" sz="1400" b="1" dirty="0"/>
-          </a:p>
-        </p:txBody>
-      </p:sp>
-      <p:sp>
-        <p:nvSpPr>
           <p:cNvPr id="17" name="TextBox 16">
             <a:extLst>
               <a:ext uri="{FF2B5EF4-FFF2-40B4-BE49-F238E27FC236}">
@@ -8723,6 +8687,42 @@
           </p:txBody>
         </p:sp>
       </p:grpSp>
+      <p:sp>
+        <p:nvSpPr>
+          <p:cNvPr id="25" name="TextBox 24">
+            <a:extLst>
+              <a:ext uri="{FF2B5EF4-FFF2-40B4-BE49-F238E27FC236}">
+                <a16:creationId xmlns:a16="http://schemas.microsoft.com/office/drawing/2014/main" id="{0B9DC068-A76D-B11A-E0C3-7EA4C307CC02}"/>
+              </a:ext>
+            </a:extLst>
+          </p:cNvPr>
+          <p:cNvSpPr txBox="1"/>
+          <p:nvPr/>
+        </p:nvSpPr>
+        <p:spPr>
+          <a:xfrm>
+            <a:off x="928358" y="883816"/>
+            <a:ext cx="468398" cy="307777"/>
+          </a:xfrm>
+          <a:prstGeom prst="rect">
+            <a:avLst/>
+          </a:prstGeom>
+          <a:noFill/>
+        </p:spPr>
+        <p:txBody>
+          <a:bodyPr wrap="none" rtlCol="0">
+            <a:spAutoFit/>
+          </a:bodyPr>
+          <a:lstStyle/>
+          <a:p>
+            <a:r>
+              <a:rPr lang="en-US" altLang="ko-KR" sz="1400" b="1" dirty="0"/>
+              <a:t>MP</a:t>
+            </a:r>
+            <a:endParaRPr lang="ko-KR" altLang="en-US" sz="1400" b="1" dirty="0"/>
+          </a:p>
+        </p:txBody>
+      </p:sp>
     </p:spTree>
     <p:extLst>
       <p:ext uri="{BB962C8B-B14F-4D97-AF65-F5344CB8AC3E}">
@@ -10352,42 +10352,6 @@
       </p:grpSp>
       <p:sp>
         <p:nvSpPr>
-          <p:cNvPr id="11" name="TextBox 10">
-            <a:extLst>
-              <a:ext uri="{FF2B5EF4-FFF2-40B4-BE49-F238E27FC236}">
-                <a16:creationId xmlns:a16="http://schemas.microsoft.com/office/drawing/2014/main" id="{1FAA5697-ABD9-E81B-5506-D58B733786F0}"/>
-              </a:ext>
-            </a:extLst>
-          </p:cNvPr>
-          <p:cNvSpPr txBox="1"/>
-          <p:nvPr/>
-        </p:nvSpPr>
-        <p:spPr>
-          <a:xfrm>
-            <a:off x="928357" y="874344"/>
-            <a:ext cx="468398" cy="307777"/>
-          </a:xfrm>
-          <a:prstGeom prst="rect">
-            <a:avLst/>
-          </a:prstGeom>
-          <a:noFill/>
-        </p:spPr>
-        <p:txBody>
-          <a:bodyPr wrap="none" rtlCol="0">
-            <a:spAutoFit/>
-          </a:bodyPr>
-          <a:lstStyle/>
-          <a:p>
-            <a:r>
-              <a:rPr lang="en-US" altLang="ko-KR" sz="1400" b="1" dirty="0"/>
-              <a:t>MP</a:t>
-            </a:r>
-            <a:endParaRPr lang="ko-KR" altLang="en-US" sz="1400" b="1" dirty="0"/>
-          </a:p>
-        </p:txBody>
-      </p:sp>
-      <p:sp>
-        <p:nvSpPr>
           <p:cNvPr id="17" name="TextBox 16">
             <a:extLst>
               <a:ext uri="{FF2B5EF4-FFF2-40B4-BE49-F238E27FC236}">
@@ -10436,7 +10400,7 @@
         </p:nvGrpSpPr>
         <p:grpSpPr>
           <a:xfrm>
-            <a:off x="10052550" y="2246899"/>
+            <a:off x="10329254" y="1824714"/>
             <a:ext cx="623235" cy="1150334"/>
             <a:chOff x="7112870" y="2496755"/>
             <a:chExt cx="623235" cy="1150334"/>
@@ -10795,6 +10759,42 @@
               <a:rPr lang="ko-KR" altLang="en-US" dirty="0"/>
               <a:t>약</a:t>
             </a:r>
+          </a:p>
+        </p:txBody>
+      </p:sp>
+      <p:sp>
+        <p:nvSpPr>
+          <p:cNvPr id="26" name="TextBox 25">
+            <a:extLst>
+              <a:ext uri="{FF2B5EF4-FFF2-40B4-BE49-F238E27FC236}">
+                <a16:creationId xmlns:a16="http://schemas.microsoft.com/office/drawing/2014/main" id="{319FFFD2-E606-9F9D-3296-EF70599DABC7}"/>
+              </a:ext>
+            </a:extLst>
+          </p:cNvPr>
+          <p:cNvSpPr txBox="1"/>
+          <p:nvPr/>
+        </p:nvSpPr>
+        <p:spPr>
+          <a:xfrm>
+            <a:off x="928358" y="883816"/>
+            <a:ext cx="468398" cy="307777"/>
+          </a:xfrm>
+          <a:prstGeom prst="rect">
+            <a:avLst/>
+          </a:prstGeom>
+          <a:noFill/>
+        </p:spPr>
+        <p:txBody>
+          <a:bodyPr wrap="none" rtlCol="0">
+            <a:spAutoFit/>
+          </a:bodyPr>
+          <a:lstStyle/>
+          <a:p>
+            <a:r>
+              <a:rPr lang="en-US" altLang="ko-KR" sz="1400" b="1" dirty="0"/>
+              <a:t>MP</a:t>
+            </a:r>
+            <a:endParaRPr lang="ko-KR" altLang="en-US" sz="1400" b="1" dirty="0"/>
           </a:p>
         </p:txBody>
       </p:sp>
@@ -12425,42 +12425,6 @@
           </p:txBody>
         </p:sp>
       </p:grpSp>
-      <p:sp>
-        <p:nvSpPr>
-          <p:cNvPr id="11" name="TextBox 10">
-            <a:extLst>
-              <a:ext uri="{FF2B5EF4-FFF2-40B4-BE49-F238E27FC236}">
-                <a16:creationId xmlns:a16="http://schemas.microsoft.com/office/drawing/2014/main" id="{DBED1E8B-DACD-9267-09B7-9A2EC5002FD9}"/>
-              </a:ext>
-            </a:extLst>
-          </p:cNvPr>
-          <p:cNvSpPr txBox="1"/>
-          <p:nvPr/>
-        </p:nvSpPr>
-        <p:spPr>
-          <a:xfrm>
-            <a:off x="928357" y="874344"/>
-            <a:ext cx="468398" cy="307777"/>
-          </a:xfrm>
-          <a:prstGeom prst="rect">
-            <a:avLst/>
-          </a:prstGeom>
-          <a:noFill/>
-        </p:spPr>
-        <p:txBody>
-          <a:bodyPr wrap="none" rtlCol="0">
-            <a:spAutoFit/>
-          </a:bodyPr>
-          <a:lstStyle/>
-          <a:p>
-            <a:r>
-              <a:rPr lang="en-US" altLang="ko-KR" sz="1400" b="1" dirty="0"/>
-              <a:t>MP</a:t>
-            </a:r>
-            <a:endParaRPr lang="ko-KR" altLang="en-US" sz="1400" b="1" dirty="0"/>
-          </a:p>
-        </p:txBody>
-      </p:sp>
       <p:sp>
         <p:nvSpPr>
           <p:cNvPr id="17" name="TextBox 16">
@@ -13537,6 +13501,42 @@
               <a:t>기믹</a:t>
             </a:r>
             <a:endParaRPr lang="ko-KR" altLang="en-US" dirty="0"/>
+          </a:p>
+        </p:txBody>
+      </p:sp>
+      <p:sp>
+        <p:nvSpPr>
+          <p:cNvPr id="43" name="TextBox 42">
+            <a:extLst>
+              <a:ext uri="{FF2B5EF4-FFF2-40B4-BE49-F238E27FC236}">
+                <a16:creationId xmlns:a16="http://schemas.microsoft.com/office/drawing/2014/main" id="{86460C8D-74CC-FF0D-6741-6B7157674027}"/>
+              </a:ext>
+            </a:extLst>
+          </p:cNvPr>
+          <p:cNvSpPr txBox="1"/>
+          <p:nvPr/>
+        </p:nvSpPr>
+        <p:spPr>
+          <a:xfrm>
+            <a:off x="928358" y="883816"/>
+            <a:ext cx="468398" cy="307777"/>
+          </a:xfrm>
+          <a:prstGeom prst="rect">
+            <a:avLst/>
+          </a:prstGeom>
+          <a:noFill/>
+        </p:spPr>
+        <p:txBody>
+          <a:bodyPr wrap="none" rtlCol="0">
+            <a:spAutoFit/>
+          </a:bodyPr>
+          <a:lstStyle/>
+          <a:p>
+            <a:r>
+              <a:rPr lang="en-US" altLang="ko-KR" sz="1400" b="1" dirty="0"/>
+              <a:t>MP</a:t>
+            </a:r>
+            <a:endParaRPr lang="ko-KR" altLang="en-US" sz="1400" b="1" dirty="0"/>
           </a:p>
         </p:txBody>
       </p:sp>

--- a/씬 별 UI.pptx
+++ b/씬 별 UI.pptx
@@ -5,15 +5,16 @@
     <p:sldMasterId id="2147483648" r:id="rId1"/>
   </p:sldMasterIdLst>
   <p:notesMasterIdLst>
-    <p:notesMasterId r:id="rId8"/>
+    <p:notesMasterId r:id="rId9"/>
   </p:notesMasterIdLst>
   <p:sldIdLst>
     <p:sldId id="303" r:id="rId2"/>
     <p:sldId id="292" r:id="rId3"/>
     <p:sldId id="311" r:id="rId4"/>
     <p:sldId id="310" r:id="rId5"/>
-    <p:sldId id="312" r:id="rId6"/>
-    <p:sldId id="313" r:id="rId7"/>
+    <p:sldId id="314" r:id="rId6"/>
+    <p:sldId id="312" r:id="rId7"/>
+    <p:sldId id="313" r:id="rId8"/>
   </p:sldIdLst>
   <p:sldSz cx="12192000" cy="6858000"/>
   <p:notesSz cx="6858000" cy="9144000"/>
@@ -1423,7 +1424,7 @@
           <a:p>
             <a:fld id="{077A12B5-C22A-4AF7-A62B-EF69F51B743A}" type="datetimeFigureOut">
               <a:rPr lang="ko-KR" altLang="en-US" smtClean="0"/>
-              <a:t>2026-10-26</a:t>
+              <a:t>2026-10-27</a:t>
             </a:fld>
             <a:endParaRPr lang="ko-KR" altLang="en-US"/>
           </a:p>
@@ -1837,7 +1838,7 @@
           <a:p>
             <a:fld id="{004137A2-7D2A-4EB2-87EC-F3BD120F3C23}" type="datetimeFigureOut">
               <a:rPr lang="ko-KR" altLang="en-US" smtClean="0"/>
-              <a:t>2026-10-26</a:t>
+              <a:t>2026-10-27</a:t>
             </a:fld>
             <a:endParaRPr lang="ko-KR" altLang="en-US"/>
           </a:p>
@@ -2035,7 +2036,7 @@
           <a:p>
             <a:fld id="{004137A2-7D2A-4EB2-87EC-F3BD120F3C23}" type="datetimeFigureOut">
               <a:rPr lang="ko-KR" altLang="en-US" smtClean="0"/>
-              <a:t>2026-10-26</a:t>
+              <a:t>2026-10-27</a:t>
             </a:fld>
             <a:endParaRPr lang="ko-KR" altLang="en-US"/>
           </a:p>
@@ -2243,7 +2244,7 @@
           <a:p>
             <a:fld id="{004137A2-7D2A-4EB2-87EC-F3BD120F3C23}" type="datetimeFigureOut">
               <a:rPr lang="ko-KR" altLang="en-US" smtClean="0"/>
-              <a:t>2026-10-26</a:t>
+              <a:t>2026-10-27</a:t>
             </a:fld>
             <a:endParaRPr lang="ko-KR" altLang="en-US"/>
           </a:p>
@@ -2441,7 +2442,7 @@
           <a:p>
             <a:fld id="{004137A2-7D2A-4EB2-87EC-F3BD120F3C23}" type="datetimeFigureOut">
               <a:rPr lang="ko-KR" altLang="en-US" smtClean="0"/>
-              <a:t>2026-10-26</a:t>
+              <a:t>2026-10-27</a:t>
             </a:fld>
             <a:endParaRPr lang="ko-KR" altLang="en-US"/>
           </a:p>
@@ -2716,7 +2717,7 @@
           <a:p>
             <a:fld id="{004137A2-7D2A-4EB2-87EC-F3BD120F3C23}" type="datetimeFigureOut">
               <a:rPr lang="ko-KR" altLang="en-US" smtClean="0"/>
-              <a:t>2026-10-26</a:t>
+              <a:t>2026-10-27</a:t>
             </a:fld>
             <a:endParaRPr lang="ko-KR" altLang="en-US"/>
           </a:p>
@@ -2981,7 +2982,7 @@
           <a:p>
             <a:fld id="{004137A2-7D2A-4EB2-87EC-F3BD120F3C23}" type="datetimeFigureOut">
               <a:rPr lang="ko-KR" altLang="en-US" smtClean="0"/>
-              <a:t>2026-10-26</a:t>
+              <a:t>2026-10-27</a:t>
             </a:fld>
             <a:endParaRPr lang="ko-KR" altLang="en-US"/>
           </a:p>
@@ -3393,7 +3394,7 @@
           <a:p>
             <a:fld id="{004137A2-7D2A-4EB2-87EC-F3BD120F3C23}" type="datetimeFigureOut">
               <a:rPr lang="ko-KR" altLang="en-US" smtClean="0"/>
-              <a:t>2026-10-26</a:t>
+              <a:t>2026-10-27</a:t>
             </a:fld>
             <a:endParaRPr lang="ko-KR" altLang="en-US"/>
           </a:p>
@@ -3534,7 +3535,7 @@
           <a:p>
             <a:fld id="{004137A2-7D2A-4EB2-87EC-F3BD120F3C23}" type="datetimeFigureOut">
               <a:rPr lang="ko-KR" altLang="en-US" smtClean="0"/>
-              <a:t>2026-10-26</a:t>
+              <a:t>2026-10-27</a:t>
             </a:fld>
             <a:endParaRPr lang="ko-KR" altLang="en-US"/>
           </a:p>
@@ -3647,7 +3648,7 @@
           <a:p>
             <a:fld id="{004137A2-7D2A-4EB2-87EC-F3BD120F3C23}" type="datetimeFigureOut">
               <a:rPr lang="ko-KR" altLang="en-US" smtClean="0"/>
-              <a:t>2026-10-26</a:t>
+              <a:t>2026-10-27</a:t>
             </a:fld>
             <a:endParaRPr lang="ko-KR" altLang="en-US"/>
           </a:p>
@@ -3958,7 +3959,7 @@
           <a:p>
             <a:fld id="{004137A2-7D2A-4EB2-87EC-F3BD120F3C23}" type="datetimeFigureOut">
               <a:rPr lang="ko-KR" altLang="en-US" smtClean="0"/>
-              <a:t>2026-10-26</a:t>
+              <a:t>2026-10-27</a:t>
             </a:fld>
             <a:endParaRPr lang="ko-KR" altLang="en-US"/>
           </a:p>
@@ -4246,7 +4247,7 @@
           <a:p>
             <a:fld id="{004137A2-7D2A-4EB2-87EC-F3BD120F3C23}" type="datetimeFigureOut">
               <a:rPr lang="ko-KR" altLang="en-US" smtClean="0"/>
-              <a:t>2026-10-26</a:t>
+              <a:t>2026-10-27</a:t>
             </a:fld>
             <a:endParaRPr lang="ko-KR" altLang="en-US"/>
           </a:p>
@@ -4487,7 +4488,7 @@
           <a:p>
             <a:fld id="{004137A2-7D2A-4EB2-87EC-F3BD120F3C23}" type="datetimeFigureOut">
               <a:rPr lang="ko-KR" altLang="en-US" smtClean="0"/>
-              <a:t>2026-10-26</a:t>
+              <a:t>2026-10-27</a:t>
             </a:fld>
             <a:endParaRPr lang="ko-KR" altLang="en-US"/>
           </a:p>
@@ -8723,6 +8724,58 @@
           </a:p>
         </p:txBody>
       </p:sp>
+      <p:pic>
+        <p:nvPicPr>
+          <p:cNvPr id="23" name="그림 22">
+            <a:extLst>
+              <a:ext uri="{FF2B5EF4-FFF2-40B4-BE49-F238E27FC236}">
+                <a16:creationId xmlns:a16="http://schemas.microsoft.com/office/drawing/2014/main" id="{F1FFB62F-9574-64B7-B150-A9400F6153DB}"/>
+              </a:ext>
+            </a:extLst>
+          </p:cNvPr>
+          <p:cNvPicPr>
+            <a:picLocks noChangeAspect="1"/>
+          </p:cNvPicPr>
+          <p:nvPr/>
+        </p:nvPicPr>
+        <p:blipFill>
+          <a:blip r:embed="rId2">
+            <a:duotone>
+              <a:schemeClr val="bg2">
+                <a:shade val="45000"/>
+                <a:satMod val="135000"/>
+              </a:schemeClr>
+              <a:prstClr val="white"/>
+            </a:duotone>
+            <a:extLst>
+              <a:ext uri="{BEBA8EAE-BF5A-486C-A8C5-ECC9F3942E4B}">
+                <a14:imgProps xmlns:a14="http://schemas.microsoft.com/office/drawing/2010/main">
+                  <a14:imgLayer r:embed="rId3">
+                    <a14:imgEffect>
+                      <a14:colorTemperature colorTemp="7335"/>
+                    </a14:imgEffect>
+                  </a14:imgLayer>
+                </a14:imgProps>
+              </a:ext>
+              <a:ext uri="{28A0092B-C50C-407E-A947-70E740481C1C}">
+                <a14:useLocalDpi xmlns:a14="http://schemas.microsoft.com/office/drawing/2010/main" val="0"/>
+              </a:ext>
+            </a:extLst>
+          </a:blip>
+          <a:stretch>
+            <a:fillRect/>
+          </a:stretch>
+        </p:blipFill>
+        <p:spPr>
+          <a:xfrm>
+            <a:off x="10669070" y="756928"/>
+            <a:ext cx="360000" cy="360000"/>
+          </a:xfrm>
+          <a:prstGeom prst="rect">
+            <a:avLst/>
+          </a:prstGeom>
+        </p:spPr>
+      </p:pic>
     </p:spTree>
     <p:extLst>
       <p:ext uri="{BB962C8B-B14F-4D97-AF65-F5344CB8AC3E}">
@@ -8737,6 +8790,1972 @@
 </file>
 
 <file path=ppt/slides/slide5.xml><?xml version="1.0" encoding="utf-8"?>
+<p:sld xmlns:a="http://schemas.openxmlformats.org/drawingml/2006/main" xmlns:r="http://schemas.openxmlformats.org/officeDocument/2006/relationships" xmlns:p="http://schemas.openxmlformats.org/presentationml/2006/main">
+  <p:cSld>
+    <p:spTree>
+      <p:nvGrpSpPr>
+        <p:cNvPr id="1" name="">
+          <a:extLst>
+            <a:ext uri="{FF2B5EF4-FFF2-40B4-BE49-F238E27FC236}">
+              <a16:creationId xmlns:a16="http://schemas.microsoft.com/office/drawing/2014/main" id="{6C91780B-5913-7E34-42D0-2728AABF620A}"/>
+            </a:ext>
+          </a:extLst>
+        </p:cNvPr>
+        <p:cNvGrpSpPr/>
+        <p:nvPr/>
+      </p:nvGrpSpPr>
+      <p:grpSpPr>
+        <a:xfrm>
+          <a:off x="0" y="0"/>
+          <a:ext cx="0" cy="0"/>
+          <a:chOff x="0" y="0"/>
+          <a:chExt cx="0" cy="0"/>
+        </a:xfrm>
+      </p:grpSpPr>
+      <p:sp>
+        <p:nvSpPr>
+          <p:cNvPr id="5" name="직사각형 4">
+            <a:extLst>
+              <a:ext uri="{FF2B5EF4-FFF2-40B4-BE49-F238E27FC236}">
+                <a16:creationId xmlns:a16="http://schemas.microsoft.com/office/drawing/2014/main" id="{D7CEE180-F10F-25CA-E55A-481F41794553}"/>
+              </a:ext>
+            </a:extLst>
+          </p:cNvPr>
+          <p:cNvSpPr>
+            <a:spLocks noChangeAspect="1"/>
+          </p:cNvSpPr>
+          <p:nvPr/>
+        </p:nvSpPr>
+        <p:spPr>
+          <a:xfrm>
+            <a:off x="912000" y="513000"/>
+            <a:ext cx="10368000" cy="5831999"/>
+          </a:xfrm>
+          <a:prstGeom prst="rect">
+            <a:avLst/>
+          </a:prstGeom>
+          <a:noFill/>
+        </p:spPr>
+        <p:style>
+          <a:lnRef idx="2">
+            <a:schemeClr val="accent1">
+              <a:shade val="15000"/>
+            </a:schemeClr>
+          </a:lnRef>
+          <a:fillRef idx="1">
+            <a:schemeClr val="accent1"/>
+          </a:fillRef>
+          <a:effectRef idx="0">
+            <a:schemeClr val="accent1"/>
+          </a:effectRef>
+          <a:fontRef idx="minor">
+            <a:schemeClr val="lt1"/>
+          </a:fontRef>
+        </p:style>
+        <p:txBody>
+          <a:bodyPr rtlCol="0" anchor="ctr"/>
+          <a:lstStyle/>
+          <a:p>
+            <a:pPr algn="ctr"/>
+            <a:endParaRPr lang="ko-KR" altLang="en-US" dirty="0"/>
+          </a:p>
+        </p:txBody>
+      </p:sp>
+      <p:grpSp>
+        <p:nvGrpSpPr>
+          <p:cNvPr id="22" name="그룹 21">
+            <a:extLst>
+              <a:ext uri="{FF2B5EF4-FFF2-40B4-BE49-F238E27FC236}">
+                <a16:creationId xmlns:a16="http://schemas.microsoft.com/office/drawing/2014/main" id="{A88264F7-144A-A2DC-9FBE-F7B4B98C0346}"/>
+              </a:ext>
+            </a:extLst>
+          </p:cNvPr>
+          <p:cNvGrpSpPr/>
+          <p:nvPr/>
+        </p:nvGrpSpPr>
+        <p:grpSpPr>
+          <a:xfrm>
+            <a:off x="9152550" y="4310424"/>
+            <a:ext cx="1800000" cy="1800000"/>
+            <a:chOff x="9296400" y="4152899"/>
+            <a:chExt cx="1800000" cy="1800000"/>
+          </a:xfrm>
+        </p:grpSpPr>
+        <p:grpSp>
+          <p:nvGrpSpPr>
+            <p:cNvPr id="20" name="그룹 19">
+              <a:extLst>
+                <a:ext uri="{FF2B5EF4-FFF2-40B4-BE49-F238E27FC236}">
+                  <a16:creationId xmlns:a16="http://schemas.microsoft.com/office/drawing/2014/main" id="{D9FA2B5B-27C2-90B3-F3D4-5EFF77F44F67}"/>
+                </a:ext>
+              </a:extLst>
+            </p:cNvPr>
+            <p:cNvGrpSpPr/>
+            <p:nvPr/>
+          </p:nvGrpSpPr>
+          <p:grpSpPr>
+            <a:xfrm>
+              <a:off x="9296400" y="4152899"/>
+              <a:ext cx="1800000" cy="1800000"/>
+              <a:chOff x="9296400" y="4152899"/>
+              <a:chExt cx="1800000" cy="1800000"/>
+            </a:xfrm>
+          </p:grpSpPr>
+          <p:sp>
+            <p:nvSpPr>
+              <p:cNvPr id="2" name="타원 1">
+                <a:extLst>
+                  <a:ext uri="{FF2B5EF4-FFF2-40B4-BE49-F238E27FC236}">
+                    <a16:creationId xmlns:a16="http://schemas.microsoft.com/office/drawing/2014/main" id="{C474704A-96FC-869D-B3E4-895DE66E6004}"/>
+                  </a:ext>
+                </a:extLst>
+              </p:cNvPr>
+              <p:cNvSpPr>
+                <a:spLocks noChangeAspect="1"/>
+              </p:cNvSpPr>
+              <p:nvPr/>
+            </p:nvSpPr>
+            <p:spPr>
+              <a:xfrm>
+                <a:off x="9296400" y="4152899"/>
+                <a:ext cx="1800000" cy="1800000"/>
+              </a:xfrm>
+              <a:prstGeom prst="ellipse">
+                <a:avLst/>
+              </a:prstGeom>
+              <a:noFill/>
+            </p:spPr>
+            <p:style>
+              <a:lnRef idx="2">
+                <a:schemeClr val="accent1">
+                  <a:shade val="15000"/>
+                </a:schemeClr>
+              </a:lnRef>
+              <a:fillRef idx="1">
+                <a:schemeClr val="accent1"/>
+              </a:fillRef>
+              <a:effectRef idx="0">
+                <a:schemeClr val="accent1"/>
+              </a:effectRef>
+              <a:fontRef idx="minor">
+                <a:schemeClr val="lt1"/>
+              </a:fontRef>
+            </p:style>
+            <p:txBody>
+              <a:bodyPr rtlCol="0" anchor="ctr"/>
+              <a:lstStyle/>
+              <a:p>
+                <a:pPr algn="ctr"/>
+                <a:endParaRPr lang="ko-KR" altLang="en-US" dirty="0"/>
+              </a:p>
+            </p:txBody>
+          </p:sp>
+          <p:cxnSp>
+            <p:nvCxnSpPr>
+              <p:cNvPr id="4" name="직선 연결선 3">
+                <a:extLst>
+                  <a:ext uri="{FF2B5EF4-FFF2-40B4-BE49-F238E27FC236}">
+                    <a16:creationId xmlns:a16="http://schemas.microsoft.com/office/drawing/2014/main" id="{B258020D-ED10-8A9A-9A0E-A711FFF518E1}"/>
+                  </a:ext>
+                </a:extLst>
+              </p:cNvPr>
+              <p:cNvCxnSpPr>
+                <a:cxnSpLocks/>
+                <a:stCxn id="2" idx="7"/>
+                <a:endCxn id="2" idx="3"/>
+              </p:cNvCxnSpPr>
+              <p:nvPr/>
+            </p:nvCxnSpPr>
+            <p:spPr>
+              <a:xfrm flipH="1">
+                <a:off x="9560004" y="4416503"/>
+                <a:ext cx="1272792" cy="1272792"/>
+              </a:xfrm>
+              <a:prstGeom prst="line">
+                <a:avLst/>
+              </a:prstGeom>
+            </p:spPr>
+            <p:style>
+              <a:lnRef idx="2">
+                <a:schemeClr val="dk1"/>
+              </a:lnRef>
+              <a:fillRef idx="0">
+                <a:schemeClr val="dk1"/>
+              </a:fillRef>
+              <a:effectRef idx="1">
+                <a:schemeClr val="dk1"/>
+              </a:effectRef>
+              <a:fontRef idx="minor">
+                <a:schemeClr val="tx1"/>
+              </a:fontRef>
+            </p:style>
+          </p:cxnSp>
+          <p:cxnSp>
+            <p:nvCxnSpPr>
+              <p:cNvPr id="10" name="직선 연결선 9">
+                <a:extLst>
+                  <a:ext uri="{FF2B5EF4-FFF2-40B4-BE49-F238E27FC236}">
+                    <a16:creationId xmlns:a16="http://schemas.microsoft.com/office/drawing/2014/main" id="{1E65C621-A27E-F7F3-26DD-8659320083E7}"/>
+                  </a:ext>
+                </a:extLst>
+              </p:cNvPr>
+              <p:cNvCxnSpPr>
+                <a:cxnSpLocks/>
+                <a:stCxn id="2" idx="1"/>
+                <a:endCxn id="2" idx="5"/>
+              </p:cNvCxnSpPr>
+              <p:nvPr/>
+            </p:nvCxnSpPr>
+            <p:spPr>
+              <a:xfrm>
+                <a:off x="9560004" y="4416503"/>
+                <a:ext cx="1272792" cy="1272792"/>
+              </a:xfrm>
+              <a:prstGeom prst="line">
+                <a:avLst/>
+              </a:prstGeom>
+            </p:spPr>
+            <p:style>
+              <a:lnRef idx="2">
+                <a:schemeClr val="dk1"/>
+              </a:lnRef>
+              <a:fillRef idx="0">
+                <a:schemeClr val="dk1"/>
+              </a:fillRef>
+              <a:effectRef idx="1">
+                <a:schemeClr val="dk1"/>
+              </a:effectRef>
+              <a:fontRef idx="minor">
+                <a:schemeClr val="tx1"/>
+              </a:fontRef>
+            </p:style>
+          </p:cxnSp>
+          <p:sp>
+            <p:nvSpPr>
+              <p:cNvPr id="13" name="TextBox 12">
+                <a:extLst>
+                  <a:ext uri="{FF2B5EF4-FFF2-40B4-BE49-F238E27FC236}">
+                    <a16:creationId xmlns:a16="http://schemas.microsoft.com/office/drawing/2014/main" id="{FA7D1C06-9050-417A-26C2-3BEE7BA1812B}"/>
+                  </a:ext>
+                </a:extLst>
+              </p:cNvPr>
+              <p:cNvSpPr txBox="1"/>
+              <p:nvPr/>
+            </p:nvSpPr>
+            <p:spPr>
+              <a:xfrm>
+                <a:off x="9988651" y="4279462"/>
+                <a:ext cx="415498" cy="369332"/>
+              </a:xfrm>
+              <a:prstGeom prst="rect">
+                <a:avLst/>
+              </a:prstGeom>
+              <a:noFill/>
+            </p:spPr>
+            <p:txBody>
+              <a:bodyPr wrap="none" rtlCol="0">
+                <a:spAutoFit/>
+              </a:bodyPr>
+              <a:lstStyle/>
+              <a:p>
+                <a:r>
+                  <a:rPr lang="ko-KR" altLang="en-US" dirty="0"/>
+                  <a:t>▲</a:t>
+                </a:r>
+              </a:p>
+            </p:txBody>
+          </p:sp>
+          <p:sp>
+            <p:nvSpPr>
+              <p:cNvPr id="14" name="TextBox 13">
+                <a:extLst>
+                  <a:ext uri="{FF2B5EF4-FFF2-40B4-BE49-F238E27FC236}">
+                    <a16:creationId xmlns:a16="http://schemas.microsoft.com/office/drawing/2014/main" id="{285BA8A5-88B1-42A3-4D02-80388FF6792E}"/>
+                  </a:ext>
+                </a:extLst>
+              </p:cNvPr>
+              <p:cNvSpPr txBox="1"/>
+              <p:nvPr/>
+            </p:nvSpPr>
+            <p:spPr>
+              <a:xfrm>
+                <a:off x="9988651" y="5437954"/>
+                <a:ext cx="415498" cy="369332"/>
+              </a:xfrm>
+              <a:prstGeom prst="rect">
+                <a:avLst/>
+              </a:prstGeom>
+              <a:noFill/>
+            </p:spPr>
+            <p:txBody>
+              <a:bodyPr wrap="none" rtlCol="0">
+                <a:spAutoFit/>
+              </a:bodyPr>
+              <a:lstStyle/>
+              <a:p>
+                <a:r>
+                  <a:rPr lang="ko-KR" altLang="en-US" dirty="0"/>
+                  <a:t>▼</a:t>
+                </a:r>
+              </a:p>
+            </p:txBody>
+          </p:sp>
+          <p:sp>
+            <p:nvSpPr>
+              <p:cNvPr id="15" name="TextBox 14">
+                <a:extLst>
+                  <a:ext uri="{FF2B5EF4-FFF2-40B4-BE49-F238E27FC236}">
+                    <a16:creationId xmlns:a16="http://schemas.microsoft.com/office/drawing/2014/main" id="{E25390A7-1317-99A0-BC43-118B392C2051}"/>
+                  </a:ext>
+                </a:extLst>
+              </p:cNvPr>
+              <p:cNvSpPr txBox="1"/>
+              <p:nvPr/>
+            </p:nvSpPr>
+            <p:spPr>
+              <a:xfrm>
+                <a:off x="9399880" y="4868233"/>
+                <a:ext cx="415498" cy="369332"/>
+              </a:xfrm>
+              <a:prstGeom prst="rect">
+                <a:avLst/>
+              </a:prstGeom>
+              <a:noFill/>
+            </p:spPr>
+            <p:txBody>
+              <a:bodyPr wrap="none" rtlCol="0">
+                <a:spAutoFit/>
+              </a:bodyPr>
+              <a:lstStyle/>
+              <a:p>
+                <a:r>
+                  <a:rPr lang="ko-KR" altLang="en-US" dirty="0"/>
+                  <a:t>◀</a:t>
+                </a:r>
+              </a:p>
+            </p:txBody>
+          </p:sp>
+          <p:sp>
+            <p:nvSpPr>
+              <p:cNvPr id="16" name="TextBox 15">
+                <a:extLst>
+                  <a:ext uri="{FF2B5EF4-FFF2-40B4-BE49-F238E27FC236}">
+                    <a16:creationId xmlns:a16="http://schemas.microsoft.com/office/drawing/2014/main" id="{00551EC6-78FA-FD64-8DAB-C251D6FD124F}"/>
+                  </a:ext>
+                </a:extLst>
+              </p:cNvPr>
+              <p:cNvSpPr txBox="1"/>
+              <p:nvPr/>
+            </p:nvSpPr>
+            <p:spPr>
+              <a:xfrm>
+                <a:off x="10577422" y="4828948"/>
+                <a:ext cx="415498" cy="369332"/>
+              </a:xfrm>
+              <a:prstGeom prst="rect">
+                <a:avLst/>
+              </a:prstGeom>
+              <a:noFill/>
+            </p:spPr>
+            <p:txBody>
+              <a:bodyPr wrap="none" rtlCol="0">
+                <a:spAutoFit/>
+              </a:bodyPr>
+              <a:lstStyle/>
+              <a:p>
+                <a:r>
+                  <a:rPr lang="ko-KR" altLang="en-US" dirty="0"/>
+                  <a:t>▶</a:t>
+                </a:r>
+              </a:p>
+            </p:txBody>
+          </p:sp>
+          <p:sp>
+            <p:nvSpPr>
+              <p:cNvPr id="19" name="타원 18">
+                <a:extLst>
+                  <a:ext uri="{FF2B5EF4-FFF2-40B4-BE49-F238E27FC236}">
+                    <a16:creationId xmlns:a16="http://schemas.microsoft.com/office/drawing/2014/main" id="{26E4D437-A4C6-D980-2A4B-3FDCF13B46DC}"/>
+                  </a:ext>
+                </a:extLst>
+              </p:cNvPr>
+              <p:cNvSpPr>
+                <a:spLocks noChangeAspect="1"/>
+              </p:cNvSpPr>
+              <p:nvPr/>
+            </p:nvSpPr>
+            <p:spPr>
+              <a:xfrm>
+                <a:off x="9476400" y="4332899"/>
+                <a:ext cx="1440000" cy="1440000"/>
+              </a:xfrm>
+              <a:prstGeom prst="ellipse">
+                <a:avLst/>
+              </a:prstGeom>
+              <a:noFill/>
+            </p:spPr>
+            <p:style>
+              <a:lnRef idx="2">
+                <a:schemeClr val="accent1">
+                  <a:shade val="15000"/>
+                </a:schemeClr>
+              </a:lnRef>
+              <a:fillRef idx="1">
+                <a:schemeClr val="accent1"/>
+              </a:fillRef>
+              <a:effectRef idx="0">
+                <a:schemeClr val="accent1"/>
+              </a:effectRef>
+              <a:fontRef idx="minor">
+                <a:schemeClr val="lt1"/>
+              </a:fontRef>
+            </p:style>
+            <p:txBody>
+              <a:bodyPr rtlCol="0" anchor="ctr"/>
+              <a:lstStyle/>
+              <a:p>
+                <a:pPr algn="ctr"/>
+                <a:endParaRPr lang="ko-KR" altLang="en-US" dirty="0"/>
+              </a:p>
+            </p:txBody>
+          </p:sp>
+        </p:grpSp>
+        <p:sp>
+          <p:nvSpPr>
+            <p:cNvPr id="21" name="타원 20">
+              <a:extLst>
+                <a:ext uri="{FF2B5EF4-FFF2-40B4-BE49-F238E27FC236}">
+                  <a16:creationId xmlns:a16="http://schemas.microsoft.com/office/drawing/2014/main" id="{A0840EA9-89DB-54AE-8644-1F8F05918E29}"/>
+                </a:ext>
+              </a:extLst>
+            </p:cNvPr>
+            <p:cNvSpPr>
+              <a:spLocks noChangeAspect="1"/>
+            </p:cNvSpPr>
+            <p:nvPr/>
+          </p:nvSpPr>
+          <p:spPr>
+            <a:xfrm>
+              <a:off x="10033822" y="4865854"/>
+              <a:ext cx="360000" cy="360000"/>
+            </a:xfrm>
+            <a:prstGeom prst="ellipse">
+              <a:avLst/>
+            </a:prstGeom>
+            <a:solidFill>
+              <a:schemeClr val="bg2">
+                <a:alpha val="50000"/>
+              </a:schemeClr>
+            </a:solidFill>
+            <a:ln>
+              <a:solidFill>
+                <a:schemeClr val="tx1"/>
+              </a:solidFill>
+            </a:ln>
+          </p:spPr>
+          <p:style>
+            <a:lnRef idx="2">
+              <a:schemeClr val="accent1">
+                <a:shade val="15000"/>
+              </a:schemeClr>
+            </a:lnRef>
+            <a:fillRef idx="1">
+              <a:schemeClr val="accent1"/>
+            </a:fillRef>
+            <a:effectRef idx="0">
+              <a:schemeClr val="accent1"/>
+            </a:effectRef>
+            <a:fontRef idx="minor">
+              <a:schemeClr val="lt1"/>
+            </a:fontRef>
+          </p:style>
+          <p:txBody>
+            <a:bodyPr rtlCol="0" anchor="ctr"/>
+            <a:lstStyle/>
+            <a:p>
+              <a:pPr algn="ctr"/>
+              <a:endParaRPr lang="ko-KR" altLang="en-US" dirty="0"/>
+            </a:p>
+          </p:txBody>
+        </p:sp>
+      </p:grpSp>
+      <p:grpSp>
+        <p:nvGrpSpPr>
+          <p:cNvPr id="95" name="그룹 94">
+            <a:extLst>
+              <a:ext uri="{FF2B5EF4-FFF2-40B4-BE49-F238E27FC236}">
+                <a16:creationId xmlns:a16="http://schemas.microsoft.com/office/drawing/2014/main" id="{7471AACD-D959-34BD-A391-A4125D9B5F36}"/>
+              </a:ext>
+            </a:extLst>
+          </p:cNvPr>
+          <p:cNvGrpSpPr/>
+          <p:nvPr/>
+        </p:nvGrpSpPr>
+        <p:grpSpPr>
+          <a:xfrm>
+            <a:off x="2862181" y="5502193"/>
+            <a:ext cx="6034244" cy="413049"/>
+            <a:chOff x="2223232" y="5433771"/>
+            <a:chExt cx="6034244" cy="413049"/>
+          </a:xfrm>
+        </p:grpSpPr>
+        <p:sp>
+          <p:nvSpPr>
+            <p:cNvPr id="68" name="직사각형 67">
+              <a:extLst>
+                <a:ext uri="{FF2B5EF4-FFF2-40B4-BE49-F238E27FC236}">
+                  <a16:creationId xmlns:a16="http://schemas.microsoft.com/office/drawing/2014/main" id="{F8CA0ECB-BA4A-E2FF-AAA2-8B7376A02EC9}"/>
+                </a:ext>
+              </a:extLst>
+            </p:cNvPr>
+            <p:cNvSpPr/>
+            <p:nvPr/>
+          </p:nvSpPr>
+          <p:spPr>
+            <a:xfrm>
+              <a:off x="2223232" y="5743665"/>
+              <a:ext cx="6034244" cy="103155"/>
+            </a:xfrm>
+            <a:prstGeom prst="rect">
+              <a:avLst/>
+            </a:prstGeom>
+            <a:solidFill>
+              <a:srgbClr val="FF0000"/>
+            </a:solidFill>
+          </p:spPr>
+          <p:style>
+            <a:lnRef idx="2">
+              <a:schemeClr val="accent1">
+                <a:shade val="15000"/>
+              </a:schemeClr>
+            </a:lnRef>
+            <a:fillRef idx="1">
+              <a:schemeClr val="accent1"/>
+            </a:fillRef>
+            <a:effectRef idx="0">
+              <a:schemeClr val="accent1"/>
+            </a:effectRef>
+            <a:fontRef idx="minor">
+              <a:schemeClr val="lt1"/>
+            </a:fontRef>
+          </p:style>
+          <p:txBody>
+            <a:bodyPr rtlCol="0" anchor="ctr"/>
+            <a:lstStyle/>
+            <a:p>
+              <a:pPr algn="ctr"/>
+              <a:endParaRPr lang="ko-KR" altLang="en-US"/>
+            </a:p>
+          </p:txBody>
+        </p:sp>
+        <p:sp>
+          <p:nvSpPr>
+            <p:cNvPr id="70" name="TextBox 69">
+              <a:extLst>
+                <a:ext uri="{FF2B5EF4-FFF2-40B4-BE49-F238E27FC236}">
+                  <a16:creationId xmlns:a16="http://schemas.microsoft.com/office/drawing/2014/main" id="{90697BC3-70B1-12E5-D3ED-79A6A467B3B9}"/>
+                </a:ext>
+              </a:extLst>
+            </p:cNvPr>
+            <p:cNvSpPr txBox="1"/>
+            <p:nvPr/>
+          </p:nvSpPr>
+          <p:spPr>
+            <a:xfrm>
+              <a:off x="4732524" y="5433771"/>
+              <a:ext cx="965329" cy="307777"/>
+            </a:xfrm>
+            <a:prstGeom prst="rect">
+              <a:avLst/>
+            </a:prstGeom>
+            <a:noFill/>
+          </p:spPr>
+          <p:txBody>
+            <a:bodyPr wrap="none" rtlCol="0">
+              <a:spAutoFit/>
+            </a:bodyPr>
+            <a:lstStyle/>
+            <a:p>
+              <a:r>
+                <a:rPr lang="ko-KR" altLang="en-US" sz="1400" dirty="0"/>
+                <a:t>보스 이름</a:t>
+              </a:r>
+            </a:p>
+          </p:txBody>
+        </p:sp>
+      </p:grpSp>
+      <p:sp>
+        <p:nvSpPr>
+          <p:cNvPr id="83" name="타원 82">
+            <a:extLst>
+              <a:ext uri="{FF2B5EF4-FFF2-40B4-BE49-F238E27FC236}">
+                <a16:creationId xmlns:a16="http://schemas.microsoft.com/office/drawing/2014/main" id="{4D5AA046-6925-CD7C-DA0A-771BE7FA66BD}"/>
+              </a:ext>
+            </a:extLst>
+          </p:cNvPr>
+          <p:cNvSpPr/>
+          <p:nvPr/>
+        </p:nvSpPr>
+        <p:spPr>
+          <a:xfrm>
+            <a:off x="10579070" y="657576"/>
+            <a:ext cx="540000" cy="540000"/>
+          </a:xfrm>
+          <a:prstGeom prst="ellipse">
+            <a:avLst/>
+          </a:prstGeom>
+          <a:solidFill>
+            <a:schemeClr val="bg2">
+              <a:lumMod val="90000"/>
+            </a:schemeClr>
+          </a:solidFill>
+        </p:spPr>
+        <p:style>
+          <a:lnRef idx="2">
+            <a:schemeClr val="accent1">
+              <a:shade val="15000"/>
+            </a:schemeClr>
+          </a:lnRef>
+          <a:fillRef idx="1">
+            <a:schemeClr val="accent1"/>
+          </a:fillRef>
+          <a:effectRef idx="0">
+            <a:schemeClr val="accent1"/>
+          </a:effectRef>
+          <a:fontRef idx="minor">
+            <a:schemeClr val="lt1"/>
+          </a:fontRef>
+        </p:style>
+        <p:txBody>
+          <a:bodyPr rtlCol="0" anchor="ctr"/>
+          <a:lstStyle/>
+          <a:p>
+            <a:pPr algn="ctr"/>
+            <a:endParaRPr lang="ko-KR" altLang="en-US"/>
+          </a:p>
+        </p:txBody>
+      </p:sp>
+      <p:sp>
+        <p:nvSpPr>
+          <p:cNvPr id="90" name="TextBox 89">
+            <a:extLst>
+              <a:ext uri="{FF2B5EF4-FFF2-40B4-BE49-F238E27FC236}">
+                <a16:creationId xmlns:a16="http://schemas.microsoft.com/office/drawing/2014/main" id="{AC7DD53C-CEC8-5E68-673E-037A21B87E25}"/>
+              </a:ext>
+            </a:extLst>
+          </p:cNvPr>
+          <p:cNvSpPr txBox="1"/>
+          <p:nvPr/>
+        </p:nvSpPr>
+        <p:spPr>
+          <a:xfrm>
+            <a:off x="0" y="67859"/>
+            <a:ext cx="958917" cy="369332"/>
+          </a:xfrm>
+          <a:prstGeom prst="rect">
+            <a:avLst/>
+          </a:prstGeom>
+          <a:noFill/>
+        </p:spPr>
+        <p:txBody>
+          <a:bodyPr wrap="none" rtlCol="0">
+            <a:spAutoFit/>
+          </a:bodyPr>
+          <a:lstStyle/>
+          <a:p>
+            <a:r>
+              <a:rPr lang="ko-KR" altLang="en-US" dirty="0"/>
+              <a:t>게임 씬</a:t>
+            </a:r>
+            <a:endParaRPr lang="en-US" altLang="ko-KR" dirty="0"/>
+          </a:p>
+        </p:txBody>
+      </p:sp>
+      <p:grpSp>
+        <p:nvGrpSpPr>
+          <p:cNvPr id="48" name="그룹 47">
+            <a:extLst>
+              <a:ext uri="{FF2B5EF4-FFF2-40B4-BE49-F238E27FC236}">
+                <a16:creationId xmlns:a16="http://schemas.microsoft.com/office/drawing/2014/main" id="{E48368E1-AB06-206B-C9E2-9425AAEA63A3}"/>
+              </a:ext>
+            </a:extLst>
+          </p:cNvPr>
+          <p:cNvGrpSpPr/>
+          <p:nvPr/>
+        </p:nvGrpSpPr>
+        <p:grpSpPr>
+          <a:xfrm>
+            <a:off x="1334347" y="896744"/>
+            <a:ext cx="1494486" cy="276948"/>
+            <a:chOff x="990455" y="896744"/>
+            <a:chExt cx="1838378" cy="276948"/>
+          </a:xfrm>
+        </p:grpSpPr>
+        <p:sp>
+          <p:nvSpPr>
+            <p:cNvPr id="24" name="직사각형 23">
+              <a:extLst>
+                <a:ext uri="{FF2B5EF4-FFF2-40B4-BE49-F238E27FC236}">
+                  <a16:creationId xmlns:a16="http://schemas.microsoft.com/office/drawing/2014/main" id="{47700A6B-AE71-B034-E5EB-15CAFEF6CC32}"/>
+                </a:ext>
+              </a:extLst>
+            </p:cNvPr>
+            <p:cNvSpPr/>
+            <p:nvPr/>
+          </p:nvSpPr>
+          <p:spPr>
+            <a:xfrm>
+              <a:off x="990457" y="896744"/>
+              <a:ext cx="742710" cy="276948"/>
+            </a:xfrm>
+            <a:prstGeom prst="rect">
+              <a:avLst/>
+            </a:prstGeom>
+            <a:solidFill>
+              <a:schemeClr val="accent1">
+                <a:lumMod val="60000"/>
+                <a:lumOff val="40000"/>
+              </a:schemeClr>
+            </a:solidFill>
+            <a:ln>
+              <a:noFill/>
+            </a:ln>
+          </p:spPr>
+          <p:style>
+            <a:lnRef idx="2">
+              <a:schemeClr val="accent1">
+                <a:shade val="15000"/>
+              </a:schemeClr>
+            </a:lnRef>
+            <a:fillRef idx="1">
+              <a:schemeClr val="accent1"/>
+            </a:fillRef>
+            <a:effectRef idx="0">
+              <a:schemeClr val="accent1"/>
+            </a:effectRef>
+            <a:fontRef idx="minor">
+              <a:schemeClr val="lt1"/>
+            </a:fontRef>
+          </p:style>
+          <p:txBody>
+            <a:bodyPr rtlCol="0" anchor="ctr"/>
+            <a:lstStyle/>
+            <a:p>
+              <a:pPr algn="ctr"/>
+              <a:endParaRPr lang="ko-KR" altLang="en-US"/>
+            </a:p>
+          </p:txBody>
+        </p:sp>
+        <p:sp>
+          <p:nvSpPr>
+            <p:cNvPr id="12" name="직사각형 11">
+              <a:extLst>
+                <a:ext uri="{FF2B5EF4-FFF2-40B4-BE49-F238E27FC236}">
+                  <a16:creationId xmlns:a16="http://schemas.microsoft.com/office/drawing/2014/main" id="{84CC8E5C-5E6C-3562-C78A-A270DA21D20D}"/>
+                </a:ext>
+              </a:extLst>
+            </p:cNvPr>
+            <p:cNvSpPr/>
+            <p:nvPr/>
+          </p:nvSpPr>
+          <p:spPr>
+            <a:xfrm>
+              <a:off x="990456" y="896744"/>
+              <a:ext cx="1838377" cy="276948"/>
+            </a:xfrm>
+            <a:prstGeom prst="rect">
+              <a:avLst/>
+            </a:prstGeom>
+            <a:solidFill>
+              <a:schemeClr val="accent1">
+                <a:lumMod val="60000"/>
+                <a:lumOff val="40000"/>
+                <a:alpha val="10000"/>
+              </a:schemeClr>
+            </a:solidFill>
+            <a:ln>
+              <a:solidFill>
+                <a:schemeClr val="tx1"/>
+              </a:solidFill>
+            </a:ln>
+          </p:spPr>
+          <p:style>
+            <a:lnRef idx="2">
+              <a:schemeClr val="accent1">
+                <a:shade val="15000"/>
+              </a:schemeClr>
+            </a:lnRef>
+            <a:fillRef idx="1">
+              <a:schemeClr val="accent1"/>
+            </a:fillRef>
+            <a:effectRef idx="0">
+              <a:schemeClr val="accent1"/>
+            </a:effectRef>
+            <a:fontRef idx="minor">
+              <a:schemeClr val="lt1"/>
+            </a:fontRef>
+          </p:style>
+          <p:txBody>
+            <a:bodyPr rtlCol="0" anchor="ctr"/>
+            <a:lstStyle/>
+            <a:p>
+              <a:pPr algn="ctr"/>
+              <a:endParaRPr lang="ko-KR" altLang="en-US"/>
+            </a:p>
+          </p:txBody>
+        </p:sp>
+        <p:sp>
+          <p:nvSpPr>
+            <p:cNvPr id="40" name="TextBox 39">
+              <a:extLst>
+                <a:ext uri="{FF2B5EF4-FFF2-40B4-BE49-F238E27FC236}">
+                  <a16:creationId xmlns:a16="http://schemas.microsoft.com/office/drawing/2014/main" id="{36CBF0A1-BACE-664B-352C-5C1A4D5C88AD}"/>
+                </a:ext>
+              </a:extLst>
+            </p:cNvPr>
+            <p:cNvSpPr txBox="1"/>
+            <p:nvPr/>
+          </p:nvSpPr>
+          <p:spPr>
+            <a:xfrm>
+              <a:off x="990455" y="904035"/>
+              <a:ext cx="1838377" cy="261610"/>
+            </a:xfrm>
+            <a:prstGeom prst="rect">
+              <a:avLst/>
+            </a:prstGeom>
+            <a:noFill/>
+          </p:spPr>
+          <p:txBody>
+            <a:bodyPr wrap="square" rtlCol="0">
+              <a:spAutoFit/>
+            </a:bodyPr>
+            <a:lstStyle/>
+            <a:p>
+              <a:pPr algn="ctr"/>
+              <a:r>
+                <a:rPr lang="en-US" altLang="ko-KR" sz="1100" b="1" dirty="0"/>
+                <a:t>100 / 40</a:t>
+              </a:r>
+              <a:endParaRPr lang="ko-KR" altLang="en-US" sz="1100" b="1" dirty="0"/>
+            </a:p>
+          </p:txBody>
+        </p:sp>
+      </p:grpSp>
+      <p:grpSp>
+        <p:nvGrpSpPr>
+          <p:cNvPr id="45" name="그룹 44">
+            <a:extLst>
+              <a:ext uri="{FF2B5EF4-FFF2-40B4-BE49-F238E27FC236}">
+                <a16:creationId xmlns:a16="http://schemas.microsoft.com/office/drawing/2014/main" id="{AC00C9B0-5242-38F6-E70B-F5E3F63D422A}"/>
+              </a:ext>
+            </a:extLst>
+          </p:cNvPr>
+          <p:cNvGrpSpPr/>
+          <p:nvPr/>
+        </p:nvGrpSpPr>
+        <p:grpSpPr>
+          <a:xfrm>
+            <a:off x="1334347" y="618534"/>
+            <a:ext cx="1494486" cy="276948"/>
+            <a:chOff x="990455" y="618534"/>
+            <a:chExt cx="1838378" cy="276948"/>
+          </a:xfrm>
+        </p:grpSpPr>
+        <p:sp>
+          <p:nvSpPr>
+            <p:cNvPr id="18" name="직사각형 17">
+              <a:extLst>
+                <a:ext uri="{FF2B5EF4-FFF2-40B4-BE49-F238E27FC236}">
+                  <a16:creationId xmlns:a16="http://schemas.microsoft.com/office/drawing/2014/main" id="{61A7B980-6701-D875-76F5-EE89D010FC37}"/>
+                </a:ext>
+              </a:extLst>
+            </p:cNvPr>
+            <p:cNvSpPr/>
+            <p:nvPr/>
+          </p:nvSpPr>
+          <p:spPr>
+            <a:xfrm>
+              <a:off x="990457" y="618534"/>
+              <a:ext cx="1174698" cy="276948"/>
+            </a:xfrm>
+            <a:prstGeom prst="rect">
+              <a:avLst/>
+            </a:prstGeom>
+            <a:solidFill>
+              <a:srgbClr val="FF0000"/>
+            </a:solidFill>
+            <a:ln>
+              <a:noFill/>
+            </a:ln>
+          </p:spPr>
+          <p:style>
+            <a:lnRef idx="2">
+              <a:schemeClr val="accent1">
+                <a:shade val="15000"/>
+              </a:schemeClr>
+            </a:lnRef>
+            <a:fillRef idx="1">
+              <a:schemeClr val="accent1"/>
+            </a:fillRef>
+            <a:effectRef idx="0">
+              <a:schemeClr val="accent1"/>
+            </a:effectRef>
+            <a:fontRef idx="minor">
+              <a:schemeClr val="lt1"/>
+            </a:fontRef>
+          </p:style>
+          <p:txBody>
+            <a:bodyPr rtlCol="0" anchor="ctr"/>
+            <a:lstStyle/>
+            <a:p>
+              <a:pPr algn="ctr"/>
+              <a:endParaRPr lang="ko-KR" altLang="en-US"/>
+            </a:p>
+          </p:txBody>
+        </p:sp>
+        <p:sp>
+          <p:nvSpPr>
+            <p:cNvPr id="6" name="직사각형 5">
+              <a:extLst>
+                <a:ext uri="{FF2B5EF4-FFF2-40B4-BE49-F238E27FC236}">
+                  <a16:creationId xmlns:a16="http://schemas.microsoft.com/office/drawing/2014/main" id="{7C820486-C7D7-B210-3ACE-3BED4EB58350}"/>
+                </a:ext>
+              </a:extLst>
+            </p:cNvPr>
+            <p:cNvSpPr/>
+            <p:nvPr/>
+          </p:nvSpPr>
+          <p:spPr>
+            <a:xfrm>
+              <a:off x="990456" y="618534"/>
+              <a:ext cx="1838377" cy="276948"/>
+            </a:xfrm>
+            <a:prstGeom prst="rect">
+              <a:avLst/>
+            </a:prstGeom>
+            <a:solidFill>
+              <a:srgbClr val="FF0000">
+                <a:alpha val="10000"/>
+              </a:srgbClr>
+            </a:solidFill>
+            <a:ln>
+              <a:solidFill>
+                <a:schemeClr val="tx1"/>
+              </a:solidFill>
+            </a:ln>
+          </p:spPr>
+          <p:style>
+            <a:lnRef idx="2">
+              <a:schemeClr val="accent1">
+                <a:shade val="15000"/>
+              </a:schemeClr>
+            </a:lnRef>
+            <a:fillRef idx="1">
+              <a:schemeClr val="accent1"/>
+            </a:fillRef>
+            <a:effectRef idx="0">
+              <a:schemeClr val="accent1"/>
+            </a:effectRef>
+            <a:fontRef idx="minor">
+              <a:schemeClr val="lt1"/>
+            </a:fontRef>
+          </p:style>
+          <p:txBody>
+            <a:bodyPr rtlCol="0" anchor="ctr"/>
+            <a:lstStyle/>
+            <a:p>
+              <a:pPr algn="ctr"/>
+              <a:endParaRPr lang="ko-KR" altLang="en-US"/>
+            </a:p>
+          </p:txBody>
+        </p:sp>
+        <p:sp>
+          <p:nvSpPr>
+            <p:cNvPr id="44" name="TextBox 43">
+              <a:extLst>
+                <a:ext uri="{FF2B5EF4-FFF2-40B4-BE49-F238E27FC236}">
+                  <a16:creationId xmlns:a16="http://schemas.microsoft.com/office/drawing/2014/main" id="{7953500A-BD3E-C832-8343-BFF90A199BE5}"/>
+                </a:ext>
+              </a:extLst>
+            </p:cNvPr>
+            <p:cNvSpPr txBox="1"/>
+            <p:nvPr/>
+          </p:nvSpPr>
+          <p:spPr>
+            <a:xfrm>
+              <a:off x="990455" y="626124"/>
+              <a:ext cx="1838377" cy="261610"/>
+            </a:xfrm>
+            <a:prstGeom prst="rect">
+              <a:avLst/>
+            </a:prstGeom>
+            <a:noFill/>
+          </p:spPr>
+          <p:txBody>
+            <a:bodyPr wrap="square" rtlCol="0">
+              <a:spAutoFit/>
+            </a:bodyPr>
+            <a:lstStyle/>
+            <a:p>
+              <a:pPr algn="ctr"/>
+              <a:r>
+                <a:rPr lang="en-US" altLang="ko-KR" sz="1100" b="1" dirty="0"/>
+                <a:t>100 / 75</a:t>
+              </a:r>
+            </a:p>
+          </p:txBody>
+        </p:sp>
+      </p:grpSp>
+      <p:sp>
+        <p:nvSpPr>
+          <p:cNvPr id="49" name="TextBox 48">
+            <a:extLst>
+              <a:ext uri="{FF2B5EF4-FFF2-40B4-BE49-F238E27FC236}">
+                <a16:creationId xmlns:a16="http://schemas.microsoft.com/office/drawing/2014/main" id="{58DE160D-2DF7-923A-C4EF-F42E4AE1005B}"/>
+              </a:ext>
+            </a:extLst>
+          </p:cNvPr>
+          <p:cNvSpPr txBox="1"/>
+          <p:nvPr/>
+        </p:nvSpPr>
+        <p:spPr>
+          <a:xfrm>
+            <a:off x="956851" y="603040"/>
+            <a:ext cx="433132" cy="307777"/>
+          </a:xfrm>
+          <a:prstGeom prst="rect">
+            <a:avLst/>
+          </a:prstGeom>
+          <a:noFill/>
+        </p:spPr>
+        <p:txBody>
+          <a:bodyPr wrap="none" rtlCol="0">
+            <a:spAutoFit/>
+          </a:bodyPr>
+          <a:lstStyle/>
+          <a:p>
+            <a:r>
+              <a:rPr lang="en-US" altLang="ko-KR" sz="1400" b="1" dirty="0"/>
+              <a:t>HP</a:t>
+            </a:r>
+            <a:endParaRPr lang="ko-KR" altLang="en-US" sz="1400" b="1" dirty="0"/>
+          </a:p>
+        </p:txBody>
+      </p:sp>
+      <p:sp>
+        <p:nvSpPr>
+          <p:cNvPr id="51" name="TextBox 50">
+            <a:extLst>
+              <a:ext uri="{FF2B5EF4-FFF2-40B4-BE49-F238E27FC236}">
+                <a16:creationId xmlns:a16="http://schemas.microsoft.com/office/drawing/2014/main" id="{1DE4C59F-092E-6DDE-4A16-11539E1CBA58}"/>
+              </a:ext>
+            </a:extLst>
+          </p:cNvPr>
+          <p:cNvSpPr txBox="1"/>
+          <p:nvPr/>
+        </p:nvSpPr>
+        <p:spPr>
+          <a:xfrm>
+            <a:off x="9588698" y="6428000"/>
+            <a:ext cx="1189749" cy="369332"/>
+          </a:xfrm>
+          <a:prstGeom prst="rect">
+            <a:avLst/>
+          </a:prstGeom>
+          <a:noFill/>
+        </p:spPr>
+        <p:txBody>
+          <a:bodyPr wrap="none" rtlCol="0">
+            <a:spAutoFit/>
+          </a:bodyPr>
+          <a:lstStyle/>
+          <a:p>
+            <a:r>
+              <a:rPr lang="ko-KR" altLang="en-US"/>
+              <a:t>이동 패드</a:t>
+            </a:r>
+          </a:p>
+        </p:txBody>
+      </p:sp>
+      <p:sp>
+        <p:nvSpPr>
+          <p:cNvPr id="35" name="TextBox 34">
+            <a:extLst>
+              <a:ext uri="{FF2B5EF4-FFF2-40B4-BE49-F238E27FC236}">
+                <a16:creationId xmlns:a16="http://schemas.microsoft.com/office/drawing/2014/main" id="{A877F938-7E2B-3B85-F464-0CA27863BDC9}"/>
+              </a:ext>
+            </a:extLst>
+          </p:cNvPr>
+          <p:cNvSpPr txBox="1"/>
+          <p:nvPr/>
+        </p:nvSpPr>
+        <p:spPr>
+          <a:xfrm>
+            <a:off x="885228" y="1155488"/>
+            <a:ext cx="511871" cy="307777"/>
+          </a:xfrm>
+          <a:prstGeom prst="rect">
+            <a:avLst/>
+          </a:prstGeom>
+          <a:noFill/>
+        </p:spPr>
+        <p:txBody>
+          <a:bodyPr wrap="none" rtlCol="0">
+            <a:spAutoFit/>
+          </a:bodyPr>
+          <a:lstStyle/>
+          <a:p>
+            <a:r>
+              <a:rPr lang="en-US" altLang="ko-KR" sz="1400" b="1" dirty="0"/>
+              <a:t>EXP</a:t>
+            </a:r>
+            <a:endParaRPr lang="ko-KR" altLang="en-US" sz="1400" b="1" dirty="0"/>
+          </a:p>
+        </p:txBody>
+      </p:sp>
+      <p:sp>
+        <p:nvSpPr>
+          <p:cNvPr id="37" name="타원 36">
+            <a:extLst>
+              <a:ext uri="{FF2B5EF4-FFF2-40B4-BE49-F238E27FC236}">
+                <a16:creationId xmlns:a16="http://schemas.microsoft.com/office/drawing/2014/main" id="{BBC1873B-2C2B-78A3-970F-769DC0A716E0}"/>
+              </a:ext>
+            </a:extLst>
+          </p:cNvPr>
+          <p:cNvSpPr>
+            <a:spLocks noChangeAspect="1"/>
+          </p:cNvSpPr>
+          <p:nvPr/>
+        </p:nvSpPr>
+        <p:spPr>
+          <a:xfrm>
+            <a:off x="1229952" y="5606978"/>
+            <a:ext cx="360000" cy="360000"/>
+          </a:xfrm>
+          <a:prstGeom prst="ellipse">
+            <a:avLst/>
+          </a:prstGeom>
+          <a:solidFill>
+            <a:srgbClr val="FFC000">
+              <a:alpha val="50000"/>
+            </a:srgbClr>
+          </a:solidFill>
+          <a:ln>
+            <a:solidFill>
+              <a:schemeClr val="tx1"/>
+            </a:solidFill>
+          </a:ln>
+        </p:spPr>
+        <p:style>
+          <a:lnRef idx="2">
+            <a:schemeClr val="accent1">
+              <a:shade val="15000"/>
+            </a:schemeClr>
+          </a:lnRef>
+          <a:fillRef idx="1">
+            <a:schemeClr val="accent1"/>
+          </a:fillRef>
+          <a:effectRef idx="0">
+            <a:schemeClr val="accent1"/>
+          </a:effectRef>
+          <a:fontRef idx="minor">
+            <a:schemeClr val="lt1"/>
+          </a:fontRef>
+        </p:style>
+        <p:txBody>
+          <a:bodyPr rtlCol="0" anchor="ctr"/>
+          <a:lstStyle/>
+          <a:p>
+            <a:pPr algn="ctr"/>
+            <a:endParaRPr lang="ko-KR" altLang="en-US" sz="200" dirty="0">
+              <a:solidFill>
+                <a:schemeClr val="tx1"/>
+              </a:solidFill>
+            </a:endParaRPr>
+          </a:p>
+        </p:txBody>
+      </p:sp>
+      <p:sp>
+        <p:nvSpPr>
+          <p:cNvPr id="39" name="타원 38">
+            <a:extLst>
+              <a:ext uri="{FF2B5EF4-FFF2-40B4-BE49-F238E27FC236}">
+                <a16:creationId xmlns:a16="http://schemas.microsoft.com/office/drawing/2014/main" id="{6865D825-04C9-4397-5FBD-B4C5CC2C338A}"/>
+              </a:ext>
+            </a:extLst>
+          </p:cNvPr>
+          <p:cNvSpPr>
+            <a:spLocks noChangeAspect="1"/>
+          </p:cNvSpPr>
+          <p:nvPr/>
+        </p:nvSpPr>
+        <p:spPr>
+          <a:xfrm>
+            <a:off x="1219698" y="5035090"/>
+            <a:ext cx="360000" cy="360000"/>
+          </a:xfrm>
+          <a:prstGeom prst="ellipse">
+            <a:avLst/>
+          </a:prstGeom>
+          <a:solidFill>
+            <a:schemeClr val="accent6">
+              <a:lumMod val="20000"/>
+              <a:lumOff val="80000"/>
+              <a:alpha val="50000"/>
+            </a:schemeClr>
+          </a:solidFill>
+          <a:ln>
+            <a:solidFill>
+              <a:schemeClr val="tx1"/>
+            </a:solidFill>
+          </a:ln>
+        </p:spPr>
+        <p:style>
+          <a:lnRef idx="2">
+            <a:schemeClr val="accent1">
+              <a:shade val="15000"/>
+            </a:schemeClr>
+          </a:lnRef>
+          <a:fillRef idx="1">
+            <a:schemeClr val="accent1"/>
+          </a:fillRef>
+          <a:effectRef idx="0">
+            <a:schemeClr val="accent1"/>
+          </a:effectRef>
+          <a:fontRef idx="minor">
+            <a:schemeClr val="lt1"/>
+          </a:fontRef>
+        </p:style>
+        <p:txBody>
+          <a:bodyPr rtlCol="0" anchor="ctr"/>
+          <a:lstStyle/>
+          <a:p>
+            <a:pPr algn="ctr"/>
+            <a:endParaRPr lang="ko-KR" altLang="en-US" dirty="0">
+              <a:solidFill>
+                <a:schemeClr val="tx1"/>
+              </a:solidFill>
+            </a:endParaRPr>
+          </a:p>
+        </p:txBody>
+      </p:sp>
+      <p:sp>
+        <p:nvSpPr>
+          <p:cNvPr id="54" name="타원 53">
+            <a:extLst>
+              <a:ext uri="{FF2B5EF4-FFF2-40B4-BE49-F238E27FC236}">
+                <a16:creationId xmlns:a16="http://schemas.microsoft.com/office/drawing/2014/main" id="{B32FF010-27A0-3AD1-313B-8EE29C630686}"/>
+              </a:ext>
+            </a:extLst>
+          </p:cNvPr>
+          <p:cNvSpPr>
+            <a:spLocks noChangeAspect="1"/>
+          </p:cNvSpPr>
+          <p:nvPr/>
+        </p:nvSpPr>
+        <p:spPr>
+          <a:xfrm>
+            <a:off x="1229952" y="3882952"/>
+            <a:ext cx="360000" cy="360000"/>
+          </a:xfrm>
+          <a:prstGeom prst="ellipse">
+            <a:avLst/>
+          </a:prstGeom>
+          <a:solidFill>
+            <a:schemeClr val="accent1">
+              <a:lumMod val="40000"/>
+              <a:lumOff val="60000"/>
+              <a:alpha val="50000"/>
+            </a:schemeClr>
+          </a:solidFill>
+          <a:ln>
+            <a:solidFill>
+              <a:schemeClr val="tx1"/>
+            </a:solidFill>
+          </a:ln>
+        </p:spPr>
+        <p:style>
+          <a:lnRef idx="2">
+            <a:schemeClr val="accent1">
+              <a:shade val="15000"/>
+            </a:schemeClr>
+          </a:lnRef>
+          <a:fillRef idx="1">
+            <a:schemeClr val="accent1"/>
+          </a:fillRef>
+          <a:effectRef idx="0">
+            <a:schemeClr val="accent1"/>
+          </a:effectRef>
+          <a:fontRef idx="minor">
+            <a:schemeClr val="lt1"/>
+          </a:fontRef>
+        </p:style>
+        <p:txBody>
+          <a:bodyPr rtlCol="0" anchor="ctr"/>
+          <a:lstStyle/>
+          <a:p>
+            <a:pPr algn="ctr"/>
+            <a:endParaRPr lang="ko-KR" altLang="en-US" dirty="0"/>
+          </a:p>
+        </p:txBody>
+      </p:sp>
+      <p:sp>
+        <p:nvSpPr>
+          <p:cNvPr id="56" name="타원 55">
+            <a:extLst>
+              <a:ext uri="{FF2B5EF4-FFF2-40B4-BE49-F238E27FC236}">
+                <a16:creationId xmlns:a16="http://schemas.microsoft.com/office/drawing/2014/main" id="{FBB6A0AB-295D-92BC-E9DE-87DA58C21BF9}"/>
+              </a:ext>
+            </a:extLst>
+          </p:cNvPr>
+          <p:cNvSpPr>
+            <a:spLocks noChangeAspect="1"/>
+          </p:cNvSpPr>
+          <p:nvPr/>
+        </p:nvSpPr>
+        <p:spPr>
+          <a:xfrm>
+            <a:off x="1229952" y="4457627"/>
+            <a:ext cx="360000" cy="360000"/>
+          </a:xfrm>
+          <a:prstGeom prst="ellipse">
+            <a:avLst/>
+          </a:prstGeom>
+          <a:solidFill>
+            <a:schemeClr val="accent1">
+              <a:lumMod val="40000"/>
+              <a:lumOff val="60000"/>
+              <a:alpha val="50000"/>
+            </a:schemeClr>
+          </a:solidFill>
+          <a:ln>
+            <a:solidFill>
+              <a:schemeClr val="tx1"/>
+            </a:solidFill>
+          </a:ln>
+        </p:spPr>
+        <p:style>
+          <a:lnRef idx="2">
+            <a:schemeClr val="accent1">
+              <a:shade val="15000"/>
+            </a:schemeClr>
+          </a:lnRef>
+          <a:fillRef idx="1">
+            <a:schemeClr val="accent1"/>
+          </a:fillRef>
+          <a:effectRef idx="0">
+            <a:schemeClr val="accent1"/>
+          </a:effectRef>
+          <a:fontRef idx="minor">
+            <a:schemeClr val="lt1"/>
+          </a:fontRef>
+        </p:style>
+        <p:txBody>
+          <a:bodyPr rtlCol="0" anchor="ctr"/>
+          <a:lstStyle/>
+          <a:p>
+            <a:pPr algn="ctr"/>
+            <a:endParaRPr lang="ko-KR" altLang="en-US" dirty="0"/>
+          </a:p>
+        </p:txBody>
+      </p:sp>
+      <p:sp>
+        <p:nvSpPr>
+          <p:cNvPr id="72" name="타원 71">
+            <a:extLst>
+              <a:ext uri="{FF2B5EF4-FFF2-40B4-BE49-F238E27FC236}">
+                <a16:creationId xmlns:a16="http://schemas.microsoft.com/office/drawing/2014/main" id="{9E6928E0-2F49-FDC6-9477-26364B92C223}"/>
+              </a:ext>
+            </a:extLst>
+          </p:cNvPr>
+          <p:cNvSpPr>
+            <a:spLocks noChangeAspect="1"/>
+          </p:cNvSpPr>
+          <p:nvPr/>
+        </p:nvSpPr>
+        <p:spPr>
+          <a:xfrm>
+            <a:off x="10424828" y="3891135"/>
+            <a:ext cx="360000" cy="360000"/>
+          </a:xfrm>
+          <a:prstGeom prst="ellipse">
+            <a:avLst/>
+          </a:prstGeom>
+          <a:solidFill>
+            <a:schemeClr val="accent1">
+              <a:lumMod val="40000"/>
+              <a:lumOff val="60000"/>
+              <a:alpha val="50000"/>
+            </a:schemeClr>
+          </a:solidFill>
+          <a:ln>
+            <a:solidFill>
+              <a:schemeClr val="tx1"/>
+            </a:solidFill>
+          </a:ln>
+        </p:spPr>
+        <p:style>
+          <a:lnRef idx="2">
+            <a:schemeClr val="accent1">
+              <a:shade val="15000"/>
+            </a:schemeClr>
+          </a:lnRef>
+          <a:fillRef idx="1">
+            <a:schemeClr val="accent1"/>
+          </a:fillRef>
+          <a:effectRef idx="0">
+            <a:schemeClr val="accent1"/>
+          </a:effectRef>
+          <a:fontRef idx="minor">
+            <a:schemeClr val="lt1"/>
+          </a:fontRef>
+        </p:style>
+        <p:txBody>
+          <a:bodyPr rtlCol="0" anchor="ctr"/>
+          <a:lstStyle/>
+          <a:p>
+            <a:pPr algn="ctr"/>
+            <a:endParaRPr lang="ko-KR" altLang="en-US" dirty="0"/>
+          </a:p>
+        </p:txBody>
+      </p:sp>
+      <p:grpSp>
+        <p:nvGrpSpPr>
+          <p:cNvPr id="3" name="그룹 2">
+            <a:extLst>
+              <a:ext uri="{FF2B5EF4-FFF2-40B4-BE49-F238E27FC236}">
+                <a16:creationId xmlns:a16="http://schemas.microsoft.com/office/drawing/2014/main" id="{DEBDD435-EF5E-E307-AC3E-0E67A77B9B34}"/>
+              </a:ext>
+            </a:extLst>
+          </p:cNvPr>
+          <p:cNvGrpSpPr/>
+          <p:nvPr/>
+        </p:nvGrpSpPr>
+        <p:grpSpPr>
+          <a:xfrm>
+            <a:off x="1339039" y="1170239"/>
+            <a:ext cx="1494487" cy="276948"/>
+            <a:chOff x="990455" y="896744"/>
+            <a:chExt cx="1838379" cy="276948"/>
+          </a:xfrm>
+        </p:grpSpPr>
+        <p:sp>
+          <p:nvSpPr>
+            <p:cNvPr id="7" name="직사각형 6">
+              <a:extLst>
+                <a:ext uri="{FF2B5EF4-FFF2-40B4-BE49-F238E27FC236}">
+                  <a16:creationId xmlns:a16="http://schemas.microsoft.com/office/drawing/2014/main" id="{08C0E20C-344A-DDBD-77CD-BC0155F72A0C}"/>
+                </a:ext>
+              </a:extLst>
+            </p:cNvPr>
+            <p:cNvSpPr/>
+            <p:nvPr/>
+          </p:nvSpPr>
+          <p:spPr>
+            <a:xfrm>
+              <a:off x="990457" y="896744"/>
+              <a:ext cx="926570" cy="276948"/>
+            </a:xfrm>
+            <a:prstGeom prst="rect">
+              <a:avLst/>
+            </a:prstGeom>
+            <a:solidFill>
+              <a:srgbClr val="FFFF00"/>
+            </a:solidFill>
+            <a:ln>
+              <a:noFill/>
+            </a:ln>
+          </p:spPr>
+          <p:style>
+            <a:lnRef idx="2">
+              <a:schemeClr val="accent1">
+                <a:shade val="15000"/>
+              </a:schemeClr>
+            </a:lnRef>
+            <a:fillRef idx="1">
+              <a:schemeClr val="accent1"/>
+            </a:fillRef>
+            <a:effectRef idx="0">
+              <a:schemeClr val="accent1"/>
+            </a:effectRef>
+            <a:fontRef idx="minor">
+              <a:schemeClr val="lt1"/>
+            </a:fontRef>
+          </p:style>
+          <p:txBody>
+            <a:bodyPr rtlCol="0" anchor="ctr"/>
+            <a:lstStyle/>
+            <a:p>
+              <a:pPr algn="ctr"/>
+              <a:endParaRPr lang="ko-KR" altLang="en-US"/>
+            </a:p>
+          </p:txBody>
+        </p:sp>
+        <p:sp>
+          <p:nvSpPr>
+            <p:cNvPr id="8" name="직사각형 7">
+              <a:extLst>
+                <a:ext uri="{FF2B5EF4-FFF2-40B4-BE49-F238E27FC236}">
+                  <a16:creationId xmlns:a16="http://schemas.microsoft.com/office/drawing/2014/main" id="{F9DCAF69-20AC-F331-F769-30B36E0CA2C0}"/>
+                </a:ext>
+              </a:extLst>
+            </p:cNvPr>
+            <p:cNvSpPr/>
+            <p:nvPr/>
+          </p:nvSpPr>
+          <p:spPr>
+            <a:xfrm>
+              <a:off x="990455" y="896744"/>
+              <a:ext cx="1838379" cy="276948"/>
+            </a:xfrm>
+            <a:prstGeom prst="rect">
+              <a:avLst/>
+            </a:prstGeom>
+            <a:solidFill>
+              <a:schemeClr val="accent1">
+                <a:lumMod val="60000"/>
+                <a:lumOff val="40000"/>
+                <a:alpha val="10000"/>
+              </a:schemeClr>
+            </a:solidFill>
+            <a:ln>
+              <a:solidFill>
+                <a:schemeClr val="tx1"/>
+              </a:solidFill>
+            </a:ln>
+          </p:spPr>
+          <p:style>
+            <a:lnRef idx="2">
+              <a:schemeClr val="accent1">
+                <a:shade val="15000"/>
+              </a:schemeClr>
+            </a:lnRef>
+            <a:fillRef idx="1">
+              <a:schemeClr val="accent1"/>
+            </a:fillRef>
+            <a:effectRef idx="0">
+              <a:schemeClr val="accent1"/>
+            </a:effectRef>
+            <a:fontRef idx="minor">
+              <a:schemeClr val="lt1"/>
+            </a:fontRef>
+          </p:style>
+          <p:txBody>
+            <a:bodyPr rtlCol="0" anchor="ctr"/>
+            <a:lstStyle/>
+            <a:p>
+              <a:pPr algn="ctr"/>
+              <a:endParaRPr lang="ko-KR" altLang="en-US" dirty="0"/>
+            </a:p>
+          </p:txBody>
+        </p:sp>
+        <p:sp>
+          <p:nvSpPr>
+            <p:cNvPr id="9" name="TextBox 8">
+              <a:extLst>
+                <a:ext uri="{FF2B5EF4-FFF2-40B4-BE49-F238E27FC236}">
+                  <a16:creationId xmlns:a16="http://schemas.microsoft.com/office/drawing/2014/main" id="{80A2D3C9-6C04-B505-434B-84FC5B775CCE}"/>
+                </a:ext>
+              </a:extLst>
+            </p:cNvPr>
+            <p:cNvSpPr txBox="1"/>
+            <p:nvPr/>
+          </p:nvSpPr>
+          <p:spPr>
+            <a:xfrm>
+              <a:off x="990455" y="902176"/>
+              <a:ext cx="1838377" cy="261610"/>
+            </a:xfrm>
+            <a:prstGeom prst="rect">
+              <a:avLst/>
+            </a:prstGeom>
+            <a:noFill/>
+          </p:spPr>
+          <p:txBody>
+            <a:bodyPr wrap="square" rtlCol="0">
+              <a:spAutoFit/>
+            </a:bodyPr>
+            <a:lstStyle/>
+            <a:p>
+              <a:pPr algn="ctr"/>
+              <a:r>
+                <a:rPr lang="en-US" altLang="ko-KR" sz="1100" b="1" dirty="0"/>
+                <a:t>100 / 50</a:t>
+              </a:r>
+              <a:endParaRPr lang="ko-KR" altLang="en-US" sz="1100" b="1" dirty="0"/>
+            </a:p>
+          </p:txBody>
+        </p:sp>
+      </p:grpSp>
+      <p:sp>
+        <p:nvSpPr>
+          <p:cNvPr id="17" name="TextBox 16">
+            <a:extLst>
+              <a:ext uri="{FF2B5EF4-FFF2-40B4-BE49-F238E27FC236}">
+                <a16:creationId xmlns:a16="http://schemas.microsoft.com/office/drawing/2014/main" id="{938C3A07-62C4-D19F-6811-EF812F10B848}"/>
+              </a:ext>
+            </a:extLst>
+          </p:cNvPr>
+          <p:cNvSpPr txBox="1"/>
+          <p:nvPr/>
+        </p:nvSpPr>
+        <p:spPr>
+          <a:xfrm>
+            <a:off x="10775340" y="3873068"/>
+            <a:ext cx="409086" cy="369332"/>
+          </a:xfrm>
+          <a:prstGeom prst="rect">
+            <a:avLst/>
+          </a:prstGeom>
+          <a:noFill/>
+        </p:spPr>
+        <p:txBody>
+          <a:bodyPr wrap="none" rtlCol="0">
+            <a:spAutoFit/>
+          </a:bodyPr>
+          <a:lstStyle/>
+          <a:p>
+            <a:r>
+              <a:rPr lang="en-US" altLang="ko-KR" dirty="0"/>
+              <a:t>*5</a:t>
+            </a:r>
+            <a:endParaRPr lang="ko-KR" altLang="en-US" dirty="0"/>
+          </a:p>
+        </p:txBody>
+      </p:sp>
+      <p:grpSp>
+        <p:nvGrpSpPr>
+          <p:cNvPr id="161" name="그룹 160">
+            <a:extLst>
+              <a:ext uri="{FF2B5EF4-FFF2-40B4-BE49-F238E27FC236}">
+                <a16:creationId xmlns:a16="http://schemas.microsoft.com/office/drawing/2014/main" id="{101FE342-56C0-3C49-F070-90F4FB97AA77}"/>
+              </a:ext>
+            </a:extLst>
+          </p:cNvPr>
+          <p:cNvGrpSpPr/>
+          <p:nvPr/>
+        </p:nvGrpSpPr>
+        <p:grpSpPr>
+          <a:xfrm>
+            <a:off x="10052550" y="2246899"/>
+            <a:ext cx="623235" cy="1150334"/>
+            <a:chOff x="7112870" y="2496755"/>
+            <a:chExt cx="623235" cy="1150334"/>
+          </a:xfrm>
+        </p:grpSpPr>
+        <p:sp>
+          <p:nvSpPr>
+            <p:cNvPr id="162" name="순서도: 자기 디스크 161">
+              <a:extLst>
+                <a:ext uri="{FF2B5EF4-FFF2-40B4-BE49-F238E27FC236}">
+                  <a16:creationId xmlns:a16="http://schemas.microsoft.com/office/drawing/2014/main" id="{ECC5C95A-2D57-826A-D43E-7D70DC1C8CD3}"/>
+                </a:ext>
+              </a:extLst>
+            </p:cNvPr>
+            <p:cNvSpPr/>
+            <p:nvPr/>
+          </p:nvSpPr>
+          <p:spPr>
+            <a:xfrm>
+              <a:off x="7117554" y="2627091"/>
+              <a:ext cx="613868" cy="1019998"/>
+            </a:xfrm>
+            <a:prstGeom prst="flowChartMagneticDisk">
+              <a:avLst/>
+            </a:prstGeom>
+            <a:solidFill>
+              <a:srgbClr val="FF0000">
+                <a:alpha val="30000"/>
+              </a:srgbClr>
+            </a:solidFill>
+          </p:spPr>
+          <p:style>
+            <a:lnRef idx="2">
+              <a:schemeClr val="accent1">
+                <a:shade val="15000"/>
+              </a:schemeClr>
+            </a:lnRef>
+            <a:fillRef idx="1">
+              <a:schemeClr val="accent1"/>
+            </a:fillRef>
+            <a:effectRef idx="0">
+              <a:schemeClr val="accent1"/>
+            </a:effectRef>
+            <a:fontRef idx="minor">
+              <a:schemeClr val="lt1"/>
+            </a:fontRef>
+          </p:style>
+          <p:txBody>
+            <a:bodyPr rtlCol="0" anchor="ctr"/>
+            <a:lstStyle/>
+            <a:p>
+              <a:pPr algn="ctr"/>
+              <a:endParaRPr lang="ko-KR" altLang="en-US"/>
+            </a:p>
+          </p:txBody>
+        </p:sp>
+        <p:sp>
+          <p:nvSpPr>
+            <p:cNvPr id="163" name="직사각형 162">
+              <a:extLst>
+                <a:ext uri="{FF2B5EF4-FFF2-40B4-BE49-F238E27FC236}">
+                  <a16:creationId xmlns:a16="http://schemas.microsoft.com/office/drawing/2014/main" id="{1C0B5FDA-7364-C3DE-1ACD-0116E7188791}"/>
+                </a:ext>
+              </a:extLst>
+            </p:cNvPr>
+            <p:cNvSpPr/>
+            <p:nvPr/>
+          </p:nvSpPr>
+          <p:spPr>
+            <a:xfrm>
+              <a:off x="7112870" y="2496755"/>
+              <a:ext cx="623235" cy="47335"/>
+            </a:xfrm>
+            <a:prstGeom prst="rect">
+              <a:avLst/>
+            </a:prstGeom>
+            <a:solidFill>
+              <a:schemeClr val="accent1">
+                <a:lumMod val="40000"/>
+                <a:lumOff val="60000"/>
+              </a:schemeClr>
+            </a:solidFill>
+          </p:spPr>
+          <p:style>
+            <a:lnRef idx="2">
+              <a:schemeClr val="accent1">
+                <a:shade val="15000"/>
+              </a:schemeClr>
+            </a:lnRef>
+            <a:fillRef idx="1">
+              <a:schemeClr val="accent1"/>
+            </a:fillRef>
+            <a:effectRef idx="0">
+              <a:schemeClr val="accent1"/>
+            </a:effectRef>
+            <a:fontRef idx="minor">
+              <a:schemeClr val="lt1"/>
+            </a:fontRef>
+          </p:style>
+          <p:txBody>
+            <a:bodyPr rtlCol="0" anchor="ctr"/>
+            <a:lstStyle/>
+            <a:p>
+              <a:pPr algn="ctr"/>
+              <a:endParaRPr lang="ko-KR" altLang="en-US"/>
+            </a:p>
+          </p:txBody>
+        </p:sp>
+      </p:grpSp>
+      <p:sp>
+        <p:nvSpPr>
+          <p:cNvPr id="25" name="TextBox 24">
+            <a:extLst>
+              <a:ext uri="{FF2B5EF4-FFF2-40B4-BE49-F238E27FC236}">
+                <a16:creationId xmlns:a16="http://schemas.microsoft.com/office/drawing/2014/main" id="{5FE87350-9C62-0F96-DAEA-248E87A19785}"/>
+              </a:ext>
+            </a:extLst>
+          </p:cNvPr>
+          <p:cNvSpPr txBox="1"/>
+          <p:nvPr/>
+        </p:nvSpPr>
+        <p:spPr>
+          <a:xfrm>
+            <a:off x="928358" y="883816"/>
+            <a:ext cx="468398" cy="307777"/>
+          </a:xfrm>
+          <a:prstGeom prst="rect">
+            <a:avLst/>
+          </a:prstGeom>
+          <a:noFill/>
+        </p:spPr>
+        <p:txBody>
+          <a:bodyPr wrap="none" rtlCol="0">
+            <a:spAutoFit/>
+          </a:bodyPr>
+          <a:lstStyle/>
+          <a:p>
+            <a:r>
+              <a:rPr lang="en-US" altLang="ko-KR" sz="1400" b="1" dirty="0"/>
+              <a:t>MP</a:t>
+            </a:r>
+            <a:endParaRPr lang="ko-KR" altLang="en-US" sz="1400" b="1" dirty="0"/>
+          </a:p>
+        </p:txBody>
+      </p:sp>
+      <p:pic>
+        <p:nvPicPr>
+          <p:cNvPr id="23" name="그림 22">
+            <a:extLst>
+              <a:ext uri="{FF2B5EF4-FFF2-40B4-BE49-F238E27FC236}">
+                <a16:creationId xmlns:a16="http://schemas.microsoft.com/office/drawing/2014/main" id="{B679BECD-6475-A6AC-810C-A575372AB8C5}"/>
+              </a:ext>
+            </a:extLst>
+          </p:cNvPr>
+          <p:cNvPicPr>
+            <a:picLocks noChangeAspect="1"/>
+          </p:cNvPicPr>
+          <p:nvPr/>
+        </p:nvPicPr>
+        <p:blipFill>
+          <a:blip r:embed="rId2">
+            <a:duotone>
+              <a:schemeClr val="bg2">
+                <a:shade val="45000"/>
+                <a:satMod val="135000"/>
+              </a:schemeClr>
+              <a:prstClr val="white"/>
+            </a:duotone>
+            <a:extLst>
+              <a:ext uri="{BEBA8EAE-BF5A-486C-A8C5-ECC9F3942E4B}">
+                <a14:imgProps xmlns:a14="http://schemas.microsoft.com/office/drawing/2010/main">
+                  <a14:imgLayer r:embed="rId3">
+                    <a14:imgEffect>
+                      <a14:colorTemperature colorTemp="7335"/>
+                    </a14:imgEffect>
+                  </a14:imgLayer>
+                </a14:imgProps>
+              </a:ext>
+              <a:ext uri="{28A0092B-C50C-407E-A947-70E740481C1C}">
+                <a14:useLocalDpi xmlns:a14="http://schemas.microsoft.com/office/drawing/2010/main" val="0"/>
+              </a:ext>
+            </a:extLst>
+          </a:blip>
+          <a:stretch>
+            <a:fillRect/>
+          </a:stretch>
+        </p:blipFill>
+        <p:spPr>
+          <a:xfrm>
+            <a:off x="10669070" y="756928"/>
+            <a:ext cx="360000" cy="360000"/>
+          </a:xfrm>
+          <a:prstGeom prst="rect">
+            <a:avLst/>
+          </a:prstGeom>
+        </p:spPr>
+      </p:pic>
+      <p:grpSp>
+        <p:nvGrpSpPr>
+          <p:cNvPr id="27" name="그룹 26">
+            <a:extLst>
+              <a:ext uri="{FF2B5EF4-FFF2-40B4-BE49-F238E27FC236}">
+                <a16:creationId xmlns:a16="http://schemas.microsoft.com/office/drawing/2014/main" id="{2D994F8D-A157-5DA1-3E9F-B4F01BC58111}"/>
+              </a:ext>
+            </a:extLst>
+          </p:cNvPr>
+          <p:cNvGrpSpPr/>
+          <p:nvPr/>
+        </p:nvGrpSpPr>
+        <p:grpSpPr>
+          <a:xfrm>
+            <a:off x="5728402" y="3050413"/>
+            <a:ext cx="608400" cy="693640"/>
+            <a:chOff x="5791200" y="3038960"/>
+            <a:chExt cx="608400" cy="693640"/>
+          </a:xfrm>
+        </p:grpSpPr>
+        <p:sp>
+          <p:nvSpPr>
+            <p:cNvPr id="75" name="직사각형 74">
+              <a:extLst>
+                <a:ext uri="{FF2B5EF4-FFF2-40B4-BE49-F238E27FC236}">
+                  <a16:creationId xmlns:a16="http://schemas.microsoft.com/office/drawing/2014/main" id="{C83460F1-9C6E-EC02-AF69-BC2A6E6D8FCD}"/>
+                </a:ext>
+              </a:extLst>
+            </p:cNvPr>
+            <p:cNvSpPr/>
+            <p:nvPr/>
+          </p:nvSpPr>
+          <p:spPr>
+            <a:xfrm>
+              <a:off x="5919500" y="3038960"/>
+              <a:ext cx="351799" cy="47335"/>
+            </a:xfrm>
+            <a:prstGeom prst="rect">
+              <a:avLst/>
+            </a:prstGeom>
+            <a:solidFill>
+              <a:srgbClr val="FF0000"/>
+            </a:solidFill>
+          </p:spPr>
+          <p:style>
+            <a:lnRef idx="2">
+              <a:schemeClr val="accent1">
+                <a:shade val="15000"/>
+              </a:schemeClr>
+            </a:lnRef>
+            <a:fillRef idx="1">
+              <a:schemeClr val="accent1"/>
+            </a:fillRef>
+            <a:effectRef idx="0">
+              <a:schemeClr val="accent1"/>
+            </a:effectRef>
+            <a:fontRef idx="minor">
+              <a:schemeClr val="lt1"/>
+            </a:fontRef>
+          </p:style>
+          <p:txBody>
+            <a:bodyPr rtlCol="0" anchor="ctr"/>
+            <a:lstStyle/>
+            <a:p>
+              <a:pPr algn="ctr"/>
+              <a:endParaRPr lang="ko-KR" altLang="en-US"/>
+            </a:p>
+          </p:txBody>
+        </p:sp>
+        <p:pic>
+          <p:nvPicPr>
+            <p:cNvPr id="26" name="그림 25">
+              <a:extLst>
+                <a:ext uri="{FF2B5EF4-FFF2-40B4-BE49-F238E27FC236}">
+                  <a16:creationId xmlns:a16="http://schemas.microsoft.com/office/drawing/2014/main" id="{23E85CC6-101C-38DD-808B-D43284EB5D6A}"/>
+                </a:ext>
+              </a:extLst>
+            </p:cNvPr>
+            <p:cNvPicPr>
+              <a:picLocks noChangeAspect="1"/>
+            </p:cNvPicPr>
+            <p:nvPr/>
+          </p:nvPicPr>
+          <p:blipFill>
+            <a:blip r:embed="rId4">
+              <a:extLst>
+                <a:ext uri="{28A0092B-C50C-407E-A947-70E740481C1C}">
+                  <a14:useLocalDpi xmlns:a14="http://schemas.microsoft.com/office/drawing/2010/main" val="0"/>
+                </a:ext>
+              </a:extLst>
+            </a:blip>
+            <a:stretch>
+              <a:fillRect/>
+            </a:stretch>
+          </p:blipFill>
+          <p:spPr>
+            <a:xfrm>
+              <a:off x="5791200" y="3124200"/>
+              <a:ext cx="608400" cy="608400"/>
+            </a:xfrm>
+            <a:prstGeom prst="rect">
+              <a:avLst/>
+            </a:prstGeom>
+          </p:spPr>
+        </p:pic>
+      </p:grpSp>
+    </p:spTree>
+    <p:extLst>
+      <p:ext uri="{BB962C8B-B14F-4D97-AF65-F5344CB8AC3E}">
+        <p14:creationId xmlns:p14="http://schemas.microsoft.com/office/powerpoint/2010/main" val="190730832"/>
+      </p:ext>
+    </p:extLst>
+  </p:cSld>
+  <p:clrMapOvr>
+    <a:masterClrMapping/>
+  </p:clrMapOvr>
+</p:sld>
+</file>
+
+<file path=ppt/slides/slide6.xml><?xml version="1.0" encoding="utf-8"?>
 <p:sld xmlns:a="http://schemas.openxmlformats.org/drawingml/2006/main" xmlns:r="http://schemas.openxmlformats.org/officeDocument/2006/relationships" xmlns:p="http://schemas.openxmlformats.org/presentationml/2006/main">
   <p:cSld>
     <p:spTree>
@@ -10196,7 +12215,7 @@
         </p:nvGrpSpPr>
         <p:grpSpPr>
           <a:xfrm>
-            <a:off x="1339039" y="1170239"/>
+            <a:off x="1331419" y="1170239"/>
             <a:ext cx="1494487" cy="276948"/>
             <a:chOff x="990455" y="896744"/>
             <a:chExt cx="1838379" cy="276948"/>
@@ -10811,7 +12830,7 @@
 </p:sld>
 </file>
 
-<file path=ppt/slides/slide6.xml><?xml version="1.0" encoding="utf-8"?>
+<file path=ppt/slides/slide7.xml><?xml version="1.0" encoding="utf-8"?>
 <p:sld xmlns:a="http://schemas.openxmlformats.org/drawingml/2006/main" xmlns:r="http://schemas.openxmlformats.org/officeDocument/2006/relationships" xmlns:p="http://schemas.openxmlformats.org/presentationml/2006/main">
   <p:cSld>
     <p:spTree>

--- a/씬 별 UI.pptx
+++ b/씬 별 UI.pptx
@@ -5,16 +5,17 @@
     <p:sldMasterId id="2147483648" r:id="rId1"/>
   </p:sldMasterIdLst>
   <p:notesMasterIdLst>
-    <p:notesMasterId r:id="rId9"/>
+    <p:notesMasterId r:id="rId10"/>
   </p:notesMasterIdLst>
   <p:sldIdLst>
     <p:sldId id="303" r:id="rId2"/>
     <p:sldId id="292" r:id="rId3"/>
     <p:sldId id="311" r:id="rId4"/>
     <p:sldId id="310" r:id="rId5"/>
-    <p:sldId id="314" r:id="rId6"/>
-    <p:sldId id="312" r:id="rId7"/>
-    <p:sldId id="313" r:id="rId8"/>
+    <p:sldId id="315" r:id="rId6"/>
+    <p:sldId id="314" r:id="rId7"/>
+    <p:sldId id="312" r:id="rId8"/>
+    <p:sldId id="313" r:id="rId9"/>
   </p:sldIdLst>
   <p:sldSz cx="12192000" cy="6858000"/>
   <p:notesSz cx="6858000" cy="9144000"/>
@@ -8797,6 +8798,2651 @@
         <p:cNvPr id="1" name="">
           <a:extLst>
             <a:ext uri="{FF2B5EF4-FFF2-40B4-BE49-F238E27FC236}">
+              <a16:creationId xmlns:a16="http://schemas.microsoft.com/office/drawing/2014/main" id="{5650CB65-6E98-DCE1-48DB-6CF52BD64071}"/>
+            </a:ext>
+          </a:extLst>
+        </p:cNvPr>
+        <p:cNvGrpSpPr/>
+        <p:nvPr/>
+      </p:nvGrpSpPr>
+      <p:grpSpPr>
+        <a:xfrm>
+          <a:off x="0" y="0"/>
+          <a:ext cx="0" cy="0"/>
+          <a:chOff x="0" y="0"/>
+          <a:chExt cx="0" cy="0"/>
+        </a:xfrm>
+      </p:grpSpPr>
+      <p:sp>
+        <p:nvSpPr>
+          <p:cNvPr id="5" name="직사각형 4">
+            <a:extLst>
+              <a:ext uri="{FF2B5EF4-FFF2-40B4-BE49-F238E27FC236}">
+                <a16:creationId xmlns:a16="http://schemas.microsoft.com/office/drawing/2014/main" id="{21A524C2-B71D-4667-17A1-B07B867D0C20}"/>
+              </a:ext>
+            </a:extLst>
+          </p:cNvPr>
+          <p:cNvSpPr>
+            <a:spLocks noChangeAspect="1"/>
+          </p:cNvSpPr>
+          <p:nvPr/>
+        </p:nvSpPr>
+        <p:spPr>
+          <a:xfrm>
+            <a:off x="912000" y="513000"/>
+            <a:ext cx="10368000" cy="5831999"/>
+          </a:xfrm>
+          <a:prstGeom prst="rect">
+            <a:avLst/>
+          </a:prstGeom>
+          <a:noFill/>
+        </p:spPr>
+        <p:style>
+          <a:lnRef idx="2">
+            <a:schemeClr val="accent1">
+              <a:shade val="15000"/>
+            </a:schemeClr>
+          </a:lnRef>
+          <a:fillRef idx="1">
+            <a:schemeClr val="accent1"/>
+          </a:fillRef>
+          <a:effectRef idx="0">
+            <a:schemeClr val="accent1"/>
+          </a:effectRef>
+          <a:fontRef idx="minor">
+            <a:schemeClr val="lt1"/>
+          </a:fontRef>
+        </p:style>
+        <p:txBody>
+          <a:bodyPr rtlCol="0" anchor="ctr"/>
+          <a:lstStyle/>
+          <a:p>
+            <a:pPr algn="ctr"/>
+            <a:endParaRPr lang="ko-KR" altLang="en-US" dirty="0"/>
+          </a:p>
+        </p:txBody>
+      </p:sp>
+      <p:grpSp>
+        <p:nvGrpSpPr>
+          <p:cNvPr id="22" name="그룹 21">
+            <a:extLst>
+              <a:ext uri="{FF2B5EF4-FFF2-40B4-BE49-F238E27FC236}">
+                <a16:creationId xmlns:a16="http://schemas.microsoft.com/office/drawing/2014/main" id="{9C563EF1-D4C7-477D-6677-BE7AE680AFC3}"/>
+              </a:ext>
+            </a:extLst>
+          </p:cNvPr>
+          <p:cNvGrpSpPr/>
+          <p:nvPr/>
+        </p:nvGrpSpPr>
+        <p:grpSpPr>
+          <a:xfrm>
+            <a:off x="9152550" y="4310424"/>
+            <a:ext cx="1800000" cy="1800000"/>
+            <a:chOff x="9296400" y="4152899"/>
+            <a:chExt cx="1800000" cy="1800000"/>
+          </a:xfrm>
+        </p:grpSpPr>
+        <p:grpSp>
+          <p:nvGrpSpPr>
+            <p:cNvPr id="20" name="그룹 19">
+              <a:extLst>
+                <a:ext uri="{FF2B5EF4-FFF2-40B4-BE49-F238E27FC236}">
+                  <a16:creationId xmlns:a16="http://schemas.microsoft.com/office/drawing/2014/main" id="{E09B8ACD-861D-5EE7-AF0F-290FF03F0CCA}"/>
+                </a:ext>
+              </a:extLst>
+            </p:cNvPr>
+            <p:cNvGrpSpPr/>
+            <p:nvPr/>
+          </p:nvGrpSpPr>
+          <p:grpSpPr>
+            <a:xfrm>
+              <a:off x="9296400" y="4152899"/>
+              <a:ext cx="1800000" cy="1800000"/>
+              <a:chOff x="9296400" y="4152899"/>
+              <a:chExt cx="1800000" cy="1800000"/>
+            </a:xfrm>
+          </p:grpSpPr>
+          <p:sp>
+            <p:nvSpPr>
+              <p:cNvPr id="2" name="타원 1">
+                <a:extLst>
+                  <a:ext uri="{FF2B5EF4-FFF2-40B4-BE49-F238E27FC236}">
+                    <a16:creationId xmlns:a16="http://schemas.microsoft.com/office/drawing/2014/main" id="{72EEEEBB-281C-B025-A512-1BDE8A4B5B0E}"/>
+                  </a:ext>
+                </a:extLst>
+              </p:cNvPr>
+              <p:cNvSpPr>
+                <a:spLocks noChangeAspect="1"/>
+              </p:cNvSpPr>
+              <p:nvPr/>
+            </p:nvSpPr>
+            <p:spPr>
+              <a:xfrm>
+                <a:off x="9296400" y="4152899"/>
+                <a:ext cx="1800000" cy="1800000"/>
+              </a:xfrm>
+              <a:prstGeom prst="ellipse">
+                <a:avLst/>
+              </a:prstGeom>
+              <a:noFill/>
+            </p:spPr>
+            <p:style>
+              <a:lnRef idx="2">
+                <a:schemeClr val="accent1">
+                  <a:shade val="15000"/>
+                </a:schemeClr>
+              </a:lnRef>
+              <a:fillRef idx="1">
+                <a:schemeClr val="accent1"/>
+              </a:fillRef>
+              <a:effectRef idx="0">
+                <a:schemeClr val="accent1"/>
+              </a:effectRef>
+              <a:fontRef idx="minor">
+                <a:schemeClr val="lt1"/>
+              </a:fontRef>
+            </p:style>
+            <p:txBody>
+              <a:bodyPr rtlCol="0" anchor="ctr"/>
+              <a:lstStyle/>
+              <a:p>
+                <a:pPr algn="ctr"/>
+                <a:endParaRPr lang="ko-KR" altLang="en-US" dirty="0"/>
+              </a:p>
+            </p:txBody>
+          </p:sp>
+          <p:cxnSp>
+            <p:nvCxnSpPr>
+              <p:cNvPr id="4" name="직선 연결선 3">
+                <a:extLst>
+                  <a:ext uri="{FF2B5EF4-FFF2-40B4-BE49-F238E27FC236}">
+                    <a16:creationId xmlns:a16="http://schemas.microsoft.com/office/drawing/2014/main" id="{35AADDD6-76D2-41D3-C3FF-22C96A9F70C6}"/>
+                  </a:ext>
+                </a:extLst>
+              </p:cNvPr>
+              <p:cNvCxnSpPr>
+                <a:cxnSpLocks/>
+                <a:stCxn id="2" idx="7"/>
+                <a:endCxn id="2" idx="3"/>
+              </p:cNvCxnSpPr>
+              <p:nvPr/>
+            </p:nvCxnSpPr>
+            <p:spPr>
+              <a:xfrm flipH="1">
+                <a:off x="9560004" y="4416503"/>
+                <a:ext cx="1272792" cy="1272792"/>
+              </a:xfrm>
+              <a:prstGeom prst="line">
+                <a:avLst/>
+              </a:prstGeom>
+            </p:spPr>
+            <p:style>
+              <a:lnRef idx="2">
+                <a:schemeClr val="dk1"/>
+              </a:lnRef>
+              <a:fillRef idx="0">
+                <a:schemeClr val="dk1"/>
+              </a:fillRef>
+              <a:effectRef idx="1">
+                <a:schemeClr val="dk1"/>
+              </a:effectRef>
+              <a:fontRef idx="minor">
+                <a:schemeClr val="tx1"/>
+              </a:fontRef>
+            </p:style>
+          </p:cxnSp>
+          <p:cxnSp>
+            <p:nvCxnSpPr>
+              <p:cNvPr id="10" name="직선 연결선 9">
+                <a:extLst>
+                  <a:ext uri="{FF2B5EF4-FFF2-40B4-BE49-F238E27FC236}">
+                    <a16:creationId xmlns:a16="http://schemas.microsoft.com/office/drawing/2014/main" id="{5E74568D-05ED-0BF8-AD9D-72C1B9195EC0}"/>
+                  </a:ext>
+                </a:extLst>
+              </p:cNvPr>
+              <p:cNvCxnSpPr>
+                <a:cxnSpLocks/>
+                <a:stCxn id="2" idx="1"/>
+                <a:endCxn id="2" idx="5"/>
+              </p:cNvCxnSpPr>
+              <p:nvPr/>
+            </p:nvCxnSpPr>
+            <p:spPr>
+              <a:xfrm>
+                <a:off x="9560004" y="4416503"/>
+                <a:ext cx="1272792" cy="1272792"/>
+              </a:xfrm>
+              <a:prstGeom prst="line">
+                <a:avLst/>
+              </a:prstGeom>
+            </p:spPr>
+            <p:style>
+              <a:lnRef idx="2">
+                <a:schemeClr val="dk1"/>
+              </a:lnRef>
+              <a:fillRef idx="0">
+                <a:schemeClr val="dk1"/>
+              </a:fillRef>
+              <a:effectRef idx="1">
+                <a:schemeClr val="dk1"/>
+              </a:effectRef>
+              <a:fontRef idx="minor">
+                <a:schemeClr val="tx1"/>
+              </a:fontRef>
+            </p:style>
+          </p:cxnSp>
+          <p:sp>
+            <p:nvSpPr>
+              <p:cNvPr id="13" name="TextBox 12">
+                <a:extLst>
+                  <a:ext uri="{FF2B5EF4-FFF2-40B4-BE49-F238E27FC236}">
+                    <a16:creationId xmlns:a16="http://schemas.microsoft.com/office/drawing/2014/main" id="{1333EC12-5D8A-63EC-04F7-83407C8D3591}"/>
+                  </a:ext>
+                </a:extLst>
+              </p:cNvPr>
+              <p:cNvSpPr txBox="1"/>
+              <p:nvPr/>
+            </p:nvSpPr>
+            <p:spPr>
+              <a:xfrm>
+                <a:off x="9988651" y="4279462"/>
+                <a:ext cx="415498" cy="369332"/>
+              </a:xfrm>
+              <a:prstGeom prst="rect">
+                <a:avLst/>
+              </a:prstGeom>
+              <a:noFill/>
+            </p:spPr>
+            <p:txBody>
+              <a:bodyPr wrap="none" rtlCol="0">
+                <a:spAutoFit/>
+              </a:bodyPr>
+              <a:lstStyle/>
+              <a:p>
+                <a:r>
+                  <a:rPr lang="ko-KR" altLang="en-US" dirty="0"/>
+                  <a:t>▲</a:t>
+                </a:r>
+              </a:p>
+            </p:txBody>
+          </p:sp>
+          <p:sp>
+            <p:nvSpPr>
+              <p:cNvPr id="14" name="TextBox 13">
+                <a:extLst>
+                  <a:ext uri="{FF2B5EF4-FFF2-40B4-BE49-F238E27FC236}">
+                    <a16:creationId xmlns:a16="http://schemas.microsoft.com/office/drawing/2014/main" id="{34315DAB-8078-D992-0702-E6861916E221}"/>
+                  </a:ext>
+                </a:extLst>
+              </p:cNvPr>
+              <p:cNvSpPr txBox="1"/>
+              <p:nvPr/>
+            </p:nvSpPr>
+            <p:spPr>
+              <a:xfrm>
+                <a:off x="9988651" y="5437954"/>
+                <a:ext cx="415498" cy="369332"/>
+              </a:xfrm>
+              <a:prstGeom prst="rect">
+                <a:avLst/>
+              </a:prstGeom>
+              <a:noFill/>
+            </p:spPr>
+            <p:txBody>
+              <a:bodyPr wrap="none" rtlCol="0">
+                <a:spAutoFit/>
+              </a:bodyPr>
+              <a:lstStyle/>
+              <a:p>
+                <a:r>
+                  <a:rPr lang="ko-KR" altLang="en-US" dirty="0"/>
+                  <a:t>▼</a:t>
+                </a:r>
+              </a:p>
+            </p:txBody>
+          </p:sp>
+          <p:sp>
+            <p:nvSpPr>
+              <p:cNvPr id="15" name="TextBox 14">
+                <a:extLst>
+                  <a:ext uri="{FF2B5EF4-FFF2-40B4-BE49-F238E27FC236}">
+                    <a16:creationId xmlns:a16="http://schemas.microsoft.com/office/drawing/2014/main" id="{0BD09DC9-7B34-12C5-77D7-23C206DA24E4}"/>
+                  </a:ext>
+                </a:extLst>
+              </p:cNvPr>
+              <p:cNvSpPr txBox="1"/>
+              <p:nvPr/>
+            </p:nvSpPr>
+            <p:spPr>
+              <a:xfrm>
+                <a:off x="9399880" y="4868233"/>
+                <a:ext cx="415498" cy="369332"/>
+              </a:xfrm>
+              <a:prstGeom prst="rect">
+                <a:avLst/>
+              </a:prstGeom>
+              <a:noFill/>
+            </p:spPr>
+            <p:txBody>
+              <a:bodyPr wrap="none" rtlCol="0">
+                <a:spAutoFit/>
+              </a:bodyPr>
+              <a:lstStyle/>
+              <a:p>
+                <a:r>
+                  <a:rPr lang="ko-KR" altLang="en-US" dirty="0"/>
+                  <a:t>◀</a:t>
+                </a:r>
+              </a:p>
+            </p:txBody>
+          </p:sp>
+          <p:sp>
+            <p:nvSpPr>
+              <p:cNvPr id="16" name="TextBox 15">
+                <a:extLst>
+                  <a:ext uri="{FF2B5EF4-FFF2-40B4-BE49-F238E27FC236}">
+                    <a16:creationId xmlns:a16="http://schemas.microsoft.com/office/drawing/2014/main" id="{CA3209A1-7A3E-8A22-2248-DAF0D789B765}"/>
+                  </a:ext>
+                </a:extLst>
+              </p:cNvPr>
+              <p:cNvSpPr txBox="1"/>
+              <p:nvPr/>
+            </p:nvSpPr>
+            <p:spPr>
+              <a:xfrm>
+                <a:off x="10577422" y="4828948"/>
+                <a:ext cx="415498" cy="369332"/>
+              </a:xfrm>
+              <a:prstGeom prst="rect">
+                <a:avLst/>
+              </a:prstGeom>
+              <a:noFill/>
+            </p:spPr>
+            <p:txBody>
+              <a:bodyPr wrap="none" rtlCol="0">
+                <a:spAutoFit/>
+              </a:bodyPr>
+              <a:lstStyle/>
+              <a:p>
+                <a:r>
+                  <a:rPr lang="ko-KR" altLang="en-US" dirty="0"/>
+                  <a:t>▶</a:t>
+                </a:r>
+              </a:p>
+            </p:txBody>
+          </p:sp>
+          <p:sp>
+            <p:nvSpPr>
+              <p:cNvPr id="19" name="타원 18">
+                <a:extLst>
+                  <a:ext uri="{FF2B5EF4-FFF2-40B4-BE49-F238E27FC236}">
+                    <a16:creationId xmlns:a16="http://schemas.microsoft.com/office/drawing/2014/main" id="{115B0789-75F6-4765-52F0-5ECA25657E81}"/>
+                  </a:ext>
+                </a:extLst>
+              </p:cNvPr>
+              <p:cNvSpPr>
+                <a:spLocks noChangeAspect="1"/>
+              </p:cNvSpPr>
+              <p:nvPr/>
+            </p:nvSpPr>
+            <p:spPr>
+              <a:xfrm>
+                <a:off x="9476400" y="4332899"/>
+                <a:ext cx="1440000" cy="1440000"/>
+              </a:xfrm>
+              <a:prstGeom prst="ellipse">
+                <a:avLst/>
+              </a:prstGeom>
+              <a:noFill/>
+            </p:spPr>
+            <p:style>
+              <a:lnRef idx="2">
+                <a:schemeClr val="accent1">
+                  <a:shade val="15000"/>
+                </a:schemeClr>
+              </a:lnRef>
+              <a:fillRef idx="1">
+                <a:schemeClr val="accent1"/>
+              </a:fillRef>
+              <a:effectRef idx="0">
+                <a:schemeClr val="accent1"/>
+              </a:effectRef>
+              <a:fontRef idx="minor">
+                <a:schemeClr val="lt1"/>
+              </a:fontRef>
+            </p:style>
+            <p:txBody>
+              <a:bodyPr rtlCol="0" anchor="ctr"/>
+              <a:lstStyle/>
+              <a:p>
+                <a:pPr algn="ctr"/>
+                <a:endParaRPr lang="ko-KR" altLang="en-US" dirty="0"/>
+              </a:p>
+            </p:txBody>
+          </p:sp>
+        </p:grpSp>
+        <p:sp>
+          <p:nvSpPr>
+            <p:cNvPr id="21" name="타원 20">
+              <a:extLst>
+                <a:ext uri="{FF2B5EF4-FFF2-40B4-BE49-F238E27FC236}">
+                  <a16:creationId xmlns:a16="http://schemas.microsoft.com/office/drawing/2014/main" id="{89784ABA-6AF6-6838-7148-79ECF2D3E60E}"/>
+                </a:ext>
+              </a:extLst>
+            </p:cNvPr>
+            <p:cNvSpPr>
+              <a:spLocks noChangeAspect="1"/>
+            </p:cNvSpPr>
+            <p:nvPr/>
+          </p:nvSpPr>
+          <p:spPr>
+            <a:xfrm>
+              <a:off x="10033822" y="4865854"/>
+              <a:ext cx="360000" cy="360000"/>
+            </a:xfrm>
+            <a:prstGeom prst="ellipse">
+              <a:avLst/>
+            </a:prstGeom>
+            <a:solidFill>
+              <a:schemeClr val="bg2">
+                <a:alpha val="50000"/>
+              </a:schemeClr>
+            </a:solidFill>
+            <a:ln>
+              <a:solidFill>
+                <a:schemeClr val="tx1"/>
+              </a:solidFill>
+            </a:ln>
+          </p:spPr>
+          <p:style>
+            <a:lnRef idx="2">
+              <a:schemeClr val="accent1">
+                <a:shade val="15000"/>
+              </a:schemeClr>
+            </a:lnRef>
+            <a:fillRef idx="1">
+              <a:schemeClr val="accent1"/>
+            </a:fillRef>
+            <a:effectRef idx="0">
+              <a:schemeClr val="accent1"/>
+            </a:effectRef>
+            <a:fontRef idx="minor">
+              <a:schemeClr val="lt1"/>
+            </a:fontRef>
+          </p:style>
+          <p:txBody>
+            <a:bodyPr rtlCol="0" anchor="ctr"/>
+            <a:lstStyle/>
+            <a:p>
+              <a:pPr algn="ctr"/>
+              <a:endParaRPr lang="ko-KR" altLang="en-US" dirty="0"/>
+            </a:p>
+          </p:txBody>
+        </p:sp>
+      </p:grpSp>
+      <p:grpSp>
+        <p:nvGrpSpPr>
+          <p:cNvPr id="95" name="그룹 94">
+            <a:extLst>
+              <a:ext uri="{FF2B5EF4-FFF2-40B4-BE49-F238E27FC236}">
+                <a16:creationId xmlns:a16="http://schemas.microsoft.com/office/drawing/2014/main" id="{E7CF9559-A484-3EC9-93FD-EFEF0EC304E4}"/>
+              </a:ext>
+            </a:extLst>
+          </p:cNvPr>
+          <p:cNvGrpSpPr/>
+          <p:nvPr/>
+        </p:nvGrpSpPr>
+        <p:grpSpPr>
+          <a:xfrm>
+            <a:off x="2862181" y="5502193"/>
+            <a:ext cx="6034244" cy="413049"/>
+            <a:chOff x="2223232" y="5433771"/>
+            <a:chExt cx="6034244" cy="413049"/>
+          </a:xfrm>
+        </p:grpSpPr>
+        <p:sp>
+          <p:nvSpPr>
+            <p:cNvPr id="68" name="직사각형 67">
+              <a:extLst>
+                <a:ext uri="{FF2B5EF4-FFF2-40B4-BE49-F238E27FC236}">
+                  <a16:creationId xmlns:a16="http://schemas.microsoft.com/office/drawing/2014/main" id="{5BBC6A21-D671-BAFB-70EC-00BA6A91DA3A}"/>
+                </a:ext>
+              </a:extLst>
+            </p:cNvPr>
+            <p:cNvSpPr/>
+            <p:nvPr/>
+          </p:nvSpPr>
+          <p:spPr>
+            <a:xfrm>
+              <a:off x="2223232" y="5743665"/>
+              <a:ext cx="6034244" cy="103155"/>
+            </a:xfrm>
+            <a:prstGeom prst="rect">
+              <a:avLst/>
+            </a:prstGeom>
+            <a:solidFill>
+              <a:srgbClr val="FF0000"/>
+            </a:solidFill>
+          </p:spPr>
+          <p:style>
+            <a:lnRef idx="2">
+              <a:schemeClr val="accent1">
+                <a:shade val="15000"/>
+              </a:schemeClr>
+            </a:lnRef>
+            <a:fillRef idx="1">
+              <a:schemeClr val="accent1"/>
+            </a:fillRef>
+            <a:effectRef idx="0">
+              <a:schemeClr val="accent1"/>
+            </a:effectRef>
+            <a:fontRef idx="minor">
+              <a:schemeClr val="lt1"/>
+            </a:fontRef>
+          </p:style>
+          <p:txBody>
+            <a:bodyPr rtlCol="0" anchor="ctr"/>
+            <a:lstStyle/>
+            <a:p>
+              <a:pPr algn="ctr"/>
+              <a:endParaRPr lang="ko-KR" altLang="en-US"/>
+            </a:p>
+          </p:txBody>
+        </p:sp>
+        <p:sp>
+          <p:nvSpPr>
+            <p:cNvPr id="70" name="TextBox 69">
+              <a:extLst>
+                <a:ext uri="{FF2B5EF4-FFF2-40B4-BE49-F238E27FC236}">
+                  <a16:creationId xmlns:a16="http://schemas.microsoft.com/office/drawing/2014/main" id="{009A188D-BC26-3A7B-D52C-12EF38F9C59B}"/>
+                </a:ext>
+              </a:extLst>
+            </p:cNvPr>
+            <p:cNvSpPr txBox="1"/>
+            <p:nvPr/>
+          </p:nvSpPr>
+          <p:spPr>
+            <a:xfrm>
+              <a:off x="4732524" y="5433771"/>
+              <a:ext cx="965329" cy="307777"/>
+            </a:xfrm>
+            <a:prstGeom prst="rect">
+              <a:avLst/>
+            </a:prstGeom>
+            <a:noFill/>
+          </p:spPr>
+          <p:txBody>
+            <a:bodyPr wrap="none" rtlCol="0">
+              <a:spAutoFit/>
+            </a:bodyPr>
+            <a:lstStyle/>
+            <a:p>
+              <a:r>
+                <a:rPr lang="ko-KR" altLang="en-US" sz="1400" dirty="0"/>
+                <a:t>보스 이름</a:t>
+              </a:r>
+            </a:p>
+          </p:txBody>
+        </p:sp>
+      </p:grpSp>
+      <p:sp>
+        <p:nvSpPr>
+          <p:cNvPr id="83" name="타원 82">
+            <a:extLst>
+              <a:ext uri="{FF2B5EF4-FFF2-40B4-BE49-F238E27FC236}">
+                <a16:creationId xmlns:a16="http://schemas.microsoft.com/office/drawing/2014/main" id="{088A624A-9C53-18DA-513C-65A30957959D}"/>
+              </a:ext>
+            </a:extLst>
+          </p:cNvPr>
+          <p:cNvSpPr/>
+          <p:nvPr/>
+        </p:nvSpPr>
+        <p:spPr>
+          <a:xfrm>
+            <a:off x="10579070" y="657576"/>
+            <a:ext cx="540000" cy="540000"/>
+          </a:xfrm>
+          <a:prstGeom prst="ellipse">
+            <a:avLst/>
+          </a:prstGeom>
+          <a:solidFill>
+            <a:schemeClr val="bg2">
+              <a:lumMod val="90000"/>
+            </a:schemeClr>
+          </a:solidFill>
+        </p:spPr>
+        <p:style>
+          <a:lnRef idx="2">
+            <a:schemeClr val="accent1">
+              <a:shade val="15000"/>
+            </a:schemeClr>
+          </a:lnRef>
+          <a:fillRef idx="1">
+            <a:schemeClr val="accent1"/>
+          </a:fillRef>
+          <a:effectRef idx="0">
+            <a:schemeClr val="accent1"/>
+          </a:effectRef>
+          <a:fontRef idx="minor">
+            <a:schemeClr val="lt1"/>
+          </a:fontRef>
+        </p:style>
+        <p:txBody>
+          <a:bodyPr rtlCol="0" anchor="ctr"/>
+          <a:lstStyle/>
+          <a:p>
+            <a:pPr algn="ctr"/>
+            <a:endParaRPr lang="ko-KR" altLang="en-US"/>
+          </a:p>
+        </p:txBody>
+      </p:sp>
+      <p:sp>
+        <p:nvSpPr>
+          <p:cNvPr id="90" name="TextBox 89">
+            <a:extLst>
+              <a:ext uri="{FF2B5EF4-FFF2-40B4-BE49-F238E27FC236}">
+                <a16:creationId xmlns:a16="http://schemas.microsoft.com/office/drawing/2014/main" id="{90E06A03-B483-636D-A931-744F5F28AE93}"/>
+              </a:ext>
+            </a:extLst>
+          </p:cNvPr>
+          <p:cNvSpPr txBox="1"/>
+          <p:nvPr/>
+        </p:nvSpPr>
+        <p:spPr>
+          <a:xfrm>
+            <a:off x="1199723" y="-180953"/>
+            <a:ext cx="1420582" cy="369332"/>
+          </a:xfrm>
+          <a:prstGeom prst="rect">
+            <a:avLst/>
+          </a:prstGeom>
+          <a:noFill/>
+        </p:spPr>
+        <p:txBody>
+          <a:bodyPr wrap="none" rtlCol="0">
+            <a:spAutoFit/>
+          </a:bodyPr>
+          <a:lstStyle/>
+          <a:p>
+            <a:r>
+              <a:rPr lang="ko-KR" altLang="en-US"/>
+              <a:t>상태 게이지</a:t>
+            </a:r>
+            <a:endParaRPr lang="en-US" altLang="ko-KR" dirty="0"/>
+          </a:p>
+        </p:txBody>
+      </p:sp>
+      <p:sp>
+        <p:nvSpPr>
+          <p:cNvPr id="93" name="TextBox 92">
+            <a:extLst>
+              <a:ext uri="{FF2B5EF4-FFF2-40B4-BE49-F238E27FC236}">
+                <a16:creationId xmlns:a16="http://schemas.microsoft.com/office/drawing/2014/main" id="{4E1C6DCF-4CC0-29F9-15C7-3BF9F83A65B9}"/>
+              </a:ext>
+            </a:extLst>
+          </p:cNvPr>
+          <p:cNvSpPr txBox="1"/>
+          <p:nvPr/>
+        </p:nvSpPr>
+        <p:spPr>
+          <a:xfrm>
+            <a:off x="11813941" y="743556"/>
+            <a:ext cx="1183337" cy="369332"/>
+          </a:xfrm>
+          <a:prstGeom prst="rect">
+            <a:avLst/>
+          </a:prstGeom>
+          <a:noFill/>
+        </p:spPr>
+        <p:txBody>
+          <a:bodyPr wrap="none" rtlCol="0">
+            <a:spAutoFit/>
+          </a:bodyPr>
+          <a:lstStyle/>
+          <a:p>
+            <a:r>
+              <a:rPr lang="ko-KR" altLang="en-US" dirty="0"/>
+              <a:t>시스템 </a:t>
+            </a:r>
+            <a:r>
+              <a:rPr lang="en-US" altLang="ko-KR" dirty="0"/>
+              <a:t>UI</a:t>
+            </a:r>
+            <a:endParaRPr lang="ko-KR" altLang="en-US" dirty="0"/>
+          </a:p>
+        </p:txBody>
+      </p:sp>
+      <p:sp>
+        <p:nvSpPr>
+          <p:cNvPr id="104" name="TextBox 103">
+            <a:extLst>
+              <a:ext uri="{FF2B5EF4-FFF2-40B4-BE49-F238E27FC236}">
+                <a16:creationId xmlns:a16="http://schemas.microsoft.com/office/drawing/2014/main" id="{EAD80577-0DED-92BB-B429-3C9460C741C5}"/>
+              </a:ext>
+            </a:extLst>
+          </p:cNvPr>
+          <p:cNvSpPr txBox="1"/>
+          <p:nvPr/>
+        </p:nvSpPr>
+        <p:spPr>
+          <a:xfrm>
+            <a:off x="-78056" y="4153431"/>
+            <a:ext cx="646331" cy="369332"/>
+          </a:xfrm>
+          <a:prstGeom prst="rect">
+            <a:avLst/>
+          </a:prstGeom>
+          <a:noFill/>
+        </p:spPr>
+        <p:txBody>
+          <a:bodyPr wrap="none" rtlCol="0">
+            <a:spAutoFit/>
+          </a:bodyPr>
+          <a:lstStyle/>
+          <a:p>
+            <a:r>
+              <a:rPr lang="ko-KR" altLang="en-US" dirty="0"/>
+              <a:t>스킬</a:t>
+            </a:r>
+          </a:p>
+        </p:txBody>
+      </p:sp>
+      <p:grpSp>
+        <p:nvGrpSpPr>
+          <p:cNvPr id="48" name="그룹 47">
+            <a:extLst>
+              <a:ext uri="{FF2B5EF4-FFF2-40B4-BE49-F238E27FC236}">
+                <a16:creationId xmlns:a16="http://schemas.microsoft.com/office/drawing/2014/main" id="{51E1DB1B-0D16-5FD0-AED7-E3C637C335C2}"/>
+              </a:ext>
+            </a:extLst>
+          </p:cNvPr>
+          <p:cNvGrpSpPr/>
+          <p:nvPr/>
+        </p:nvGrpSpPr>
+        <p:grpSpPr>
+          <a:xfrm>
+            <a:off x="1334347" y="896744"/>
+            <a:ext cx="1494486" cy="276948"/>
+            <a:chOff x="990455" y="896744"/>
+            <a:chExt cx="1838378" cy="276948"/>
+          </a:xfrm>
+        </p:grpSpPr>
+        <p:sp>
+          <p:nvSpPr>
+            <p:cNvPr id="24" name="직사각형 23">
+              <a:extLst>
+                <a:ext uri="{FF2B5EF4-FFF2-40B4-BE49-F238E27FC236}">
+                  <a16:creationId xmlns:a16="http://schemas.microsoft.com/office/drawing/2014/main" id="{63FAEE2E-B96A-81B9-4BBE-0A62CE105E36}"/>
+                </a:ext>
+              </a:extLst>
+            </p:cNvPr>
+            <p:cNvSpPr/>
+            <p:nvPr/>
+          </p:nvSpPr>
+          <p:spPr>
+            <a:xfrm>
+              <a:off x="990457" y="896744"/>
+              <a:ext cx="742710" cy="276948"/>
+            </a:xfrm>
+            <a:prstGeom prst="rect">
+              <a:avLst/>
+            </a:prstGeom>
+            <a:solidFill>
+              <a:schemeClr val="accent1">
+                <a:lumMod val="60000"/>
+                <a:lumOff val="40000"/>
+              </a:schemeClr>
+            </a:solidFill>
+            <a:ln>
+              <a:noFill/>
+            </a:ln>
+          </p:spPr>
+          <p:style>
+            <a:lnRef idx="2">
+              <a:schemeClr val="accent1">
+                <a:shade val="15000"/>
+              </a:schemeClr>
+            </a:lnRef>
+            <a:fillRef idx="1">
+              <a:schemeClr val="accent1"/>
+            </a:fillRef>
+            <a:effectRef idx="0">
+              <a:schemeClr val="accent1"/>
+            </a:effectRef>
+            <a:fontRef idx="minor">
+              <a:schemeClr val="lt1"/>
+            </a:fontRef>
+          </p:style>
+          <p:txBody>
+            <a:bodyPr rtlCol="0" anchor="ctr"/>
+            <a:lstStyle/>
+            <a:p>
+              <a:pPr algn="ctr"/>
+              <a:endParaRPr lang="ko-KR" altLang="en-US"/>
+            </a:p>
+          </p:txBody>
+        </p:sp>
+        <p:sp>
+          <p:nvSpPr>
+            <p:cNvPr id="12" name="직사각형 11">
+              <a:extLst>
+                <a:ext uri="{FF2B5EF4-FFF2-40B4-BE49-F238E27FC236}">
+                  <a16:creationId xmlns:a16="http://schemas.microsoft.com/office/drawing/2014/main" id="{E0B06BBD-DD5E-7D26-20CA-6CF0AECCAF66}"/>
+                </a:ext>
+              </a:extLst>
+            </p:cNvPr>
+            <p:cNvSpPr/>
+            <p:nvPr/>
+          </p:nvSpPr>
+          <p:spPr>
+            <a:xfrm>
+              <a:off x="990456" y="896744"/>
+              <a:ext cx="1838377" cy="276948"/>
+            </a:xfrm>
+            <a:prstGeom prst="rect">
+              <a:avLst/>
+            </a:prstGeom>
+            <a:solidFill>
+              <a:schemeClr val="accent1">
+                <a:lumMod val="60000"/>
+                <a:lumOff val="40000"/>
+                <a:alpha val="10000"/>
+              </a:schemeClr>
+            </a:solidFill>
+            <a:ln>
+              <a:solidFill>
+                <a:schemeClr val="tx1"/>
+              </a:solidFill>
+            </a:ln>
+          </p:spPr>
+          <p:style>
+            <a:lnRef idx="2">
+              <a:schemeClr val="accent1">
+                <a:shade val="15000"/>
+              </a:schemeClr>
+            </a:lnRef>
+            <a:fillRef idx="1">
+              <a:schemeClr val="accent1"/>
+            </a:fillRef>
+            <a:effectRef idx="0">
+              <a:schemeClr val="accent1"/>
+            </a:effectRef>
+            <a:fontRef idx="minor">
+              <a:schemeClr val="lt1"/>
+            </a:fontRef>
+          </p:style>
+          <p:txBody>
+            <a:bodyPr rtlCol="0" anchor="ctr"/>
+            <a:lstStyle/>
+            <a:p>
+              <a:pPr algn="ctr"/>
+              <a:endParaRPr lang="ko-KR" altLang="en-US"/>
+            </a:p>
+          </p:txBody>
+        </p:sp>
+        <p:sp>
+          <p:nvSpPr>
+            <p:cNvPr id="40" name="TextBox 39">
+              <a:extLst>
+                <a:ext uri="{FF2B5EF4-FFF2-40B4-BE49-F238E27FC236}">
+                  <a16:creationId xmlns:a16="http://schemas.microsoft.com/office/drawing/2014/main" id="{D6DC8D50-18F3-B621-37CA-62BC174F3BF6}"/>
+                </a:ext>
+              </a:extLst>
+            </p:cNvPr>
+            <p:cNvSpPr txBox="1"/>
+            <p:nvPr/>
+          </p:nvSpPr>
+          <p:spPr>
+            <a:xfrm>
+              <a:off x="990455" y="904035"/>
+              <a:ext cx="1838377" cy="261610"/>
+            </a:xfrm>
+            <a:prstGeom prst="rect">
+              <a:avLst/>
+            </a:prstGeom>
+            <a:noFill/>
+          </p:spPr>
+          <p:txBody>
+            <a:bodyPr wrap="square" rtlCol="0">
+              <a:spAutoFit/>
+            </a:bodyPr>
+            <a:lstStyle/>
+            <a:p>
+              <a:pPr algn="ctr"/>
+              <a:r>
+                <a:rPr lang="en-US" altLang="ko-KR" sz="1100" b="1" dirty="0"/>
+                <a:t>100 / 40</a:t>
+              </a:r>
+              <a:endParaRPr lang="ko-KR" altLang="en-US" sz="1100" b="1" dirty="0"/>
+            </a:p>
+          </p:txBody>
+        </p:sp>
+      </p:grpSp>
+      <p:grpSp>
+        <p:nvGrpSpPr>
+          <p:cNvPr id="45" name="그룹 44">
+            <a:extLst>
+              <a:ext uri="{FF2B5EF4-FFF2-40B4-BE49-F238E27FC236}">
+                <a16:creationId xmlns:a16="http://schemas.microsoft.com/office/drawing/2014/main" id="{599FF0C0-2631-9A95-1C82-DB740F444039}"/>
+              </a:ext>
+            </a:extLst>
+          </p:cNvPr>
+          <p:cNvGrpSpPr/>
+          <p:nvPr/>
+        </p:nvGrpSpPr>
+        <p:grpSpPr>
+          <a:xfrm>
+            <a:off x="1334347" y="618534"/>
+            <a:ext cx="1494486" cy="276948"/>
+            <a:chOff x="990455" y="618534"/>
+            <a:chExt cx="1838378" cy="276948"/>
+          </a:xfrm>
+        </p:grpSpPr>
+        <p:sp>
+          <p:nvSpPr>
+            <p:cNvPr id="18" name="직사각형 17">
+              <a:extLst>
+                <a:ext uri="{FF2B5EF4-FFF2-40B4-BE49-F238E27FC236}">
+                  <a16:creationId xmlns:a16="http://schemas.microsoft.com/office/drawing/2014/main" id="{BC486677-7322-A620-D353-691790F205E2}"/>
+                </a:ext>
+              </a:extLst>
+            </p:cNvPr>
+            <p:cNvSpPr/>
+            <p:nvPr/>
+          </p:nvSpPr>
+          <p:spPr>
+            <a:xfrm>
+              <a:off x="990457" y="618534"/>
+              <a:ext cx="1174698" cy="276948"/>
+            </a:xfrm>
+            <a:prstGeom prst="rect">
+              <a:avLst/>
+            </a:prstGeom>
+            <a:solidFill>
+              <a:srgbClr val="FF0000"/>
+            </a:solidFill>
+            <a:ln>
+              <a:noFill/>
+            </a:ln>
+          </p:spPr>
+          <p:style>
+            <a:lnRef idx="2">
+              <a:schemeClr val="accent1">
+                <a:shade val="15000"/>
+              </a:schemeClr>
+            </a:lnRef>
+            <a:fillRef idx="1">
+              <a:schemeClr val="accent1"/>
+            </a:fillRef>
+            <a:effectRef idx="0">
+              <a:schemeClr val="accent1"/>
+            </a:effectRef>
+            <a:fontRef idx="minor">
+              <a:schemeClr val="lt1"/>
+            </a:fontRef>
+          </p:style>
+          <p:txBody>
+            <a:bodyPr rtlCol="0" anchor="ctr"/>
+            <a:lstStyle/>
+            <a:p>
+              <a:pPr algn="ctr"/>
+              <a:endParaRPr lang="ko-KR" altLang="en-US"/>
+            </a:p>
+          </p:txBody>
+        </p:sp>
+        <p:sp>
+          <p:nvSpPr>
+            <p:cNvPr id="6" name="직사각형 5">
+              <a:extLst>
+                <a:ext uri="{FF2B5EF4-FFF2-40B4-BE49-F238E27FC236}">
+                  <a16:creationId xmlns:a16="http://schemas.microsoft.com/office/drawing/2014/main" id="{EFA9D71D-8B92-7AC9-7990-A1CCF185ED61}"/>
+                </a:ext>
+              </a:extLst>
+            </p:cNvPr>
+            <p:cNvSpPr/>
+            <p:nvPr/>
+          </p:nvSpPr>
+          <p:spPr>
+            <a:xfrm>
+              <a:off x="990456" y="618534"/>
+              <a:ext cx="1838377" cy="276948"/>
+            </a:xfrm>
+            <a:prstGeom prst="rect">
+              <a:avLst/>
+            </a:prstGeom>
+            <a:solidFill>
+              <a:srgbClr val="FF0000">
+                <a:alpha val="10000"/>
+              </a:srgbClr>
+            </a:solidFill>
+            <a:ln>
+              <a:solidFill>
+                <a:schemeClr val="tx1"/>
+              </a:solidFill>
+            </a:ln>
+          </p:spPr>
+          <p:style>
+            <a:lnRef idx="2">
+              <a:schemeClr val="accent1">
+                <a:shade val="15000"/>
+              </a:schemeClr>
+            </a:lnRef>
+            <a:fillRef idx="1">
+              <a:schemeClr val="accent1"/>
+            </a:fillRef>
+            <a:effectRef idx="0">
+              <a:schemeClr val="accent1"/>
+            </a:effectRef>
+            <a:fontRef idx="minor">
+              <a:schemeClr val="lt1"/>
+            </a:fontRef>
+          </p:style>
+          <p:txBody>
+            <a:bodyPr rtlCol="0" anchor="ctr"/>
+            <a:lstStyle/>
+            <a:p>
+              <a:pPr algn="ctr"/>
+              <a:endParaRPr lang="ko-KR" altLang="en-US"/>
+            </a:p>
+          </p:txBody>
+        </p:sp>
+        <p:sp>
+          <p:nvSpPr>
+            <p:cNvPr id="44" name="TextBox 43">
+              <a:extLst>
+                <a:ext uri="{FF2B5EF4-FFF2-40B4-BE49-F238E27FC236}">
+                  <a16:creationId xmlns:a16="http://schemas.microsoft.com/office/drawing/2014/main" id="{DFB847D7-428B-1DE5-6911-7B4EAC461D5D}"/>
+                </a:ext>
+              </a:extLst>
+            </p:cNvPr>
+            <p:cNvSpPr txBox="1"/>
+            <p:nvPr/>
+          </p:nvSpPr>
+          <p:spPr>
+            <a:xfrm>
+              <a:off x="990455" y="626124"/>
+              <a:ext cx="1838377" cy="261610"/>
+            </a:xfrm>
+            <a:prstGeom prst="rect">
+              <a:avLst/>
+            </a:prstGeom>
+            <a:noFill/>
+          </p:spPr>
+          <p:txBody>
+            <a:bodyPr wrap="square" rtlCol="0">
+              <a:spAutoFit/>
+            </a:bodyPr>
+            <a:lstStyle/>
+            <a:p>
+              <a:pPr algn="ctr"/>
+              <a:r>
+                <a:rPr lang="en-US" altLang="ko-KR" sz="1100" b="1" dirty="0"/>
+                <a:t>100 / 75</a:t>
+              </a:r>
+            </a:p>
+          </p:txBody>
+        </p:sp>
+      </p:grpSp>
+      <p:sp>
+        <p:nvSpPr>
+          <p:cNvPr id="49" name="TextBox 48">
+            <a:extLst>
+              <a:ext uri="{FF2B5EF4-FFF2-40B4-BE49-F238E27FC236}">
+                <a16:creationId xmlns:a16="http://schemas.microsoft.com/office/drawing/2014/main" id="{60F43543-4B41-2ABD-30F2-08622609448D}"/>
+              </a:ext>
+            </a:extLst>
+          </p:cNvPr>
+          <p:cNvSpPr txBox="1"/>
+          <p:nvPr/>
+        </p:nvSpPr>
+        <p:spPr>
+          <a:xfrm>
+            <a:off x="956851" y="603040"/>
+            <a:ext cx="433132" cy="307777"/>
+          </a:xfrm>
+          <a:prstGeom prst="rect">
+            <a:avLst/>
+          </a:prstGeom>
+          <a:noFill/>
+        </p:spPr>
+        <p:txBody>
+          <a:bodyPr wrap="none" rtlCol="0">
+            <a:spAutoFit/>
+          </a:bodyPr>
+          <a:lstStyle/>
+          <a:p>
+            <a:r>
+              <a:rPr lang="en-US" altLang="ko-KR" sz="1400" b="1" dirty="0"/>
+              <a:t>HP</a:t>
+            </a:r>
+            <a:endParaRPr lang="ko-KR" altLang="en-US" sz="1400" b="1" dirty="0"/>
+          </a:p>
+        </p:txBody>
+      </p:sp>
+      <p:sp>
+        <p:nvSpPr>
+          <p:cNvPr id="35" name="TextBox 34">
+            <a:extLst>
+              <a:ext uri="{FF2B5EF4-FFF2-40B4-BE49-F238E27FC236}">
+                <a16:creationId xmlns:a16="http://schemas.microsoft.com/office/drawing/2014/main" id="{4F532825-BC93-BB8C-1B07-4F431AC46F67}"/>
+              </a:ext>
+            </a:extLst>
+          </p:cNvPr>
+          <p:cNvSpPr txBox="1"/>
+          <p:nvPr/>
+        </p:nvSpPr>
+        <p:spPr>
+          <a:xfrm>
+            <a:off x="885228" y="1155488"/>
+            <a:ext cx="511871" cy="307777"/>
+          </a:xfrm>
+          <a:prstGeom prst="rect">
+            <a:avLst/>
+          </a:prstGeom>
+          <a:noFill/>
+        </p:spPr>
+        <p:txBody>
+          <a:bodyPr wrap="none" rtlCol="0">
+            <a:spAutoFit/>
+          </a:bodyPr>
+          <a:lstStyle/>
+          <a:p>
+            <a:r>
+              <a:rPr lang="en-US" altLang="ko-KR" sz="1400" b="1" dirty="0"/>
+              <a:t>EXP</a:t>
+            </a:r>
+            <a:endParaRPr lang="ko-KR" altLang="en-US" sz="1400" b="1" dirty="0"/>
+          </a:p>
+        </p:txBody>
+      </p:sp>
+      <p:sp>
+        <p:nvSpPr>
+          <p:cNvPr id="37" name="타원 36">
+            <a:extLst>
+              <a:ext uri="{FF2B5EF4-FFF2-40B4-BE49-F238E27FC236}">
+                <a16:creationId xmlns:a16="http://schemas.microsoft.com/office/drawing/2014/main" id="{7DCB479A-F0DA-D2C4-BB8D-5E8661D077F2}"/>
+              </a:ext>
+            </a:extLst>
+          </p:cNvPr>
+          <p:cNvSpPr>
+            <a:spLocks noChangeAspect="1"/>
+          </p:cNvSpPr>
+          <p:nvPr/>
+        </p:nvSpPr>
+        <p:spPr>
+          <a:xfrm>
+            <a:off x="1229952" y="5606978"/>
+            <a:ext cx="360000" cy="360000"/>
+          </a:xfrm>
+          <a:prstGeom prst="ellipse">
+            <a:avLst/>
+          </a:prstGeom>
+          <a:solidFill>
+            <a:srgbClr val="FFC000">
+              <a:alpha val="50000"/>
+            </a:srgbClr>
+          </a:solidFill>
+          <a:ln>
+            <a:solidFill>
+              <a:schemeClr val="tx1"/>
+            </a:solidFill>
+          </a:ln>
+        </p:spPr>
+        <p:style>
+          <a:lnRef idx="2">
+            <a:schemeClr val="accent1">
+              <a:shade val="15000"/>
+            </a:schemeClr>
+          </a:lnRef>
+          <a:fillRef idx="1">
+            <a:schemeClr val="accent1"/>
+          </a:fillRef>
+          <a:effectRef idx="0">
+            <a:schemeClr val="accent1"/>
+          </a:effectRef>
+          <a:fontRef idx="minor">
+            <a:schemeClr val="lt1"/>
+          </a:fontRef>
+        </p:style>
+        <p:txBody>
+          <a:bodyPr rtlCol="0" anchor="ctr"/>
+          <a:lstStyle/>
+          <a:p>
+            <a:pPr algn="ctr"/>
+            <a:endParaRPr lang="ko-KR" altLang="en-US" sz="200" dirty="0">
+              <a:solidFill>
+                <a:schemeClr val="tx1"/>
+              </a:solidFill>
+            </a:endParaRPr>
+          </a:p>
+        </p:txBody>
+      </p:sp>
+      <p:sp>
+        <p:nvSpPr>
+          <p:cNvPr id="39" name="타원 38">
+            <a:extLst>
+              <a:ext uri="{FF2B5EF4-FFF2-40B4-BE49-F238E27FC236}">
+                <a16:creationId xmlns:a16="http://schemas.microsoft.com/office/drawing/2014/main" id="{A29C5DE1-39D4-554B-7620-203C9238165C}"/>
+              </a:ext>
+            </a:extLst>
+          </p:cNvPr>
+          <p:cNvSpPr>
+            <a:spLocks noChangeAspect="1"/>
+          </p:cNvSpPr>
+          <p:nvPr/>
+        </p:nvSpPr>
+        <p:spPr>
+          <a:xfrm>
+            <a:off x="1219698" y="5035090"/>
+            <a:ext cx="360000" cy="360000"/>
+          </a:xfrm>
+          <a:prstGeom prst="ellipse">
+            <a:avLst/>
+          </a:prstGeom>
+          <a:solidFill>
+            <a:schemeClr val="accent6">
+              <a:lumMod val="20000"/>
+              <a:lumOff val="80000"/>
+              <a:alpha val="50000"/>
+            </a:schemeClr>
+          </a:solidFill>
+          <a:ln>
+            <a:solidFill>
+              <a:schemeClr val="tx1"/>
+            </a:solidFill>
+          </a:ln>
+        </p:spPr>
+        <p:style>
+          <a:lnRef idx="2">
+            <a:schemeClr val="accent1">
+              <a:shade val="15000"/>
+            </a:schemeClr>
+          </a:lnRef>
+          <a:fillRef idx="1">
+            <a:schemeClr val="accent1"/>
+          </a:fillRef>
+          <a:effectRef idx="0">
+            <a:schemeClr val="accent1"/>
+          </a:effectRef>
+          <a:fontRef idx="minor">
+            <a:schemeClr val="lt1"/>
+          </a:fontRef>
+        </p:style>
+        <p:txBody>
+          <a:bodyPr rtlCol="0" anchor="ctr"/>
+          <a:lstStyle/>
+          <a:p>
+            <a:pPr algn="ctr"/>
+            <a:endParaRPr lang="ko-KR" altLang="en-US" dirty="0">
+              <a:solidFill>
+                <a:schemeClr val="tx1"/>
+              </a:solidFill>
+            </a:endParaRPr>
+          </a:p>
+        </p:txBody>
+      </p:sp>
+      <p:sp>
+        <p:nvSpPr>
+          <p:cNvPr id="42" name="TextBox 41">
+            <a:extLst>
+              <a:ext uri="{FF2B5EF4-FFF2-40B4-BE49-F238E27FC236}">
+                <a16:creationId xmlns:a16="http://schemas.microsoft.com/office/drawing/2014/main" id="{A2510491-F87E-FEC7-902E-83F56807BBCF}"/>
+              </a:ext>
+            </a:extLst>
+          </p:cNvPr>
+          <p:cNvSpPr txBox="1"/>
+          <p:nvPr/>
+        </p:nvSpPr>
+        <p:spPr>
+          <a:xfrm>
+            <a:off x="-308889" y="5607485"/>
+            <a:ext cx="877164" cy="369332"/>
+          </a:xfrm>
+          <a:prstGeom prst="rect">
+            <a:avLst/>
+          </a:prstGeom>
+          <a:noFill/>
+        </p:spPr>
+        <p:txBody>
+          <a:bodyPr wrap="none" rtlCol="0">
+            <a:spAutoFit/>
+          </a:bodyPr>
+          <a:lstStyle/>
+          <a:p>
+            <a:pPr algn="r"/>
+            <a:r>
+              <a:rPr lang="ko-KR" altLang="en-US"/>
+              <a:t>회피기</a:t>
+            </a:r>
+            <a:endParaRPr lang="ko-KR" altLang="en-US" dirty="0"/>
+          </a:p>
+        </p:txBody>
+      </p:sp>
+      <p:sp>
+        <p:nvSpPr>
+          <p:cNvPr id="52" name="TextBox 51">
+            <a:extLst>
+              <a:ext uri="{FF2B5EF4-FFF2-40B4-BE49-F238E27FC236}">
+                <a16:creationId xmlns:a16="http://schemas.microsoft.com/office/drawing/2014/main" id="{E06F4D49-A44A-A8B8-3858-670F83009CBC}"/>
+              </a:ext>
+            </a:extLst>
+          </p:cNvPr>
+          <p:cNvSpPr txBox="1"/>
+          <p:nvPr/>
+        </p:nvSpPr>
+        <p:spPr>
+          <a:xfrm>
+            <a:off x="-631092" y="5035090"/>
+            <a:ext cx="1199367" cy="369332"/>
+          </a:xfrm>
+          <a:prstGeom prst="rect">
+            <a:avLst/>
+          </a:prstGeom>
+          <a:noFill/>
+        </p:spPr>
+        <p:txBody>
+          <a:bodyPr wrap="none" rtlCol="0">
+            <a:spAutoFit/>
+          </a:bodyPr>
+          <a:lstStyle/>
+          <a:p>
+            <a:pPr algn="r"/>
+            <a:r>
+              <a:rPr lang="ko-KR" altLang="en-US" dirty="0"/>
+              <a:t>막기</a:t>
+            </a:r>
+            <a:r>
+              <a:rPr lang="en-US" altLang="ko-KR" dirty="0"/>
+              <a:t>/</a:t>
+            </a:r>
+            <a:r>
+              <a:rPr lang="ko-KR" altLang="en-US" dirty="0"/>
+              <a:t>패링</a:t>
+            </a:r>
+          </a:p>
+        </p:txBody>
+      </p:sp>
+      <p:sp>
+        <p:nvSpPr>
+          <p:cNvPr id="54" name="타원 53">
+            <a:extLst>
+              <a:ext uri="{FF2B5EF4-FFF2-40B4-BE49-F238E27FC236}">
+                <a16:creationId xmlns:a16="http://schemas.microsoft.com/office/drawing/2014/main" id="{74FEF42A-A8DC-1F6D-AF8B-CBE127AC5EEB}"/>
+              </a:ext>
+            </a:extLst>
+          </p:cNvPr>
+          <p:cNvSpPr>
+            <a:spLocks noChangeAspect="1"/>
+          </p:cNvSpPr>
+          <p:nvPr/>
+        </p:nvSpPr>
+        <p:spPr>
+          <a:xfrm>
+            <a:off x="1229952" y="3882952"/>
+            <a:ext cx="360000" cy="360000"/>
+          </a:xfrm>
+          <a:prstGeom prst="ellipse">
+            <a:avLst/>
+          </a:prstGeom>
+          <a:solidFill>
+            <a:schemeClr val="accent1">
+              <a:lumMod val="40000"/>
+              <a:lumOff val="60000"/>
+              <a:alpha val="50000"/>
+            </a:schemeClr>
+          </a:solidFill>
+          <a:ln>
+            <a:solidFill>
+              <a:schemeClr val="tx1"/>
+            </a:solidFill>
+          </a:ln>
+        </p:spPr>
+        <p:style>
+          <a:lnRef idx="2">
+            <a:schemeClr val="accent1">
+              <a:shade val="15000"/>
+            </a:schemeClr>
+          </a:lnRef>
+          <a:fillRef idx="1">
+            <a:schemeClr val="accent1"/>
+          </a:fillRef>
+          <a:effectRef idx="0">
+            <a:schemeClr val="accent1"/>
+          </a:effectRef>
+          <a:fontRef idx="minor">
+            <a:schemeClr val="lt1"/>
+          </a:fontRef>
+        </p:style>
+        <p:txBody>
+          <a:bodyPr rtlCol="0" anchor="ctr"/>
+          <a:lstStyle/>
+          <a:p>
+            <a:pPr algn="ctr"/>
+            <a:endParaRPr lang="ko-KR" altLang="en-US" dirty="0"/>
+          </a:p>
+        </p:txBody>
+      </p:sp>
+      <p:sp>
+        <p:nvSpPr>
+          <p:cNvPr id="56" name="타원 55">
+            <a:extLst>
+              <a:ext uri="{FF2B5EF4-FFF2-40B4-BE49-F238E27FC236}">
+                <a16:creationId xmlns:a16="http://schemas.microsoft.com/office/drawing/2014/main" id="{FC49A505-E554-AE0B-6221-6B083C1C8CCC}"/>
+              </a:ext>
+            </a:extLst>
+          </p:cNvPr>
+          <p:cNvSpPr>
+            <a:spLocks noChangeAspect="1"/>
+          </p:cNvSpPr>
+          <p:nvPr/>
+        </p:nvSpPr>
+        <p:spPr>
+          <a:xfrm>
+            <a:off x="1229952" y="4457627"/>
+            <a:ext cx="360000" cy="360000"/>
+          </a:xfrm>
+          <a:prstGeom prst="ellipse">
+            <a:avLst/>
+          </a:prstGeom>
+          <a:solidFill>
+            <a:schemeClr val="accent1">
+              <a:lumMod val="40000"/>
+              <a:lumOff val="60000"/>
+              <a:alpha val="50000"/>
+            </a:schemeClr>
+          </a:solidFill>
+          <a:ln>
+            <a:solidFill>
+              <a:schemeClr val="tx1"/>
+            </a:solidFill>
+          </a:ln>
+        </p:spPr>
+        <p:style>
+          <a:lnRef idx="2">
+            <a:schemeClr val="accent1">
+              <a:shade val="15000"/>
+            </a:schemeClr>
+          </a:lnRef>
+          <a:fillRef idx="1">
+            <a:schemeClr val="accent1"/>
+          </a:fillRef>
+          <a:effectRef idx="0">
+            <a:schemeClr val="accent1"/>
+          </a:effectRef>
+          <a:fontRef idx="minor">
+            <a:schemeClr val="lt1"/>
+          </a:fontRef>
+        </p:style>
+        <p:txBody>
+          <a:bodyPr rtlCol="0" anchor="ctr"/>
+          <a:lstStyle/>
+          <a:p>
+            <a:pPr algn="ctr"/>
+            <a:endParaRPr lang="ko-KR" altLang="en-US" dirty="0"/>
+          </a:p>
+        </p:txBody>
+      </p:sp>
+      <p:sp>
+        <p:nvSpPr>
+          <p:cNvPr id="72" name="타원 71">
+            <a:extLst>
+              <a:ext uri="{FF2B5EF4-FFF2-40B4-BE49-F238E27FC236}">
+                <a16:creationId xmlns:a16="http://schemas.microsoft.com/office/drawing/2014/main" id="{53F18B15-0B0E-EB20-9AC4-B10ACB988A8D}"/>
+              </a:ext>
+            </a:extLst>
+          </p:cNvPr>
+          <p:cNvSpPr>
+            <a:spLocks noChangeAspect="1"/>
+          </p:cNvSpPr>
+          <p:nvPr/>
+        </p:nvSpPr>
+        <p:spPr>
+          <a:xfrm>
+            <a:off x="10424828" y="3891135"/>
+            <a:ext cx="360000" cy="360000"/>
+          </a:xfrm>
+          <a:prstGeom prst="ellipse">
+            <a:avLst/>
+          </a:prstGeom>
+          <a:solidFill>
+            <a:schemeClr val="accent1">
+              <a:lumMod val="40000"/>
+              <a:lumOff val="60000"/>
+              <a:alpha val="50000"/>
+            </a:schemeClr>
+          </a:solidFill>
+          <a:ln>
+            <a:solidFill>
+              <a:schemeClr val="tx1"/>
+            </a:solidFill>
+          </a:ln>
+        </p:spPr>
+        <p:style>
+          <a:lnRef idx="2">
+            <a:schemeClr val="accent1">
+              <a:shade val="15000"/>
+            </a:schemeClr>
+          </a:lnRef>
+          <a:fillRef idx="1">
+            <a:schemeClr val="accent1"/>
+          </a:fillRef>
+          <a:effectRef idx="0">
+            <a:schemeClr val="accent1"/>
+          </a:effectRef>
+          <a:fontRef idx="minor">
+            <a:schemeClr val="lt1"/>
+          </a:fontRef>
+        </p:style>
+        <p:txBody>
+          <a:bodyPr rtlCol="0" anchor="ctr"/>
+          <a:lstStyle/>
+          <a:p>
+            <a:pPr algn="ctr"/>
+            <a:endParaRPr lang="ko-KR" altLang="en-US" dirty="0"/>
+          </a:p>
+        </p:txBody>
+      </p:sp>
+      <p:grpSp>
+        <p:nvGrpSpPr>
+          <p:cNvPr id="73" name="그룹 72">
+            <a:extLst>
+              <a:ext uri="{FF2B5EF4-FFF2-40B4-BE49-F238E27FC236}">
+                <a16:creationId xmlns:a16="http://schemas.microsoft.com/office/drawing/2014/main" id="{742797C9-33E0-5947-8E52-E903ABDA1F2E}"/>
+              </a:ext>
+            </a:extLst>
+          </p:cNvPr>
+          <p:cNvGrpSpPr/>
+          <p:nvPr/>
+        </p:nvGrpSpPr>
+        <p:grpSpPr>
+          <a:xfrm>
+            <a:off x="5854137" y="3073664"/>
+            <a:ext cx="428591" cy="710670"/>
+            <a:chOff x="5787571" y="3559790"/>
+            <a:chExt cx="616857" cy="1463589"/>
+          </a:xfrm>
+        </p:grpSpPr>
+        <p:sp>
+          <p:nvSpPr>
+            <p:cNvPr id="74" name="순서도: 자기 디스크 73">
+              <a:extLst>
+                <a:ext uri="{FF2B5EF4-FFF2-40B4-BE49-F238E27FC236}">
+                  <a16:creationId xmlns:a16="http://schemas.microsoft.com/office/drawing/2014/main" id="{11CDBB2D-0FC0-97E7-A70D-6C8F8B8F0438}"/>
+                </a:ext>
+              </a:extLst>
+            </p:cNvPr>
+            <p:cNvSpPr/>
+            <p:nvPr/>
+          </p:nvSpPr>
+          <p:spPr>
+            <a:xfrm>
+              <a:off x="5787571" y="3723090"/>
+              <a:ext cx="616857" cy="1300289"/>
+            </a:xfrm>
+            <a:prstGeom prst="flowChartMagneticDisk">
+              <a:avLst/>
+            </a:prstGeom>
+          </p:spPr>
+          <p:style>
+            <a:lnRef idx="2">
+              <a:schemeClr val="accent1">
+                <a:shade val="15000"/>
+              </a:schemeClr>
+            </a:lnRef>
+            <a:fillRef idx="1">
+              <a:schemeClr val="accent1"/>
+            </a:fillRef>
+            <a:effectRef idx="0">
+              <a:schemeClr val="accent1"/>
+            </a:effectRef>
+            <a:fontRef idx="minor">
+              <a:schemeClr val="lt1"/>
+            </a:fontRef>
+          </p:style>
+          <p:txBody>
+            <a:bodyPr rtlCol="0" anchor="ctr"/>
+            <a:lstStyle/>
+            <a:p>
+              <a:pPr algn="ctr"/>
+              <a:endParaRPr lang="ko-KR" altLang="en-US"/>
+            </a:p>
+          </p:txBody>
+        </p:sp>
+        <p:sp>
+          <p:nvSpPr>
+            <p:cNvPr id="75" name="직사각형 74">
+              <a:extLst>
+                <a:ext uri="{FF2B5EF4-FFF2-40B4-BE49-F238E27FC236}">
+                  <a16:creationId xmlns:a16="http://schemas.microsoft.com/office/drawing/2014/main" id="{1D3470A6-7B9E-8D5D-DDB8-B674F82E651D}"/>
+                </a:ext>
+              </a:extLst>
+            </p:cNvPr>
+            <p:cNvSpPr/>
+            <p:nvPr/>
+          </p:nvSpPr>
+          <p:spPr>
+            <a:xfrm>
+              <a:off x="5842832" y="3559790"/>
+              <a:ext cx="506333" cy="97485"/>
+            </a:xfrm>
+            <a:prstGeom prst="rect">
+              <a:avLst/>
+            </a:prstGeom>
+            <a:solidFill>
+              <a:srgbClr val="FF0000"/>
+            </a:solidFill>
+          </p:spPr>
+          <p:style>
+            <a:lnRef idx="2">
+              <a:schemeClr val="accent1">
+                <a:shade val="15000"/>
+              </a:schemeClr>
+            </a:lnRef>
+            <a:fillRef idx="1">
+              <a:schemeClr val="accent1"/>
+            </a:fillRef>
+            <a:effectRef idx="0">
+              <a:schemeClr val="accent1"/>
+            </a:effectRef>
+            <a:fontRef idx="minor">
+              <a:schemeClr val="lt1"/>
+            </a:fontRef>
+          </p:style>
+          <p:txBody>
+            <a:bodyPr rtlCol="0" anchor="ctr"/>
+            <a:lstStyle/>
+            <a:p>
+              <a:pPr algn="ctr"/>
+              <a:endParaRPr lang="ko-KR" altLang="en-US"/>
+            </a:p>
+          </p:txBody>
+        </p:sp>
+      </p:grpSp>
+      <p:grpSp>
+        <p:nvGrpSpPr>
+          <p:cNvPr id="3" name="그룹 2">
+            <a:extLst>
+              <a:ext uri="{FF2B5EF4-FFF2-40B4-BE49-F238E27FC236}">
+                <a16:creationId xmlns:a16="http://schemas.microsoft.com/office/drawing/2014/main" id="{853CFD71-EB95-5BAC-9D04-26CB90A62472}"/>
+              </a:ext>
+            </a:extLst>
+          </p:cNvPr>
+          <p:cNvGrpSpPr/>
+          <p:nvPr/>
+        </p:nvGrpSpPr>
+        <p:grpSpPr>
+          <a:xfrm>
+            <a:off x="1339039" y="1170239"/>
+            <a:ext cx="1494487" cy="276948"/>
+            <a:chOff x="990455" y="896744"/>
+            <a:chExt cx="1838379" cy="276948"/>
+          </a:xfrm>
+        </p:grpSpPr>
+        <p:sp>
+          <p:nvSpPr>
+            <p:cNvPr id="7" name="직사각형 6">
+              <a:extLst>
+                <a:ext uri="{FF2B5EF4-FFF2-40B4-BE49-F238E27FC236}">
+                  <a16:creationId xmlns:a16="http://schemas.microsoft.com/office/drawing/2014/main" id="{BED6687F-C38C-43B8-11C7-101B745060AF}"/>
+                </a:ext>
+              </a:extLst>
+            </p:cNvPr>
+            <p:cNvSpPr/>
+            <p:nvPr/>
+          </p:nvSpPr>
+          <p:spPr>
+            <a:xfrm>
+              <a:off x="990457" y="896744"/>
+              <a:ext cx="926570" cy="276948"/>
+            </a:xfrm>
+            <a:prstGeom prst="rect">
+              <a:avLst/>
+            </a:prstGeom>
+            <a:solidFill>
+              <a:srgbClr val="FFFF00"/>
+            </a:solidFill>
+            <a:ln>
+              <a:noFill/>
+            </a:ln>
+          </p:spPr>
+          <p:style>
+            <a:lnRef idx="2">
+              <a:schemeClr val="accent1">
+                <a:shade val="15000"/>
+              </a:schemeClr>
+            </a:lnRef>
+            <a:fillRef idx="1">
+              <a:schemeClr val="accent1"/>
+            </a:fillRef>
+            <a:effectRef idx="0">
+              <a:schemeClr val="accent1"/>
+            </a:effectRef>
+            <a:fontRef idx="minor">
+              <a:schemeClr val="lt1"/>
+            </a:fontRef>
+          </p:style>
+          <p:txBody>
+            <a:bodyPr rtlCol="0" anchor="ctr"/>
+            <a:lstStyle/>
+            <a:p>
+              <a:pPr algn="ctr"/>
+              <a:endParaRPr lang="ko-KR" altLang="en-US"/>
+            </a:p>
+          </p:txBody>
+        </p:sp>
+        <p:sp>
+          <p:nvSpPr>
+            <p:cNvPr id="8" name="직사각형 7">
+              <a:extLst>
+                <a:ext uri="{FF2B5EF4-FFF2-40B4-BE49-F238E27FC236}">
+                  <a16:creationId xmlns:a16="http://schemas.microsoft.com/office/drawing/2014/main" id="{F38DA274-1DAB-1B84-7147-72CA8B9A79E2}"/>
+                </a:ext>
+              </a:extLst>
+            </p:cNvPr>
+            <p:cNvSpPr/>
+            <p:nvPr/>
+          </p:nvSpPr>
+          <p:spPr>
+            <a:xfrm>
+              <a:off x="990455" y="896744"/>
+              <a:ext cx="1838379" cy="276948"/>
+            </a:xfrm>
+            <a:prstGeom prst="rect">
+              <a:avLst/>
+            </a:prstGeom>
+            <a:solidFill>
+              <a:schemeClr val="accent1">
+                <a:lumMod val="60000"/>
+                <a:lumOff val="40000"/>
+                <a:alpha val="10000"/>
+              </a:schemeClr>
+            </a:solidFill>
+            <a:ln>
+              <a:solidFill>
+                <a:schemeClr val="tx1"/>
+              </a:solidFill>
+            </a:ln>
+          </p:spPr>
+          <p:style>
+            <a:lnRef idx="2">
+              <a:schemeClr val="accent1">
+                <a:shade val="15000"/>
+              </a:schemeClr>
+            </a:lnRef>
+            <a:fillRef idx="1">
+              <a:schemeClr val="accent1"/>
+            </a:fillRef>
+            <a:effectRef idx="0">
+              <a:schemeClr val="accent1"/>
+            </a:effectRef>
+            <a:fontRef idx="minor">
+              <a:schemeClr val="lt1"/>
+            </a:fontRef>
+          </p:style>
+          <p:txBody>
+            <a:bodyPr rtlCol="0" anchor="ctr"/>
+            <a:lstStyle/>
+            <a:p>
+              <a:pPr algn="ctr"/>
+              <a:endParaRPr lang="ko-KR" altLang="en-US" dirty="0"/>
+            </a:p>
+          </p:txBody>
+        </p:sp>
+        <p:sp>
+          <p:nvSpPr>
+            <p:cNvPr id="9" name="TextBox 8">
+              <a:extLst>
+                <a:ext uri="{FF2B5EF4-FFF2-40B4-BE49-F238E27FC236}">
+                  <a16:creationId xmlns:a16="http://schemas.microsoft.com/office/drawing/2014/main" id="{D0AF96D2-EFA9-B080-352D-DB10FB87EC43}"/>
+                </a:ext>
+              </a:extLst>
+            </p:cNvPr>
+            <p:cNvSpPr txBox="1"/>
+            <p:nvPr/>
+          </p:nvSpPr>
+          <p:spPr>
+            <a:xfrm>
+              <a:off x="990455" y="902176"/>
+              <a:ext cx="1838377" cy="261610"/>
+            </a:xfrm>
+            <a:prstGeom prst="rect">
+              <a:avLst/>
+            </a:prstGeom>
+            <a:noFill/>
+          </p:spPr>
+          <p:txBody>
+            <a:bodyPr wrap="square" rtlCol="0">
+              <a:spAutoFit/>
+            </a:bodyPr>
+            <a:lstStyle/>
+            <a:p>
+              <a:pPr algn="ctr"/>
+              <a:r>
+                <a:rPr lang="en-US" altLang="ko-KR" sz="1100" b="1" dirty="0"/>
+                <a:t>100 / 50</a:t>
+              </a:r>
+              <a:endParaRPr lang="ko-KR" altLang="en-US" sz="1100" b="1" dirty="0"/>
+            </a:p>
+          </p:txBody>
+        </p:sp>
+      </p:grpSp>
+      <p:sp>
+        <p:nvSpPr>
+          <p:cNvPr id="17" name="TextBox 16">
+            <a:extLst>
+              <a:ext uri="{FF2B5EF4-FFF2-40B4-BE49-F238E27FC236}">
+                <a16:creationId xmlns:a16="http://schemas.microsoft.com/office/drawing/2014/main" id="{247A063C-E0EC-05AF-23D6-43A4DC73B423}"/>
+              </a:ext>
+            </a:extLst>
+          </p:cNvPr>
+          <p:cNvSpPr txBox="1"/>
+          <p:nvPr/>
+        </p:nvSpPr>
+        <p:spPr>
+          <a:xfrm>
+            <a:off x="10775340" y="3873068"/>
+            <a:ext cx="409086" cy="369332"/>
+          </a:xfrm>
+          <a:prstGeom prst="rect">
+            <a:avLst/>
+          </a:prstGeom>
+          <a:noFill/>
+        </p:spPr>
+        <p:txBody>
+          <a:bodyPr wrap="none" rtlCol="0">
+            <a:spAutoFit/>
+          </a:bodyPr>
+          <a:lstStyle/>
+          <a:p>
+            <a:r>
+              <a:rPr lang="en-US" altLang="ko-KR" dirty="0"/>
+              <a:t>*5</a:t>
+            </a:r>
+            <a:endParaRPr lang="ko-KR" altLang="en-US" dirty="0"/>
+          </a:p>
+        </p:txBody>
+      </p:sp>
+      <p:sp>
+        <p:nvSpPr>
+          <p:cNvPr id="25" name="TextBox 24">
+            <a:extLst>
+              <a:ext uri="{FF2B5EF4-FFF2-40B4-BE49-F238E27FC236}">
+                <a16:creationId xmlns:a16="http://schemas.microsoft.com/office/drawing/2014/main" id="{DEB4EB2A-89E2-9A0B-E2D3-4F968183D807}"/>
+              </a:ext>
+            </a:extLst>
+          </p:cNvPr>
+          <p:cNvSpPr txBox="1"/>
+          <p:nvPr/>
+        </p:nvSpPr>
+        <p:spPr>
+          <a:xfrm>
+            <a:off x="928358" y="883816"/>
+            <a:ext cx="468398" cy="307777"/>
+          </a:xfrm>
+          <a:prstGeom prst="rect">
+            <a:avLst/>
+          </a:prstGeom>
+          <a:noFill/>
+        </p:spPr>
+        <p:txBody>
+          <a:bodyPr wrap="none" rtlCol="0">
+            <a:spAutoFit/>
+          </a:bodyPr>
+          <a:lstStyle/>
+          <a:p>
+            <a:r>
+              <a:rPr lang="en-US" altLang="ko-KR" sz="1400" b="1" dirty="0"/>
+              <a:t>MP</a:t>
+            </a:r>
+            <a:endParaRPr lang="ko-KR" altLang="en-US" sz="1400" b="1" dirty="0"/>
+          </a:p>
+        </p:txBody>
+      </p:sp>
+      <p:pic>
+        <p:nvPicPr>
+          <p:cNvPr id="23" name="그림 22">
+            <a:extLst>
+              <a:ext uri="{FF2B5EF4-FFF2-40B4-BE49-F238E27FC236}">
+                <a16:creationId xmlns:a16="http://schemas.microsoft.com/office/drawing/2014/main" id="{3A8347D0-A88E-3585-59C9-BA4F7F2B9E52}"/>
+              </a:ext>
+            </a:extLst>
+          </p:cNvPr>
+          <p:cNvPicPr>
+            <a:picLocks noChangeAspect="1"/>
+          </p:cNvPicPr>
+          <p:nvPr/>
+        </p:nvPicPr>
+        <p:blipFill>
+          <a:blip r:embed="rId2">
+            <a:duotone>
+              <a:schemeClr val="bg2">
+                <a:shade val="45000"/>
+                <a:satMod val="135000"/>
+              </a:schemeClr>
+              <a:prstClr val="white"/>
+            </a:duotone>
+            <a:extLst>
+              <a:ext uri="{BEBA8EAE-BF5A-486C-A8C5-ECC9F3942E4B}">
+                <a14:imgProps xmlns:a14="http://schemas.microsoft.com/office/drawing/2010/main">
+                  <a14:imgLayer r:embed="rId3">
+                    <a14:imgEffect>
+                      <a14:colorTemperature colorTemp="7335"/>
+                    </a14:imgEffect>
+                  </a14:imgLayer>
+                </a14:imgProps>
+              </a:ext>
+              <a:ext uri="{28A0092B-C50C-407E-A947-70E740481C1C}">
+                <a14:useLocalDpi xmlns:a14="http://schemas.microsoft.com/office/drawing/2010/main" val="0"/>
+              </a:ext>
+            </a:extLst>
+          </a:blip>
+          <a:stretch>
+            <a:fillRect/>
+          </a:stretch>
+        </p:blipFill>
+        <p:spPr>
+          <a:xfrm>
+            <a:off x="10669070" y="756928"/>
+            <a:ext cx="360000" cy="360000"/>
+          </a:xfrm>
+          <a:prstGeom prst="rect">
+            <a:avLst/>
+          </a:prstGeom>
+        </p:spPr>
+      </p:pic>
+      <p:sp>
+        <p:nvSpPr>
+          <p:cNvPr id="11" name="직사각형 10">
+            <a:extLst>
+              <a:ext uri="{FF2B5EF4-FFF2-40B4-BE49-F238E27FC236}">
+                <a16:creationId xmlns:a16="http://schemas.microsoft.com/office/drawing/2014/main" id="{5EB83C51-6C72-66B7-5C15-1AB9FF2622A3}"/>
+              </a:ext>
+            </a:extLst>
+          </p:cNvPr>
+          <p:cNvSpPr/>
+          <p:nvPr/>
+        </p:nvSpPr>
+        <p:spPr>
+          <a:xfrm>
+            <a:off x="812132" y="437191"/>
+            <a:ext cx="2195764" cy="1163009"/>
+          </a:xfrm>
+          <a:prstGeom prst="rect">
+            <a:avLst/>
+          </a:prstGeom>
+          <a:noFill/>
+        </p:spPr>
+        <p:style>
+          <a:lnRef idx="2">
+            <a:schemeClr val="accent1">
+              <a:shade val="15000"/>
+            </a:schemeClr>
+          </a:lnRef>
+          <a:fillRef idx="1">
+            <a:schemeClr val="accent1"/>
+          </a:fillRef>
+          <a:effectRef idx="0">
+            <a:schemeClr val="accent1"/>
+          </a:effectRef>
+          <a:fontRef idx="minor">
+            <a:schemeClr val="lt1"/>
+          </a:fontRef>
+        </p:style>
+        <p:txBody>
+          <a:bodyPr rtlCol="0" anchor="ctr"/>
+          <a:lstStyle/>
+          <a:p>
+            <a:pPr algn="ctr"/>
+            <a:endParaRPr lang="ko-KR" altLang="en-US"/>
+          </a:p>
+        </p:txBody>
+      </p:sp>
+      <p:sp>
+        <p:nvSpPr>
+          <p:cNvPr id="26" name="직사각형 25">
+            <a:extLst>
+              <a:ext uri="{FF2B5EF4-FFF2-40B4-BE49-F238E27FC236}">
+                <a16:creationId xmlns:a16="http://schemas.microsoft.com/office/drawing/2014/main" id="{03F7C4D8-86AD-E25F-1C77-99C71DD67B74}"/>
+              </a:ext>
+            </a:extLst>
+          </p:cNvPr>
+          <p:cNvSpPr/>
+          <p:nvPr/>
+        </p:nvSpPr>
+        <p:spPr>
+          <a:xfrm>
+            <a:off x="792332" y="3756593"/>
+            <a:ext cx="1072564" cy="1163009"/>
+          </a:xfrm>
+          <a:prstGeom prst="rect">
+            <a:avLst/>
+          </a:prstGeom>
+          <a:noFill/>
+        </p:spPr>
+        <p:style>
+          <a:lnRef idx="2">
+            <a:schemeClr val="dk1"/>
+          </a:lnRef>
+          <a:fillRef idx="1">
+            <a:schemeClr val="lt1"/>
+          </a:fillRef>
+          <a:effectRef idx="0">
+            <a:schemeClr val="dk1"/>
+          </a:effectRef>
+          <a:fontRef idx="minor">
+            <a:schemeClr val="dk1"/>
+          </a:fontRef>
+        </p:style>
+        <p:txBody>
+          <a:bodyPr rtlCol="0" anchor="ctr"/>
+          <a:lstStyle/>
+          <a:p>
+            <a:pPr algn="ctr"/>
+            <a:endParaRPr lang="ko-KR" altLang="en-US"/>
+          </a:p>
+        </p:txBody>
+      </p:sp>
+      <p:cxnSp>
+        <p:nvCxnSpPr>
+          <p:cNvPr id="28" name="직선 화살표 연결선 27">
+            <a:extLst>
+              <a:ext uri="{FF2B5EF4-FFF2-40B4-BE49-F238E27FC236}">
+                <a16:creationId xmlns:a16="http://schemas.microsoft.com/office/drawing/2014/main" id="{86B88E47-E828-0BC8-113A-8B78109B559F}"/>
+              </a:ext>
+            </a:extLst>
+          </p:cNvPr>
+          <p:cNvCxnSpPr>
+            <a:stCxn id="26" idx="1"/>
+            <a:endCxn id="104" idx="3"/>
+          </p:cNvCxnSpPr>
+          <p:nvPr/>
+        </p:nvCxnSpPr>
+        <p:spPr>
+          <a:xfrm flipH="1" flipV="1">
+            <a:off x="568275" y="4338097"/>
+            <a:ext cx="224057" cy="1"/>
+          </a:xfrm>
+          <a:prstGeom prst="straightConnector1">
+            <a:avLst/>
+          </a:prstGeom>
+          <a:ln>
+            <a:tailEnd type="triangle"/>
+          </a:ln>
+        </p:spPr>
+        <p:style>
+          <a:lnRef idx="2">
+            <a:schemeClr val="dk1"/>
+          </a:lnRef>
+          <a:fillRef idx="0">
+            <a:schemeClr val="dk1"/>
+          </a:fillRef>
+          <a:effectRef idx="1">
+            <a:schemeClr val="dk1"/>
+          </a:effectRef>
+          <a:fontRef idx="minor">
+            <a:schemeClr val="tx1"/>
+          </a:fontRef>
+        </p:style>
+      </p:cxnSp>
+      <p:cxnSp>
+        <p:nvCxnSpPr>
+          <p:cNvPr id="31" name="직선 화살표 연결선 30">
+            <a:extLst>
+              <a:ext uri="{FF2B5EF4-FFF2-40B4-BE49-F238E27FC236}">
+                <a16:creationId xmlns:a16="http://schemas.microsoft.com/office/drawing/2014/main" id="{76E8C375-5CDE-32BB-871F-CE54065E0509}"/>
+              </a:ext>
+            </a:extLst>
+          </p:cNvPr>
+          <p:cNvCxnSpPr>
+            <a:cxnSpLocks/>
+            <a:stCxn id="39" idx="2"/>
+            <a:endCxn id="52" idx="3"/>
+          </p:cNvCxnSpPr>
+          <p:nvPr/>
+        </p:nvCxnSpPr>
+        <p:spPr>
+          <a:xfrm flipH="1">
+            <a:off x="568275" y="5215090"/>
+            <a:ext cx="651423" cy="4666"/>
+          </a:xfrm>
+          <a:prstGeom prst="straightConnector1">
+            <a:avLst/>
+          </a:prstGeom>
+          <a:ln>
+            <a:tailEnd type="triangle"/>
+          </a:ln>
+        </p:spPr>
+        <p:style>
+          <a:lnRef idx="2">
+            <a:schemeClr val="dk1"/>
+          </a:lnRef>
+          <a:fillRef idx="0">
+            <a:schemeClr val="dk1"/>
+          </a:fillRef>
+          <a:effectRef idx="1">
+            <a:schemeClr val="dk1"/>
+          </a:effectRef>
+          <a:fontRef idx="minor">
+            <a:schemeClr val="tx1"/>
+          </a:fontRef>
+        </p:style>
+      </p:cxnSp>
+      <p:cxnSp>
+        <p:nvCxnSpPr>
+          <p:cNvPr id="34" name="직선 화살표 연결선 33">
+            <a:extLst>
+              <a:ext uri="{FF2B5EF4-FFF2-40B4-BE49-F238E27FC236}">
+                <a16:creationId xmlns:a16="http://schemas.microsoft.com/office/drawing/2014/main" id="{4E9877BD-59FC-B975-CDAE-236EE810EFB5}"/>
+              </a:ext>
+            </a:extLst>
+          </p:cNvPr>
+          <p:cNvCxnSpPr>
+            <a:cxnSpLocks/>
+            <a:stCxn id="37" idx="2"/>
+            <a:endCxn id="42" idx="3"/>
+          </p:cNvCxnSpPr>
+          <p:nvPr/>
+        </p:nvCxnSpPr>
+        <p:spPr>
+          <a:xfrm flipH="1">
+            <a:off x="568275" y="5786978"/>
+            <a:ext cx="661677" cy="5173"/>
+          </a:xfrm>
+          <a:prstGeom prst="straightConnector1">
+            <a:avLst/>
+          </a:prstGeom>
+          <a:ln>
+            <a:tailEnd type="triangle"/>
+          </a:ln>
+        </p:spPr>
+        <p:style>
+          <a:lnRef idx="2">
+            <a:schemeClr val="dk1"/>
+          </a:lnRef>
+          <a:fillRef idx="0">
+            <a:schemeClr val="dk1"/>
+          </a:fillRef>
+          <a:effectRef idx="1">
+            <a:schemeClr val="dk1"/>
+          </a:effectRef>
+          <a:fontRef idx="minor">
+            <a:schemeClr val="tx1"/>
+          </a:fontRef>
+        </p:style>
+      </p:cxnSp>
+      <p:cxnSp>
+        <p:nvCxnSpPr>
+          <p:cNvPr id="46" name="직선 화살표 연결선 45">
+            <a:extLst>
+              <a:ext uri="{FF2B5EF4-FFF2-40B4-BE49-F238E27FC236}">
+                <a16:creationId xmlns:a16="http://schemas.microsoft.com/office/drawing/2014/main" id="{6B243055-8E9D-A644-6EDF-AE466581012D}"/>
+              </a:ext>
+            </a:extLst>
+          </p:cNvPr>
+          <p:cNvCxnSpPr>
+            <a:cxnSpLocks/>
+            <a:stCxn id="11" idx="0"/>
+            <a:endCxn id="90" idx="2"/>
+          </p:cNvCxnSpPr>
+          <p:nvPr/>
+        </p:nvCxnSpPr>
+        <p:spPr>
+          <a:xfrm flipV="1">
+            <a:off x="1910014" y="188379"/>
+            <a:ext cx="0" cy="248812"/>
+          </a:xfrm>
+          <a:prstGeom prst="straightConnector1">
+            <a:avLst/>
+          </a:prstGeom>
+          <a:ln>
+            <a:tailEnd type="triangle"/>
+          </a:ln>
+        </p:spPr>
+        <p:style>
+          <a:lnRef idx="2">
+            <a:schemeClr val="dk1"/>
+          </a:lnRef>
+          <a:fillRef idx="0">
+            <a:schemeClr val="dk1"/>
+          </a:fillRef>
+          <a:effectRef idx="1">
+            <a:schemeClr val="dk1"/>
+          </a:effectRef>
+          <a:fontRef idx="minor">
+            <a:schemeClr val="tx1"/>
+          </a:fontRef>
+        </p:style>
+      </p:cxnSp>
+      <p:cxnSp>
+        <p:nvCxnSpPr>
+          <p:cNvPr id="55" name="직선 화살표 연결선 54">
+            <a:extLst>
+              <a:ext uri="{FF2B5EF4-FFF2-40B4-BE49-F238E27FC236}">
+                <a16:creationId xmlns:a16="http://schemas.microsoft.com/office/drawing/2014/main" id="{8A055DFB-DAED-61E1-E4E0-38EED27E83D1}"/>
+              </a:ext>
+            </a:extLst>
+          </p:cNvPr>
+          <p:cNvCxnSpPr>
+            <a:cxnSpLocks/>
+            <a:stCxn id="98" idx="3"/>
+            <a:endCxn id="93" idx="1"/>
+          </p:cNvCxnSpPr>
+          <p:nvPr/>
+        </p:nvCxnSpPr>
+        <p:spPr>
+          <a:xfrm>
+            <a:off x="11379868" y="927027"/>
+            <a:ext cx="434073" cy="1195"/>
+          </a:xfrm>
+          <a:prstGeom prst="straightConnector1">
+            <a:avLst/>
+          </a:prstGeom>
+          <a:ln>
+            <a:tailEnd type="triangle"/>
+          </a:ln>
+        </p:spPr>
+        <p:style>
+          <a:lnRef idx="2">
+            <a:schemeClr val="dk1"/>
+          </a:lnRef>
+          <a:fillRef idx="0">
+            <a:schemeClr val="dk1"/>
+          </a:fillRef>
+          <a:effectRef idx="1">
+            <a:schemeClr val="dk1"/>
+          </a:effectRef>
+          <a:fontRef idx="minor">
+            <a:schemeClr val="tx1"/>
+          </a:fontRef>
+        </p:style>
+      </p:cxnSp>
+      <p:sp>
+        <p:nvSpPr>
+          <p:cNvPr id="61" name="TextBox 60">
+            <a:extLst>
+              <a:ext uri="{FF2B5EF4-FFF2-40B4-BE49-F238E27FC236}">
+                <a16:creationId xmlns:a16="http://schemas.microsoft.com/office/drawing/2014/main" id="{A013588C-0C0B-FD4E-1850-9A9BF05E6FF0}"/>
+              </a:ext>
+            </a:extLst>
+          </p:cNvPr>
+          <p:cNvSpPr txBox="1"/>
+          <p:nvPr/>
+        </p:nvSpPr>
+        <p:spPr>
+          <a:xfrm>
+            <a:off x="11730379" y="5022298"/>
+            <a:ext cx="1189749" cy="369332"/>
+          </a:xfrm>
+          <a:prstGeom prst="rect">
+            <a:avLst/>
+          </a:prstGeom>
+          <a:noFill/>
+        </p:spPr>
+        <p:txBody>
+          <a:bodyPr wrap="none" rtlCol="0">
+            <a:spAutoFit/>
+          </a:bodyPr>
+          <a:lstStyle/>
+          <a:p>
+            <a:r>
+              <a:rPr lang="ko-KR" altLang="en-US" dirty="0"/>
+              <a:t>이동 패드</a:t>
+            </a:r>
+          </a:p>
+        </p:txBody>
+      </p:sp>
+      <p:sp>
+        <p:nvSpPr>
+          <p:cNvPr id="62" name="TextBox 61">
+            <a:extLst>
+              <a:ext uri="{FF2B5EF4-FFF2-40B4-BE49-F238E27FC236}">
+                <a16:creationId xmlns:a16="http://schemas.microsoft.com/office/drawing/2014/main" id="{C6BA3ED6-2DFF-17BB-AC5E-592AB7DFFBC3}"/>
+              </a:ext>
+            </a:extLst>
+          </p:cNvPr>
+          <p:cNvSpPr txBox="1"/>
+          <p:nvPr/>
+        </p:nvSpPr>
+        <p:spPr>
+          <a:xfrm>
+            <a:off x="11730380" y="3846811"/>
+            <a:ext cx="1189749" cy="369332"/>
+          </a:xfrm>
+          <a:prstGeom prst="rect">
+            <a:avLst/>
+          </a:prstGeom>
+          <a:noFill/>
+        </p:spPr>
+        <p:txBody>
+          <a:bodyPr wrap="none" rtlCol="0">
+            <a:spAutoFit/>
+          </a:bodyPr>
+          <a:lstStyle/>
+          <a:p>
+            <a:r>
+              <a:rPr lang="ko-KR" altLang="en-US" dirty="0"/>
+              <a:t>전략 버튼</a:t>
+            </a:r>
+          </a:p>
+        </p:txBody>
+      </p:sp>
+      <p:sp>
+        <p:nvSpPr>
+          <p:cNvPr id="64" name="TextBox 63">
+            <a:extLst>
+              <a:ext uri="{FF2B5EF4-FFF2-40B4-BE49-F238E27FC236}">
+                <a16:creationId xmlns:a16="http://schemas.microsoft.com/office/drawing/2014/main" id="{A89B2E79-9B4F-7E15-6074-E4B7FB654052}"/>
+              </a:ext>
+            </a:extLst>
+          </p:cNvPr>
+          <p:cNvSpPr txBox="1"/>
+          <p:nvPr/>
+        </p:nvSpPr>
+        <p:spPr>
+          <a:xfrm>
+            <a:off x="5169012" y="6612666"/>
+            <a:ext cx="1420582" cy="369332"/>
+          </a:xfrm>
+          <a:prstGeom prst="rect">
+            <a:avLst/>
+          </a:prstGeom>
+          <a:noFill/>
+        </p:spPr>
+        <p:txBody>
+          <a:bodyPr wrap="none" rtlCol="0">
+            <a:spAutoFit/>
+          </a:bodyPr>
+          <a:lstStyle/>
+          <a:p>
+            <a:pPr algn="r"/>
+            <a:r>
+              <a:rPr lang="ko-KR" altLang="en-US" dirty="0"/>
+              <a:t>보스 </a:t>
+            </a:r>
+            <a:r>
+              <a:rPr lang="ko-KR" altLang="en-US" dirty="0" err="1"/>
+              <a:t>체력바</a:t>
+            </a:r>
+            <a:endParaRPr lang="ko-KR" altLang="en-US" dirty="0"/>
+          </a:p>
+        </p:txBody>
+      </p:sp>
+      <p:cxnSp>
+        <p:nvCxnSpPr>
+          <p:cNvPr id="65" name="직선 화살표 연결선 64">
+            <a:extLst>
+              <a:ext uri="{FF2B5EF4-FFF2-40B4-BE49-F238E27FC236}">
+                <a16:creationId xmlns:a16="http://schemas.microsoft.com/office/drawing/2014/main" id="{F8DE5989-D967-1F18-E435-E537EA1F1941}"/>
+              </a:ext>
+            </a:extLst>
+          </p:cNvPr>
+          <p:cNvCxnSpPr>
+            <a:cxnSpLocks/>
+            <a:stCxn id="68" idx="2"/>
+            <a:endCxn id="64" idx="0"/>
+          </p:cNvCxnSpPr>
+          <p:nvPr/>
+        </p:nvCxnSpPr>
+        <p:spPr>
+          <a:xfrm>
+            <a:off x="5879303" y="5915242"/>
+            <a:ext cx="0" cy="697424"/>
+          </a:xfrm>
+          <a:prstGeom prst="straightConnector1">
+            <a:avLst/>
+          </a:prstGeom>
+          <a:ln>
+            <a:tailEnd type="triangle"/>
+          </a:ln>
+        </p:spPr>
+        <p:style>
+          <a:lnRef idx="2">
+            <a:schemeClr val="dk1"/>
+          </a:lnRef>
+          <a:fillRef idx="0">
+            <a:schemeClr val="dk1"/>
+          </a:fillRef>
+          <a:effectRef idx="1">
+            <a:schemeClr val="dk1"/>
+          </a:effectRef>
+          <a:fontRef idx="minor">
+            <a:schemeClr val="tx1"/>
+          </a:fontRef>
+        </p:style>
+      </p:cxnSp>
+      <p:cxnSp>
+        <p:nvCxnSpPr>
+          <p:cNvPr id="71" name="직선 화살표 연결선 70">
+            <a:extLst>
+              <a:ext uri="{FF2B5EF4-FFF2-40B4-BE49-F238E27FC236}">
+                <a16:creationId xmlns:a16="http://schemas.microsoft.com/office/drawing/2014/main" id="{C956A8B9-9AAB-2BF5-F52B-3EE024C3A5A4}"/>
+              </a:ext>
+            </a:extLst>
+          </p:cNvPr>
+          <p:cNvCxnSpPr>
+            <a:cxnSpLocks/>
+            <a:stCxn id="2" idx="6"/>
+            <a:endCxn id="61" idx="1"/>
+          </p:cNvCxnSpPr>
+          <p:nvPr/>
+        </p:nvCxnSpPr>
+        <p:spPr>
+          <a:xfrm flipV="1">
+            <a:off x="10952550" y="5206964"/>
+            <a:ext cx="777829" cy="3460"/>
+          </a:xfrm>
+          <a:prstGeom prst="straightConnector1">
+            <a:avLst/>
+          </a:prstGeom>
+          <a:ln>
+            <a:tailEnd type="triangle"/>
+          </a:ln>
+        </p:spPr>
+        <p:style>
+          <a:lnRef idx="2">
+            <a:schemeClr val="dk1"/>
+          </a:lnRef>
+          <a:fillRef idx="0">
+            <a:schemeClr val="dk1"/>
+          </a:fillRef>
+          <a:effectRef idx="1">
+            <a:schemeClr val="dk1"/>
+          </a:effectRef>
+          <a:fontRef idx="minor">
+            <a:schemeClr val="tx1"/>
+          </a:fontRef>
+        </p:style>
+      </p:cxnSp>
+      <p:cxnSp>
+        <p:nvCxnSpPr>
+          <p:cNvPr id="81" name="직선 화살표 연결선 80">
+            <a:extLst>
+              <a:ext uri="{FF2B5EF4-FFF2-40B4-BE49-F238E27FC236}">
+                <a16:creationId xmlns:a16="http://schemas.microsoft.com/office/drawing/2014/main" id="{8F8315E7-A278-9F79-493B-B985B394CF27}"/>
+              </a:ext>
+            </a:extLst>
+          </p:cNvPr>
+          <p:cNvCxnSpPr>
+            <a:cxnSpLocks/>
+            <a:stCxn id="85" idx="3"/>
+            <a:endCxn id="62" idx="1"/>
+          </p:cNvCxnSpPr>
+          <p:nvPr/>
+        </p:nvCxnSpPr>
+        <p:spPr>
+          <a:xfrm>
+            <a:off x="11379868" y="4031477"/>
+            <a:ext cx="350512" cy="0"/>
+          </a:xfrm>
+          <a:prstGeom prst="straightConnector1">
+            <a:avLst/>
+          </a:prstGeom>
+          <a:ln>
+            <a:tailEnd type="triangle"/>
+          </a:ln>
+        </p:spPr>
+        <p:style>
+          <a:lnRef idx="2">
+            <a:schemeClr val="dk1"/>
+          </a:lnRef>
+          <a:fillRef idx="0">
+            <a:schemeClr val="dk1"/>
+          </a:fillRef>
+          <a:effectRef idx="1">
+            <a:schemeClr val="dk1"/>
+          </a:effectRef>
+          <a:fontRef idx="minor">
+            <a:schemeClr val="tx1"/>
+          </a:fontRef>
+        </p:style>
+      </p:cxnSp>
+      <p:sp>
+        <p:nvSpPr>
+          <p:cNvPr id="85" name="직사각형 84">
+            <a:extLst>
+              <a:ext uri="{FF2B5EF4-FFF2-40B4-BE49-F238E27FC236}">
+                <a16:creationId xmlns:a16="http://schemas.microsoft.com/office/drawing/2014/main" id="{6A96211A-183F-681C-2410-302BF9A78EAB}"/>
+              </a:ext>
+            </a:extLst>
+          </p:cNvPr>
+          <p:cNvSpPr/>
+          <p:nvPr/>
+        </p:nvSpPr>
+        <p:spPr>
+          <a:xfrm>
+            <a:off x="10226112" y="3756593"/>
+            <a:ext cx="1153756" cy="549768"/>
+          </a:xfrm>
+          <a:prstGeom prst="rect">
+            <a:avLst/>
+          </a:prstGeom>
+          <a:noFill/>
+        </p:spPr>
+        <p:style>
+          <a:lnRef idx="2">
+            <a:schemeClr val="dk1"/>
+          </a:lnRef>
+          <a:fillRef idx="1">
+            <a:schemeClr val="lt1"/>
+          </a:fillRef>
+          <a:effectRef idx="0">
+            <a:schemeClr val="dk1"/>
+          </a:effectRef>
+          <a:fontRef idx="minor">
+            <a:schemeClr val="dk1"/>
+          </a:fontRef>
+        </p:style>
+        <p:txBody>
+          <a:bodyPr rtlCol="0" anchor="ctr"/>
+          <a:lstStyle/>
+          <a:p>
+            <a:pPr algn="ctr"/>
+            <a:endParaRPr lang="ko-KR" altLang="en-US"/>
+          </a:p>
+        </p:txBody>
+      </p:sp>
+      <p:sp>
+        <p:nvSpPr>
+          <p:cNvPr id="96" name="TextBox 95">
+            <a:extLst>
+              <a:ext uri="{FF2B5EF4-FFF2-40B4-BE49-F238E27FC236}">
+                <a16:creationId xmlns:a16="http://schemas.microsoft.com/office/drawing/2014/main" id="{75743DF8-7C96-4C7C-CDA4-C9F8DC90E564}"/>
+              </a:ext>
+            </a:extLst>
+          </p:cNvPr>
+          <p:cNvSpPr txBox="1"/>
+          <p:nvPr/>
+        </p:nvSpPr>
+        <p:spPr>
+          <a:xfrm>
+            <a:off x="9786625" y="752262"/>
+            <a:ext cx="742511" cy="369332"/>
+          </a:xfrm>
+          <a:prstGeom prst="rect">
+            <a:avLst/>
+          </a:prstGeom>
+          <a:noFill/>
+        </p:spPr>
+        <p:txBody>
+          <a:bodyPr wrap="none" rtlCol="0">
+            <a:spAutoFit/>
+          </a:bodyPr>
+          <a:lstStyle/>
+          <a:p>
+            <a:r>
+              <a:rPr lang="en-US" altLang="ko-KR" dirty="0"/>
+              <a:t>03:00</a:t>
+            </a:r>
+            <a:endParaRPr lang="ko-KR" altLang="en-US" dirty="0"/>
+          </a:p>
+        </p:txBody>
+      </p:sp>
+      <p:sp>
+        <p:nvSpPr>
+          <p:cNvPr id="98" name="직사각형 97">
+            <a:extLst>
+              <a:ext uri="{FF2B5EF4-FFF2-40B4-BE49-F238E27FC236}">
+                <a16:creationId xmlns:a16="http://schemas.microsoft.com/office/drawing/2014/main" id="{7F706F7E-ACDE-70B7-3A68-DF8350637917}"/>
+              </a:ext>
+            </a:extLst>
+          </p:cNvPr>
+          <p:cNvSpPr/>
+          <p:nvPr/>
+        </p:nvSpPr>
+        <p:spPr>
+          <a:xfrm>
+            <a:off x="9844801" y="603040"/>
+            <a:ext cx="1535067" cy="647973"/>
+          </a:xfrm>
+          <a:prstGeom prst="rect">
+            <a:avLst/>
+          </a:prstGeom>
+          <a:noFill/>
+        </p:spPr>
+        <p:style>
+          <a:lnRef idx="2">
+            <a:schemeClr val="dk1"/>
+          </a:lnRef>
+          <a:fillRef idx="1">
+            <a:schemeClr val="lt1"/>
+          </a:fillRef>
+          <a:effectRef idx="0">
+            <a:schemeClr val="dk1"/>
+          </a:effectRef>
+          <a:fontRef idx="minor">
+            <a:schemeClr val="dk1"/>
+          </a:fontRef>
+        </p:style>
+        <p:txBody>
+          <a:bodyPr rtlCol="0" anchor="ctr"/>
+          <a:lstStyle/>
+          <a:p>
+            <a:pPr algn="ctr"/>
+            <a:endParaRPr lang="ko-KR" altLang="en-US"/>
+          </a:p>
+        </p:txBody>
+      </p:sp>
+    </p:spTree>
+    <p:extLst>
+      <p:ext uri="{BB962C8B-B14F-4D97-AF65-F5344CB8AC3E}">
+        <p14:creationId xmlns:p14="http://schemas.microsoft.com/office/powerpoint/2010/main" val="428146269"/>
+      </p:ext>
+    </p:extLst>
+  </p:cSld>
+  <p:clrMapOvr>
+    <a:masterClrMapping/>
+  </p:clrMapOvr>
+</p:sld>
+</file>
+
+<file path=ppt/slides/slide6.xml><?xml version="1.0" encoding="utf-8"?>
+<p:sld xmlns:a="http://schemas.openxmlformats.org/drawingml/2006/main" xmlns:r="http://schemas.openxmlformats.org/officeDocument/2006/relationships" xmlns:p="http://schemas.openxmlformats.org/presentationml/2006/main">
+  <p:cSld>
+    <p:spTree>
+      <p:nvGrpSpPr>
+        <p:cNvPr id="1" name="">
+          <a:extLst>
+            <a:ext uri="{FF2B5EF4-FFF2-40B4-BE49-F238E27FC236}">
               <a16:creationId xmlns:a16="http://schemas.microsoft.com/office/drawing/2014/main" id="{6C91780B-5913-7E34-42D0-2728AABF620A}"/>
             </a:ext>
           </a:extLst>
@@ -10755,7 +13401,7 @@
 </p:sld>
 </file>
 
-<file path=ppt/slides/slide6.xml><?xml version="1.0" encoding="utf-8"?>
+<file path=ppt/slides/slide7.xml><?xml version="1.0" encoding="utf-8"?>
 <p:sld xmlns:a="http://schemas.openxmlformats.org/drawingml/2006/main" xmlns:r="http://schemas.openxmlformats.org/officeDocument/2006/relationships" xmlns:p="http://schemas.openxmlformats.org/presentationml/2006/main">
   <p:cSld>
     <p:spTree>
@@ -12830,7 +15476,7 @@
 </p:sld>
 </file>
 
-<file path=ppt/slides/slide7.xml><?xml version="1.0" encoding="utf-8"?>
+<file path=ppt/slides/slide8.xml><?xml version="1.0" encoding="utf-8"?>
 <p:sld xmlns:a="http://schemas.openxmlformats.org/drawingml/2006/main" xmlns:r="http://schemas.openxmlformats.org/officeDocument/2006/relationships" xmlns:p="http://schemas.openxmlformats.org/presentationml/2006/main">
   <p:cSld>
     <p:spTree>
